--- a/protected-downloads/praesentation/M08.pptx
+++ b/protected-downloads/praesentation/M08.pptx
@@ -8,13 +8,14 @@
     <p:sldId id="256" r:id="rId7"/>
     <p:sldId id="257" r:id="rId8"/>
     <p:sldId id="258" r:id="rId9"/>
-    <p:sldId id="259" r:id="rId10"/>
-    <p:sldId id="260" r:id="rId11"/>
-    <p:sldId id="261" r:id="rId12"/>
-    <p:sldId id="262" r:id="rId13"/>
-    <p:sldId id="263" r:id="rId14"/>
-    <p:sldId id="264" r:id="rId15"/>
-    <p:sldId id="265" r:id="rId16"/>
+    <p:sldId id="259" r:id="rId11"/>
+    <p:sldId id="260" r:id="rId12"/>
+    <p:sldId id="261" r:id="rId13"/>
+    <p:sldId id="262" r:id="rId14"/>
+    <p:sldId id="263" r:id="rId15"/>
+    <p:sldId id="264" r:id="rId16"/>
+    <p:sldId id="265" r:id="rId17"/>
+    <p:sldId id="266" r:id="rId18"/>
   </p:sldIdLst>
   <p:sldSz cx="12188952" cy="6858000" type="screen4x3"/>
   <p:notesSz cx="6858000" cy="9144000"/>
@@ -114,6 +115,891 @@
     </a:lvl9pPr>
   </p:defaultTextStyle>
 </p:presentation>
+</file>
+
+<file path=ppt/notesMasters/notesMaster1.xml><?xml version="1.0" encoding="utf-8"?>
+<p:notesMaster xmlns:a="http://schemas.openxmlformats.org/drawingml/2006/main" xmlns:p="http://schemas.openxmlformats.org/presentationml/2006/main" xmlns:r="http://schemas.openxmlformats.org/officeDocument/2006/relationships">
+  <p:cSld>
+    <p:bg>
+      <p:bgRef idx="1001">
+        <a:schemeClr val="bg1"/>
+      </p:bgRef>
+    </p:bg>
+    <p:spTree>
+      <p:nvGrpSpPr>
+        <p:cNvPr id="1" name=""/>
+        <p:cNvGrpSpPr/>
+        <p:nvPr/>
+      </p:nvGrpSpPr>
+      <p:grpSpPr>
+        <a:xfrm>
+          <a:off x="0" y="0"/>
+          <a:ext cx="0" cy="0"/>
+          <a:chOff x="0" y="0"/>
+          <a:chExt cx="0" cy="0"/>
+        </a:xfrm>
+      </p:grpSpPr>
+      <p:sp>
+        <p:nvSpPr>
+          <p:cNvPr id="2" name="Header Placeholder 1"/>
+          <p:cNvSpPr>
+            <a:spLocks noGrp="1"/>
+          </p:cNvSpPr>
+          <p:nvPr>
+            <p:ph type="hdr" sz="quarter"/>
+          </p:nvPr>
+        </p:nvSpPr>
+        <p:spPr>
+          <a:xfrm>
+            <a:off x="0" y="0"/>
+            <a:ext cx="2971800" cy="457200"/>
+          </a:xfrm>
+          <a:prstGeom prst="rect">
+            <a:avLst/>
+          </a:prstGeom>
+        </p:spPr>
+        <p:txBody>
+          <a:bodyPr vert="horz" lIns="91440" tIns="45720" rIns="91440" bIns="45720" rtlCol="0"/>
+          <a:lstStyle>
+            <a:lvl1pPr algn="l">
+              <a:defRPr sz="1200"/>
+            </a:lvl1pPr>
+          </a:lstStyle>
+          <a:p>
+            <a:endParaRPr lang="en-US"/>
+          </a:p>
+        </p:txBody>
+      </p:sp>
+      <p:sp>
+        <p:nvSpPr>
+          <p:cNvPr id="3" name="Date Placeholder 2"/>
+          <p:cNvSpPr>
+            <a:spLocks noGrp="1"/>
+          </p:cNvSpPr>
+          <p:nvPr>
+            <p:ph type="dt" idx="1"/>
+          </p:nvPr>
+        </p:nvSpPr>
+        <p:spPr>
+          <a:xfrm>
+            <a:off x="3884613" y="0"/>
+            <a:ext cx="2971800" cy="457200"/>
+          </a:xfrm>
+          <a:prstGeom prst="rect">
+            <a:avLst/>
+          </a:prstGeom>
+        </p:spPr>
+        <p:txBody>
+          <a:bodyPr vert="horz" lIns="91440" tIns="45720" rIns="91440" bIns="45720" rtlCol="0"/>
+          <a:lstStyle>
+            <a:lvl1pPr algn="r">
+              <a:defRPr sz="1200"/>
+            </a:lvl1pPr>
+          </a:lstStyle>
+          <a:p>
+            <a:fld id="{0F89C1C7-3DCD-1040-A9CF-14679D8B5DDD}" type="datetimeFigureOut">
+              <a:rPr lang="en-US" smtClean="0"/>
+              <a:t>10/17/16</a:t>
+            </a:fld>
+            <a:endParaRPr lang="en-US"/>
+          </a:p>
+        </p:txBody>
+      </p:sp>
+      <p:sp>
+        <p:nvSpPr>
+          <p:cNvPr id="4" name="Slide Image Placeholder 3"/>
+          <p:cNvSpPr>
+            <a:spLocks noGrp="1" noRot="1" noChangeAspect="1"/>
+          </p:cNvSpPr>
+          <p:nvPr>
+            <p:ph type="sldImg" idx="2"/>
+          </p:nvPr>
+        </p:nvSpPr>
+        <p:spPr>
+          <a:xfrm>
+            <a:off x="1143000" y="685800"/>
+            <a:ext cx="4572000" cy="3429000"/>
+          </a:xfrm>
+          <a:prstGeom prst="rect">
+            <a:avLst/>
+          </a:prstGeom>
+          <a:noFill/>
+          <a:ln w="12700">
+            <a:solidFill>
+              <a:prstClr val="black"/>
+            </a:solidFill>
+          </a:ln>
+        </p:spPr>
+        <p:txBody>
+          <a:bodyPr vert="horz" lIns="91440" tIns="45720" rIns="91440" bIns="45720" rtlCol="0" anchor="ctr"/>
+          <a:lstStyle/>
+          <a:p>
+            <a:endParaRPr lang="en-US"/>
+          </a:p>
+        </p:txBody>
+      </p:sp>
+      <p:sp>
+        <p:nvSpPr>
+          <p:cNvPr id="5" name="Notes Placeholder 4"/>
+          <p:cNvSpPr>
+            <a:spLocks noGrp="1"/>
+          </p:cNvSpPr>
+          <p:nvPr>
+            <p:ph type="body" sz="quarter" idx="3"/>
+          </p:nvPr>
+        </p:nvSpPr>
+        <p:spPr>
+          <a:xfrm>
+            <a:off x="685800" y="4343400"/>
+            <a:ext cx="5486400" cy="4114800"/>
+          </a:xfrm>
+          <a:prstGeom prst="rect">
+            <a:avLst/>
+          </a:prstGeom>
+        </p:spPr>
+        <p:txBody>
+          <a:bodyPr vert="horz" lIns="91440" tIns="45720" rIns="91440" bIns="45720" rtlCol="0"/>
+          <a:lstStyle/>
+          <a:p>
+            <a:pPr lvl="0"/>
+            <a:r>
+              <a:rPr lang="en-US" smtClean="0"/>
+              <a:t>Click to edit Master text styles</a:t>
+            </a:r>
+          </a:p>
+          <a:p>
+            <a:pPr lvl="1"/>
+            <a:r>
+              <a:rPr lang="en-US" smtClean="0"/>
+              <a:t>Second level</a:t>
+            </a:r>
+          </a:p>
+          <a:p>
+            <a:pPr lvl="2"/>
+            <a:r>
+              <a:rPr lang="en-US" smtClean="0"/>
+              <a:t>Third level</a:t>
+            </a:r>
+          </a:p>
+          <a:p>
+            <a:pPr lvl="3"/>
+            <a:r>
+              <a:rPr lang="en-US" smtClean="0"/>
+              <a:t>Fourth level</a:t>
+            </a:r>
+          </a:p>
+          <a:p>
+            <a:pPr lvl="4"/>
+            <a:r>
+              <a:rPr lang="en-US" smtClean="0"/>
+              <a:t>Fifth level</a:t>
+            </a:r>
+            <a:endParaRPr lang="en-US"/>
+          </a:p>
+        </p:txBody>
+      </p:sp>
+      <p:sp>
+        <p:nvSpPr>
+          <p:cNvPr id="6" name="Footer Placeholder 5"/>
+          <p:cNvSpPr>
+            <a:spLocks noGrp="1"/>
+          </p:cNvSpPr>
+          <p:nvPr>
+            <p:ph type="ftr" sz="quarter" idx="4"/>
+          </p:nvPr>
+        </p:nvSpPr>
+        <p:spPr>
+          <a:xfrm>
+            <a:off x="0" y="8685213"/>
+            <a:ext cx="2971800" cy="457200"/>
+          </a:xfrm>
+          <a:prstGeom prst="rect">
+            <a:avLst/>
+          </a:prstGeom>
+        </p:spPr>
+        <p:txBody>
+          <a:bodyPr vert="horz" lIns="91440" tIns="45720" rIns="91440" bIns="45720" rtlCol="0" anchor="b"/>
+          <a:lstStyle>
+            <a:lvl1pPr algn="l">
+              <a:defRPr sz="1200"/>
+            </a:lvl1pPr>
+          </a:lstStyle>
+          <a:p>
+            <a:endParaRPr lang="en-US"/>
+          </a:p>
+        </p:txBody>
+      </p:sp>
+      <p:sp>
+        <p:nvSpPr>
+          <p:cNvPr id="7" name="Slide Number Placeholder 6"/>
+          <p:cNvSpPr>
+            <a:spLocks noGrp="1"/>
+          </p:cNvSpPr>
+          <p:nvPr>
+            <p:ph type="sldNum" sz="quarter" idx="5"/>
+          </p:nvPr>
+        </p:nvSpPr>
+        <p:spPr>
+          <a:xfrm>
+            <a:off x="3884613" y="8685213"/>
+            <a:ext cx="2971800" cy="457200"/>
+          </a:xfrm>
+          <a:prstGeom prst="rect">
+            <a:avLst/>
+          </a:prstGeom>
+        </p:spPr>
+        <p:txBody>
+          <a:bodyPr vert="horz" lIns="91440" tIns="45720" rIns="91440" bIns="45720" rtlCol="0" anchor="b"/>
+          <a:lstStyle>
+            <a:lvl1pPr algn="r">
+              <a:defRPr sz="1200"/>
+            </a:lvl1pPr>
+          </a:lstStyle>
+          <a:p>
+            <a:fld id="{BB5E49A5-4136-284D-997B-48E1D791AD67}" type="slidenum">
+              <a:rPr lang="en-US" smtClean="0"/>
+              <a:t>‹#›</a:t>
+            </a:fld>
+            <a:endParaRPr lang="en-US"/>
+          </a:p>
+        </p:txBody>
+      </p:sp>
+    </p:spTree>
+    <p:extLst>
+      <p:ext uri="{BB962C8B-B14F-4D97-AF65-F5344CB8AC3E}">
+        <p14:creationId xmlns:p14="http://schemas.microsoft.com/office/powerpoint/2010/main" val="2623252185"/>
+      </p:ext>
+    </p:extLst>
+  </p:cSld>
+  <p:clrMap bg1="lt1" tx1="dk1" bg2="lt2" tx2="dk2" accent1="accent1" accent2="accent2" accent3="accent3" accent4="accent4" accent5="accent5" accent6="accent6" hlink="hlink" folHlink="folHlink"/>
+  <p:notesStyle>
+    <a:lvl1pPr marL="0" algn="l" defTabSz="457200" rtl="0" eaLnBrk="1" latinLnBrk="0" hangingPunct="1">
+      <a:defRPr sz="1200" kern="1200">
+        <a:solidFill>
+          <a:schemeClr val="tx1"/>
+        </a:solidFill>
+        <a:latin typeface="+mn-lt"/>
+        <a:ea typeface="+mn-ea"/>
+        <a:cs typeface="+mn-cs"/>
+      </a:defRPr>
+    </a:lvl1pPr>
+    <a:lvl2pPr marL="457200" algn="l" defTabSz="457200" rtl="0" eaLnBrk="1" latinLnBrk="0" hangingPunct="1">
+      <a:defRPr sz="1200" kern="1200">
+        <a:solidFill>
+          <a:schemeClr val="tx1"/>
+        </a:solidFill>
+        <a:latin typeface="+mn-lt"/>
+        <a:ea typeface="+mn-ea"/>
+        <a:cs typeface="+mn-cs"/>
+      </a:defRPr>
+    </a:lvl2pPr>
+    <a:lvl3pPr marL="914400" algn="l" defTabSz="457200" rtl="0" eaLnBrk="1" latinLnBrk="0" hangingPunct="1">
+      <a:defRPr sz="1200" kern="1200">
+        <a:solidFill>
+          <a:schemeClr val="tx1"/>
+        </a:solidFill>
+        <a:latin typeface="+mn-lt"/>
+        <a:ea typeface="+mn-ea"/>
+        <a:cs typeface="+mn-cs"/>
+      </a:defRPr>
+    </a:lvl3pPr>
+    <a:lvl4pPr marL="1371600" algn="l" defTabSz="457200" rtl="0" eaLnBrk="1" latinLnBrk="0" hangingPunct="1">
+      <a:defRPr sz="1200" kern="1200">
+        <a:solidFill>
+          <a:schemeClr val="tx1"/>
+        </a:solidFill>
+        <a:latin typeface="+mn-lt"/>
+        <a:ea typeface="+mn-ea"/>
+        <a:cs typeface="+mn-cs"/>
+      </a:defRPr>
+    </a:lvl4pPr>
+    <a:lvl5pPr marL="1828800" algn="l" defTabSz="457200" rtl="0" eaLnBrk="1" latinLnBrk="0" hangingPunct="1">
+      <a:defRPr sz="1200" kern="1200">
+        <a:solidFill>
+          <a:schemeClr val="tx1"/>
+        </a:solidFill>
+        <a:latin typeface="+mn-lt"/>
+        <a:ea typeface="+mn-ea"/>
+        <a:cs typeface="+mn-cs"/>
+      </a:defRPr>
+    </a:lvl5pPr>
+    <a:lvl6pPr marL="2286000" algn="l" defTabSz="457200" rtl="0" eaLnBrk="1" latinLnBrk="0" hangingPunct="1">
+      <a:defRPr sz="1200" kern="1200">
+        <a:solidFill>
+          <a:schemeClr val="tx1"/>
+        </a:solidFill>
+        <a:latin typeface="+mn-lt"/>
+        <a:ea typeface="+mn-ea"/>
+        <a:cs typeface="+mn-cs"/>
+      </a:defRPr>
+    </a:lvl6pPr>
+    <a:lvl7pPr marL="2743200" algn="l" defTabSz="457200" rtl="0" eaLnBrk="1" latinLnBrk="0" hangingPunct="1">
+      <a:defRPr sz="1200" kern="1200">
+        <a:solidFill>
+          <a:schemeClr val="tx1"/>
+        </a:solidFill>
+        <a:latin typeface="+mn-lt"/>
+        <a:ea typeface="+mn-ea"/>
+        <a:cs typeface="+mn-cs"/>
+      </a:defRPr>
+    </a:lvl7pPr>
+    <a:lvl8pPr marL="3200400" algn="l" defTabSz="457200" rtl="0" eaLnBrk="1" latinLnBrk="0" hangingPunct="1">
+      <a:defRPr sz="1200" kern="1200">
+        <a:solidFill>
+          <a:schemeClr val="tx1"/>
+        </a:solidFill>
+        <a:latin typeface="+mn-lt"/>
+        <a:ea typeface="+mn-ea"/>
+        <a:cs typeface="+mn-cs"/>
+      </a:defRPr>
+    </a:lvl8pPr>
+    <a:lvl9pPr marL="3657600" algn="l" defTabSz="457200" rtl="0" eaLnBrk="1" latinLnBrk="0" hangingPunct="1">
+      <a:defRPr sz="1200" kern="1200">
+        <a:solidFill>
+          <a:schemeClr val="tx1"/>
+        </a:solidFill>
+        <a:latin typeface="+mn-lt"/>
+        <a:ea typeface="+mn-ea"/>
+        <a:cs typeface="+mn-cs"/>
+      </a:defRPr>
+    </a:lvl9pPr>
+  </p:notesStyle>
+</p:notesMaster>
+</file>
+
+<file path=ppt/notesSlides/notesSlide1.xml><?xml version="1.0" encoding="utf-8"?>
+<p:notes xmlns:a="http://schemas.openxmlformats.org/drawingml/2006/main" xmlns:p="http://schemas.openxmlformats.org/presentationml/2006/main" xmlns:r="http://schemas.openxmlformats.org/officeDocument/2006/relationships">
+  <p:cSld>
+    <p:spTree>
+      <p:nvGrpSpPr>
+        <p:cNvPr id="1" name=""/>
+        <p:cNvGrpSpPr/>
+        <p:nvPr/>
+      </p:nvGrpSpPr>
+      <p:grpSpPr>
+        <a:xfrm>
+          <a:off x="0" y="0"/>
+          <a:ext cx="0" cy="0"/>
+          <a:chOff x="0" y="0"/>
+          <a:chExt cx="0" cy="0"/>
+        </a:xfrm>
+      </p:grpSpPr>
+      <p:sp>
+        <p:nvSpPr>
+          <p:cNvPr id="2" name="Slide Image Placeholder 1"/>
+          <p:cNvSpPr>
+            <a:spLocks noGrp="1"/>
+          </p:cNvSpPr>
+          <p:nvPr>
+            <p:ph type="sldImg" idx="2"/>
+          </p:nvPr>
+        </p:nvSpPr>
+        <p:spPr/>
+      </p:sp>
+      <p:sp>
+        <p:nvSpPr>
+          <p:cNvPr id="3" name="Notes Placeholder 2"/>
+          <p:cNvSpPr>
+            <a:spLocks noGrp="1"/>
+          </p:cNvSpPr>
+          <p:nvPr>
+            <p:ph type="body" idx="3" sz="quarter"/>
+          </p:nvPr>
+        </p:nvSpPr>
+        <p:spPr/>
+        <p:txBody>
+          <a:bodyPr/>
+          <a:lstStyle/>
+          <a:p>
+            <a:r>
+              <a:t>Agenda-Überblick. Timing und Pausen siehe Ablaufplan im Trainerhandbuch (Sektion 3).</a:t>
+            </a:r>
+          </a:p>
+        </p:txBody>
+      </p:sp>
+      <p:sp>
+        <p:nvSpPr>
+          <p:cNvPr id="4" name="Slide Number Placeholder 3"/>
+          <p:cNvSpPr>
+            <a:spLocks noGrp="1"/>
+          </p:cNvSpPr>
+          <p:nvPr>
+            <p:ph type="sldNum" idx="5" sz="quarter"/>
+          </p:nvPr>
+        </p:nvSpPr>
+        <p:spPr/>
+      </p:sp>
+    </p:spTree>
+  </p:cSld>
+  <p:clrMapOvr>
+    <a:masterClrMapping/>
+  </p:clrMapOvr>
+</p:notes>
+</file>
+
+<file path=ppt/notesSlides/notesSlide2.xml><?xml version="1.0" encoding="utf-8"?>
+<p:notes xmlns:a="http://schemas.openxmlformats.org/drawingml/2006/main" xmlns:p="http://schemas.openxmlformats.org/presentationml/2006/main" xmlns:r="http://schemas.openxmlformats.org/officeDocument/2006/relationships">
+  <p:cSld>
+    <p:spTree>
+      <p:nvGrpSpPr>
+        <p:cNvPr id="1" name=""/>
+        <p:cNvGrpSpPr/>
+        <p:nvPr/>
+      </p:nvGrpSpPr>
+      <p:grpSpPr>
+        <a:xfrm>
+          <a:off x="0" y="0"/>
+          <a:ext cx="0" cy="0"/>
+          <a:chOff x="0" y="0"/>
+          <a:chExt cx="0" cy="0"/>
+        </a:xfrm>
+      </p:grpSpPr>
+      <p:sp>
+        <p:nvSpPr>
+          <p:cNvPr id="2" name="Slide Image Placeholder 1"/>
+          <p:cNvSpPr>
+            <a:spLocks noGrp="1"/>
+          </p:cNvSpPr>
+          <p:nvPr>
+            <p:ph type="sldImg" idx="2"/>
+          </p:nvPr>
+        </p:nvSpPr>
+        <p:spPr/>
+      </p:sp>
+      <p:sp>
+        <p:nvSpPr>
+          <p:cNvPr id="3" name="Notes Placeholder 2"/>
+          <p:cNvSpPr>
+            <a:spLocks noGrp="1"/>
+          </p:cNvSpPr>
+          <p:nvPr>
+            <p:ph type="body" idx="3" sz="quarter"/>
+          </p:nvPr>
+        </p:nvSpPr>
+        <p:spPr/>
+        <p:txBody>
+          <a:bodyPr/>
+          <a:lstStyle/>
+          <a:p>
+            <a:r>
+              <a:t>Siehe Trainerhandbuch (Sektion 3) für Moderationshinweise, Timing und erwartete Teilnehmerreaktionen.</a:t>
+            </a:r>
+          </a:p>
+        </p:txBody>
+      </p:sp>
+      <p:sp>
+        <p:nvSpPr>
+          <p:cNvPr id="4" name="Slide Number Placeholder 3"/>
+          <p:cNvSpPr>
+            <a:spLocks noGrp="1"/>
+          </p:cNvSpPr>
+          <p:nvPr>
+            <p:ph type="sldNum" idx="5" sz="quarter"/>
+          </p:nvPr>
+        </p:nvSpPr>
+        <p:spPr/>
+      </p:sp>
+    </p:spTree>
+  </p:cSld>
+  <p:clrMapOvr>
+    <a:masterClrMapping/>
+  </p:clrMapOvr>
+</p:notes>
+</file>
+
+<file path=ppt/notesSlides/notesSlide3.xml><?xml version="1.0" encoding="utf-8"?>
+<p:notes xmlns:a="http://schemas.openxmlformats.org/drawingml/2006/main" xmlns:p="http://schemas.openxmlformats.org/presentationml/2006/main" xmlns:r="http://schemas.openxmlformats.org/officeDocument/2006/relationships">
+  <p:cSld>
+    <p:spTree>
+      <p:nvGrpSpPr>
+        <p:cNvPr id="1" name=""/>
+        <p:cNvGrpSpPr/>
+        <p:nvPr/>
+      </p:nvGrpSpPr>
+      <p:grpSpPr>
+        <a:xfrm>
+          <a:off x="0" y="0"/>
+          <a:ext cx="0" cy="0"/>
+          <a:chOff x="0" y="0"/>
+          <a:chExt cx="0" cy="0"/>
+        </a:xfrm>
+      </p:grpSpPr>
+      <p:sp>
+        <p:nvSpPr>
+          <p:cNvPr id="2" name="Slide Image Placeholder 1"/>
+          <p:cNvSpPr>
+            <a:spLocks noGrp="1"/>
+          </p:cNvSpPr>
+          <p:nvPr>
+            <p:ph type="sldImg" idx="2"/>
+          </p:nvPr>
+        </p:nvSpPr>
+        <p:spPr/>
+      </p:sp>
+      <p:sp>
+        <p:nvSpPr>
+          <p:cNvPr id="3" name="Notes Placeholder 2"/>
+          <p:cNvSpPr>
+            <a:spLocks noGrp="1"/>
+          </p:cNvSpPr>
+          <p:nvPr>
+            <p:ph type="body" idx="3" sz="quarter"/>
+          </p:nvPr>
+        </p:nvSpPr>
+        <p:spPr/>
+        <p:txBody>
+          <a:bodyPr/>
+          <a:lstStyle/>
+          <a:p>
+            <a:r>
+              <a:t>Siehe Trainerhandbuch (Sektion 3) für Moderationshinweise, Timing und erwartete Teilnehmerreaktionen.</a:t>
+            </a:r>
+          </a:p>
+        </p:txBody>
+      </p:sp>
+      <p:sp>
+        <p:nvSpPr>
+          <p:cNvPr id="4" name="Slide Number Placeholder 3"/>
+          <p:cNvSpPr>
+            <a:spLocks noGrp="1"/>
+          </p:cNvSpPr>
+          <p:nvPr>
+            <p:ph type="sldNum" idx="5" sz="quarter"/>
+          </p:nvPr>
+        </p:nvSpPr>
+        <p:spPr/>
+      </p:sp>
+    </p:spTree>
+  </p:cSld>
+  <p:clrMapOvr>
+    <a:masterClrMapping/>
+  </p:clrMapOvr>
+</p:notes>
+</file>
+
+<file path=ppt/notesSlides/notesSlide4.xml><?xml version="1.0" encoding="utf-8"?>
+<p:notes xmlns:a="http://schemas.openxmlformats.org/drawingml/2006/main" xmlns:p="http://schemas.openxmlformats.org/presentationml/2006/main" xmlns:r="http://schemas.openxmlformats.org/officeDocument/2006/relationships">
+  <p:cSld>
+    <p:spTree>
+      <p:nvGrpSpPr>
+        <p:cNvPr id="1" name=""/>
+        <p:cNvGrpSpPr/>
+        <p:nvPr/>
+      </p:nvGrpSpPr>
+      <p:grpSpPr>
+        <a:xfrm>
+          <a:off x="0" y="0"/>
+          <a:ext cx="0" cy="0"/>
+          <a:chOff x="0" y="0"/>
+          <a:chExt cx="0" cy="0"/>
+        </a:xfrm>
+      </p:grpSpPr>
+      <p:sp>
+        <p:nvSpPr>
+          <p:cNvPr id="2" name="Slide Image Placeholder 1"/>
+          <p:cNvSpPr>
+            <a:spLocks noGrp="1"/>
+          </p:cNvSpPr>
+          <p:nvPr>
+            <p:ph type="sldImg" idx="2"/>
+          </p:nvPr>
+        </p:nvSpPr>
+        <p:spPr/>
+      </p:sp>
+      <p:sp>
+        <p:nvSpPr>
+          <p:cNvPr id="3" name="Notes Placeholder 2"/>
+          <p:cNvSpPr>
+            <a:spLocks noGrp="1"/>
+          </p:cNvSpPr>
+          <p:nvPr>
+            <p:ph type="body" idx="3" sz="quarter"/>
+          </p:nvPr>
+        </p:nvSpPr>
+        <p:spPr/>
+        <p:txBody>
+          <a:bodyPr/>
+          <a:lstStyle/>
+          <a:p>
+            <a:r>
+              <a:t>Siehe Trainerhandbuch (Sektion 3) für Moderationshinweise, Timing und erwartete Teilnehmerreaktionen.</a:t>
+            </a:r>
+          </a:p>
+        </p:txBody>
+      </p:sp>
+      <p:sp>
+        <p:nvSpPr>
+          <p:cNvPr id="4" name="Slide Number Placeholder 3"/>
+          <p:cNvSpPr>
+            <a:spLocks noGrp="1"/>
+          </p:cNvSpPr>
+          <p:nvPr>
+            <p:ph type="sldNum" idx="5" sz="quarter"/>
+          </p:nvPr>
+        </p:nvSpPr>
+        <p:spPr/>
+      </p:sp>
+    </p:spTree>
+  </p:cSld>
+  <p:clrMapOvr>
+    <a:masterClrMapping/>
+  </p:clrMapOvr>
+</p:notes>
+</file>
+
+<file path=ppt/notesSlides/notesSlide5.xml><?xml version="1.0" encoding="utf-8"?>
+<p:notes xmlns:a="http://schemas.openxmlformats.org/drawingml/2006/main" xmlns:p="http://schemas.openxmlformats.org/presentationml/2006/main" xmlns:r="http://schemas.openxmlformats.org/officeDocument/2006/relationships">
+  <p:cSld>
+    <p:spTree>
+      <p:nvGrpSpPr>
+        <p:cNvPr id="1" name=""/>
+        <p:cNvGrpSpPr/>
+        <p:nvPr/>
+      </p:nvGrpSpPr>
+      <p:grpSpPr>
+        <a:xfrm>
+          <a:off x="0" y="0"/>
+          <a:ext cx="0" cy="0"/>
+          <a:chOff x="0" y="0"/>
+          <a:chExt cx="0" cy="0"/>
+        </a:xfrm>
+      </p:grpSpPr>
+      <p:sp>
+        <p:nvSpPr>
+          <p:cNvPr id="2" name="Slide Image Placeholder 1"/>
+          <p:cNvSpPr>
+            <a:spLocks noGrp="1"/>
+          </p:cNvSpPr>
+          <p:nvPr>
+            <p:ph type="sldImg" idx="2"/>
+          </p:nvPr>
+        </p:nvSpPr>
+        <p:spPr/>
+      </p:sp>
+      <p:sp>
+        <p:nvSpPr>
+          <p:cNvPr id="3" name="Notes Placeholder 2"/>
+          <p:cNvSpPr>
+            <a:spLocks noGrp="1"/>
+          </p:cNvSpPr>
+          <p:nvPr>
+            <p:ph type="body" idx="3" sz="quarter"/>
+          </p:nvPr>
+        </p:nvSpPr>
+        <p:spPr/>
+        <p:txBody>
+          <a:bodyPr/>
+          <a:lstStyle/>
+          <a:p>
+            <a:r>
+              <a:t>Siehe Trainerhandbuch (Sektion 3) für Moderationshinweise, Timing und erwartete Teilnehmerreaktionen.</a:t>
+            </a:r>
+          </a:p>
+        </p:txBody>
+      </p:sp>
+      <p:sp>
+        <p:nvSpPr>
+          <p:cNvPr id="4" name="Slide Number Placeholder 3"/>
+          <p:cNvSpPr>
+            <a:spLocks noGrp="1"/>
+          </p:cNvSpPr>
+          <p:nvPr>
+            <p:ph type="sldNum" idx="5" sz="quarter"/>
+          </p:nvPr>
+        </p:nvSpPr>
+        <p:spPr/>
+      </p:sp>
+    </p:spTree>
+  </p:cSld>
+  <p:clrMapOvr>
+    <a:masterClrMapping/>
+  </p:clrMapOvr>
+</p:notes>
+</file>
+
+<file path=ppt/notesSlides/notesSlide6.xml><?xml version="1.0" encoding="utf-8"?>
+<p:notes xmlns:a="http://schemas.openxmlformats.org/drawingml/2006/main" xmlns:p="http://schemas.openxmlformats.org/presentationml/2006/main" xmlns:r="http://schemas.openxmlformats.org/officeDocument/2006/relationships">
+  <p:cSld>
+    <p:spTree>
+      <p:nvGrpSpPr>
+        <p:cNvPr id="1" name=""/>
+        <p:cNvGrpSpPr/>
+        <p:nvPr/>
+      </p:nvGrpSpPr>
+      <p:grpSpPr>
+        <a:xfrm>
+          <a:off x="0" y="0"/>
+          <a:ext cx="0" cy="0"/>
+          <a:chOff x="0" y="0"/>
+          <a:chExt cx="0" cy="0"/>
+        </a:xfrm>
+      </p:grpSpPr>
+      <p:sp>
+        <p:nvSpPr>
+          <p:cNvPr id="2" name="Slide Image Placeholder 1"/>
+          <p:cNvSpPr>
+            <a:spLocks noGrp="1"/>
+          </p:cNvSpPr>
+          <p:nvPr>
+            <p:ph type="sldImg" idx="2"/>
+          </p:nvPr>
+        </p:nvSpPr>
+        <p:spPr/>
+      </p:sp>
+      <p:sp>
+        <p:nvSpPr>
+          <p:cNvPr id="3" name="Notes Placeholder 2"/>
+          <p:cNvSpPr>
+            <a:spLocks noGrp="1"/>
+          </p:cNvSpPr>
+          <p:nvPr>
+            <p:ph type="body" idx="3" sz="quarter"/>
+          </p:nvPr>
+        </p:nvSpPr>
+        <p:spPr/>
+        <p:txBody>
+          <a:bodyPr/>
+          <a:lstStyle/>
+          <a:p>
+            <a:r>
+              <a:t>Trainer-Hinweis – Zeitplan und Vorverkaufsquote: In der Seminarrealität werden Teilnehmer nach der Plausibilität des Baustarts fragen. Wichtig: In Süddeutschland benötigen notarielle Beurkundungen von Kaufverträgen typischerweise 3–6 Monate Vorlauf (Bonitätsprüfung Käufer, Finanzierungsbestätigung, Notarterminplanung). Die Kreditanfrage erfolgt im Mai/Juni 2026 – ein Baubeginn Oktober 2026 wäre in der Realität für das Erreichen einer 30-%-Vorverkaufsquote zu ambitioniert. Der Case nutzt einen April-2027-Baubeginn, der deutlich realistischer ist und dem Vertriebsteam ausreichend Zeit für Beurkundungen lässt. Diesen Hinweis können Trainer nutzen, um die Qualität von Projektplanungen kritisch zu hinterfragen: „Hat der Bauträger die Vorlaufzeit für Notartermine und Käuferfinanzierungen in seinem Zeitplan berücksichtigt?"</a:t>
+            </a:r>
+          </a:p>
+          <a:p>
+            <a:r>
+              <a:t>Musterlösung (Trainer-Version)</a:t>
+            </a:r>
+          </a:p>
+          <a:p>
+            <a:r>
+              <a:t>Zu Aufgabe 2:</a:t>
+            </a:r>
+          </a:p>
+          <a:p>
+            <a:r>
+              <a:t>Projektmarge: (6.163.600 − 5.340.000) / 5.340.000 × 100 = 15,4 % → unteres Ende des soliden Bereichs (15–20 %), akzeptabel aber ohne großen Puffer</a:t>
+            </a:r>
+          </a:p>
+          <a:p>
+            <a:r>
+              <a:t>LTV: 4.000.000 / 6.163.600 × 100 = 64,9 % → im marktüblichen Rahmen (&lt; 80 % Marktwert)</a:t>
+            </a:r>
+          </a:p>
+          <a:p>
+            <a:r>
+              <a:t>Vorverkaufsquote wertmäßig: 4 beurkundete WE – angenommen gleichmäßige Verteilung: ca. 4/16 × 6.163.600 = 1.540.900 / 6.163.600 = 25,0 % → unter der üblichen Mindestquote von 30–50 %; Warnsignal</a:t>
+            </a:r>
+          </a:p>
+          <a:p>
+            <a:r>
+              <a:t>Zu Aufgabe 3:</a:t>
+            </a:r>
+          </a:p>
+          <a:p>
+            <a:r>
+              <a:t>Stärkste Risikofelder: (1) Absatzrisiko (25 % Vorverkauf reicht nicht; Erstentwickler mit nur einem Referenzprojekt), (2) Fertigstellungsrisiko (Erstprojekt dieser Größenordnung für Feller), (3) Kostenüberschreitungsrisiko (GU-Festpreisvertrag schützt, aber Nebengewerke variabel)</a:t>
+            </a:r>
+          </a:p>
+          <a:p>
+            <a:r>
+              <a:t>Empfohlene Covenants: (1) Meilensteinbasierte Vorverkaufsquote: 30 % (wertmäßig) bis Baubeginn/Start der Baukredite (Phase 2), 50 % bis Rohbaufertigstellung, 80 % bis Innenausbaubeginn – deutlich realistischer als eine pauschale Bedingung vor erster Auszahlung (die bei Grundstückskauf noch nicht erreichbar ist); (2) Auszahlung tranchenweise nach beurkundetem Baufortschritt und Nachweis Vorverkauf je Meilenstein; (3) Fertigstellungsbürgschaft des GU mindestens 10 % der Bausumme; (4) Grundschuld-Freigaberegelung pro Einheit im Kreditvertrag fixiert</a:t>
+            </a:r>
+          </a:p>
+          <a:p>
+            <a:r>
+              <a:t>Verbundpartner: Schwäbisch Hall sofort prüfen – können SHB-Endfinanzierungen für die 16 Käufer über die Volksbank vermittelt werden? Das bindet die Endkunden an die Bank und schafft Refinanzierungsmöglichkeiten für die Käufer; MünchenerHyp prüfen wenn Hausbank-Kreditlinie ausgeschöpft oder Laufzeit &gt; 36 Monate; DZ BANK als Konsortialpartner bei Projektvolumen &gt; 5 Mio. EUR</a:t>
+            </a:r>
+          </a:p>
+        </p:txBody>
+      </p:sp>
+      <p:sp>
+        <p:nvSpPr>
+          <p:cNvPr id="4" name="Slide Number Placeholder 3"/>
+          <p:cNvSpPr>
+            <a:spLocks noGrp="1"/>
+          </p:cNvSpPr>
+          <p:nvPr>
+            <p:ph type="sldNum" idx="5" sz="quarter"/>
+          </p:nvPr>
+        </p:nvSpPr>
+        <p:spPr/>
+      </p:sp>
+    </p:spTree>
+  </p:cSld>
+  <p:clrMapOvr>
+    <a:masterClrMapping/>
+  </p:clrMapOvr>
+</p:notes>
+</file>
+
+<file path=ppt/notesSlides/notesSlide7.xml><?xml version="1.0" encoding="utf-8"?>
+<p:notes xmlns:a="http://schemas.openxmlformats.org/drawingml/2006/main" xmlns:p="http://schemas.openxmlformats.org/presentationml/2006/main" xmlns:r="http://schemas.openxmlformats.org/officeDocument/2006/relationships">
+  <p:cSld>
+    <p:spTree>
+      <p:nvGrpSpPr>
+        <p:cNvPr id="1" name=""/>
+        <p:cNvGrpSpPr/>
+        <p:nvPr/>
+      </p:nvGrpSpPr>
+      <p:grpSpPr>
+        <a:xfrm>
+          <a:off x="0" y="0"/>
+          <a:ext cx="0" cy="0"/>
+          <a:chOff x="0" y="0"/>
+          <a:chExt cx="0" cy="0"/>
+        </a:xfrm>
+      </p:grpSpPr>
+      <p:sp>
+        <p:nvSpPr>
+          <p:cNvPr id="2" name="Slide Image Placeholder 1"/>
+          <p:cNvSpPr>
+            <a:spLocks noGrp="1"/>
+          </p:cNvSpPr>
+          <p:nvPr>
+            <p:ph type="sldImg" idx="2"/>
+          </p:nvPr>
+        </p:nvSpPr>
+        <p:spPr/>
+      </p:sp>
+      <p:sp>
+        <p:nvSpPr>
+          <p:cNvPr id="3" name="Notes Placeholder 2"/>
+          <p:cNvSpPr>
+            <a:spLocks noGrp="1"/>
+          </p:cNvSpPr>
+          <p:nvPr>
+            <p:ph type="body" idx="3" sz="quarter"/>
+          </p:nvPr>
+        </p:nvSpPr>
+        <p:spPr/>
+        <p:txBody>
+          <a:bodyPr/>
+          <a:lstStyle/>
+          <a:p>
+            <a:r>
+              <a:t>Siehe Trainerhandbuch (Sektion 3) für Moderationshinweise, Timing und erwartete Teilnehmerreaktionen.</a:t>
+            </a:r>
+          </a:p>
+        </p:txBody>
+      </p:sp>
+      <p:sp>
+        <p:nvSpPr>
+          <p:cNvPr id="4" name="Slide Number Placeholder 3"/>
+          <p:cNvSpPr>
+            <a:spLocks noGrp="1"/>
+          </p:cNvSpPr>
+          <p:nvPr>
+            <p:ph type="sldNum" idx="5" sz="quarter"/>
+          </p:nvPr>
+        </p:nvSpPr>
+        <p:spPr/>
+      </p:sp>
+    </p:spTree>
+  </p:cSld>
+  <p:clrMapOvr>
+    <a:masterClrMapping/>
+  </p:clrMapOvr>
+</p:notes>
 </file>
 
 <file path=ppt/slideLayouts/slideLayout1.xml><?xml version="1.0" encoding="utf-8"?>
@@ -3909,6 +4795,595 @@
                 </a:solidFill>
                 <a:latin typeface="Source Serif 4"/>
               </a:rPr>
+              <a:t>Praxiscase: Quartier Sonnenhalde – Bauträgerfinanzierung Ravensburg</a:t>
+            </a:r>
+          </a:p>
+        </p:txBody>
+      </p:sp>
+      <p:sp>
+        <p:nvSpPr>
+          <p:cNvPr id="8" name="TextBox 7"/>
+          <p:cNvSpPr txBox="1"/>
+          <p:nvPr/>
+        </p:nvSpPr>
+        <p:spPr>
+          <a:xfrm>
+            <a:off x="685800" y="1417320"/>
+            <a:ext cx="10817352" cy="5029200"/>
+          </a:xfrm>
+          <a:prstGeom prst="rect">
+            <a:avLst/>
+          </a:prstGeom>
+          <a:noFill/>
+        </p:spPr>
+        <p:txBody>
+          <a:bodyPr wrap="square">
+            <a:spAutoFit/>
+          </a:bodyPr>
+          <a:lstStyle/>
+          <a:p>
+            <a:pPr>
+              <a:spcBef>
+                <a:spcPts val="1000"/>
+              </a:spcBef>
+              <a:spcAft>
+                <a:spcPts val="200"/>
+              </a:spcAft>
+            </a:pPr>
+            <a:r>
+              <a:rPr sz="800" b="1">
+                <a:solidFill>
+                  <a:srgbClr val="78808C"/>
+                </a:solidFill>
+                <a:latin typeface="JetBrains Mono"/>
+              </a:rPr>
+              <a:t>UNTERNEHMENSPORTRÄT</a:t>
+            </a:r>
+          </a:p>
+          <a:p>
+            <a:pPr>
+              <a:spcBef>
+                <a:spcPts val="400"/>
+              </a:spcBef>
+              <a:spcAft>
+                <a:spcPts val="200"/>
+              </a:spcAft>
+            </a:pPr>
+            <a:r>
+              <a:rPr sz="1200">
+                <a:solidFill>
+                  <a:srgbClr val="3D5466"/>
+                </a:solidFill>
+                <a:latin typeface="Arial"/>
+              </a:rPr>
+              <a:t>Das Projekt "Sonnenhalde":</a:t>
+            </a:r>
+          </a:p>
+          <a:p>
+            <a:pPr>
+              <a:spcBef>
+                <a:spcPts val="400"/>
+              </a:spcBef>
+              <a:spcAft>
+                <a:spcPts val="200"/>
+              </a:spcAft>
+            </a:pPr>
+            <a:r>
+              <a:rPr sz="1300">
+                <a:solidFill>
+                  <a:srgbClr val="3D5466"/>
+                </a:solidFill>
+                <a:latin typeface="Arial"/>
+              </a:rPr>
+              <a:t>▸  Lage: Ravensburg-Südstadt, aufgewertetes Quartier, gute ÖPNV-Anbindung</a:t>
+            </a:r>
+          </a:p>
+          <a:p>
+            <a:pPr>
+              <a:spcBef>
+                <a:spcPts val="400"/>
+              </a:spcBef>
+              <a:spcAft>
+                <a:spcPts val="200"/>
+              </a:spcAft>
+            </a:pPr>
+            <a:r>
+              <a:rPr sz="1300">
+                <a:solidFill>
+                  <a:srgbClr val="3D5466"/>
+                </a:solidFill>
+                <a:latin typeface="Arial"/>
+              </a:rPr>
+              <a:t>▸  Nutzung: 16 Eigentumswohnungen (60–110 m², 2–4 Zimmer)</a:t>
+            </a:r>
+          </a:p>
+          <a:p>
+            <a:pPr>
+              <a:spcBef>
+                <a:spcPts val="400"/>
+              </a:spcBef>
+              <a:spcAft>
+                <a:spcPts val="200"/>
+              </a:spcAft>
+            </a:pPr>
+            <a:r>
+              <a:rPr sz="1300">
+                <a:solidFill>
+                  <a:srgbClr val="3D5466"/>
+                </a:solidFill>
+                <a:latin typeface="Arial"/>
+              </a:rPr>
+              <a:t>▸  Baugenehmigung: seit März 2026 rechtskräftig</a:t>
+            </a:r>
+          </a:p>
+          <a:p>
+            <a:pPr>
+              <a:spcBef>
+                <a:spcPts val="400"/>
+              </a:spcBef>
+              <a:spcAft>
+                <a:spcPts val="200"/>
+              </a:spcAft>
+            </a:pPr>
+            <a:r>
+              <a:rPr sz="1300">
+                <a:solidFill>
+                  <a:srgbClr val="3D5466"/>
+                </a:solidFill>
+                <a:latin typeface="Arial"/>
+              </a:rPr>
+              <a:t>▸  Baubeginn: geplant April 2027 (Vorlaufzeit für Beurkundungen und Bauvorbereitungen realistisch eingeplant)</a:t>
+            </a:r>
+          </a:p>
+          <a:p>
+            <a:pPr>
+              <a:spcBef>
+                <a:spcPts val="400"/>
+              </a:spcBef>
+              <a:spcAft>
+                <a:spcPts val="200"/>
+              </a:spcAft>
+            </a:pPr>
+            <a:r>
+              <a:rPr sz="1300">
+                <a:solidFill>
+                  <a:srgbClr val="3D5466"/>
+                </a:solidFill>
+                <a:latin typeface="Arial"/>
+              </a:rPr>
+              <a:t>▸  Fertigstellung: Juni 2028</a:t>
+            </a:r>
+          </a:p>
+          <a:p>
+            <a:pPr>
+              <a:spcBef>
+                <a:spcPts val="400"/>
+              </a:spcBef>
+              <a:spcAft>
+                <a:spcPts val="200"/>
+              </a:spcAft>
+            </a:pPr>
+            <a:r>
+              <a:rPr sz="1300">
+                <a:solidFill>
+                  <a:srgbClr val="3D5466"/>
+                </a:solidFill>
+                <a:latin typeface="Arial"/>
+              </a:rPr>
+              <a:t>▸  Vertrieb: eigenes Vertriebsbüro + regionaler Maklerpartner</a:t>
+            </a:r>
+          </a:p>
+          <a:p>
+            <a:pPr>
+              <a:spcBef>
+                <a:spcPts val="400"/>
+              </a:spcBef>
+              <a:spcAft>
+                <a:spcPts val="200"/>
+              </a:spcAft>
+            </a:pPr>
+            <a:r>
+              <a:rPr sz="1300">
+                <a:solidFill>
+                  <a:srgbClr val="3D5466"/>
+                </a:solidFill>
+                <a:latin typeface="Arial"/>
+              </a:rPr>
+              <a:t>▸  Vorverkäufe zum Zeitpunkt der Kreditanfrage: 4 von 16 Einheiten notariell beurkundet (25 %)</a:t>
+            </a:r>
+          </a:p>
+          <a:p>
+            <a:pPr>
+              <a:spcBef>
+                <a:spcPts val="1000"/>
+              </a:spcBef>
+              <a:spcAft>
+                <a:spcPts val="200"/>
+              </a:spcAft>
+            </a:pPr>
+            <a:r>
+              <a:rPr sz="800" b="1">
+                <a:solidFill>
+                  <a:srgbClr val="78808C"/>
+                </a:solidFill>
+                <a:latin typeface="JetBrains Mono"/>
+              </a:rPr>
+              <a:t>PROJEKTFINANZIERUNG – ECKDATEN</a:t>
+            </a:r>
+          </a:p>
+          <a:p>
+            <a:pPr>
+              <a:spcBef>
+                <a:spcPts val="400"/>
+              </a:spcBef>
+              <a:spcAft>
+                <a:spcPts val="200"/>
+              </a:spcAft>
+            </a:pPr>
+            <a:r>
+              <a:rPr sz="1200">
+                <a:solidFill>
+                  <a:srgbClr val="3D5466"/>
+                </a:solidFill>
+                <a:latin typeface="Arial"/>
+              </a:rPr>
+              <a:t>Prognostizierte Verkaufserlöse:</a:t>
+            </a:r>
+          </a:p>
+          <a:p>
+            <a:pPr>
+              <a:spcBef>
+                <a:spcPts val="1000"/>
+              </a:spcBef>
+              <a:spcAft>
+                <a:spcPts val="200"/>
+              </a:spcAft>
+            </a:pPr>
+            <a:r>
+              <a:rPr sz="800" b="1">
+                <a:solidFill>
+                  <a:srgbClr val="78808C"/>
+                </a:solidFill>
+                <a:latin typeface="JetBrains Mono"/>
+              </a:rPr>
+              <a:t>AUFGABEN (GRUPPENARBEIT, JE GRUPPE CA. 60 MIN.)</a:t>
+            </a:r>
+          </a:p>
+        </p:txBody>
+      </p:sp>
+      <p:sp>
+        <p:nvSpPr>
+          <p:cNvPr id="9" name="Rectangle 8"/>
+          <p:cNvSpPr/>
+          <p:nvPr/>
+        </p:nvSpPr>
+        <p:spPr>
+          <a:xfrm>
+            <a:off x="0" y="6510528"/>
+            <a:ext cx="12188952" cy="347472"/>
+          </a:xfrm>
+          <a:prstGeom prst="rect">
+            <a:avLst/>
+          </a:prstGeom>
+          <a:solidFill>
+            <a:srgbClr val="0A1937"/>
+          </a:solidFill>
+          <a:ln>
+            <a:noFill/>
+          </a:ln>
+        </p:spPr>
+        <p:style>
+          <a:lnRef idx="1">
+            <a:schemeClr val="accent1"/>
+          </a:lnRef>
+          <a:fillRef idx="3">
+            <a:schemeClr val="accent1"/>
+          </a:fillRef>
+          <a:effectRef idx="2">
+            <a:schemeClr val="accent1"/>
+          </a:effectRef>
+          <a:fontRef idx="minor">
+            <a:schemeClr val="lt1"/>
+          </a:fontRef>
+        </p:style>
+        <p:txBody>
+          <a:bodyPr rtlCol="0" anchor="ctr"/>
+          <a:lstStyle/>
+          <a:p>
+            <a:pPr algn="ctr"/>
+          </a:p>
+        </p:txBody>
+      </p:sp>
+      <p:sp>
+        <p:nvSpPr>
+          <p:cNvPr id="10" name="TextBox 9"/>
+          <p:cNvSpPr txBox="1"/>
+          <p:nvPr/>
+        </p:nvSpPr>
+        <p:spPr>
+          <a:xfrm>
+            <a:off x="685800" y="6583680"/>
+            <a:ext cx="6490411" cy="256032"/>
+          </a:xfrm>
+          <a:prstGeom prst="rect">
+            <a:avLst/>
+          </a:prstGeom>
+          <a:noFill/>
+        </p:spPr>
+        <p:txBody>
+          <a:bodyPr wrap="none">
+            <a:spAutoFit/>
+          </a:bodyPr>
+          <a:lstStyle/>
+          <a:p>
+            <a:pPr algn="l"/>
+            <a:r>
+              <a:rPr sz="700">
+                <a:solidFill>
+                  <a:srgbClr val="A0B4D2"/>
+                </a:solidFill>
+                <a:latin typeface="JetBrains Mono"/>
+              </a:rPr>
+              <a:t>Benedikt Zoller Coaching  ·  FKB Campus  ·  M08</a:t>
+            </a:r>
+          </a:p>
+        </p:txBody>
+      </p:sp>
+    </p:spTree>
+  </p:cSld>
+  <p:clrMapOvr>
+    <a:masterClrMapping/>
+  </p:clrMapOvr>
+</p:sld>
+</file>
+
+<file path=ppt/slides/slide11.xml><?xml version="1.0" encoding="utf-8"?>
+<p:sld xmlns:a="http://schemas.openxmlformats.org/drawingml/2006/main" xmlns:p="http://schemas.openxmlformats.org/presentationml/2006/main" xmlns:r="http://schemas.openxmlformats.org/officeDocument/2006/relationships">
+  <p:cSld>
+    <p:spTree>
+      <p:nvGrpSpPr>
+        <p:cNvPr id="1" name=""/>
+        <p:cNvGrpSpPr/>
+        <p:nvPr/>
+      </p:nvGrpSpPr>
+      <p:grpSpPr/>
+      <p:sp>
+        <p:nvSpPr>
+          <p:cNvPr id="2" name="Rectangle 1"/>
+          <p:cNvSpPr/>
+          <p:nvPr/>
+        </p:nvSpPr>
+        <p:spPr>
+          <a:xfrm>
+            <a:off x="0" y="0"/>
+            <a:ext cx="12188952" cy="6858000"/>
+          </a:xfrm>
+          <a:prstGeom prst="rect">
+            <a:avLst/>
+          </a:prstGeom>
+          <a:solidFill>
+            <a:srgbClr val="EDEDF3"/>
+          </a:solidFill>
+          <a:ln>
+            <a:noFill/>
+          </a:ln>
+        </p:spPr>
+        <p:style>
+          <a:lnRef idx="1">
+            <a:schemeClr val="accent1"/>
+          </a:lnRef>
+          <a:fillRef idx="3">
+            <a:schemeClr val="accent1"/>
+          </a:fillRef>
+          <a:effectRef idx="2">
+            <a:schemeClr val="accent1"/>
+          </a:effectRef>
+          <a:fontRef idx="minor">
+            <a:schemeClr val="lt1"/>
+          </a:fontRef>
+        </p:style>
+        <p:txBody>
+          <a:bodyPr rtlCol="0" anchor="ctr"/>
+          <a:lstStyle/>
+          <a:p>
+            <a:pPr algn="ctr"/>
+          </a:p>
+        </p:txBody>
+      </p:sp>
+      <p:sp>
+        <p:nvSpPr>
+          <p:cNvPr id="3" name="Rectangle 2"/>
+          <p:cNvSpPr/>
+          <p:nvPr/>
+        </p:nvSpPr>
+        <p:spPr>
+          <a:xfrm>
+            <a:off x="0" y="0"/>
+            <a:ext cx="12188952" cy="50292"/>
+          </a:xfrm>
+          <a:prstGeom prst="rect">
+            <a:avLst/>
+          </a:prstGeom>
+          <a:solidFill>
+            <a:srgbClr val="1F2C56"/>
+          </a:solidFill>
+          <a:ln>
+            <a:noFill/>
+          </a:ln>
+        </p:spPr>
+        <p:style>
+          <a:lnRef idx="1">
+            <a:schemeClr val="accent1"/>
+          </a:lnRef>
+          <a:fillRef idx="3">
+            <a:schemeClr val="accent1"/>
+          </a:fillRef>
+          <a:effectRef idx="2">
+            <a:schemeClr val="accent1"/>
+          </a:effectRef>
+          <a:fontRef idx="minor">
+            <a:schemeClr val="lt1"/>
+          </a:fontRef>
+        </p:style>
+        <p:txBody>
+          <a:bodyPr rtlCol="0" anchor="ctr"/>
+          <a:lstStyle/>
+          <a:p>
+            <a:pPr algn="ctr"/>
+          </a:p>
+        </p:txBody>
+      </p:sp>
+      <p:sp>
+        <p:nvSpPr>
+          <p:cNvPr id="4" name="TextBox 3"/>
+          <p:cNvSpPr txBox="1"/>
+          <p:nvPr/>
+        </p:nvSpPr>
+        <p:spPr>
+          <a:xfrm>
+            <a:off x="685800" y="109728"/>
+            <a:ext cx="10817352" cy="228600"/>
+          </a:xfrm>
+          <a:prstGeom prst="rect">
+            <a:avLst/>
+          </a:prstGeom>
+          <a:noFill/>
+        </p:spPr>
+        <p:txBody>
+          <a:bodyPr wrap="none">
+            <a:spAutoFit/>
+          </a:bodyPr>
+          <a:lstStyle/>
+          <a:p>
+            <a:pPr algn="l"/>
+            <a:r>
+              <a:rPr sz="750">
+                <a:solidFill>
+                  <a:srgbClr val="78808C"/>
+                </a:solidFill>
+                <a:latin typeface="JetBrains Mono"/>
+              </a:rPr>
+              <a:t>M08  ·  INHALT</a:t>
+            </a:r>
+          </a:p>
+        </p:txBody>
+      </p:sp>
+      <p:sp>
+        <p:nvSpPr>
+          <p:cNvPr id="5" name="Rectangle 4"/>
+          <p:cNvSpPr/>
+          <p:nvPr/>
+        </p:nvSpPr>
+        <p:spPr>
+          <a:xfrm>
+            <a:off x="0" y="1234440"/>
+            <a:ext cx="12188952" cy="12700"/>
+          </a:xfrm>
+          <a:prstGeom prst="rect">
+            <a:avLst/>
+          </a:prstGeom>
+          <a:solidFill>
+            <a:srgbClr val="D8DFE4"/>
+          </a:solidFill>
+          <a:ln>
+            <a:noFill/>
+          </a:ln>
+        </p:spPr>
+        <p:style>
+          <a:lnRef idx="1">
+            <a:schemeClr val="accent1"/>
+          </a:lnRef>
+          <a:fillRef idx="3">
+            <a:schemeClr val="accent1"/>
+          </a:fillRef>
+          <a:effectRef idx="2">
+            <a:schemeClr val="accent1"/>
+          </a:effectRef>
+          <a:fontRef idx="minor">
+            <a:schemeClr val="lt1"/>
+          </a:fontRef>
+        </p:style>
+        <p:txBody>
+          <a:bodyPr rtlCol="0" anchor="ctr"/>
+          <a:lstStyle/>
+          <a:p>
+            <a:pPr algn="ctr"/>
+          </a:p>
+        </p:txBody>
+      </p:sp>
+      <p:sp>
+        <p:nvSpPr>
+          <p:cNvPr id="6" name="Rectangle 5"/>
+          <p:cNvSpPr/>
+          <p:nvPr/>
+        </p:nvSpPr>
+        <p:spPr>
+          <a:xfrm>
+            <a:off x="685800" y="502920"/>
+            <a:ext cx="36576" cy="658368"/>
+          </a:xfrm>
+          <a:prstGeom prst="rect">
+            <a:avLst/>
+          </a:prstGeom>
+          <a:solidFill>
+            <a:srgbClr val="D9C089"/>
+          </a:solidFill>
+          <a:ln>
+            <a:noFill/>
+          </a:ln>
+        </p:spPr>
+        <p:style>
+          <a:lnRef idx="1">
+            <a:schemeClr val="accent1"/>
+          </a:lnRef>
+          <a:fillRef idx="3">
+            <a:schemeClr val="accent1"/>
+          </a:fillRef>
+          <a:effectRef idx="2">
+            <a:schemeClr val="accent1"/>
+          </a:effectRef>
+          <a:fontRef idx="minor">
+            <a:schemeClr val="lt1"/>
+          </a:fontRef>
+        </p:style>
+        <p:txBody>
+          <a:bodyPr rtlCol="0" anchor="ctr"/>
+          <a:lstStyle/>
+          <a:p>
+            <a:pPr algn="ctr"/>
+          </a:p>
+        </p:txBody>
+      </p:sp>
+      <p:sp>
+        <p:nvSpPr>
+          <p:cNvPr id="7" name="TextBox 6"/>
+          <p:cNvSpPr txBox="1"/>
+          <p:nvPr/>
+        </p:nvSpPr>
+        <p:spPr>
+          <a:xfrm>
+            <a:off x="813816" y="502920"/>
+            <a:ext cx="10634472" cy="685800"/>
+          </a:xfrm>
+          <a:prstGeom prst="rect">
+            <a:avLst/>
+          </a:prstGeom>
+          <a:noFill/>
+        </p:spPr>
+        <p:txBody>
+          <a:bodyPr wrap="square">
+            <a:spAutoFit/>
+          </a:bodyPr>
+          <a:lstStyle/>
+          <a:p>
+            <a:pPr algn="l"/>
+            <a:r>
+              <a:rPr sz="2400" b="1" i="0">
+                <a:solidFill>
+                  <a:srgbClr val="1F2C56"/>
+                </a:solidFill>
+                <a:latin typeface="Source Serif 4"/>
+              </a:rPr>
               <a:t>Reflexionsfragen</a:t>
             </a:r>
           </a:p>
@@ -4790,7 +6265,7 @@
                 </a:solidFill>
                 <a:latin typeface="JetBrains Mono"/>
               </a:rPr>
-              <a:t>M08  ·  INHALT</a:t>
+              <a:t>AGENDA  ·  M08</a:t>
             </a:r>
           </a:p>
         </p:txBody>
@@ -4840,44 +6315,36 @@
       </p:sp>
       <p:sp>
         <p:nvSpPr>
-          <p:cNvPr id="6" name="Rectangle 5"/>
-          <p:cNvSpPr/>
+          <p:cNvPr id="6" name="TextBox 5"/>
+          <p:cNvSpPr txBox="1"/>
           <p:nvPr/>
         </p:nvSpPr>
         <p:spPr>
           <a:xfrm>
             <a:off x="685800" y="502920"/>
-            <a:ext cx="36576" cy="658368"/>
-          </a:xfrm>
-          <a:prstGeom prst="rect">
-            <a:avLst/>
-          </a:prstGeom>
-          <a:solidFill>
-            <a:srgbClr val="D9C089"/>
-          </a:solidFill>
-          <a:ln>
-            <a:noFill/>
-          </a:ln>
-        </p:spPr>
-        <p:style>
-          <a:lnRef idx="1">
-            <a:schemeClr val="accent1"/>
-          </a:lnRef>
-          <a:fillRef idx="3">
-            <a:schemeClr val="accent1"/>
-          </a:fillRef>
-          <a:effectRef idx="2">
-            <a:schemeClr val="accent1"/>
-          </a:effectRef>
-          <a:fontRef idx="minor">
-            <a:schemeClr val="lt1"/>
-          </a:fontRef>
-        </p:style>
-        <p:txBody>
-          <a:bodyPr rtlCol="0" anchor="ctr"/>
-          <a:lstStyle/>
-          <a:p>
-            <a:pPr algn="ctr"/>
+            <a:ext cx="10817352" cy="658368"/>
+          </a:xfrm>
+          <a:prstGeom prst="rect">
+            <a:avLst/>
+          </a:prstGeom>
+          <a:noFill/>
+        </p:spPr>
+        <p:txBody>
+          <a:bodyPr wrap="square">
+            <a:spAutoFit/>
+          </a:bodyPr>
+          <a:lstStyle/>
+          <a:p>
+            <a:pPr algn="l"/>
+            <a:r>
+              <a:rPr sz="2600" b="1" i="0">
+                <a:solidFill>
+                  <a:srgbClr val="1F2C56"/>
+                </a:solidFill>
+                <a:latin typeface="Source Serif 4"/>
+              </a:rPr>
+              <a:t>Agenda</a:t>
+            </a:r>
           </a:p>
         </p:txBody>
       </p:sp>
@@ -4889,8 +6356,8 @@
         </p:nvSpPr>
         <p:spPr>
           <a:xfrm>
-            <a:off x="813816" y="502920"/>
-            <a:ext cx="10634472" cy="685800"/>
+            <a:off x="685800" y="1463040"/>
+            <a:ext cx="10817352" cy="4937760"/>
           </a:xfrm>
           <a:prstGeom prst="rect">
             <a:avLst/>
@@ -4903,273 +6370,124 @@
           </a:bodyPr>
           <a:lstStyle/>
           <a:p>
-            <a:pPr algn="l"/>
-            <a:r>
-              <a:rPr sz="2400" b="1" i="0">
-                <a:solidFill>
-                  <a:srgbClr val="1F2C56"/>
-                </a:solidFill>
-                <a:latin typeface="Source Serif 4"/>
-              </a:rPr>
-              <a:t>Theorie-Input 1: Kundentypologie der Immobilienfinanzierung</a:t>
-            </a:r>
-          </a:p>
-        </p:txBody>
-      </p:sp>
-      <p:sp>
-        <p:nvSpPr>
-          <p:cNvPr id="8" name="TextBox 7"/>
-          <p:cNvSpPr txBox="1"/>
-          <p:nvPr/>
-        </p:nvSpPr>
-        <p:spPr>
-          <a:xfrm>
-            <a:off x="685800" y="1417320"/>
-            <a:ext cx="10817352" cy="5029200"/>
-          </a:xfrm>
-          <a:prstGeom prst="rect">
-            <a:avLst/>
-          </a:prstGeom>
-          <a:noFill/>
-        </p:spPr>
-        <p:txBody>
-          <a:bodyPr wrap="square">
-            <a:spAutoFit/>
-          </a:bodyPr>
-          <a:lstStyle/>
-          <a:p>
             <a:pPr>
               <a:spcBef>
-                <a:spcPts val="1000"/>
+                <a:spcPts val="800"/>
               </a:spcBef>
               <a:spcAft>
                 <a:spcPts val="200"/>
               </a:spcAft>
             </a:pPr>
             <a:r>
-              <a:rPr sz="800" b="1">
-                <a:solidFill>
-                  <a:srgbClr val="78808C"/>
-                </a:solidFill>
-                <a:latin typeface="JetBrains Mono"/>
-              </a:rPr>
-              <a:t>DREI GRUNDTYPEN – DREI RISIKOLANDSCHAFTEN</a:t>
+              <a:rPr sz="1500">
+                <a:solidFill>
+                  <a:srgbClr val="3D5466"/>
+                </a:solidFill>
+                <a:latin typeface="Arial"/>
+              </a:rPr>
+              <a:t>01   Theorie-Input 1: Kundentypologie der Immobilienfinanzierung</a:t>
             </a:r>
           </a:p>
           <a:p>
             <a:pPr>
               <a:spcBef>
-                <a:spcPts val="400"/>
+                <a:spcPts val="800"/>
               </a:spcBef>
               <a:spcAft>
                 <a:spcPts val="200"/>
               </a:spcAft>
             </a:pPr>
             <a:r>
-              <a:rPr sz="1200">
+              <a:rPr sz="1500">
                 <a:solidFill>
                   <a:srgbClr val="3D5466"/>
                 </a:solidFill>
                 <a:latin typeface="Arial"/>
               </a:rPr>
-              <a:t>Typ 1: Bestandshalter</a:t>
+              <a:t>02   Theorie-Input 2: Beleihungswertermittlung nach BelWertV</a:t>
             </a:r>
           </a:p>
           <a:p>
             <a:pPr>
               <a:spcBef>
-                <a:spcPts val="400"/>
+                <a:spcPts val="800"/>
               </a:spcBef>
               <a:spcAft>
                 <a:spcPts val="200"/>
               </a:spcAft>
             </a:pPr>
             <a:r>
-              <a:rPr sz="1300">
+              <a:rPr sz="1500">
                 <a:solidFill>
                   <a:srgbClr val="3D5466"/>
                 </a:solidFill>
                 <a:latin typeface="Arial"/>
               </a:rPr>
-              <a:t>▸  Cashflow-Struktur: Stabile, planbare Mieteinnahmen – Finanzierungsrisiko hängt primär an Vermietungsstand und Mietzahlungsfähigkeit der Mieter</a:t>
+              <a:t>03   Theorie-Input 3: Kennzahlen der Immobilien- und Projektfinanzierung</a:t>
             </a:r>
           </a:p>
           <a:p>
             <a:pPr>
               <a:spcBef>
-                <a:spcPts val="400"/>
+                <a:spcPts val="800"/>
               </a:spcBef>
               <a:spcAft>
                 <a:spcPts val="200"/>
               </a:spcAft>
             </a:pPr>
             <a:r>
-              <a:rPr sz="1300">
+              <a:rPr sz="1500">
                 <a:solidFill>
                   <a:srgbClr val="3D5466"/>
                 </a:solidFill>
                 <a:latin typeface="Arial"/>
               </a:rPr>
-              <a:t>▸  Typischer Finanzierungsbedarf: Ankaufsfinanzierung, Refinanzierung, Modernisierungskredite</a:t>
+              <a:t>04   Theorie-Input 4: Risikofelder der Bauträgerfinanzierung</a:t>
             </a:r>
           </a:p>
           <a:p>
             <a:pPr>
               <a:spcBef>
-                <a:spcPts val="400"/>
+                <a:spcPts val="800"/>
               </a:spcBef>
               <a:spcAft>
                 <a:spcPts val="200"/>
               </a:spcAft>
             </a:pPr>
             <a:r>
-              <a:rPr sz="1300">
+              <a:rPr sz="1500">
                 <a:solidFill>
                   <a:srgbClr val="3D5466"/>
                 </a:solidFill>
                 <a:latin typeface="Arial"/>
               </a:rPr>
-              <a:t>▸  Kernkennzahl: DSCR (Debt Service Coverage Ratio) – können die Mieteinnahmen den Kapitaldienst dauerhaft abdecken?</a:t>
+              <a:t>05   Praxiscase: Quartier Sonnenhalde – Bauträgerfinanzierung Ravensburg</a:t>
             </a:r>
           </a:p>
           <a:p>
             <a:pPr>
               <a:spcBef>
-                <a:spcPts val="400"/>
+                <a:spcPts val="800"/>
               </a:spcBef>
               <a:spcAft>
                 <a:spcPts val="200"/>
               </a:spcAft>
             </a:pPr>
             <a:r>
-              <a:rPr sz="1300">
+              <a:rPr sz="1500">
                 <a:solidFill>
                   <a:srgbClr val="3D5466"/>
                 </a:solidFill>
                 <a:latin typeface="Arial"/>
               </a:rPr>
-              <a:t>▸  Hauptrisiko: Leerstandsrisiko, Mieterbonitätsrisiko, Instandhaltungsstau</a:t>
-            </a:r>
-          </a:p>
-          <a:p>
-            <a:pPr>
-              <a:spcBef>
-                <a:spcPts val="400"/>
-              </a:spcBef>
-              <a:spcAft>
-                <a:spcPts val="200"/>
-              </a:spcAft>
-            </a:pPr>
-            <a:r>
-              <a:rPr sz="1200">
-                <a:solidFill>
-                  <a:srgbClr val="3D5466"/>
-                </a:solidFill>
-                <a:latin typeface="Arial"/>
-              </a:rPr>
-              <a:t>Typ 2: Bauträger</a:t>
-            </a:r>
-          </a:p>
-          <a:p>
-            <a:pPr>
-              <a:spcBef>
-                <a:spcPts val="400"/>
-              </a:spcBef>
-              <a:spcAft>
-                <a:spcPts val="200"/>
-              </a:spcAft>
-            </a:pPr>
-            <a:r>
-              <a:rPr sz="1300">
-                <a:solidFill>
-                  <a:srgbClr val="3D5466"/>
-                </a:solidFill>
-                <a:latin typeface="Arial"/>
-              </a:rPr>
-              <a:t>▸  Cashflow-Struktur: Kein laufender Miet-Cashflow – Rückfluss ausschließlich aus Verkaufserlösen nach Fertigstellung. Das Kapital ist bis zum Verkauf vollständig gebunden.</a:t>
-            </a:r>
-          </a:p>
-          <a:p>
-            <a:pPr>
-              <a:spcBef>
-                <a:spcPts val="400"/>
-              </a:spcBef>
-              <a:spcAft>
-                <a:spcPts val="200"/>
-              </a:spcAft>
-            </a:pPr>
-            <a:r>
-              <a:rPr sz="1300">
-                <a:solidFill>
-                  <a:srgbClr val="3D5466"/>
-                </a:solidFill>
-                <a:latin typeface="Arial"/>
-              </a:rPr>
-              <a:t>▸  Typischer Finanzierungsbedarf: Kurzfristige Bauträgerfinanzierung (Laufzeit 18–36 Monate), strukturiert nach Baufortschritt</a:t>
-            </a:r>
-          </a:p>
-          <a:p>
-            <a:pPr>
-              <a:spcBef>
-                <a:spcPts val="400"/>
-              </a:spcBef>
-              <a:spcAft>
-                <a:spcPts val="200"/>
-              </a:spcAft>
-            </a:pPr>
-            <a:r>
-              <a:rPr sz="1300">
-                <a:solidFill>
-                  <a:srgbClr val="3D5466"/>
-                </a:solidFill>
-                <a:latin typeface="Arial"/>
-              </a:rPr>
-              <a:t>▸  Kernkennzahl: LTV (Loan-to-Value) bezogen auf prognostizierte Verkaufserlöse; Vorverkaufsquote</a:t>
-            </a:r>
-          </a:p>
-          <a:p>
-            <a:pPr>
-              <a:spcBef>
-                <a:spcPts val="400"/>
-              </a:spcBef>
-              <a:spcAft>
-                <a:spcPts val="200"/>
-              </a:spcAft>
-            </a:pPr>
-            <a:r>
-              <a:rPr sz="1300">
-                <a:solidFill>
-                  <a:srgbClr val="3D5466"/>
-                </a:solidFill>
-                <a:latin typeface="Arial"/>
-              </a:rPr>
-              <a:t>▸  Hauptrisiko: Fertigstellungsrisiko, Absatzrisiko, Kostenüberschreitungen</a:t>
-            </a:r>
-          </a:p>
-          <a:p>
-            <a:pPr>
-              <a:spcBef>
-                <a:spcPts val="400"/>
-              </a:spcBef>
-              <a:spcAft>
-                <a:spcPts val="200"/>
-              </a:spcAft>
-            </a:pPr>
-            <a:r>
-              <a:rPr sz="1200">
-                <a:solidFill>
-                  <a:srgbClr val="3D5466"/>
-                </a:solidFill>
-                <a:latin typeface="Arial"/>
-              </a:rPr>
-              <a:t>Typ 3: Projektentwickler</a:t>
-            </a:r>
-          </a:p>
-        </p:txBody>
-      </p:sp>
-      <p:sp>
-        <p:nvSpPr>
-          <p:cNvPr id="9" name="Rectangle 8"/>
+              <a:t>06   Reflexionsfragen</a:t>
+            </a:r>
+          </a:p>
+        </p:txBody>
+      </p:sp>
+      <p:sp>
+        <p:nvSpPr>
+          <p:cNvPr id="8" name="Rectangle 7"/>
           <p:cNvSpPr/>
           <p:nvPr/>
         </p:nvSpPr>
@@ -5212,7 +6530,7 @@
       </p:sp>
       <p:sp>
         <p:nvSpPr>
-          <p:cNvPr id="10" name="TextBox 9"/>
+          <p:cNvPr id="9" name="TextBox 8"/>
           <p:cNvSpPr txBox="1"/>
           <p:nvPr/>
         </p:nvSpPr>
@@ -5278,7 +6596,7 @@
             <a:avLst/>
           </a:prstGeom>
           <a:solidFill>
-            <a:srgbClr val="FFFFFF"/>
+            <a:srgbClr val="EDEDF3"/>
           </a:solidFill>
           <a:ln>
             <a:noFill/>
@@ -5379,43 +6697,51 @@
                 </a:solidFill>
                 <a:latin typeface="JetBrains Mono"/>
               </a:rPr>
-              <a:t>M08  ·  SCHAUBILD</a:t>
-            </a:r>
-          </a:p>
-        </p:txBody>
-      </p:sp>
-      <p:sp>
-        <p:nvSpPr>
-          <p:cNvPr id="5" name="TextBox 4"/>
-          <p:cNvSpPr txBox="1"/>
+              <a:t>M08  ·  INHALT</a:t>
+            </a:r>
+          </a:p>
+        </p:txBody>
+      </p:sp>
+      <p:sp>
+        <p:nvSpPr>
+          <p:cNvPr id="5" name="Rectangle 4"/>
+          <p:cNvSpPr/>
           <p:nvPr/>
         </p:nvSpPr>
         <p:spPr>
           <a:xfrm>
-            <a:off x="685800" y="502920"/>
-            <a:ext cx="10817352" cy="594360"/>
-          </a:xfrm>
-          <a:prstGeom prst="rect">
-            <a:avLst/>
-          </a:prstGeom>
-          <a:noFill/>
-        </p:spPr>
-        <p:txBody>
-          <a:bodyPr wrap="square">
-            <a:spAutoFit/>
-          </a:bodyPr>
-          <a:lstStyle/>
-          <a:p>
-            <a:pPr algn="l"/>
-            <a:r>
-              <a:rPr sz="2000" b="1" i="0">
-                <a:solidFill>
-                  <a:srgbClr val="1F2C56"/>
-                </a:solidFill>
-                <a:latin typeface="Source Serif 4"/>
-              </a:rPr>
-              <a:t>Drei Immobilien-Typologien im Vergleich</a:t>
-            </a:r>
+            <a:off x="0" y="1234440"/>
+            <a:ext cx="12188952" cy="12700"/>
+          </a:xfrm>
+          <a:prstGeom prst="rect">
+            <a:avLst/>
+          </a:prstGeom>
+          <a:solidFill>
+            <a:srgbClr val="D8DFE4"/>
+          </a:solidFill>
+          <a:ln>
+            <a:noFill/>
+          </a:ln>
+        </p:spPr>
+        <p:style>
+          <a:lnRef idx="1">
+            <a:schemeClr val="accent1"/>
+          </a:lnRef>
+          <a:fillRef idx="3">
+            <a:schemeClr val="accent1"/>
+          </a:fillRef>
+          <a:effectRef idx="2">
+            <a:schemeClr val="accent1"/>
+          </a:effectRef>
+          <a:fontRef idx="minor">
+            <a:schemeClr val="lt1"/>
+          </a:fontRef>
+        </p:style>
+        <p:txBody>
+          <a:bodyPr rtlCol="0" anchor="ctr"/>
+          <a:lstStyle/>
+          <a:p>
+            <a:pPr algn="ctr"/>
           </a:p>
         </p:txBody>
       </p:sp>
@@ -5427,8 +6753,8 @@
         </p:nvSpPr>
         <p:spPr>
           <a:xfrm>
-            <a:off x="685800" y="1143000"/>
-            <a:ext cx="10817352" cy="25400"/>
+            <a:off x="685800" y="502920"/>
+            <a:ext cx="36576" cy="658368"/>
           </a:xfrm>
           <a:prstGeom prst="rect">
             <a:avLst/>
@@ -5462,33 +6788,295 @@
           </a:p>
         </p:txBody>
       </p:sp>
-      <p:pic>
-        <p:nvPicPr>
-          <p:cNvPr id="7" name="Picture 6" descr="image.png"/>
-          <p:cNvPicPr>
-            <a:picLocks noChangeAspect="1"/>
-          </p:cNvPicPr>
+      <p:sp>
+        <p:nvSpPr>
+          <p:cNvPr id="7" name="TextBox 6"/>
+          <p:cNvSpPr txBox="1"/>
           <p:nvPr/>
-        </p:nvPicPr>
-        <p:blipFill>
-          <a:blip r:embed="rId2"/>
-          <a:stretch>
-            <a:fillRect/>
-          </a:stretch>
-        </p:blipFill>
-        <p:spPr>
-          <a:xfrm>
-            <a:off x="2554863" y="1325880"/>
-            <a:ext cx="7079225" cy="4937760"/>
-          </a:xfrm>
-          <a:prstGeom prst="rect">
-            <a:avLst/>
-          </a:prstGeom>
-        </p:spPr>
-      </p:pic>
-      <p:sp>
-        <p:nvSpPr>
-          <p:cNvPr id="8" name="Rectangle 7"/>
+        </p:nvSpPr>
+        <p:spPr>
+          <a:xfrm>
+            <a:off x="813816" y="502920"/>
+            <a:ext cx="10634472" cy="685800"/>
+          </a:xfrm>
+          <a:prstGeom prst="rect">
+            <a:avLst/>
+          </a:prstGeom>
+          <a:noFill/>
+        </p:spPr>
+        <p:txBody>
+          <a:bodyPr wrap="square">
+            <a:spAutoFit/>
+          </a:bodyPr>
+          <a:lstStyle/>
+          <a:p>
+            <a:pPr algn="l"/>
+            <a:r>
+              <a:rPr sz="2400" b="1" i="0">
+                <a:solidFill>
+                  <a:srgbClr val="1F2C56"/>
+                </a:solidFill>
+                <a:latin typeface="Source Serif 4"/>
+              </a:rPr>
+              <a:t>Theorie-Input 1: Kundentypologie der Immobilienfinanzierung</a:t>
+            </a:r>
+          </a:p>
+        </p:txBody>
+      </p:sp>
+      <p:sp>
+        <p:nvSpPr>
+          <p:cNvPr id="8" name="TextBox 7"/>
+          <p:cNvSpPr txBox="1"/>
+          <p:nvPr/>
+        </p:nvSpPr>
+        <p:spPr>
+          <a:xfrm>
+            <a:off x="685800" y="1417320"/>
+            <a:ext cx="10817352" cy="5029200"/>
+          </a:xfrm>
+          <a:prstGeom prst="rect">
+            <a:avLst/>
+          </a:prstGeom>
+          <a:noFill/>
+        </p:spPr>
+        <p:txBody>
+          <a:bodyPr wrap="square">
+            <a:spAutoFit/>
+          </a:bodyPr>
+          <a:lstStyle/>
+          <a:p>
+            <a:pPr>
+              <a:spcBef>
+                <a:spcPts val="1000"/>
+              </a:spcBef>
+              <a:spcAft>
+                <a:spcPts val="200"/>
+              </a:spcAft>
+            </a:pPr>
+            <a:r>
+              <a:rPr sz="800" b="1">
+                <a:solidFill>
+                  <a:srgbClr val="78808C"/>
+                </a:solidFill>
+                <a:latin typeface="JetBrains Mono"/>
+              </a:rPr>
+              <a:t>DREI GRUNDTYPEN – DREI RISIKOLANDSCHAFTEN</a:t>
+            </a:r>
+          </a:p>
+          <a:p>
+            <a:pPr>
+              <a:spcBef>
+                <a:spcPts val="400"/>
+              </a:spcBef>
+              <a:spcAft>
+                <a:spcPts val="200"/>
+              </a:spcAft>
+            </a:pPr>
+            <a:r>
+              <a:rPr sz="1200">
+                <a:solidFill>
+                  <a:srgbClr val="3D5466"/>
+                </a:solidFill>
+                <a:latin typeface="Arial"/>
+              </a:rPr>
+              <a:t>Typ 1: Bestandshalter</a:t>
+            </a:r>
+          </a:p>
+          <a:p>
+            <a:pPr>
+              <a:spcBef>
+                <a:spcPts val="400"/>
+              </a:spcBef>
+              <a:spcAft>
+                <a:spcPts val="200"/>
+              </a:spcAft>
+            </a:pPr>
+            <a:r>
+              <a:rPr sz="1300">
+                <a:solidFill>
+                  <a:srgbClr val="3D5466"/>
+                </a:solidFill>
+                <a:latin typeface="Arial"/>
+              </a:rPr>
+              <a:t>▸  Cashflow-Struktur: Stabile, planbare Mieteinnahmen – Finanzierungsrisiko hängt primär an Vermietungsstand und Mietzahlungsfähigkeit der Mieter</a:t>
+            </a:r>
+          </a:p>
+          <a:p>
+            <a:pPr>
+              <a:spcBef>
+                <a:spcPts val="400"/>
+              </a:spcBef>
+              <a:spcAft>
+                <a:spcPts val="200"/>
+              </a:spcAft>
+            </a:pPr>
+            <a:r>
+              <a:rPr sz="1300">
+                <a:solidFill>
+                  <a:srgbClr val="3D5466"/>
+                </a:solidFill>
+                <a:latin typeface="Arial"/>
+              </a:rPr>
+              <a:t>▸  Typischer Finanzierungsbedarf: Ankaufsfinanzierung, Refinanzierung, Modernisierungskredite</a:t>
+            </a:r>
+          </a:p>
+          <a:p>
+            <a:pPr>
+              <a:spcBef>
+                <a:spcPts val="400"/>
+              </a:spcBef>
+              <a:spcAft>
+                <a:spcPts val="200"/>
+              </a:spcAft>
+            </a:pPr>
+            <a:r>
+              <a:rPr sz="1300">
+                <a:solidFill>
+                  <a:srgbClr val="3D5466"/>
+                </a:solidFill>
+                <a:latin typeface="Arial"/>
+              </a:rPr>
+              <a:t>▸  Kernkennzahl: DSCR (Debt Service Coverage Ratio) – können die Mieteinnahmen den Kapitaldienst dauerhaft abdecken?</a:t>
+            </a:r>
+          </a:p>
+          <a:p>
+            <a:pPr>
+              <a:spcBef>
+                <a:spcPts val="400"/>
+              </a:spcBef>
+              <a:spcAft>
+                <a:spcPts val="200"/>
+              </a:spcAft>
+            </a:pPr>
+            <a:r>
+              <a:rPr sz="1300">
+                <a:solidFill>
+                  <a:srgbClr val="3D5466"/>
+                </a:solidFill>
+                <a:latin typeface="Arial"/>
+              </a:rPr>
+              <a:t>▸  Hauptrisiko: Leerstandsrisiko, Mieterbonitätsrisiko, Instandhaltungsstau</a:t>
+            </a:r>
+          </a:p>
+          <a:p>
+            <a:pPr>
+              <a:spcBef>
+                <a:spcPts val="400"/>
+              </a:spcBef>
+              <a:spcAft>
+                <a:spcPts val="200"/>
+              </a:spcAft>
+            </a:pPr>
+            <a:r>
+              <a:rPr sz="1200">
+                <a:solidFill>
+                  <a:srgbClr val="3D5466"/>
+                </a:solidFill>
+                <a:latin typeface="Arial"/>
+              </a:rPr>
+              <a:t>Typ 2: Bauträger</a:t>
+            </a:r>
+          </a:p>
+          <a:p>
+            <a:pPr>
+              <a:spcBef>
+                <a:spcPts val="400"/>
+              </a:spcBef>
+              <a:spcAft>
+                <a:spcPts val="200"/>
+              </a:spcAft>
+            </a:pPr>
+            <a:r>
+              <a:rPr sz="1300">
+                <a:solidFill>
+                  <a:srgbClr val="3D5466"/>
+                </a:solidFill>
+                <a:latin typeface="Arial"/>
+              </a:rPr>
+              <a:t>▸  Cashflow-Struktur: Kein laufender Miet-Cashflow – Rückfluss ausschließlich aus Verkaufserlösen nach Fertigstellung. Das Kapital ist bis zum Verkauf vollständig gebunden.</a:t>
+            </a:r>
+          </a:p>
+          <a:p>
+            <a:pPr>
+              <a:spcBef>
+                <a:spcPts val="400"/>
+              </a:spcBef>
+              <a:spcAft>
+                <a:spcPts val="200"/>
+              </a:spcAft>
+            </a:pPr>
+            <a:r>
+              <a:rPr sz="1300">
+                <a:solidFill>
+                  <a:srgbClr val="3D5466"/>
+                </a:solidFill>
+                <a:latin typeface="Arial"/>
+              </a:rPr>
+              <a:t>▸  Typischer Finanzierungsbedarf: Kurzfristige Bauträgerfinanzierung (Laufzeit 18–36 Monate), strukturiert nach Baufortschritt</a:t>
+            </a:r>
+          </a:p>
+          <a:p>
+            <a:pPr>
+              <a:spcBef>
+                <a:spcPts val="400"/>
+              </a:spcBef>
+              <a:spcAft>
+                <a:spcPts val="200"/>
+              </a:spcAft>
+            </a:pPr>
+            <a:r>
+              <a:rPr sz="1300">
+                <a:solidFill>
+                  <a:srgbClr val="3D5466"/>
+                </a:solidFill>
+                <a:latin typeface="Arial"/>
+              </a:rPr>
+              <a:t>▸  Kernkennzahl: LTV (Loan-to-Value) bezogen auf prognostizierte Verkaufserlöse; Vorverkaufsquote</a:t>
+            </a:r>
+          </a:p>
+          <a:p>
+            <a:pPr>
+              <a:spcBef>
+                <a:spcPts val="400"/>
+              </a:spcBef>
+              <a:spcAft>
+                <a:spcPts val="200"/>
+              </a:spcAft>
+            </a:pPr>
+            <a:r>
+              <a:rPr sz="1300">
+                <a:solidFill>
+                  <a:srgbClr val="3D5466"/>
+                </a:solidFill>
+                <a:latin typeface="Arial"/>
+              </a:rPr>
+              <a:t>▸  Hauptrisiko: Fertigstellungsrisiko, Absatzrisiko, Kostenüberschreitungen</a:t>
+            </a:r>
+          </a:p>
+          <a:p>
+            <a:pPr>
+              <a:spcBef>
+                <a:spcPts val="400"/>
+              </a:spcBef>
+              <a:spcAft>
+                <a:spcPts val="200"/>
+              </a:spcAft>
+            </a:pPr>
+            <a:r>
+              <a:rPr sz="1200">
+                <a:solidFill>
+                  <a:srgbClr val="3D5466"/>
+                </a:solidFill>
+                <a:latin typeface="Arial"/>
+              </a:rPr>
+              <a:t>Typ 3: Projektentwickler</a:t>
+            </a:r>
+          </a:p>
+        </p:txBody>
+      </p:sp>
+      <p:sp>
+        <p:nvSpPr>
+          <p:cNvPr id="9" name="Rectangle 8"/>
           <p:cNvSpPr/>
           <p:nvPr/>
         </p:nvSpPr>
@@ -5531,7 +7119,7 @@
       </p:sp>
       <p:sp>
         <p:nvSpPr>
-          <p:cNvPr id="9" name="TextBox 8"/>
+          <p:cNvPr id="10" name="TextBox 9"/>
           <p:cNvSpPr txBox="1"/>
           <p:nvPr/>
         </p:nvSpPr>
@@ -5560,41 +7148,6 @@
                 <a:latin typeface="JetBrains Mono"/>
               </a:rPr>
               <a:t>Benedikt Zoller Coaching  ·  FKB Campus  ·  M08</a:t>
-            </a:r>
-          </a:p>
-        </p:txBody>
-      </p:sp>
-      <p:sp>
-        <p:nvSpPr>
-          <p:cNvPr id="10" name="TextBox 9"/>
-          <p:cNvSpPr txBox="1"/>
-          <p:nvPr/>
-        </p:nvSpPr>
-        <p:spPr>
-          <a:xfrm>
-            <a:off x="7176211" y="6583680"/>
-            <a:ext cx="4326940" cy="256032"/>
-          </a:xfrm>
-          <a:prstGeom prst="rect">
-            <a:avLst/>
-          </a:prstGeom>
-          <a:noFill/>
-        </p:spPr>
-        <p:txBody>
-          <a:bodyPr wrap="none">
-            <a:spAutoFit/>
-          </a:bodyPr>
-          <a:lstStyle/>
-          <a:p>
-            <a:pPr algn="r"/>
-            <a:r>
-              <a:rPr sz="700">
-                <a:solidFill>
-                  <a:srgbClr val="A0B4D2"/>
-                </a:solidFill>
-                <a:latin typeface="JetBrains Mono"/>
-              </a:rPr>
-              <a:t>Schaubild</a:t>
             </a:r>
           </a:p>
         </p:txBody>
@@ -5632,7 +7185,7 @@
             <a:avLst/>
           </a:prstGeom>
           <a:solidFill>
-            <a:srgbClr val="EDEDF3"/>
+            <a:srgbClr val="FFFFFF"/>
           </a:solidFill>
           <a:ln>
             <a:noFill/>
@@ -5733,51 +7286,43 @@
                 </a:solidFill>
                 <a:latin typeface="JetBrains Mono"/>
               </a:rPr>
-              <a:t>M08  ·  INHALT</a:t>
-            </a:r>
-          </a:p>
-        </p:txBody>
-      </p:sp>
-      <p:sp>
-        <p:nvSpPr>
-          <p:cNvPr id="5" name="Rectangle 4"/>
-          <p:cNvSpPr/>
+              <a:t>M08  ·  SCHAUBILD</a:t>
+            </a:r>
+          </a:p>
+        </p:txBody>
+      </p:sp>
+      <p:sp>
+        <p:nvSpPr>
+          <p:cNvPr id="5" name="TextBox 4"/>
+          <p:cNvSpPr txBox="1"/>
           <p:nvPr/>
         </p:nvSpPr>
         <p:spPr>
           <a:xfrm>
-            <a:off x="0" y="1234440"/>
-            <a:ext cx="12188952" cy="12700"/>
-          </a:xfrm>
-          <a:prstGeom prst="rect">
-            <a:avLst/>
-          </a:prstGeom>
-          <a:solidFill>
-            <a:srgbClr val="D8DFE4"/>
-          </a:solidFill>
-          <a:ln>
-            <a:noFill/>
-          </a:ln>
-        </p:spPr>
-        <p:style>
-          <a:lnRef idx="1">
-            <a:schemeClr val="accent1"/>
-          </a:lnRef>
-          <a:fillRef idx="3">
-            <a:schemeClr val="accent1"/>
-          </a:fillRef>
-          <a:effectRef idx="2">
-            <a:schemeClr val="accent1"/>
-          </a:effectRef>
-          <a:fontRef idx="minor">
-            <a:schemeClr val="lt1"/>
-          </a:fontRef>
-        </p:style>
-        <p:txBody>
-          <a:bodyPr rtlCol="0" anchor="ctr"/>
-          <a:lstStyle/>
-          <a:p>
-            <a:pPr algn="ctr"/>
+            <a:off x="685800" y="502920"/>
+            <a:ext cx="10817352" cy="594360"/>
+          </a:xfrm>
+          <a:prstGeom prst="rect">
+            <a:avLst/>
+          </a:prstGeom>
+          <a:noFill/>
+        </p:spPr>
+        <p:txBody>
+          <a:bodyPr wrap="square">
+            <a:spAutoFit/>
+          </a:bodyPr>
+          <a:lstStyle/>
+          <a:p>
+            <a:pPr algn="l"/>
+            <a:r>
+              <a:rPr sz="2000" b="1" i="0">
+                <a:solidFill>
+                  <a:srgbClr val="1F2C56"/>
+                </a:solidFill>
+                <a:latin typeface="Source Serif 4"/>
+              </a:rPr>
+              <a:t>Drei Immobilien-Typologien im Vergleich</a:t>
+            </a:r>
           </a:p>
         </p:txBody>
       </p:sp>
@@ -5789,8 +7334,8 @@
         </p:nvSpPr>
         <p:spPr>
           <a:xfrm>
-            <a:off x="685800" y="502920"/>
-            <a:ext cx="36576" cy="658368"/>
+            <a:off x="685800" y="1143000"/>
+            <a:ext cx="10817352" cy="25400"/>
           </a:xfrm>
           <a:prstGeom prst="rect">
             <a:avLst/>
@@ -5824,295 +7369,33 @@
           </a:p>
         </p:txBody>
       </p:sp>
-      <p:sp>
-        <p:nvSpPr>
-          <p:cNvPr id="7" name="TextBox 6"/>
-          <p:cNvSpPr txBox="1"/>
+      <p:pic>
+        <p:nvPicPr>
+          <p:cNvPr id="7" name="Picture 6" descr="image.png"/>
+          <p:cNvPicPr>
+            <a:picLocks noChangeAspect="1"/>
+          </p:cNvPicPr>
           <p:nvPr/>
-        </p:nvSpPr>
-        <p:spPr>
-          <a:xfrm>
-            <a:off x="813816" y="502920"/>
-            <a:ext cx="10634472" cy="685800"/>
-          </a:xfrm>
-          <a:prstGeom prst="rect">
-            <a:avLst/>
-          </a:prstGeom>
-          <a:noFill/>
-        </p:spPr>
-        <p:txBody>
-          <a:bodyPr wrap="square">
-            <a:spAutoFit/>
-          </a:bodyPr>
-          <a:lstStyle/>
-          <a:p>
-            <a:pPr algn="l"/>
-            <a:r>
-              <a:rPr sz="2400" b="1" i="0">
-                <a:solidFill>
-                  <a:srgbClr val="1F2C56"/>
-                </a:solidFill>
-                <a:latin typeface="Source Serif 4"/>
-              </a:rPr>
-              <a:t>Theorie-Input 2: Beleihungswertermittlung nach BelWertV</a:t>
-            </a:r>
-          </a:p>
-        </p:txBody>
-      </p:sp>
-      <p:sp>
-        <p:nvSpPr>
-          <p:cNvPr id="8" name="TextBox 7"/>
-          <p:cNvSpPr txBox="1"/>
-          <p:nvPr/>
-        </p:nvSpPr>
-        <p:spPr>
-          <a:xfrm>
-            <a:off x="685800" y="1417320"/>
-            <a:ext cx="10817352" cy="5029200"/>
-          </a:xfrm>
-          <a:prstGeom prst="rect">
-            <a:avLst/>
-          </a:prstGeom>
-          <a:noFill/>
-        </p:spPr>
-        <p:txBody>
-          <a:bodyPr wrap="square">
-            <a:spAutoFit/>
-          </a:bodyPr>
-          <a:lstStyle/>
-          <a:p>
-            <a:pPr>
-              <a:spcBef>
-                <a:spcPts val="1000"/>
-              </a:spcBef>
-              <a:spcAft>
-                <a:spcPts val="200"/>
-              </a:spcAft>
-            </a:pPr>
-            <a:r>
-              <a:rPr sz="800" b="1">
-                <a:solidFill>
-                  <a:srgbClr val="78808C"/>
-                </a:solidFill>
-                <a:latin typeface="JetBrains Mono"/>
-              </a:rPr>
-              <a:t>WARUM DER BELEIHUNGSWERT KEIN MARKTWERT IST</a:t>
-            </a:r>
-          </a:p>
-          <a:p>
-            <a:pPr>
-              <a:spcBef>
-                <a:spcPts val="1000"/>
-              </a:spcBef>
-              <a:spcAft>
-                <a:spcPts val="200"/>
-              </a:spcAft>
-            </a:pPr>
-            <a:r>
-              <a:rPr sz="800" b="1">
-                <a:solidFill>
-                  <a:srgbClr val="78808C"/>
-                </a:solidFill>
-                <a:latin typeface="JetBrains Mono"/>
-              </a:rPr>
-              <a:t>DIE ZWEI HAUPTMETHODEN (§§ 8–17 BELWERTV)</a:t>
-            </a:r>
-          </a:p>
-          <a:p>
-            <a:pPr>
-              <a:spcBef>
-                <a:spcPts val="400"/>
-              </a:spcBef>
-              <a:spcAft>
-                <a:spcPts val="200"/>
-              </a:spcAft>
-            </a:pPr>
-            <a:r>
-              <a:rPr sz="1200">
-                <a:solidFill>
-                  <a:srgbClr val="3D5466"/>
-                </a:solidFill>
-                <a:latin typeface="Arial"/>
-              </a:rPr>
-              <a:t>Methode 1: Ertragswertverfahren (bei vermieteten Objekten)</a:t>
-            </a:r>
-          </a:p>
-          <a:p>
-            <a:pPr>
-              <a:spcBef>
-                <a:spcPts val="400"/>
-              </a:spcBef>
-              <a:spcAft>
-                <a:spcPts val="200"/>
-              </a:spcAft>
-            </a:pPr>
-            <a:r>
-              <a:rPr sz="1200">
-                <a:solidFill>
-                  <a:srgbClr val="3D5466"/>
-                </a:solidFill>
-                <a:latin typeface="Arial"/>
-              </a:rPr>
-              <a:t>Anwendung: Wohnimmobilien mit mehreren Einheiten, Gewerbeimmobilien, Bestandsobjekte mit Miethistorie.</a:t>
-            </a:r>
-          </a:p>
-          <a:p>
-            <a:pPr>
-              <a:spcBef>
-                <a:spcPts val="400"/>
-              </a:spcBef>
-              <a:spcAft>
-                <a:spcPts val="200"/>
-              </a:spcAft>
-            </a:pPr>
-            <a:r>
-              <a:rPr sz="1200">
-                <a:solidFill>
-                  <a:srgbClr val="3D5466"/>
-                </a:solidFill>
-                <a:latin typeface="Arial"/>
-              </a:rPr>
-              <a:t>Berechnung (vereinfacht):</a:t>
-            </a:r>
-          </a:p>
-          <a:p>
-            <a:pPr>
-              <a:spcBef>
-                <a:spcPts val="400"/>
-              </a:spcBef>
-              <a:spcAft>
-                <a:spcPts val="200"/>
-              </a:spcAft>
-            </a:pPr>
-            <a:r>
-              <a:rPr sz="1300">
-                <a:solidFill>
-                  <a:srgbClr val="3D5466"/>
-                </a:solidFill>
-                <a:latin typeface="Arial"/>
-              </a:rPr>
-              <a:t>▸  Rohertrag: Jahresmiete (nachhaltig erzielbar, kein vorübergehender Leerstand)</a:t>
-            </a:r>
-          </a:p>
-          <a:p>
-            <a:pPr>
-              <a:spcBef>
-                <a:spcPts val="400"/>
-              </a:spcBef>
-              <a:spcAft>
-                <a:spcPts val="200"/>
-              </a:spcAft>
-            </a:pPr>
-            <a:r>
-              <a:rPr sz="1300">
-                <a:solidFill>
-                  <a:srgbClr val="3D5466"/>
-                </a:solidFill>
-                <a:latin typeface="Arial"/>
-              </a:rPr>
-              <a:t>▸  Bewirtschaftungskosten: Verwaltung, Instandhaltung, Mietausfall (pauschal 20–25 % je nach Nutzungsart)</a:t>
-            </a:r>
-          </a:p>
-          <a:p>
-            <a:pPr>
-              <a:spcBef>
-                <a:spcPts val="400"/>
-              </a:spcBef>
-              <a:spcAft>
-                <a:spcPts val="200"/>
-              </a:spcAft>
-            </a:pPr>
-            <a:r>
-              <a:rPr sz="1300">
-                <a:solidFill>
-                  <a:srgbClr val="3D5466"/>
-                </a:solidFill>
-                <a:latin typeface="Arial"/>
-              </a:rPr>
-              <a:t>▸  Reinertrag = Rohertrag − Bewirtschaftungskosten</a:t>
-            </a:r>
-          </a:p>
-          <a:p>
-            <a:pPr>
-              <a:spcBef>
-                <a:spcPts val="400"/>
-              </a:spcBef>
-              <a:spcAft>
-                <a:spcPts val="200"/>
-              </a:spcAft>
-            </a:pPr>
-            <a:r>
-              <a:rPr sz="1300">
-                <a:solidFill>
-                  <a:srgbClr val="3D5466"/>
-                </a:solidFill>
-                <a:latin typeface="Arial"/>
-              </a:rPr>
-              <a:t>▸  Bodenwert: Nachhaltiger Bodenrichtwert × Fläche</a:t>
-            </a:r>
-          </a:p>
-          <a:p>
-            <a:pPr>
-              <a:spcBef>
-                <a:spcPts val="400"/>
-              </a:spcBef>
-              <a:spcAft>
-                <a:spcPts val="200"/>
-              </a:spcAft>
-            </a:pPr>
-            <a:r>
-              <a:rPr sz="1300">
-                <a:solidFill>
-                  <a:srgbClr val="3D5466"/>
-                </a:solidFill>
-                <a:latin typeface="Arial"/>
-              </a:rPr>
-              <a:t>▸  Gebäudeertragswert = Reinertrag − Bodenwertverzinsung (Liegenschaftszins × Bodenwert), kapitalisiert mit dem Liegenschaftszins über Restnutzungsdauer</a:t>
-            </a:r>
-          </a:p>
-          <a:p>
-            <a:pPr>
-              <a:spcBef>
-                <a:spcPts val="400"/>
-              </a:spcBef>
-              <a:spcAft>
-                <a:spcPts val="200"/>
-              </a:spcAft>
-            </a:pPr>
-            <a:r>
-              <a:rPr sz="1300">
-                <a:solidFill>
-                  <a:srgbClr val="3D5466"/>
-                </a:solidFill>
-                <a:latin typeface="Arial"/>
-              </a:rPr>
-              <a:t>▸  Ertragswert = Gebäudeertragswert + Bodenwert</a:t>
-            </a:r>
-          </a:p>
-          <a:p>
-            <a:pPr>
-              <a:spcBef>
-                <a:spcPts val="400"/>
-              </a:spcBef>
-              <a:spcAft>
-                <a:spcPts val="200"/>
-              </a:spcAft>
-            </a:pPr>
-            <a:r>
-              <a:rPr sz="1300">
-                <a:solidFill>
-                  <a:srgbClr val="3D5466"/>
-                </a:solidFill>
-                <a:latin typeface="Arial"/>
-              </a:rPr>
-              <a:t>▸  Beleihungswert: Sicherheitsabschlag auf den Ertragswert (§ 12 BelWertV, max. 10 % vom nachhaltigen Wert)</a:t>
-            </a:r>
-          </a:p>
-        </p:txBody>
-      </p:sp>
-      <p:sp>
-        <p:nvSpPr>
-          <p:cNvPr id="9" name="Rectangle 8"/>
+        </p:nvPicPr>
+        <p:blipFill>
+          <a:blip r:embed="rId2"/>
+          <a:stretch>
+            <a:fillRect/>
+          </a:stretch>
+        </p:blipFill>
+        <p:spPr>
+          <a:xfrm>
+            <a:off x="2554863" y="1325880"/>
+            <a:ext cx="7079225" cy="4937760"/>
+          </a:xfrm>
+          <a:prstGeom prst="rect">
+            <a:avLst/>
+          </a:prstGeom>
+        </p:spPr>
+      </p:pic>
+      <p:sp>
+        <p:nvSpPr>
+          <p:cNvPr id="8" name="Rectangle 7"/>
           <p:cNvSpPr/>
           <p:nvPr/>
         </p:nvSpPr>
@@ -6155,14 +7438,49 @@
       </p:sp>
       <p:sp>
         <p:nvSpPr>
+          <p:cNvPr id="9" name="TextBox 8"/>
+          <p:cNvSpPr txBox="1"/>
+          <p:nvPr/>
+        </p:nvSpPr>
+        <p:spPr>
+          <a:xfrm>
+            <a:off x="685800" y="6583680"/>
+            <a:ext cx="6490411" cy="256032"/>
+          </a:xfrm>
+          <a:prstGeom prst="rect">
+            <a:avLst/>
+          </a:prstGeom>
+          <a:noFill/>
+        </p:spPr>
+        <p:txBody>
+          <a:bodyPr wrap="none">
+            <a:spAutoFit/>
+          </a:bodyPr>
+          <a:lstStyle/>
+          <a:p>
+            <a:pPr algn="l"/>
+            <a:r>
+              <a:rPr sz="700">
+                <a:solidFill>
+                  <a:srgbClr val="A0B4D2"/>
+                </a:solidFill>
+                <a:latin typeface="JetBrains Mono"/>
+              </a:rPr>
+              <a:t>Benedikt Zoller Coaching  ·  FKB Campus  ·  M08</a:t>
+            </a:r>
+          </a:p>
+        </p:txBody>
+      </p:sp>
+      <p:sp>
+        <p:nvSpPr>
           <p:cNvPr id="10" name="TextBox 9"/>
           <p:cNvSpPr txBox="1"/>
           <p:nvPr/>
         </p:nvSpPr>
         <p:spPr>
           <a:xfrm>
-            <a:off x="685800" y="6583680"/>
-            <a:ext cx="6490411" cy="256032"/>
+            <a:off x="7176211" y="6583680"/>
+            <a:ext cx="4326940" cy="256032"/>
           </a:xfrm>
           <a:prstGeom prst="rect">
             <a:avLst/>
@@ -6175,7 +7493,7 @@
           </a:bodyPr>
           <a:lstStyle/>
           <a:p>
-            <a:pPr algn="l"/>
+            <a:pPr algn="r"/>
             <a:r>
               <a:rPr sz="700">
                 <a:solidFill>
@@ -6183,7 +7501,7 @@
                 </a:solidFill>
                 <a:latin typeface="JetBrains Mono"/>
               </a:rPr>
-              <a:t>Benedikt Zoller Coaching  ·  FKB Campus  ·  M08</a:t>
+              <a:t>Schaubild</a:t>
             </a:r>
           </a:p>
         </p:txBody>
@@ -6443,7 +7761,7 @@
                 </a:solidFill>
                 <a:latin typeface="Source Serif 4"/>
               </a:rPr>
-              <a:t>Theorie-Input 3: Kennzahlen der Immobilien- und Projektfinanzierung</a:t>
+              <a:t>Theorie-Input 2: Beleihungswertermittlung nach BelWertV</a:t>
             </a:r>
           </a:p>
         </p:txBody>
@@ -6485,7 +7803,26 @@
                 </a:solidFill>
                 <a:latin typeface="JetBrains Mono"/>
               </a:rPr>
-              <a:t>DIE VIER SCHLÜSSELKENNZAHLEN IM ÜBERBLICK</a:t>
+              <a:t>WARUM DER BELEIHUNGSWERT KEIN MARKTWERT IST</a:t>
+            </a:r>
+          </a:p>
+          <a:p>
+            <a:pPr>
+              <a:spcBef>
+                <a:spcPts val="1000"/>
+              </a:spcBef>
+              <a:spcAft>
+                <a:spcPts val="200"/>
+              </a:spcAft>
+            </a:pPr>
+            <a:r>
+              <a:rPr sz="800" b="1">
+                <a:solidFill>
+                  <a:srgbClr val="78808C"/>
+                </a:solidFill>
+                <a:latin typeface="JetBrains Mono"/>
+              </a:rPr>
+              <a:t>DIE ZWEI HAUPTMETHODEN (§§ 8–17 BELWERTV)</a:t>
             </a:r>
           </a:p>
           <a:p>
@@ -6504,7 +7841,7 @@
                 </a:solidFill>
                 <a:latin typeface="Arial"/>
               </a:rPr>
-              <a:t>1. LTV – Loan-to-Value (Beleihungsauslauf)</a:t>
+              <a:t>Methode 1: Ertragswertverfahren (bei vermieteten Objekten)</a:t>
             </a:r>
           </a:p>
           <a:p>
@@ -6523,7 +7860,7 @@
                 </a:solidFill>
                 <a:latin typeface="Arial"/>
               </a:rPr>
-              <a:t>Der LTV misst, wie hoch der Kredit im Verhältnis zum Immobilienwert ist. Die Bezugsgröße ist je nach Kundentypologie unterschiedlich – diese Unterscheidung ist in der Kreditpraxis zwingend anzugeben:</a:t>
+              <a:t>Anwendung: Wohnimmobilien mit mehreren Einheiten, Gewerbeimmobilien, Bestandsobjekte mit Miethistorie.</a:t>
             </a:r>
           </a:p>
           <a:p>
@@ -6542,26 +7879,7 @@
                 </a:solidFill>
                 <a:latin typeface="Arial"/>
               </a:rPr>
-              <a:t>Bei Bauträgerprojekten gilt als Richtwert: LTV ≤ 65–70 % des GDV (enger als bei Bestandshaltern, da GDV zum Zeitpunkt der Kreditvergabe erst prognostiziert ist; vgl. Gondring, 2022 ).</a:t>
-            </a:r>
-          </a:p>
-          <a:p>
-            <a:pPr>
-              <a:spcBef>
-                <a:spcPts val="1000"/>
-              </a:spcBef>
-              <a:spcAft>
-                <a:spcPts val="200"/>
-              </a:spcAft>
-            </a:pPr>
-            <a:r>
-              <a:rPr sz="800" b="1">
-                <a:solidFill>
-                  <a:srgbClr val="78808C"/>
-                </a:solidFill>
-                <a:latin typeface="JetBrains Mono"/>
-              </a:rPr>
-              <a:t>VERBUNDPARTNER-ÜBERSICHT IMMOBILIENFINANZIERUNG</a:t>
+              <a:t>Berechnung (vereinfacht):</a:t>
             </a:r>
           </a:p>
           <a:p>
@@ -6574,13 +7892,13 @@
               </a:spcAft>
             </a:pPr>
             <a:r>
-              <a:rPr sz="1200">
+              <a:rPr sz="1300">
                 <a:solidFill>
                   <a:srgbClr val="3D5466"/>
                 </a:solidFill>
                 <a:latin typeface="Arial"/>
               </a:rPr>
-              <a:t>2. DSCR – Debt Service Coverage Ratio (Kapitaldienst-Deckungsgrad)</a:t>
+              <a:t>▸  Rohertrag: Jahresmiete (nachhaltig erzielbar, kein vorübergehender Leerstand)</a:t>
             </a:r>
           </a:p>
           <a:p>
@@ -6593,13 +7911,13 @@
               </a:spcAft>
             </a:pPr>
             <a:r>
-              <a:rPr sz="1200">
+              <a:rPr sz="1300">
                 <a:solidFill>
                   <a:srgbClr val="3D5466"/>
                 </a:solidFill>
                 <a:latin typeface="Arial"/>
               </a:rPr>
-              <a:t>DSCR = Netto-Mieteinnahmen (NOI) / Jährlicher Kapitaldienst (Zins + Tilgung)</a:t>
+              <a:t>▸  Bewirtschaftungskosten: Verwaltung, Instandhaltung, Mietausfall (pauschal 20–25 % je nach Nutzungsart)</a:t>
             </a:r>
           </a:p>
           <a:p>
@@ -6612,13 +7930,13 @@
               </a:spcAft>
             </a:pPr>
             <a:r>
-              <a:rPr sz="1200">
+              <a:rPr sz="1300">
                 <a:solidFill>
                   <a:srgbClr val="3D5466"/>
                 </a:solidFill>
                 <a:latin typeface="Arial"/>
               </a:rPr>
-              <a:t>Der DSCR misst, ob die laufenden Mieteinnahmen ausreichen, um Zins und Tilgung zu bedienen. Anwendung primär bei Bestandshaltern (vgl. Gondring, 2022, S. 512 ).</a:t>
+              <a:t>▸  Reinertrag = Rohertrag − Bewirtschaftungskosten</a:t>
             </a:r>
           </a:p>
           <a:p>
@@ -6637,7 +7955,7 @@
                 </a:solidFill>
                 <a:latin typeface="Arial"/>
               </a:rPr>
-              <a:t>▸  DSCR &gt; 1,25: Solide – ausreichender Puffer für Mietausfälle und Kostensteigerungen</a:t>
+              <a:t>▸  Bodenwert: Nachhaltiger Bodenrichtwert × Fläche</a:t>
             </a:r>
           </a:p>
           <a:p>
@@ -6656,7 +7974,7 @@
                 </a:solidFill>
                 <a:latin typeface="Arial"/>
               </a:rPr>
-              <a:t>▸  DSCR 1,10–1,25: Vertretbar – wenig Puffer, Nebenabsprachen empfehlenswert</a:t>
+              <a:t>▸  Gebäudeertragswert = Reinertrag − Bodenwertverzinsung (Liegenschaftszins × Bodenwert), kapitalisiert mit dem Liegenschaftszins über Restnutzungsdauer</a:t>
             </a:r>
           </a:p>
           <a:p>
@@ -6675,7 +7993,7 @@
                 </a:solidFill>
                 <a:latin typeface="Arial"/>
               </a:rPr>
-              <a:t>▸  DSCR &lt; 1,10: Kritisch – Kapitaldienst kaum gedeckt, erhöhtes Ausfallrisiko</a:t>
+              <a:t>▸  Ertragswert = Gebäudeertragswert + Bodenwert</a:t>
             </a:r>
           </a:p>
           <a:p>
@@ -6688,13 +8006,13 @@
               </a:spcAft>
             </a:pPr>
             <a:r>
-              <a:rPr sz="1200">
+              <a:rPr sz="1300">
                 <a:solidFill>
                   <a:srgbClr val="3D5466"/>
                 </a:solidFill>
                 <a:latin typeface="Arial"/>
               </a:rPr>
-              <a:t>Prolongationsrisiko bei Bestandshaltern (Zinsänderungsrisiko bei Zinsbindungsablauf)</a:t>
+              <a:t>▸  Beleihungswert: Sicherheitsabschlag auf den Ertragswert (§ 12 BelWertV, max. 10 % vom nachhaltigen Wert)</a:t>
             </a:r>
           </a:p>
         </p:txBody>
@@ -7032,7 +8350,7 @@
                 </a:solidFill>
                 <a:latin typeface="Source Serif 4"/>
               </a:rPr>
-              <a:t>Theorie-Input 4: Risikofelder der Bauträgerfinanzierung</a:t>
+              <a:t>Theorie-Input 3: Kennzahlen der Immobilien- und Projektfinanzierung</a:t>
             </a:r>
           </a:p>
         </p:txBody>
@@ -7058,6 +8376,25 @@
             <a:spAutoFit/>
           </a:bodyPr>
           <a:lstStyle/>
+          <a:p>
+            <a:pPr>
+              <a:spcBef>
+                <a:spcPts val="1000"/>
+              </a:spcBef>
+              <a:spcAft>
+                <a:spcPts val="200"/>
+              </a:spcAft>
+            </a:pPr>
+            <a:r>
+              <a:rPr sz="800" b="1">
+                <a:solidFill>
+                  <a:srgbClr val="78808C"/>
+                </a:solidFill>
+                <a:latin typeface="JetBrains Mono"/>
+              </a:rPr>
+              <a:t>DIE VIER SCHLÜSSELKENNZAHLEN IM ÜBERBLICK</a:t>
+            </a:r>
+          </a:p>
           <a:p>
             <a:pPr>
               <a:spcBef>
@@ -7074,7 +8411,7 @@
                 </a:solidFill>
                 <a:latin typeface="Arial"/>
               </a:rPr>
-              <a:t>Risikofeld 1: Fertigstellungsrisiko</a:t>
+              <a:t>1. LTV – Loan-to-Value (Beleihungsauslauf)</a:t>
             </a:r>
           </a:p>
           <a:p>
@@ -7093,7 +8430,7 @@
                 </a:solidFill>
                 <a:latin typeface="Arial"/>
               </a:rPr>
-              <a:t>Risikofeld 2: Absatzrisiko</a:t>
+              <a:t>Der LTV misst, wie hoch der Kredit im Verhältnis zum Immobilienwert ist. Die Bezugsgröße ist je nach Kundentypologie unterschiedlich – diese Unterscheidung ist in der Kreditpraxis zwingend anzugeben:</a:t>
             </a:r>
           </a:p>
           <a:p>
@@ -7112,7 +8449,26 @@
                 </a:solidFill>
                 <a:latin typeface="Arial"/>
               </a:rPr>
-              <a:t>Risikominderung: Vorverkaufsquote als Auszahlungsbedingung, konservative Wertansätze (Vergleichspreise statt Optimistik), Vermarktungskonzept des Bauträgers prüfen.</a:t>
+              <a:t>Bei Bauträgerprojekten gilt als Richtwert: LTV ≤ 65–70 % des GDV (enger als bei Bestandshaltern, da GDV zum Zeitpunkt der Kreditvergabe erst prognostiziert ist; vgl. Gondring, 2022 ).</a:t>
+            </a:r>
+          </a:p>
+          <a:p>
+            <a:pPr>
+              <a:spcBef>
+                <a:spcPts val="1000"/>
+              </a:spcBef>
+              <a:spcAft>
+                <a:spcPts val="200"/>
+              </a:spcAft>
+            </a:pPr>
+            <a:r>
+              <a:rPr sz="800" b="1">
+                <a:solidFill>
+                  <a:srgbClr val="78808C"/>
+                </a:solidFill>
+                <a:latin typeface="JetBrains Mono"/>
+              </a:rPr>
+              <a:t>VERBUNDPARTNER-ÜBERSICHT IMMOBILIENFINANZIERUNG</a:t>
             </a:r>
           </a:p>
           <a:p>
@@ -7131,7 +8487,7 @@
                 </a:solidFill>
                 <a:latin typeface="Arial"/>
               </a:rPr>
-              <a:t>Risikofeld 3: Kostenüberschreitungsrisiko</a:t>
+              <a:t>2. DSCR – Debt Service Coverage Ratio (Kapitaldienst-Deckungsgrad)</a:t>
             </a:r>
           </a:p>
           <a:p>
@@ -7150,7 +8506,7 @@
                 </a:solidFill>
                 <a:latin typeface="Arial"/>
               </a:rPr>
-              <a:t>Risikominderung: Festpreisverträge mit dem Generalunternehmer, EK-Puffer (mindestens 20–25 % EK-Quote), Kostenschätzung durch unabhängigen Bausachverständigen prüfen lassen.</a:t>
+              <a:t>DSCR = Netto-Mieteinnahmen (NOI) / Jährlicher Kapitaldienst (Zins + Tilgung)</a:t>
             </a:r>
           </a:p>
           <a:p>
@@ -7169,7 +8525,7 @@
                 </a:solidFill>
                 <a:latin typeface="Arial"/>
               </a:rPr>
-              <a:t>Risikofeld 4a: Sicherheitenstruktur und Grundschuld-Freigabe bei Bauträgerfinanzierungen</a:t>
+              <a:t>Der DSCR misst, ob die laufenden Mieteinnahmen ausreichen, um Zins und Tilgung zu bedienen. Anwendung primär bei Bestandshaltern (vgl. Gondring, 2022, S. 512 ).</a:t>
             </a:r>
           </a:p>
           <a:p>
@@ -7182,13 +8538,13 @@
               </a:spcAft>
             </a:pPr>
             <a:r>
-              <a:rPr sz="1200">
+              <a:rPr sz="1300">
                 <a:solidFill>
                   <a:srgbClr val="3D5466"/>
                 </a:solidFill>
                 <a:latin typeface="Arial"/>
               </a:rPr>
-              <a:t>Ein in der Praxis häufig unterschätztes operatives Thema: Die Grundschuld-Strukturierung und die Freigaberegelung bei Teilverkäufen.</a:t>
+              <a:t>▸  DSCR &gt; 1,25: Solide – ausreichender Puffer für Mietausfälle und Kostensteigerungen</a:t>
             </a:r>
           </a:p>
           <a:p>
@@ -7201,13 +8557,13 @@
               </a:spcAft>
             </a:pPr>
             <a:r>
-              <a:rPr sz="1200">
+              <a:rPr sz="1300">
                 <a:solidFill>
                   <a:srgbClr val="3D5466"/>
                 </a:solidFill>
                 <a:latin typeface="Arial"/>
               </a:rPr>
-              <a:t>Freigaberegelung – typische Bankpraxis:</a:t>
+              <a:t>▸  DSCR 1,10–1,25: Vertretbar – wenig Puffer, Nebenabsprachen empfehlenswert</a:t>
             </a:r>
           </a:p>
           <a:p>
@@ -7220,13 +8576,13 @@
               </a:spcAft>
             </a:pPr>
             <a:r>
-              <a:rPr sz="1200">
+              <a:rPr sz="1300">
                 <a:solidFill>
                   <a:srgbClr val="3D5466"/>
                 </a:solidFill>
                 <a:latin typeface="Arial"/>
               </a:rPr>
-              <a:t>Risikofeld 4: Zinsänderungs- und Laufzeitrisiko</a:t>
+              <a:t>▸  DSCR &lt; 1,10: Kritisch – Kapitaldienst kaum gedeckt, erhöhtes Ausfallrisiko</a:t>
             </a:r>
           </a:p>
           <a:p>
@@ -7245,26 +8601,7 @@
                 </a:solidFill>
                 <a:latin typeface="Arial"/>
               </a:rPr>
-              <a:t>Risikominderung: Zinssicherung (Zinsswap, Cap) für die Bauphase, realistische Zeitplanung mit Puffer, Klauseln bei Laufzeitverlängerung.</a:t>
-            </a:r>
-          </a:p>
-          <a:p>
-            <a:pPr>
-              <a:spcBef>
-                <a:spcPts val="400"/>
-              </a:spcBef>
-              <a:spcAft>
-                <a:spcPts val="200"/>
-              </a:spcAft>
-            </a:pPr>
-            <a:r>
-              <a:rPr sz="1200">
-                <a:solidFill>
-                  <a:srgbClr val="3D5466"/>
-                </a:solidFill>
-                <a:latin typeface="Arial"/>
-              </a:rPr>
-              <a:t>Die folgende Handlungskarte fasst die zentralen Diagnose-Aktion-Muster für die Immobilien- und Projektfinanzierung zusammen:</a:t>
+              <a:t>Prolongationsrisiko bei Bestandshaltern (Zinsänderungsrisiko bei Zinsbindungsablauf)</a:t>
             </a:r>
           </a:p>
         </p:txBody>
@@ -7380,7 +8717,7 @@
             <a:avLst/>
           </a:prstGeom>
           <a:solidFill>
-            <a:srgbClr val="FFFFFF"/>
+            <a:srgbClr val="EDEDF3"/>
           </a:solidFill>
           <a:ln>
             <a:noFill/>
@@ -7481,43 +8818,51 @@
                 </a:solidFill>
                 <a:latin typeface="JetBrains Mono"/>
               </a:rPr>
-              <a:t>M08  ·  SCHAUBILD</a:t>
-            </a:r>
-          </a:p>
-        </p:txBody>
-      </p:sp>
-      <p:sp>
-        <p:nvSpPr>
-          <p:cNvPr id="5" name="TextBox 4"/>
-          <p:cNvSpPr txBox="1"/>
+              <a:t>M08  ·  INHALT</a:t>
+            </a:r>
+          </a:p>
+        </p:txBody>
+      </p:sp>
+      <p:sp>
+        <p:nvSpPr>
+          <p:cNvPr id="5" name="Rectangle 4"/>
+          <p:cNvSpPr/>
           <p:nvPr/>
         </p:nvSpPr>
         <p:spPr>
           <a:xfrm>
-            <a:off x="685800" y="502920"/>
-            <a:ext cx="10817352" cy="594360"/>
-          </a:xfrm>
-          <a:prstGeom prst="rect">
-            <a:avLst/>
-          </a:prstGeom>
-          <a:noFill/>
-        </p:spPr>
-        <p:txBody>
-          <a:bodyPr wrap="square">
-            <a:spAutoFit/>
-          </a:bodyPr>
-          <a:lstStyle/>
-          <a:p>
-            <a:pPr algn="l"/>
-            <a:r>
-              <a:rPr sz="2000" b="1" i="0">
-                <a:solidFill>
-                  <a:srgbClr val="1F2C56"/>
-                </a:solidFill>
-                <a:latin typeface="Source Serif 4"/>
-              </a:rPr>
-              <a:t>Handlungsempfehlung Immobilienfinanzierung</a:t>
-            </a:r>
+            <a:off x="0" y="1234440"/>
+            <a:ext cx="12188952" cy="12700"/>
+          </a:xfrm>
+          <a:prstGeom prst="rect">
+            <a:avLst/>
+          </a:prstGeom>
+          <a:solidFill>
+            <a:srgbClr val="D8DFE4"/>
+          </a:solidFill>
+          <a:ln>
+            <a:noFill/>
+          </a:ln>
+        </p:spPr>
+        <p:style>
+          <a:lnRef idx="1">
+            <a:schemeClr val="accent1"/>
+          </a:lnRef>
+          <a:fillRef idx="3">
+            <a:schemeClr val="accent1"/>
+          </a:fillRef>
+          <a:effectRef idx="2">
+            <a:schemeClr val="accent1"/>
+          </a:effectRef>
+          <a:fontRef idx="minor">
+            <a:schemeClr val="lt1"/>
+          </a:fontRef>
+        </p:style>
+        <p:txBody>
+          <a:bodyPr rtlCol="0" anchor="ctr"/>
+          <a:lstStyle/>
+          <a:p>
+            <a:pPr algn="ctr"/>
           </a:p>
         </p:txBody>
       </p:sp>
@@ -7529,8 +8874,8 @@
         </p:nvSpPr>
         <p:spPr>
           <a:xfrm>
-            <a:off x="685800" y="1143000"/>
-            <a:ext cx="10817352" cy="25400"/>
+            <a:off x="685800" y="502920"/>
+            <a:ext cx="36576" cy="658368"/>
           </a:xfrm>
           <a:prstGeom prst="rect">
             <a:avLst/>
@@ -7564,33 +8909,276 @@
           </a:p>
         </p:txBody>
       </p:sp>
-      <p:pic>
-        <p:nvPicPr>
-          <p:cNvPr id="7" name="Picture 6" descr="image.png"/>
-          <p:cNvPicPr>
-            <a:picLocks noChangeAspect="1"/>
-          </p:cNvPicPr>
+      <p:sp>
+        <p:nvSpPr>
+          <p:cNvPr id="7" name="TextBox 6"/>
+          <p:cNvSpPr txBox="1"/>
           <p:nvPr/>
-        </p:nvPicPr>
-        <p:blipFill>
-          <a:blip r:embed="rId2"/>
-          <a:stretch>
-            <a:fillRect/>
-          </a:stretch>
-        </p:blipFill>
-        <p:spPr>
-          <a:xfrm>
-            <a:off x="2303489" y="1325880"/>
-            <a:ext cx="7581973" cy="4937760"/>
-          </a:xfrm>
-          <a:prstGeom prst="rect">
-            <a:avLst/>
-          </a:prstGeom>
-        </p:spPr>
-      </p:pic>
-      <p:sp>
-        <p:nvSpPr>
-          <p:cNvPr id="8" name="Rectangle 7"/>
+        </p:nvSpPr>
+        <p:spPr>
+          <a:xfrm>
+            <a:off x="813816" y="502920"/>
+            <a:ext cx="10634472" cy="685800"/>
+          </a:xfrm>
+          <a:prstGeom prst="rect">
+            <a:avLst/>
+          </a:prstGeom>
+          <a:noFill/>
+        </p:spPr>
+        <p:txBody>
+          <a:bodyPr wrap="square">
+            <a:spAutoFit/>
+          </a:bodyPr>
+          <a:lstStyle/>
+          <a:p>
+            <a:pPr algn="l"/>
+            <a:r>
+              <a:rPr sz="2400" b="1" i="0">
+                <a:solidFill>
+                  <a:srgbClr val="1F2C56"/>
+                </a:solidFill>
+                <a:latin typeface="Source Serif 4"/>
+              </a:rPr>
+              <a:t>Theorie-Input 4: Risikofelder der Bauträgerfinanzierung</a:t>
+            </a:r>
+          </a:p>
+        </p:txBody>
+      </p:sp>
+      <p:sp>
+        <p:nvSpPr>
+          <p:cNvPr id="8" name="TextBox 7"/>
+          <p:cNvSpPr txBox="1"/>
+          <p:nvPr/>
+        </p:nvSpPr>
+        <p:spPr>
+          <a:xfrm>
+            <a:off x="685800" y="1417320"/>
+            <a:ext cx="10817352" cy="5029200"/>
+          </a:xfrm>
+          <a:prstGeom prst="rect">
+            <a:avLst/>
+          </a:prstGeom>
+          <a:noFill/>
+        </p:spPr>
+        <p:txBody>
+          <a:bodyPr wrap="square">
+            <a:spAutoFit/>
+          </a:bodyPr>
+          <a:lstStyle/>
+          <a:p>
+            <a:pPr>
+              <a:spcBef>
+                <a:spcPts val="400"/>
+              </a:spcBef>
+              <a:spcAft>
+                <a:spcPts val="200"/>
+              </a:spcAft>
+            </a:pPr>
+            <a:r>
+              <a:rPr sz="1200">
+                <a:solidFill>
+                  <a:srgbClr val="3D5466"/>
+                </a:solidFill>
+                <a:latin typeface="Arial"/>
+              </a:rPr>
+              <a:t>Risikofeld 1: Fertigstellungsrisiko</a:t>
+            </a:r>
+          </a:p>
+          <a:p>
+            <a:pPr>
+              <a:spcBef>
+                <a:spcPts val="400"/>
+              </a:spcBef>
+              <a:spcAft>
+                <a:spcPts val="200"/>
+              </a:spcAft>
+            </a:pPr>
+            <a:r>
+              <a:rPr sz="1200">
+                <a:solidFill>
+                  <a:srgbClr val="3D5466"/>
+                </a:solidFill>
+                <a:latin typeface="Arial"/>
+              </a:rPr>
+              <a:t>Risikofeld 2: Absatzrisiko</a:t>
+            </a:r>
+          </a:p>
+          <a:p>
+            <a:pPr>
+              <a:spcBef>
+                <a:spcPts val="400"/>
+              </a:spcBef>
+              <a:spcAft>
+                <a:spcPts val="200"/>
+              </a:spcAft>
+            </a:pPr>
+            <a:r>
+              <a:rPr sz="1200">
+                <a:solidFill>
+                  <a:srgbClr val="3D5466"/>
+                </a:solidFill>
+                <a:latin typeface="Arial"/>
+              </a:rPr>
+              <a:t>Risikominderung: Vorverkaufsquote als Auszahlungsbedingung, konservative Wertansätze (Vergleichspreise statt Optimistik), Vermarktungskonzept des Bauträgers prüfen.</a:t>
+            </a:r>
+          </a:p>
+          <a:p>
+            <a:pPr>
+              <a:spcBef>
+                <a:spcPts val="400"/>
+              </a:spcBef>
+              <a:spcAft>
+                <a:spcPts val="200"/>
+              </a:spcAft>
+            </a:pPr>
+            <a:r>
+              <a:rPr sz="1200">
+                <a:solidFill>
+                  <a:srgbClr val="3D5466"/>
+                </a:solidFill>
+                <a:latin typeface="Arial"/>
+              </a:rPr>
+              <a:t>Risikofeld 3: Kostenüberschreitungsrisiko</a:t>
+            </a:r>
+          </a:p>
+          <a:p>
+            <a:pPr>
+              <a:spcBef>
+                <a:spcPts val="400"/>
+              </a:spcBef>
+              <a:spcAft>
+                <a:spcPts val="200"/>
+              </a:spcAft>
+            </a:pPr>
+            <a:r>
+              <a:rPr sz="1200">
+                <a:solidFill>
+                  <a:srgbClr val="3D5466"/>
+                </a:solidFill>
+                <a:latin typeface="Arial"/>
+              </a:rPr>
+              <a:t>Risikominderung: Festpreisverträge mit dem Generalunternehmer, EK-Puffer (mindestens 20–25 % EK-Quote), Kostenschätzung durch unabhängigen Bausachverständigen prüfen lassen.</a:t>
+            </a:r>
+          </a:p>
+          <a:p>
+            <a:pPr>
+              <a:spcBef>
+                <a:spcPts val="400"/>
+              </a:spcBef>
+              <a:spcAft>
+                <a:spcPts val="200"/>
+              </a:spcAft>
+            </a:pPr>
+            <a:r>
+              <a:rPr sz="1200">
+                <a:solidFill>
+                  <a:srgbClr val="3D5466"/>
+                </a:solidFill>
+                <a:latin typeface="Arial"/>
+              </a:rPr>
+              <a:t>Risikofeld 4a: Sicherheitenstruktur und Grundschuld-Freigabe bei Bauträgerfinanzierungen</a:t>
+            </a:r>
+          </a:p>
+          <a:p>
+            <a:pPr>
+              <a:spcBef>
+                <a:spcPts val="400"/>
+              </a:spcBef>
+              <a:spcAft>
+                <a:spcPts val="200"/>
+              </a:spcAft>
+            </a:pPr>
+            <a:r>
+              <a:rPr sz="1200">
+                <a:solidFill>
+                  <a:srgbClr val="3D5466"/>
+                </a:solidFill>
+                <a:latin typeface="Arial"/>
+              </a:rPr>
+              <a:t>Ein in der Praxis häufig unterschätztes operatives Thema: Die Grundschuld-Strukturierung und die Freigaberegelung bei Teilverkäufen.</a:t>
+            </a:r>
+          </a:p>
+          <a:p>
+            <a:pPr>
+              <a:spcBef>
+                <a:spcPts val="400"/>
+              </a:spcBef>
+              <a:spcAft>
+                <a:spcPts val="200"/>
+              </a:spcAft>
+            </a:pPr>
+            <a:r>
+              <a:rPr sz="1200">
+                <a:solidFill>
+                  <a:srgbClr val="3D5466"/>
+                </a:solidFill>
+                <a:latin typeface="Arial"/>
+              </a:rPr>
+              <a:t>Freigaberegelung – typische Bankpraxis:</a:t>
+            </a:r>
+          </a:p>
+          <a:p>
+            <a:pPr>
+              <a:spcBef>
+                <a:spcPts val="400"/>
+              </a:spcBef>
+              <a:spcAft>
+                <a:spcPts val="200"/>
+              </a:spcAft>
+            </a:pPr>
+            <a:r>
+              <a:rPr sz="1200">
+                <a:solidFill>
+                  <a:srgbClr val="3D5466"/>
+                </a:solidFill>
+                <a:latin typeface="Arial"/>
+              </a:rPr>
+              <a:t>Risikofeld 4: Zinsänderungs- und Laufzeitrisiko</a:t>
+            </a:r>
+          </a:p>
+          <a:p>
+            <a:pPr>
+              <a:spcBef>
+                <a:spcPts val="400"/>
+              </a:spcBef>
+              <a:spcAft>
+                <a:spcPts val="200"/>
+              </a:spcAft>
+            </a:pPr>
+            <a:r>
+              <a:rPr sz="1200">
+                <a:solidFill>
+                  <a:srgbClr val="3D5466"/>
+                </a:solidFill>
+                <a:latin typeface="Arial"/>
+              </a:rPr>
+              <a:t>Risikominderung: Zinssicherung (Zinsswap, Cap) für die Bauphase, realistische Zeitplanung mit Puffer, Klauseln bei Laufzeitverlängerung.</a:t>
+            </a:r>
+          </a:p>
+          <a:p>
+            <a:pPr>
+              <a:spcBef>
+                <a:spcPts val="400"/>
+              </a:spcBef>
+              <a:spcAft>
+                <a:spcPts val="200"/>
+              </a:spcAft>
+            </a:pPr>
+            <a:r>
+              <a:rPr sz="1200">
+                <a:solidFill>
+                  <a:srgbClr val="3D5466"/>
+                </a:solidFill>
+                <a:latin typeface="Arial"/>
+              </a:rPr>
+              <a:t>Die folgende Handlungskarte fasst die zentralen Diagnose-Aktion-Muster für die Immobilien- und Projektfinanzierung zusammen:</a:t>
+            </a:r>
+          </a:p>
+        </p:txBody>
+      </p:sp>
+      <p:sp>
+        <p:nvSpPr>
+          <p:cNvPr id="9" name="Rectangle 8"/>
           <p:cNvSpPr/>
           <p:nvPr/>
         </p:nvSpPr>
@@ -7633,7 +9221,7 @@
       </p:sp>
       <p:sp>
         <p:nvSpPr>
-          <p:cNvPr id="9" name="TextBox 8"/>
+          <p:cNvPr id="10" name="TextBox 9"/>
           <p:cNvSpPr txBox="1"/>
           <p:nvPr/>
         </p:nvSpPr>
@@ -7662,41 +9250,6 @@
                 <a:latin typeface="JetBrains Mono"/>
               </a:rPr>
               <a:t>Benedikt Zoller Coaching  ·  FKB Campus  ·  M08</a:t>
-            </a:r>
-          </a:p>
-        </p:txBody>
-      </p:sp>
-      <p:sp>
-        <p:nvSpPr>
-          <p:cNvPr id="10" name="TextBox 9"/>
-          <p:cNvSpPr txBox="1"/>
-          <p:nvPr/>
-        </p:nvSpPr>
-        <p:spPr>
-          <a:xfrm>
-            <a:off x="7176211" y="6583680"/>
-            <a:ext cx="4326940" cy="256032"/>
-          </a:xfrm>
-          <a:prstGeom prst="rect">
-            <a:avLst/>
-          </a:prstGeom>
-          <a:noFill/>
-        </p:spPr>
-        <p:txBody>
-          <a:bodyPr wrap="none">
-            <a:spAutoFit/>
-          </a:bodyPr>
-          <a:lstStyle/>
-          <a:p>
-            <a:pPr algn="r"/>
-            <a:r>
-              <a:rPr sz="700">
-                <a:solidFill>
-                  <a:srgbClr val="A0B4D2"/>
-                </a:solidFill>
-                <a:latin typeface="JetBrains Mono"/>
-              </a:rPr>
-              <a:t>Schaubild</a:t>
             </a:r>
           </a:p>
         </p:txBody>
@@ -7734,7 +9287,7 @@
             <a:avLst/>
           </a:prstGeom>
           <a:solidFill>
-            <a:srgbClr val="EDEDF3"/>
+            <a:srgbClr val="FFFFFF"/>
           </a:solidFill>
           <a:ln>
             <a:noFill/>
@@ -7835,51 +9388,43 @@
                 </a:solidFill>
                 <a:latin typeface="JetBrains Mono"/>
               </a:rPr>
-              <a:t>M08  ·  INHALT</a:t>
-            </a:r>
-          </a:p>
-        </p:txBody>
-      </p:sp>
-      <p:sp>
-        <p:nvSpPr>
-          <p:cNvPr id="5" name="Rectangle 4"/>
-          <p:cNvSpPr/>
+              <a:t>M08  ·  SCHAUBILD</a:t>
+            </a:r>
+          </a:p>
+        </p:txBody>
+      </p:sp>
+      <p:sp>
+        <p:nvSpPr>
+          <p:cNvPr id="5" name="TextBox 4"/>
+          <p:cNvSpPr txBox="1"/>
           <p:nvPr/>
         </p:nvSpPr>
         <p:spPr>
           <a:xfrm>
-            <a:off x="0" y="1234440"/>
-            <a:ext cx="12188952" cy="12700"/>
-          </a:xfrm>
-          <a:prstGeom prst="rect">
-            <a:avLst/>
-          </a:prstGeom>
-          <a:solidFill>
-            <a:srgbClr val="D8DFE4"/>
-          </a:solidFill>
-          <a:ln>
-            <a:noFill/>
-          </a:ln>
-        </p:spPr>
-        <p:style>
-          <a:lnRef idx="1">
-            <a:schemeClr val="accent1"/>
-          </a:lnRef>
-          <a:fillRef idx="3">
-            <a:schemeClr val="accent1"/>
-          </a:fillRef>
-          <a:effectRef idx="2">
-            <a:schemeClr val="accent1"/>
-          </a:effectRef>
-          <a:fontRef idx="minor">
-            <a:schemeClr val="lt1"/>
-          </a:fontRef>
-        </p:style>
-        <p:txBody>
-          <a:bodyPr rtlCol="0" anchor="ctr"/>
-          <a:lstStyle/>
-          <a:p>
-            <a:pPr algn="ctr"/>
+            <a:off x="685800" y="502920"/>
+            <a:ext cx="10817352" cy="594360"/>
+          </a:xfrm>
+          <a:prstGeom prst="rect">
+            <a:avLst/>
+          </a:prstGeom>
+          <a:noFill/>
+        </p:spPr>
+        <p:txBody>
+          <a:bodyPr wrap="square">
+            <a:spAutoFit/>
+          </a:bodyPr>
+          <a:lstStyle/>
+          <a:p>
+            <a:pPr algn="l"/>
+            <a:r>
+              <a:rPr sz="2000" b="1" i="0">
+                <a:solidFill>
+                  <a:srgbClr val="1F2C56"/>
+                </a:solidFill>
+                <a:latin typeface="Source Serif 4"/>
+              </a:rPr>
+              <a:t>Handlungsempfehlung Immobilienfinanzierung</a:t>
+            </a:r>
           </a:p>
         </p:txBody>
       </p:sp>
@@ -7891,8 +9436,8 @@
         </p:nvSpPr>
         <p:spPr>
           <a:xfrm>
-            <a:off x="685800" y="502920"/>
-            <a:ext cx="36576" cy="658368"/>
+            <a:off x="685800" y="1143000"/>
+            <a:ext cx="10817352" cy="25400"/>
           </a:xfrm>
           <a:prstGeom prst="rect">
             <a:avLst/>
@@ -7926,295 +9471,33 @@
           </a:p>
         </p:txBody>
       </p:sp>
-      <p:sp>
-        <p:nvSpPr>
-          <p:cNvPr id="7" name="TextBox 6"/>
-          <p:cNvSpPr txBox="1"/>
+      <p:pic>
+        <p:nvPicPr>
+          <p:cNvPr id="7" name="Picture 6" descr="image.png"/>
+          <p:cNvPicPr>
+            <a:picLocks noChangeAspect="1"/>
+          </p:cNvPicPr>
           <p:nvPr/>
-        </p:nvSpPr>
-        <p:spPr>
-          <a:xfrm>
-            <a:off x="813816" y="502920"/>
-            <a:ext cx="10634472" cy="685800"/>
-          </a:xfrm>
-          <a:prstGeom prst="rect">
-            <a:avLst/>
-          </a:prstGeom>
-          <a:noFill/>
-        </p:spPr>
-        <p:txBody>
-          <a:bodyPr wrap="square">
-            <a:spAutoFit/>
-          </a:bodyPr>
-          <a:lstStyle/>
-          <a:p>
-            <a:pPr algn="l"/>
-            <a:r>
-              <a:rPr sz="2400" b="1" i="0">
-                <a:solidFill>
-                  <a:srgbClr val="1F2C56"/>
-                </a:solidFill>
-                <a:latin typeface="Source Serif 4"/>
-              </a:rPr>
-              <a:t>Praxiscase: Quartier Sonnenhalde – Bauträgerfinanzierung Ravensburg</a:t>
-            </a:r>
-          </a:p>
-        </p:txBody>
-      </p:sp>
-      <p:sp>
-        <p:nvSpPr>
-          <p:cNvPr id="8" name="TextBox 7"/>
-          <p:cNvSpPr txBox="1"/>
-          <p:nvPr/>
-        </p:nvSpPr>
-        <p:spPr>
-          <a:xfrm>
-            <a:off x="685800" y="1417320"/>
-            <a:ext cx="10817352" cy="5029200"/>
-          </a:xfrm>
-          <a:prstGeom prst="rect">
-            <a:avLst/>
-          </a:prstGeom>
-          <a:noFill/>
-        </p:spPr>
-        <p:txBody>
-          <a:bodyPr wrap="square">
-            <a:spAutoFit/>
-          </a:bodyPr>
-          <a:lstStyle/>
-          <a:p>
-            <a:pPr>
-              <a:spcBef>
-                <a:spcPts val="1000"/>
-              </a:spcBef>
-              <a:spcAft>
-                <a:spcPts val="200"/>
-              </a:spcAft>
-            </a:pPr>
-            <a:r>
-              <a:rPr sz="800" b="1">
-                <a:solidFill>
-                  <a:srgbClr val="78808C"/>
-                </a:solidFill>
-                <a:latin typeface="JetBrains Mono"/>
-              </a:rPr>
-              <a:t>UNTERNEHMENSPORTRÄT</a:t>
-            </a:r>
-          </a:p>
-          <a:p>
-            <a:pPr>
-              <a:spcBef>
-                <a:spcPts val="400"/>
-              </a:spcBef>
-              <a:spcAft>
-                <a:spcPts val="200"/>
-              </a:spcAft>
-            </a:pPr>
-            <a:r>
-              <a:rPr sz="1200">
-                <a:solidFill>
-                  <a:srgbClr val="3D5466"/>
-                </a:solidFill>
-                <a:latin typeface="Arial"/>
-              </a:rPr>
-              <a:t>Das Projekt "Sonnenhalde":</a:t>
-            </a:r>
-          </a:p>
-          <a:p>
-            <a:pPr>
-              <a:spcBef>
-                <a:spcPts val="400"/>
-              </a:spcBef>
-              <a:spcAft>
-                <a:spcPts val="200"/>
-              </a:spcAft>
-            </a:pPr>
-            <a:r>
-              <a:rPr sz="1300">
-                <a:solidFill>
-                  <a:srgbClr val="3D5466"/>
-                </a:solidFill>
-                <a:latin typeface="Arial"/>
-              </a:rPr>
-              <a:t>▸  Lage: Ravensburg-Südstadt, aufgewertetes Quartier, gute ÖPNV-Anbindung</a:t>
-            </a:r>
-          </a:p>
-          <a:p>
-            <a:pPr>
-              <a:spcBef>
-                <a:spcPts val="400"/>
-              </a:spcBef>
-              <a:spcAft>
-                <a:spcPts val="200"/>
-              </a:spcAft>
-            </a:pPr>
-            <a:r>
-              <a:rPr sz="1300">
-                <a:solidFill>
-                  <a:srgbClr val="3D5466"/>
-                </a:solidFill>
-                <a:latin typeface="Arial"/>
-              </a:rPr>
-              <a:t>▸  Nutzung: 16 Eigentumswohnungen (60–110 m², 2–4 Zimmer)</a:t>
-            </a:r>
-          </a:p>
-          <a:p>
-            <a:pPr>
-              <a:spcBef>
-                <a:spcPts val="400"/>
-              </a:spcBef>
-              <a:spcAft>
-                <a:spcPts val="200"/>
-              </a:spcAft>
-            </a:pPr>
-            <a:r>
-              <a:rPr sz="1300">
-                <a:solidFill>
-                  <a:srgbClr val="3D5466"/>
-                </a:solidFill>
-                <a:latin typeface="Arial"/>
-              </a:rPr>
-              <a:t>▸  Baugenehmigung: seit März 2026 rechtskräftig</a:t>
-            </a:r>
-          </a:p>
-          <a:p>
-            <a:pPr>
-              <a:spcBef>
-                <a:spcPts val="400"/>
-              </a:spcBef>
-              <a:spcAft>
-                <a:spcPts val="200"/>
-              </a:spcAft>
-            </a:pPr>
-            <a:r>
-              <a:rPr sz="1300">
-                <a:solidFill>
-                  <a:srgbClr val="3D5466"/>
-                </a:solidFill>
-                <a:latin typeface="Arial"/>
-              </a:rPr>
-              <a:t>▸  Baubeginn: geplant April 2027 (Vorlaufzeit für Beurkundungen und Bauvorbereitungen realistisch eingeplant)</a:t>
-            </a:r>
-          </a:p>
-          <a:p>
-            <a:pPr>
-              <a:spcBef>
-                <a:spcPts val="400"/>
-              </a:spcBef>
-              <a:spcAft>
-                <a:spcPts val="200"/>
-              </a:spcAft>
-            </a:pPr>
-            <a:r>
-              <a:rPr sz="1300">
-                <a:solidFill>
-                  <a:srgbClr val="3D5466"/>
-                </a:solidFill>
-                <a:latin typeface="Arial"/>
-              </a:rPr>
-              <a:t>▸  Fertigstellung: Juni 2028</a:t>
-            </a:r>
-          </a:p>
-          <a:p>
-            <a:pPr>
-              <a:spcBef>
-                <a:spcPts val="400"/>
-              </a:spcBef>
-              <a:spcAft>
-                <a:spcPts val="200"/>
-              </a:spcAft>
-            </a:pPr>
-            <a:r>
-              <a:rPr sz="1300">
-                <a:solidFill>
-                  <a:srgbClr val="3D5466"/>
-                </a:solidFill>
-                <a:latin typeface="Arial"/>
-              </a:rPr>
-              <a:t>▸  Vertrieb: eigenes Vertriebsbüro + regionaler Maklerpartner</a:t>
-            </a:r>
-          </a:p>
-          <a:p>
-            <a:pPr>
-              <a:spcBef>
-                <a:spcPts val="400"/>
-              </a:spcBef>
-              <a:spcAft>
-                <a:spcPts val="200"/>
-              </a:spcAft>
-            </a:pPr>
-            <a:r>
-              <a:rPr sz="1300">
-                <a:solidFill>
-                  <a:srgbClr val="3D5466"/>
-                </a:solidFill>
-                <a:latin typeface="Arial"/>
-              </a:rPr>
-              <a:t>▸  Vorverkäufe zum Zeitpunkt der Kreditanfrage: 4 von 16 Einheiten notariell beurkundet (25 %)</a:t>
-            </a:r>
-          </a:p>
-          <a:p>
-            <a:pPr>
-              <a:spcBef>
-                <a:spcPts val="1000"/>
-              </a:spcBef>
-              <a:spcAft>
-                <a:spcPts val="200"/>
-              </a:spcAft>
-            </a:pPr>
-            <a:r>
-              <a:rPr sz="800" b="1">
-                <a:solidFill>
-                  <a:srgbClr val="78808C"/>
-                </a:solidFill>
-                <a:latin typeface="JetBrains Mono"/>
-              </a:rPr>
-              <a:t>PROJEKTFINANZIERUNG – ECKDATEN</a:t>
-            </a:r>
-          </a:p>
-          <a:p>
-            <a:pPr>
-              <a:spcBef>
-                <a:spcPts val="400"/>
-              </a:spcBef>
-              <a:spcAft>
-                <a:spcPts val="200"/>
-              </a:spcAft>
-            </a:pPr>
-            <a:r>
-              <a:rPr sz="1200">
-                <a:solidFill>
-                  <a:srgbClr val="3D5466"/>
-                </a:solidFill>
-                <a:latin typeface="Arial"/>
-              </a:rPr>
-              <a:t>Prognostizierte Verkaufserlöse:</a:t>
-            </a:r>
-          </a:p>
-          <a:p>
-            <a:pPr>
-              <a:spcBef>
-                <a:spcPts val="1000"/>
-              </a:spcBef>
-              <a:spcAft>
-                <a:spcPts val="200"/>
-              </a:spcAft>
-            </a:pPr>
-            <a:r>
-              <a:rPr sz="800" b="1">
-                <a:solidFill>
-                  <a:srgbClr val="78808C"/>
-                </a:solidFill>
-                <a:latin typeface="JetBrains Mono"/>
-              </a:rPr>
-              <a:t>AUFGABEN (GRUPPENARBEIT, JE GRUPPE CA. 60 MIN.)</a:t>
-            </a:r>
-          </a:p>
-        </p:txBody>
-      </p:sp>
-      <p:sp>
-        <p:nvSpPr>
-          <p:cNvPr id="9" name="Rectangle 8"/>
+        </p:nvPicPr>
+        <p:blipFill>
+          <a:blip r:embed="rId2"/>
+          <a:stretch>
+            <a:fillRect/>
+          </a:stretch>
+        </p:blipFill>
+        <p:spPr>
+          <a:xfrm>
+            <a:off x="2303489" y="1325880"/>
+            <a:ext cx="7581973" cy="4937760"/>
+          </a:xfrm>
+          <a:prstGeom prst="rect">
+            <a:avLst/>
+          </a:prstGeom>
+        </p:spPr>
+      </p:pic>
+      <p:sp>
+        <p:nvSpPr>
+          <p:cNvPr id="8" name="Rectangle 7"/>
           <p:cNvSpPr/>
           <p:nvPr/>
         </p:nvSpPr>
@@ -8257,14 +9540,49 @@
       </p:sp>
       <p:sp>
         <p:nvSpPr>
+          <p:cNvPr id="9" name="TextBox 8"/>
+          <p:cNvSpPr txBox="1"/>
+          <p:nvPr/>
+        </p:nvSpPr>
+        <p:spPr>
+          <a:xfrm>
+            <a:off x="685800" y="6583680"/>
+            <a:ext cx="6490411" cy="256032"/>
+          </a:xfrm>
+          <a:prstGeom prst="rect">
+            <a:avLst/>
+          </a:prstGeom>
+          <a:noFill/>
+        </p:spPr>
+        <p:txBody>
+          <a:bodyPr wrap="none">
+            <a:spAutoFit/>
+          </a:bodyPr>
+          <a:lstStyle/>
+          <a:p>
+            <a:pPr algn="l"/>
+            <a:r>
+              <a:rPr sz="700">
+                <a:solidFill>
+                  <a:srgbClr val="A0B4D2"/>
+                </a:solidFill>
+                <a:latin typeface="JetBrains Mono"/>
+              </a:rPr>
+              <a:t>Benedikt Zoller Coaching  ·  FKB Campus  ·  M08</a:t>
+            </a:r>
+          </a:p>
+        </p:txBody>
+      </p:sp>
+      <p:sp>
+        <p:nvSpPr>
           <p:cNvPr id="10" name="TextBox 9"/>
           <p:cNvSpPr txBox="1"/>
           <p:nvPr/>
         </p:nvSpPr>
         <p:spPr>
           <a:xfrm>
-            <a:off x="685800" y="6583680"/>
-            <a:ext cx="6490411" cy="256032"/>
+            <a:off x="7176211" y="6583680"/>
+            <a:ext cx="4326940" cy="256032"/>
           </a:xfrm>
           <a:prstGeom prst="rect">
             <a:avLst/>
@@ -8277,7 +9595,7 @@
           </a:bodyPr>
           <a:lstStyle/>
           <a:p>
-            <a:pPr algn="l"/>
+            <a:pPr algn="r"/>
             <a:r>
               <a:rPr sz="700">
                 <a:solidFill>
@@ -8285,7 +9603,7 @@
                 </a:solidFill>
                 <a:latin typeface="JetBrains Mono"/>
               </a:rPr>
-              <a:t>Benedikt Zoller Coaching  ·  FKB Campus  ·  M08</a:t>
+              <a:t>Schaubild</a:t>
             </a:r>
           </a:p>
         </p:txBody>
@@ -8616,4 +9934,324 @@
   </a:objectDefaults>
   <a:extraClrSchemeLst/>
 </a:theme>
+</file>
+
+<file path=ppt/theme/theme2.xml><?xml version="1.0" encoding="utf-8"?>
+<a:theme xmlns:a="http://schemas.openxmlformats.org/drawingml/2006/main" name="Office Theme">
+  <a:themeElements>
+    <a:clrScheme name="Office">
+      <a:dk1>
+        <a:sysClr val="windowText" lastClr="000000"/>
+      </a:dk1>
+      <a:lt1>
+        <a:sysClr val="window" lastClr="FFFFFF"/>
+      </a:lt1>
+      <a:dk2>
+        <a:srgbClr val="1F497D"/>
+      </a:dk2>
+      <a:lt2>
+        <a:srgbClr val="EEECE1"/>
+      </a:lt2>
+      <a:accent1>
+        <a:srgbClr val="4F81BD"/>
+      </a:accent1>
+      <a:accent2>
+        <a:srgbClr val="C0504D"/>
+      </a:accent2>
+      <a:accent3>
+        <a:srgbClr val="9BBB59"/>
+      </a:accent3>
+      <a:accent4>
+        <a:srgbClr val="8064A2"/>
+      </a:accent4>
+      <a:accent5>
+        <a:srgbClr val="4BACC6"/>
+      </a:accent5>
+      <a:accent6>
+        <a:srgbClr val="F79646"/>
+      </a:accent6>
+      <a:hlink>
+        <a:srgbClr val="0000FF"/>
+      </a:hlink>
+      <a:folHlink>
+        <a:srgbClr val="800080"/>
+      </a:folHlink>
+    </a:clrScheme>
+    <a:fontScheme name="Office">
+      <a:majorFont>
+        <a:latin typeface="Calibri"/>
+        <a:ea typeface=""/>
+        <a:cs typeface=""/>
+        <a:font script="Jpan" typeface="ＭＳ Ｐゴシック"/>
+        <a:font script="Hang" typeface="맑은 고딕"/>
+        <a:font script="Hans" typeface="宋体"/>
+        <a:font script="Hant" typeface="新細明體"/>
+        <a:font script="Arab" typeface="Times New Roman"/>
+        <a:font script="Hebr" typeface="Times New Roman"/>
+        <a:font script="Thai" typeface="Angsana New"/>
+        <a:font script="Ethi" typeface="Nyala"/>
+        <a:font script="Beng" typeface="Vrinda"/>
+        <a:font script="Gujr" typeface="Shruti"/>
+        <a:font script="Khmr" typeface="MoolBoran"/>
+        <a:font script="Knda" typeface="Tunga"/>
+        <a:font script="Guru" typeface="Raavi"/>
+        <a:font script="Cans" typeface="Euphemia"/>
+        <a:font script="Cher" typeface="Plantagenet Cherokee"/>
+        <a:font script="Yiii" typeface="Microsoft Yi Baiti"/>
+        <a:font script="Tibt" typeface="Microsoft Himalaya"/>
+        <a:font script="Thaa" typeface="MV Boli"/>
+        <a:font script="Deva" typeface="Mangal"/>
+        <a:font script="Telu" typeface="Gautami"/>
+        <a:font script="Taml" typeface="Latha"/>
+        <a:font script="Syrc" typeface="Estrangelo Edessa"/>
+        <a:font script="Orya" typeface="Kalinga"/>
+        <a:font script="Mlym" typeface="Kartika"/>
+        <a:font script="Laoo" typeface="DokChampa"/>
+        <a:font script="Sinh" typeface="Iskoola Pota"/>
+        <a:font script="Mong" typeface="Mongolian Baiti"/>
+        <a:font script="Viet" typeface="Times New Roman"/>
+        <a:font script="Uigh" typeface="Microsoft Uighur"/>
+        <a:font script="Geor" typeface="Sylfaen"/>
+      </a:majorFont>
+      <a:minorFont>
+        <a:latin typeface="Calibri"/>
+        <a:ea typeface=""/>
+        <a:cs typeface=""/>
+        <a:font script="Jpan" typeface="ＭＳ Ｐゴシック"/>
+        <a:font script="Hang" typeface="맑은 고딕"/>
+        <a:font script="Hans" typeface="宋体"/>
+        <a:font script="Hant" typeface="新細明體"/>
+        <a:font script="Arab" typeface="Arial"/>
+        <a:font script="Hebr" typeface="Arial"/>
+        <a:font script="Thai" typeface="Cordia New"/>
+        <a:font script="Ethi" typeface="Nyala"/>
+        <a:font script="Beng" typeface="Vrinda"/>
+        <a:font script="Gujr" typeface="Shruti"/>
+        <a:font script="Khmr" typeface="DaunPenh"/>
+        <a:font script="Knda" typeface="Tunga"/>
+        <a:font script="Guru" typeface="Raavi"/>
+        <a:font script="Cans" typeface="Euphemia"/>
+        <a:font script="Cher" typeface="Plantagenet Cherokee"/>
+        <a:font script="Yiii" typeface="Microsoft Yi Baiti"/>
+        <a:font script="Tibt" typeface="Microsoft Himalaya"/>
+        <a:font script="Thaa" typeface="MV Boli"/>
+        <a:font script="Deva" typeface="Mangal"/>
+        <a:font script="Telu" typeface="Gautami"/>
+        <a:font script="Taml" typeface="Latha"/>
+        <a:font script="Syrc" typeface="Estrangelo Edessa"/>
+        <a:font script="Orya" typeface="Kalinga"/>
+        <a:font script="Mlym" typeface="Kartika"/>
+        <a:font script="Laoo" typeface="DokChampa"/>
+        <a:font script="Sinh" typeface="Iskoola Pota"/>
+        <a:font script="Mong" typeface="Mongolian Baiti"/>
+        <a:font script="Viet" typeface="Arial"/>
+        <a:font script="Uigh" typeface="Microsoft Uighur"/>
+        <a:font script="Geor" typeface="Sylfaen"/>
+      </a:minorFont>
+    </a:fontScheme>
+    <a:fmtScheme name="Office">
+      <a:fillStyleLst>
+        <a:solidFill>
+          <a:schemeClr val="phClr"/>
+        </a:solidFill>
+        <a:gradFill rotWithShape="1">
+          <a:gsLst>
+            <a:gs pos="0">
+              <a:schemeClr val="phClr">
+                <a:tint val="50000"/>
+                <a:satMod val="300000"/>
+              </a:schemeClr>
+            </a:gs>
+            <a:gs pos="35000">
+              <a:schemeClr val="phClr">
+                <a:tint val="37000"/>
+                <a:satMod val="300000"/>
+              </a:schemeClr>
+            </a:gs>
+            <a:gs pos="100000">
+              <a:schemeClr val="phClr">
+                <a:tint val="15000"/>
+                <a:satMod val="350000"/>
+              </a:schemeClr>
+            </a:gs>
+          </a:gsLst>
+          <a:lin ang="16200000" scaled="1"/>
+        </a:gradFill>
+        <a:gradFill rotWithShape="1">
+          <a:gsLst>
+            <a:gs pos="0">
+              <a:schemeClr val="phClr">
+                <a:tint val="100000"/>
+                <a:shade val="100000"/>
+                <a:satMod val="130000"/>
+              </a:schemeClr>
+            </a:gs>
+            <a:gs pos="100000">
+              <a:schemeClr val="phClr">
+                <a:tint val="50000"/>
+                <a:shade val="100000"/>
+                <a:satMod val="350000"/>
+              </a:schemeClr>
+            </a:gs>
+          </a:gsLst>
+          <a:lin ang="16200000" scaled="0"/>
+        </a:gradFill>
+      </a:fillStyleLst>
+      <a:lnStyleLst>
+        <a:ln w="9525" cap="flat" cmpd="sng" algn="ctr">
+          <a:solidFill>
+            <a:schemeClr val="phClr">
+              <a:shade val="95000"/>
+              <a:satMod val="105000"/>
+            </a:schemeClr>
+          </a:solidFill>
+          <a:prstDash val="solid"/>
+        </a:ln>
+        <a:ln w="25400" cap="flat" cmpd="sng" algn="ctr">
+          <a:solidFill>
+            <a:schemeClr val="phClr"/>
+          </a:solidFill>
+          <a:prstDash val="solid"/>
+        </a:ln>
+        <a:ln w="38100" cap="flat" cmpd="sng" algn="ctr">
+          <a:solidFill>
+            <a:schemeClr val="phClr"/>
+          </a:solidFill>
+          <a:prstDash val="solid"/>
+        </a:ln>
+      </a:lnStyleLst>
+      <a:effectStyleLst>
+        <a:effectStyle>
+          <a:effectLst>
+            <a:outerShdw blurRad="40000" dist="20000" dir="5400000" rotWithShape="0">
+              <a:srgbClr val="000000">
+                <a:alpha val="38000"/>
+              </a:srgbClr>
+            </a:outerShdw>
+          </a:effectLst>
+        </a:effectStyle>
+        <a:effectStyle>
+          <a:effectLst>
+            <a:outerShdw blurRad="40000" dist="23000" dir="5400000" rotWithShape="0">
+              <a:srgbClr val="000000">
+                <a:alpha val="35000"/>
+              </a:srgbClr>
+            </a:outerShdw>
+          </a:effectLst>
+        </a:effectStyle>
+        <a:effectStyle>
+          <a:effectLst>
+            <a:outerShdw blurRad="40000" dist="23000" dir="5400000" rotWithShape="0">
+              <a:srgbClr val="000000">
+                <a:alpha val="35000"/>
+              </a:srgbClr>
+            </a:outerShdw>
+          </a:effectLst>
+          <a:scene3d>
+            <a:camera prst="orthographicFront">
+              <a:rot lat="0" lon="0" rev="0"/>
+            </a:camera>
+            <a:lightRig rig="threePt" dir="t">
+              <a:rot lat="0" lon="0" rev="1200000"/>
+            </a:lightRig>
+          </a:scene3d>
+          <a:sp3d>
+            <a:bevelT w="63500" h="25400"/>
+          </a:sp3d>
+        </a:effectStyle>
+      </a:effectStyleLst>
+      <a:bgFillStyleLst>
+        <a:solidFill>
+          <a:schemeClr val="phClr"/>
+        </a:solidFill>
+        <a:gradFill rotWithShape="1">
+          <a:gsLst>
+            <a:gs pos="0">
+              <a:schemeClr val="phClr">
+                <a:tint val="40000"/>
+                <a:satMod val="350000"/>
+              </a:schemeClr>
+            </a:gs>
+            <a:gs pos="40000">
+              <a:schemeClr val="phClr">
+                <a:tint val="45000"/>
+                <a:shade val="99000"/>
+                <a:satMod val="350000"/>
+              </a:schemeClr>
+            </a:gs>
+            <a:gs pos="100000">
+              <a:schemeClr val="phClr">
+                <a:shade val="20000"/>
+                <a:satMod val="255000"/>
+              </a:schemeClr>
+            </a:gs>
+          </a:gsLst>
+          <a:path path="circle">
+            <a:fillToRect l="50000" t="-80000" r="50000" b="180000"/>
+          </a:path>
+        </a:gradFill>
+        <a:gradFill rotWithShape="1">
+          <a:gsLst>
+            <a:gs pos="0">
+              <a:schemeClr val="phClr">
+                <a:tint val="80000"/>
+                <a:satMod val="300000"/>
+              </a:schemeClr>
+            </a:gs>
+            <a:gs pos="100000">
+              <a:schemeClr val="phClr">
+                <a:shade val="30000"/>
+                <a:satMod val="200000"/>
+              </a:schemeClr>
+            </a:gs>
+          </a:gsLst>
+          <a:path path="circle">
+            <a:fillToRect l="50000" t="50000" r="50000" b="50000"/>
+          </a:path>
+        </a:gradFill>
+      </a:bgFillStyleLst>
+    </a:fmtScheme>
+  </a:themeElements>
+  <a:objectDefaults>
+    <a:spDef>
+      <a:spPr/>
+      <a:bodyPr/>
+      <a:lstStyle/>
+      <a:style>
+        <a:lnRef idx="1">
+          <a:schemeClr val="accent1"/>
+        </a:lnRef>
+        <a:fillRef idx="3">
+          <a:schemeClr val="accent1"/>
+        </a:fillRef>
+        <a:effectRef idx="2">
+          <a:schemeClr val="accent1"/>
+        </a:effectRef>
+        <a:fontRef idx="minor">
+          <a:schemeClr val="lt1"/>
+        </a:fontRef>
+      </a:style>
+    </a:spDef>
+    <a:lnDef>
+      <a:spPr/>
+      <a:bodyPr/>
+      <a:lstStyle/>
+      <a:style>
+        <a:lnRef idx="2">
+          <a:schemeClr val="accent1"/>
+        </a:lnRef>
+        <a:fillRef idx="0">
+          <a:schemeClr val="accent1"/>
+        </a:fillRef>
+        <a:effectRef idx="1">
+          <a:schemeClr val="accent1"/>
+        </a:effectRef>
+        <a:fontRef idx="minor">
+          <a:schemeClr val="tx1"/>
+        </a:fontRef>
+      </a:style>
+    </a:lnDef>
+  </a:objectDefaults>
+  <a:extraClrSchemeLst/>
+</a:theme>
 </file>
--- a/protected-downloads/praesentation/M08.pptx
+++ b/protected-downloads/praesentation/M08.pptx
@@ -977,7 +977,42 @@
           <a:lstStyle/>
           <a:p>
             <a:r>
-              <a:t>Siehe Trainerhandbuch (Sektion 3) für Moderationshinweise, Timing und erwartete Teilnehmerreaktionen.</a:t>
+              <a:t>Musterlösung Mini-Case Bestandshalter (Trainer-Version)</a:t>
+            </a:r>
+          </a:p>
+          <a:p>
+            <a:r>
+              <a:t>NOI aktuell: 84.000 − 21.000 = 63.000 EUR</a:t>
+            </a:r>
+          </a:p>
+          <a:p>
+            <a:r>
+              <a:t>DSCR aktuell: 63.000 / 50.400 = 1,25 → knapp solide</a:t>
+            </a:r>
+          </a:p>
+          <a:p>
+            <a:r>
+              <a:t>Annuität neu gesamt: 50.400 + 19.000 = 69.400 EUR</a:t>
+            </a:r>
+          </a:p>
+          <a:p>
+            <a:r>
+              <a:t>NOI nach Ausbau (erst in 18 Monaten): 63.000 + 18.000 = 81.000 EUR; in Übergangszeit: 63.000</a:t>
+            </a:r>
+          </a:p>
+          <a:p>
+            <a:r>
+              <a:t>DSCR übergangsweise: 63.000 / 69.400 = 0,91 → kritisch; nach Vollvermietung: 81.000 / 69.400 = 1,17 → vertretbar, aber knapp</a:t>
+            </a:r>
+          </a:p>
+          <a:p>
+            <a:r>
+              <a:t>LTV: 580.000 / 760.000 = 76,3 %; nach Aufstockung: 780.000 / 760.000 = 102,6 % → über Beleihungswert!</a:t>
+            </a:r>
+          </a:p>
+          <a:p>
+            <a:r>
+              <a:t>Fazit: Aufstockung auf Basis heutiger BelWertV problematisch. Optionen: Neugutachten nach Ausbau, Tilgungsaussetzung Bauphase, Schwäbisch Hall für Refinanzierung prüfen.</a:t>
             </a:r>
           </a:p>
         </p:txBody>
@@ -5446,158 +5481,6 @@
                 <a:latin typeface="Arial"/>
               </a:rPr>
               <a:t>Die Familie fragt nach einer Aufstockung des Kredits um 200.000 EUR für Dachgeschossausbau (2 neue Einheiten, geplante Zusatzmiete 18.000 EUR p.a.).</a:t>
-            </a:r>
-          </a:p>
-          <a:p>
-            <a:pPr>
-              <a:spcBef>
-                <a:spcPts val="400"/>
-              </a:spcBef>
-              <a:spcAft>
-                <a:spcPts val="200"/>
-              </a:spcAft>
-            </a:pPr>
-            <a:r>
-              <a:rPr sz="1200">
-                <a:solidFill>
-                  <a:srgbClr val="3D5466"/>
-                </a:solidFill>
-                <a:latin typeface="Arial"/>
-              </a:rPr>
-              <a:t>Musterlösung:</a:t>
-            </a:r>
-          </a:p>
-          <a:p>
-            <a:pPr>
-              <a:spcBef>
-                <a:spcPts val="400"/>
-              </a:spcBef>
-              <a:spcAft>
-                <a:spcPts val="200"/>
-              </a:spcAft>
-            </a:pPr>
-            <a:r>
-              <a:rPr sz="1300">
-                <a:solidFill>
-                  <a:srgbClr val="3D5466"/>
-                </a:solidFill>
-                <a:latin typeface="Arial"/>
-              </a:rPr>
-              <a:t>▸  NOI aktuell: 84.000 − 21.000 = 63.000 EUR</a:t>
-            </a:r>
-          </a:p>
-          <a:p>
-            <a:pPr>
-              <a:spcBef>
-                <a:spcPts val="400"/>
-              </a:spcBef>
-              <a:spcAft>
-                <a:spcPts val="200"/>
-              </a:spcAft>
-            </a:pPr>
-            <a:r>
-              <a:rPr sz="1300">
-                <a:solidFill>
-                  <a:srgbClr val="3D5466"/>
-                </a:solidFill>
-                <a:latin typeface="Arial"/>
-              </a:rPr>
-              <a:t>▸  DSCR aktuell: 63.000 / 50.400 = 1,25 → knapp solide</a:t>
-            </a:r>
-          </a:p>
-          <a:p>
-            <a:pPr>
-              <a:spcBef>
-                <a:spcPts val="400"/>
-              </a:spcBef>
-              <a:spcAft>
-                <a:spcPts val="200"/>
-              </a:spcAft>
-            </a:pPr>
-            <a:r>
-              <a:rPr sz="1300">
-                <a:solidFill>
-                  <a:srgbClr val="3D5466"/>
-                </a:solidFill>
-                <a:latin typeface="Arial"/>
-              </a:rPr>
-              <a:t>▸  Annuität neu gesamt: 50.400 + 19.000 = 69.400 EUR</a:t>
-            </a:r>
-          </a:p>
-          <a:p>
-            <a:pPr>
-              <a:spcBef>
-                <a:spcPts val="400"/>
-              </a:spcBef>
-              <a:spcAft>
-                <a:spcPts val="200"/>
-              </a:spcAft>
-            </a:pPr>
-            <a:r>
-              <a:rPr sz="1300">
-                <a:solidFill>
-                  <a:srgbClr val="3D5466"/>
-                </a:solidFill>
-                <a:latin typeface="Arial"/>
-              </a:rPr>
-              <a:t>▸  NOI nach Ausbau (erst in 18 Monaten): 63.000 + 18.000 = 81.000 EUR; in Übergangszeit: 63.000</a:t>
-            </a:r>
-          </a:p>
-          <a:p>
-            <a:pPr>
-              <a:spcBef>
-                <a:spcPts val="400"/>
-              </a:spcBef>
-              <a:spcAft>
-                <a:spcPts val="200"/>
-              </a:spcAft>
-            </a:pPr>
-            <a:r>
-              <a:rPr sz="1300">
-                <a:solidFill>
-                  <a:srgbClr val="3D5466"/>
-                </a:solidFill>
-                <a:latin typeface="Arial"/>
-              </a:rPr>
-              <a:t>▸  DSCR übergangsweise: 63.000 / 69.400 = 0,91 → kritisch; nach Vollvermietung: 81.000 / 69.400 = 1,17 → vertretbar, aber knapp</a:t>
-            </a:r>
-          </a:p>
-          <a:p>
-            <a:pPr>
-              <a:spcBef>
-                <a:spcPts val="400"/>
-              </a:spcBef>
-              <a:spcAft>
-                <a:spcPts val="200"/>
-              </a:spcAft>
-            </a:pPr>
-            <a:r>
-              <a:rPr sz="1300">
-                <a:solidFill>
-                  <a:srgbClr val="3D5466"/>
-                </a:solidFill>
-                <a:latin typeface="Arial"/>
-              </a:rPr>
-              <a:t>▸  LTV: 580.000 / 760.000 = 76,3 %; nach Aufstockung: 780.000 / 760.000 = 102,6 % → über Beleihungswert!</a:t>
-            </a:r>
-          </a:p>
-          <a:p>
-            <a:pPr>
-              <a:spcBef>
-                <a:spcPts val="400"/>
-              </a:spcBef>
-              <a:spcAft>
-                <a:spcPts val="200"/>
-              </a:spcAft>
-            </a:pPr>
-            <a:r>
-              <a:rPr sz="1300">
-                <a:solidFill>
-                  <a:srgbClr val="3D5466"/>
-                </a:solidFill>
-                <a:latin typeface="Arial"/>
-              </a:rPr>
-              <a:t>▸  Fazit: Aufstockung auf Basis heutiger BelWertV problematisch. Optionen: Neugutachten nach Ausbau, Tilgungsaussetzung Bauphase, Schwäbisch Hall für Refinanzierung prüfen.</a:t>
             </a:r>
           </a:p>
           <a:p>

--- a/protected-downloads/praesentation/M08.pptx
+++ b/protected-downloads/praesentation/M08.pptx
@@ -8,7 +8,7 @@
     <p:sldId id="256" r:id="rId7"/>
     <p:sldId id="257" r:id="rId8"/>
     <p:sldId id="258" r:id="rId9"/>
-    <p:sldId id="259" r:id="rId11"/>
+    <p:sldId id="259" r:id="rId10"/>
     <p:sldId id="260" r:id="rId12"/>
     <p:sldId id="261" r:id="rId13"/>
     <p:sldId id="262" r:id="rId14"/>
@@ -16,6 +16,7 @@
     <p:sldId id="264" r:id="rId16"/>
     <p:sldId id="265" r:id="rId17"/>
     <p:sldId id="266" r:id="rId18"/>
+    <p:sldId id="267" r:id="rId19"/>
   </p:sldIdLst>
   <p:sldSz cx="12188952" cy="6858000" type="screen4x3"/>
   <p:notesSz cx="6858000" cy="9144000"/>
@@ -4608,7 +4609,7 @@
             <a:avLst/>
           </a:prstGeom>
           <a:solidFill>
-            <a:srgbClr val="EDEDF3"/>
+            <a:srgbClr val="FFFFFF"/>
           </a:solidFill>
           <a:ln>
             <a:noFill/>
@@ -4709,51 +4710,43 @@
                 </a:solidFill>
                 <a:latin typeface="JetBrains Mono"/>
               </a:rPr>
-              <a:t>M08  ·  INHALT</a:t>
-            </a:r>
-          </a:p>
-        </p:txBody>
-      </p:sp>
-      <p:sp>
-        <p:nvSpPr>
-          <p:cNvPr id="5" name="Rectangle 4"/>
-          <p:cNvSpPr/>
-          <p:nvPr/>
-        </p:nvSpPr>
-        <p:spPr>
-          <a:xfrm>
-            <a:off x="0" y="1234440"/>
-            <a:ext cx="12188952" cy="12700"/>
-          </a:xfrm>
-          <a:prstGeom prst="rect">
-            <a:avLst/>
-          </a:prstGeom>
-          <a:solidFill>
-            <a:srgbClr val="D8DFE4"/>
-          </a:solidFill>
-          <a:ln>
-            <a:noFill/>
-          </a:ln>
-        </p:spPr>
-        <p:style>
-          <a:lnRef idx="1">
-            <a:schemeClr val="accent1"/>
-          </a:lnRef>
-          <a:fillRef idx="3">
-            <a:schemeClr val="accent1"/>
-          </a:fillRef>
-          <a:effectRef idx="2">
-            <a:schemeClr val="accent1"/>
-          </a:effectRef>
-          <a:fontRef idx="minor">
-            <a:schemeClr val="lt1"/>
-          </a:fontRef>
-        </p:style>
-        <p:txBody>
-          <a:bodyPr rtlCol="0" anchor="ctr"/>
-          <a:lstStyle/>
-          <a:p>
-            <a:pPr algn="ctr"/>
+              <a:t>M08  ·  SCHAUBILD</a:t>
+            </a:r>
+          </a:p>
+        </p:txBody>
+      </p:sp>
+      <p:sp>
+        <p:nvSpPr>
+          <p:cNvPr id="5" name="TextBox 4"/>
+          <p:cNvSpPr txBox="1"/>
+          <p:nvPr/>
+        </p:nvSpPr>
+        <p:spPr>
+          <a:xfrm>
+            <a:off x="685800" y="502920"/>
+            <a:ext cx="10817352" cy="594360"/>
+          </a:xfrm>
+          <a:prstGeom prst="rect">
+            <a:avLst/>
+          </a:prstGeom>
+          <a:noFill/>
+        </p:spPr>
+        <p:txBody>
+          <a:bodyPr wrap="square">
+            <a:spAutoFit/>
+          </a:bodyPr>
+          <a:lstStyle/>
+          <a:p>
+            <a:pPr algn="l"/>
+            <a:r>
+              <a:rPr sz="2000" b="1" i="0">
+                <a:solidFill>
+                  <a:srgbClr val="1F2C56"/>
+                </a:solidFill>
+                <a:latin typeface="Source Serif 4"/>
+              </a:rPr>
+              <a:t>Handlungsempfehlung Immobilienfinanzierung</a:t>
+            </a:r>
           </a:p>
         </p:txBody>
       </p:sp>
@@ -4765,8 +4758,8 @@
         </p:nvSpPr>
         <p:spPr>
           <a:xfrm>
-            <a:off x="685800" y="502920"/>
-            <a:ext cx="36576" cy="658368"/>
+            <a:off x="685800" y="1143000"/>
+            <a:ext cx="10817352" cy="25400"/>
           </a:xfrm>
           <a:prstGeom prst="rect">
             <a:avLst/>
@@ -4800,295 +4793,33 @@
           </a:p>
         </p:txBody>
       </p:sp>
-      <p:sp>
-        <p:nvSpPr>
-          <p:cNvPr id="7" name="TextBox 6"/>
-          <p:cNvSpPr txBox="1"/>
-          <p:nvPr/>
-        </p:nvSpPr>
-        <p:spPr>
-          <a:xfrm>
-            <a:off x="813816" y="502920"/>
-            <a:ext cx="10634472" cy="685800"/>
-          </a:xfrm>
-          <a:prstGeom prst="rect">
-            <a:avLst/>
-          </a:prstGeom>
-          <a:noFill/>
-        </p:spPr>
-        <p:txBody>
-          <a:bodyPr wrap="square">
-            <a:spAutoFit/>
-          </a:bodyPr>
-          <a:lstStyle/>
-          <a:p>
-            <a:pPr algn="l"/>
-            <a:r>
-              <a:rPr sz="2400" b="1" i="0">
-                <a:solidFill>
-                  <a:srgbClr val="1F2C56"/>
-                </a:solidFill>
-                <a:latin typeface="Source Serif 4"/>
-              </a:rPr>
-              <a:t>Praxiscase: Quartier Sonnenhalde – Bauträgerfinanzierung Ravensburg</a:t>
-            </a:r>
-          </a:p>
-        </p:txBody>
-      </p:sp>
-      <p:sp>
-        <p:nvSpPr>
-          <p:cNvPr id="8" name="TextBox 7"/>
-          <p:cNvSpPr txBox="1"/>
-          <p:nvPr/>
-        </p:nvSpPr>
-        <p:spPr>
-          <a:xfrm>
-            <a:off x="685800" y="1417320"/>
-            <a:ext cx="10817352" cy="5029200"/>
-          </a:xfrm>
-          <a:prstGeom prst="rect">
-            <a:avLst/>
-          </a:prstGeom>
-          <a:noFill/>
-        </p:spPr>
-        <p:txBody>
-          <a:bodyPr wrap="square">
-            <a:spAutoFit/>
-          </a:bodyPr>
-          <a:lstStyle/>
-          <a:p>
-            <a:pPr>
-              <a:spcBef>
-                <a:spcPts val="1000"/>
-              </a:spcBef>
-              <a:spcAft>
-                <a:spcPts val="200"/>
-              </a:spcAft>
-            </a:pPr>
-            <a:r>
-              <a:rPr sz="800" b="1">
-                <a:solidFill>
-                  <a:srgbClr val="78808C"/>
-                </a:solidFill>
-                <a:latin typeface="JetBrains Mono"/>
-              </a:rPr>
-              <a:t>UNTERNEHMENSPORTRÄT</a:t>
-            </a:r>
-          </a:p>
-          <a:p>
-            <a:pPr>
-              <a:spcBef>
-                <a:spcPts val="400"/>
-              </a:spcBef>
-              <a:spcAft>
-                <a:spcPts val="200"/>
-              </a:spcAft>
-            </a:pPr>
-            <a:r>
-              <a:rPr sz="1200">
-                <a:solidFill>
-                  <a:srgbClr val="3D5466"/>
-                </a:solidFill>
-                <a:latin typeface="Arial"/>
-              </a:rPr>
-              <a:t>Das Projekt "Sonnenhalde":</a:t>
-            </a:r>
-          </a:p>
-          <a:p>
-            <a:pPr>
-              <a:spcBef>
-                <a:spcPts val="400"/>
-              </a:spcBef>
-              <a:spcAft>
-                <a:spcPts val="200"/>
-              </a:spcAft>
-            </a:pPr>
-            <a:r>
-              <a:rPr sz="1300">
-                <a:solidFill>
-                  <a:srgbClr val="3D5466"/>
-                </a:solidFill>
-                <a:latin typeface="Arial"/>
-              </a:rPr>
-              <a:t>▸  Lage: Ravensburg-Südstadt, aufgewertetes Quartier, gute ÖPNV-Anbindung</a:t>
-            </a:r>
-          </a:p>
-          <a:p>
-            <a:pPr>
-              <a:spcBef>
-                <a:spcPts val="400"/>
-              </a:spcBef>
-              <a:spcAft>
-                <a:spcPts val="200"/>
-              </a:spcAft>
-            </a:pPr>
-            <a:r>
-              <a:rPr sz="1300">
-                <a:solidFill>
-                  <a:srgbClr val="3D5466"/>
-                </a:solidFill>
-                <a:latin typeface="Arial"/>
-              </a:rPr>
-              <a:t>▸  Nutzung: 16 Eigentumswohnungen (60–110 m², 2–4 Zimmer)</a:t>
-            </a:r>
-          </a:p>
-          <a:p>
-            <a:pPr>
-              <a:spcBef>
-                <a:spcPts val="400"/>
-              </a:spcBef>
-              <a:spcAft>
-                <a:spcPts val="200"/>
-              </a:spcAft>
-            </a:pPr>
-            <a:r>
-              <a:rPr sz="1300">
-                <a:solidFill>
-                  <a:srgbClr val="3D5466"/>
-                </a:solidFill>
-                <a:latin typeface="Arial"/>
-              </a:rPr>
-              <a:t>▸  Baugenehmigung: seit März 2026 rechtskräftig</a:t>
-            </a:r>
-          </a:p>
-          <a:p>
-            <a:pPr>
-              <a:spcBef>
-                <a:spcPts val="400"/>
-              </a:spcBef>
-              <a:spcAft>
-                <a:spcPts val="200"/>
-              </a:spcAft>
-            </a:pPr>
-            <a:r>
-              <a:rPr sz="1300">
-                <a:solidFill>
-                  <a:srgbClr val="3D5466"/>
-                </a:solidFill>
-                <a:latin typeface="Arial"/>
-              </a:rPr>
-              <a:t>▸  Baubeginn: geplant April 2027 (Vorlaufzeit für Beurkundungen und Bauvorbereitungen realistisch eingeplant)</a:t>
-            </a:r>
-          </a:p>
-          <a:p>
-            <a:pPr>
-              <a:spcBef>
-                <a:spcPts val="400"/>
-              </a:spcBef>
-              <a:spcAft>
-                <a:spcPts val="200"/>
-              </a:spcAft>
-            </a:pPr>
-            <a:r>
-              <a:rPr sz="1300">
-                <a:solidFill>
-                  <a:srgbClr val="3D5466"/>
-                </a:solidFill>
-                <a:latin typeface="Arial"/>
-              </a:rPr>
-              <a:t>▸  Fertigstellung: Juni 2028</a:t>
-            </a:r>
-          </a:p>
-          <a:p>
-            <a:pPr>
-              <a:spcBef>
-                <a:spcPts val="400"/>
-              </a:spcBef>
-              <a:spcAft>
-                <a:spcPts val="200"/>
-              </a:spcAft>
-            </a:pPr>
-            <a:r>
-              <a:rPr sz="1300">
-                <a:solidFill>
-                  <a:srgbClr val="3D5466"/>
-                </a:solidFill>
-                <a:latin typeface="Arial"/>
-              </a:rPr>
-              <a:t>▸  Vertrieb: eigenes Vertriebsbüro + regionaler Maklerpartner</a:t>
-            </a:r>
-          </a:p>
-          <a:p>
-            <a:pPr>
-              <a:spcBef>
-                <a:spcPts val="400"/>
-              </a:spcBef>
-              <a:spcAft>
-                <a:spcPts val="200"/>
-              </a:spcAft>
-            </a:pPr>
-            <a:r>
-              <a:rPr sz="1300">
-                <a:solidFill>
-                  <a:srgbClr val="3D5466"/>
-                </a:solidFill>
-                <a:latin typeface="Arial"/>
-              </a:rPr>
-              <a:t>▸  Vorverkäufe zum Zeitpunkt der Kreditanfrage: 4 von 16 Einheiten notariell beurkundet (25 %)</a:t>
-            </a:r>
-          </a:p>
-          <a:p>
-            <a:pPr>
-              <a:spcBef>
-                <a:spcPts val="1000"/>
-              </a:spcBef>
-              <a:spcAft>
-                <a:spcPts val="200"/>
-              </a:spcAft>
-            </a:pPr>
-            <a:r>
-              <a:rPr sz="800" b="1">
-                <a:solidFill>
-                  <a:srgbClr val="78808C"/>
-                </a:solidFill>
-                <a:latin typeface="JetBrains Mono"/>
-              </a:rPr>
-              <a:t>PROJEKTFINANZIERUNG – ECKDATEN</a:t>
-            </a:r>
-          </a:p>
-          <a:p>
-            <a:pPr>
-              <a:spcBef>
-                <a:spcPts val="400"/>
-              </a:spcBef>
-              <a:spcAft>
-                <a:spcPts val="200"/>
-              </a:spcAft>
-            </a:pPr>
-            <a:r>
-              <a:rPr sz="1200">
-                <a:solidFill>
-                  <a:srgbClr val="3D5466"/>
-                </a:solidFill>
-                <a:latin typeface="Arial"/>
-              </a:rPr>
-              <a:t>Prognostizierte Verkaufserlöse:</a:t>
-            </a:r>
-          </a:p>
-          <a:p>
-            <a:pPr>
-              <a:spcBef>
-                <a:spcPts val="1000"/>
-              </a:spcBef>
-              <a:spcAft>
-                <a:spcPts val="200"/>
-              </a:spcAft>
-            </a:pPr>
-            <a:r>
-              <a:rPr sz="800" b="1">
-                <a:solidFill>
-                  <a:srgbClr val="78808C"/>
-                </a:solidFill>
-                <a:latin typeface="JetBrains Mono"/>
-              </a:rPr>
-              <a:t>AUFGABEN (GRUPPENARBEIT, JE GRUPPE CA. 60 MIN.)</a:t>
-            </a:r>
-          </a:p>
-        </p:txBody>
-      </p:sp>
-      <p:sp>
-        <p:nvSpPr>
-          <p:cNvPr id="9" name="Rectangle 8"/>
+      <p:pic>
+        <p:nvPicPr>
+          <p:cNvPr id="7" name="Picture 6" descr="image.png"/>
+          <p:cNvPicPr>
+            <a:picLocks noChangeAspect="1"/>
+          </p:cNvPicPr>
+          <p:nvPr/>
+        </p:nvPicPr>
+        <p:blipFill>
+          <a:blip r:embed="rId2"/>
+          <a:stretch>
+            <a:fillRect/>
+          </a:stretch>
+        </p:blipFill>
+        <p:spPr>
+          <a:xfrm>
+            <a:off x="2303489" y="1325880"/>
+            <a:ext cx="7581973" cy="4937760"/>
+          </a:xfrm>
+          <a:prstGeom prst="rect">
+            <a:avLst/>
+          </a:prstGeom>
+        </p:spPr>
+      </p:pic>
+      <p:sp>
+        <p:nvSpPr>
+          <p:cNvPr id="8" name="Rectangle 7"/>
           <p:cNvSpPr/>
           <p:nvPr/>
         </p:nvSpPr>
@@ -5131,7 +4862,7 @@
       </p:sp>
       <p:sp>
         <p:nvSpPr>
-          <p:cNvPr id="10" name="TextBox 9"/>
+          <p:cNvPr id="9" name="TextBox 8"/>
           <p:cNvSpPr txBox="1"/>
           <p:nvPr/>
         </p:nvSpPr>
@@ -5160,6 +4891,41 @@
                 <a:latin typeface="JetBrains Mono"/>
               </a:rPr>
               <a:t>Benedikt Zoller Coaching  ·  FKB Campus  ·  M08</a:t>
+            </a:r>
+          </a:p>
+        </p:txBody>
+      </p:sp>
+      <p:sp>
+        <p:nvSpPr>
+          <p:cNvPr id="10" name="TextBox 9"/>
+          <p:cNvSpPr txBox="1"/>
+          <p:nvPr/>
+        </p:nvSpPr>
+        <p:spPr>
+          <a:xfrm>
+            <a:off x="7176211" y="6583680"/>
+            <a:ext cx="4326940" cy="256032"/>
+          </a:xfrm>
+          <a:prstGeom prst="rect">
+            <a:avLst/>
+          </a:prstGeom>
+          <a:noFill/>
+        </p:spPr>
+        <p:txBody>
+          <a:bodyPr wrap="none">
+            <a:spAutoFit/>
+          </a:bodyPr>
+          <a:lstStyle/>
+          <a:p>
+            <a:pPr algn="r"/>
+            <a:r>
+              <a:rPr sz="700">
+                <a:solidFill>
+                  <a:srgbClr val="A0B4D2"/>
+                </a:solidFill>
+                <a:latin typeface="JetBrains Mono"/>
+              </a:rPr>
+              <a:t>Schaubild</a:t>
             </a:r>
           </a:p>
         </p:txBody>
@@ -5419,6 +5185,595 @@
                 </a:solidFill>
                 <a:latin typeface="Source Serif 4"/>
               </a:rPr>
+              <a:t>Praxiscase: Quartier Sonnenhalde – Bauträgerfinanzierung Ravensburg</a:t>
+            </a:r>
+          </a:p>
+        </p:txBody>
+      </p:sp>
+      <p:sp>
+        <p:nvSpPr>
+          <p:cNvPr id="8" name="TextBox 7"/>
+          <p:cNvSpPr txBox="1"/>
+          <p:nvPr/>
+        </p:nvSpPr>
+        <p:spPr>
+          <a:xfrm>
+            <a:off x="685800" y="1417320"/>
+            <a:ext cx="10817352" cy="5029200"/>
+          </a:xfrm>
+          <a:prstGeom prst="rect">
+            <a:avLst/>
+          </a:prstGeom>
+          <a:noFill/>
+        </p:spPr>
+        <p:txBody>
+          <a:bodyPr wrap="square">
+            <a:spAutoFit/>
+          </a:bodyPr>
+          <a:lstStyle/>
+          <a:p>
+            <a:pPr>
+              <a:spcBef>
+                <a:spcPts val="1000"/>
+              </a:spcBef>
+              <a:spcAft>
+                <a:spcPts val="200"/>
+              </a:spcAft>
+            </a:pPr>
+            <a:r>
+              <a:rPr sz="800" b="1">
+                <a:solidFill>
+                  <a:srgbClr val="78808C"/>
+                </a:solidFill>
+                <a:latin typeface="JetBrains Mono"/>
+              </a:rPr>
+              <a:t>UNTERNEHMENSPORTRÄT</a:t>
+            </a:r>
+          </a:p>
+          <a:p>
+            <a:pPr>
+              <a:spcBef>
+                <a:spcPts val="400"/>
+              </a:spcBef>
+              <a:spcAft>
+                <a:spcPts val="200"/>
+              </a:spcAft>
+            </a:pPr>
+            <a:r>
+              <a:rPr sz="1200">
+                <a:solidFill>
+                  <a:srgbClr val="3D5466"/>
+                </a:solidFill>
+                <a:latin typeface="Arial"/>
+              </a:rPr>
+              <a:t>Das Projekt "Sonnenhalde":</a:t>
+            </a:r>
+          </a:p>
+          <a:p>
+            <a:pPr>
+              <a:spcBef>
+                <a:spcPts val="400"/>
+              </a:spcBef>
+              <a:spcAft>
+                <a:spcPts val="200"/>
+              </a:spcAft>
+            </a:pPr>
+            <a:r>
+              <a:rPr sz="1300">
+                <a:solidFill>
+                  <a:srgbClr val="3D5466"/>
+                </a:solidFill>
+                <a:latin typeface="Arial"/>
+              </a:rPr>
+              <a:t>▸  Lage: Ravensburg-Südstadt, aufgewertetes Quartier, gute ÖPNV-Anbindung</a:t>
+            </a:r>
+          </a:p>
+          <a:p>
+            <a:pPr>
+              <a:spcBef>
+                <a:spcPts val="400"/>
+              </a:spcBef>
+              <a:spcAft>
+                <a:spcPts val="200"/>
+              </a:spcAft>
+            </a:pPr>
+            <a:r>
+              <a:rPr sz="1300">
+                <a:solidFill>
+                  <a:srgbClr val="3D5466"/>
+                </a:solidFill>
+                <a:latin typeface="Arial"/>
+              </a:rPr>
+              <a:t>▸  Nutzung: 16 Eigentumswohnungen (60–110 m², 2–4 Zimmer)</a:t>
+            </a:r>
+          </a:p>
+          <a:p>
+            <a:pPr>
+              <a:spcBef>
+                <a:spcPts val="400"/>
+              </a:spcBef>
+              <a:spcAft>
+                <a:spcPts val="200"/>
+              </a:spcAft>
+            </a:pPr>
+            <a:r>
+              <a:rPr sz="1300">
+                <a:solidFill>
+                  <a:srgbClr val="3D5466"/>
+                </a:solidFill>
+                <a:latin typeface="Arial"/>
+              </a:rPr>
+              <a:t>▸  Baugenehmigung: seit März 2026 rechtskräftig</a:t>
+            </a:r>
+          </a:p>
+          <a:p>
+            <a:pPr>
+              <a:spcBef>
+                <a:spcPts val="400"/>
+              </a:spcBef>
+              <a:spcAft>
+                <a:spcPts val="200"/>
+              </a:spcAft>
+            </a:pPr>
+            <a:r>
+              <a:rPr sz="1300">
+                <a:solidFill>
+                  <a:srgbClr val="3D5466"/>
+                </a:solidFill>
+                <a:latin typeface="Arial"/>
+              </a:rPr>
+              <a:t>▸  Baubeginn: geplant April 2027 (Vorlaufzeit für Beurkundungen und Bauvorbereitungen realistisch eingeplant)</a:t>
+            </a:r>
+          </a:p>
+          <a:p>
+            <a:pPr>
+              <a:spcBef>
+                <a:spcPts val="400"/>
+              </a:spcBef>
+              <a:spcAft>
+                <a:spcPts val="200"/>
+              </a:spcAft>
+            </a:pPr>
+            <a:r>
+              <a:rPr sz="1300">
+                <a:solidFill>
+                  <a:srgbClr val="3D5466"/>
+                </a:solidFill>
+                <a:latin typeface="Arial"/>
+              </a:rPr>
+              <a:t>▸  Fertigstellung: Juni 2028</a:t>
+            </a:r>
+          </a:p>
+          <a:p>
+            <a:pPr>
+              <a:spcBef>
+                <a:spcPts val="400"/>
+              </a:spcBef>
+              <a:spcAft>
+                <a:spcPts val="200"/>
+              </a:spcAft>
+            </a:pPr>
+            <a:r>
+              <a:rPr sz="1300">
+                <a:solidFill>
+                  <a:srgbClr val="3D5466"/>
+                </a:solidFill>
+                <a:latin typeface="Arial"/>
+              </a:rPr>
+              <a:t>▸  Vertrieb: eigenes Vertriebsbüro + regionaler Maklerpartner</a:t>
+            </a:r>
+          </a:p>
+          <a:p>
+            <a:pPr>
+              <a:spcBef>
+                <a:spcPts val="400"/>
+              </a:spcBef>
+              <a:spcAft>
+                <a:spcPts val="200"/>
+              </a:spcAft>
+            </a:pPr>
+            <a:r>
+              <a:rPr sz="1300">
+                <a:solidFill>
+                  <a:srgbClr val="3D5466"/>
+                </a:solidFill>
+                <a:latin typeface="Arial"/>
+              </a:rPr>
+              <a:t>▸  Vorverkäufe zum Zeitpunkt der Kreditanfrage: 4 von 16 Einheiten notariell beurkundet (25 %)</a:t>
+            </a:r>
+          </a:p>
+          <a:p>
+            <a:pPr>
+              <a:spcBef>
+                <a:spcPts val="1000"/>
+              </a:spcBef>
+              <a:spcAft>
+                <a:spcPts val="200"/>
+              </a:spcAft>
+            </a:pPr>
+            <a:r>
+              <a:rPr sz="800" b="1">
+                <a:solidFill>
+                  <a:srgbClr val="78808C"/>
+                </a:solidFill>
+                <a:latin typeface="JetBrains Mono"/>
+              </a:rPr>
+              <a:t>PROJEKTFINANZIERUNG – ECKDATEN</a:t>
+            </a:r>
+          </a:p>
+          <a:p>
+            <a:pPr>
+              <a:spcBef>
+                <a:spcPts val="400"/>
+              </a:spcBef>
+              <a:spcAft>
+                <a:spcPts val="200"/>
+              </a:spcAft>
+            </a:pPr>
+            <a:r>
+              <a:rPr sz="1200">
+                <a:solidFill>
+                  <a:srgbClr val="3D5466"/>
+                </a:solidFill>
+                <a:latin typeface="Arial"/>
+              </a:rPr>
+              <a:t>Prognostizierte Verkaufserlöse:</a:t>
+            </a:r>
+          </a:p>
+          <a:p>
+            <a:pPr>
+              <a:spcBef>
+                <a:spcPts val="1000"/>
+              </a:spcBef>
+              <a:spcAft>
+                <a:spcPts val="200"/>
+              </a:spcAft>
+            </a:pPr>
+            <a:r>
+              <a:rPr sz="800" b="1">
+                <a:solidFill>
+                  <a:srgbClr val="78808C"/>
+                </a:solidFill>
+                <a:latin typeface="JetBrains Mono"/>
+              </a:rPr>
+              <a:t>AUFGABEN (GRUPPENARBEIT, JE GRUPPE CA. 60 MIN.)</a:t>
+            </a:r>
+          </a:p>
+        </p:txBody>
+      </p:sp>
+      <p:sp>
+        <p:nvSpPr>
+          <p:cNvPr id="9" name="Rectangle 8"/>
+          <p:cNvSpPr/>
+          <p:nvPr/>
+        </p:nvSpPr>
+        <p:spPr>
+          <a:xfrm>
+            <a:off x="0" y="6510528"/>
+            <a:ext cx="12188952" cy="347472"/>
+          </a:xfrm>
+          <a:prstGeom prst="rect">
+            <a:avLst/>
+          </a:prstGeom>
+          <a:solidFill>
+            <a:srgbClr val="0A1937"/>
+          </a:solidFill>
+          <a:ln>
+            <a:noFill/>
+          </a:ln>
+        </p:spPr>
+        <p:style>
+          <a:lnRef idx="1">
+            <a:schemeClr val="accent1"/>
+          </a:lnRef>
+          <a:fillRef idx="3">
+            <a:schemeClr val="accent1"/>
+          </a:fillRef>
+          <a:effectRef idx="2">
+            <a:schemeClr val="accent1"/>
+          </a:effectRef>
+          <a:fontRef idx="minor">
+            <a:schemeClr val="lt1"/>
+          </a:fontRef>
+        </p:style>
+        <p:txBody>
+          <a:bodyPr rtlCol="0" anchor="ctr"/>
+          <a:lstStyle/>
+          <a:p>
+            <a:pPr algn="ctr"/>
+          </a:p>
+        </p:txBody>
+      </p:sp>
+      <p:sp>
+        <p:nvSpPr>
+          <p:cNvPr id="10" name="TextBox 9"/>
+          <p:cNvSpPr txBox="1"/>
+          <p:nvPr/>
+        </p:nvSpPr>
+        <p:spPr>
+          <a:xfrm>
+            <a:off x="685800" y="6583680"/>
+            <a:ext cx="6490411" cy="256032"/>
+          </a:xfrm>
+          <a:prstGeom prst="rect">
+            <a:avLst/>
+          </a:prstGeom>
+          <a:noFill/>
+        </p:spPr>
+        <p:txBody>
+          <a:bodyPr wrap="none">
+            <a:spAutoFit/>
+          </a:bodyPr>
+          <a:lstStyle/>
+          <a:p>
+            <a:pPr algn="l"/>
+            <a:r>
+              <a:rPr sz="700">
+                <a:solidFill>
+                  <a:srgbClr val="A0B4D2"/>
+                </a:solidFill>
+                <a:latin typeface="JetBrains Mono"/>
+              </a:rPr>
+              <a:t>Benedikt Zoller Coaching  ·  FKB Campus  ·  M08</a:t>
+            </a:r>
+          </a:p>
+        </p:txBody>
+      </p:sp>
+    </p:spTree>
+  </p:cSld>
+  <p:clrMapOvr>
+    <a:masterClrMapping/>
+  </p:clrMapOvr>
+</p:sld>
+</file>
+
+<file path=ppt/slides/slide12.xml><?xml version="1.0" encoding="utf-8"?>
+<p:sld xmlns:a="http://schemas.openxmlformats.org/drawingml/2006/main" xmlns:p="http://schemas.openxmlformats.org/presentationml/2006/main" xmlns:r="http://schemas.openxmlformats.org/officeDocument/2006/relationships">
+  <p:cSld>
+    <p:spTree>
+      <p:nvGrpSpPr>
+        <p:cNvPr id="1" name=""/>
+        <p:cNvGrpSpPr/>
+        <p:nvPr/>
+      </p:nvGrpSpPr>
+      <p:grpSpPr/>
+      <p:sp>
+        <p:nvSpPr>
+          <p:cNvPr id="2" name="Rectangle 1"/>
+          <p:cNvSpPr/>
+          <p:nvPr/>
+        </p:nvSpPr>
+        <p:spPr>
+          <a:xfrm>
+            <a:off x="0" y="0"/>
+            <a:ext cx="12188952" cy="6858000"/>
+          </a:xfrm>
+          <a:prstGeom prst="rect">
+            <a:avLst/>
+          </a:prstGeom>
+          <a:solidFill>
+            <a:srgbClr val="EDEDF3"/>
+          </a:solidFill>
+          <a:ln>
+            <a:noFill/>
+          </a:ln>
+        </p:spPr>
+        <p:style>
+          <a:lnRef idx="1">
+            <a:schemeClr val="accent1"/>
+          </a:lnRef>
+          <a:fillRef idx="3">
+            <a:schemeClr val="accent1"/>
+          </a:fillRef>
+          <a:effectRef idx="2">
+            <a:schemeClr val="accent1"/>
+          </a:effectRef>
+          <a:fontRef idx="minor">
+            <a:schemeClr val="lt1"/>
+          </a:fontRef>
+        </p:style>
+        <p:txBody>
+          <a:bodyPr rtlCol="0" anchor="ctr"/>
+          <a:lstStyle/>
+          <a:p>
+            <a:pPr algn="ctr"/>
+          </a:p>
+        </p:txBody>
+      </p:sp>
+      <p:sp>
+        <p:nvSpPr>
+          <p:cNvPr id="3" name="Rectangle 2"/>
+          <p:cNvSpPr/>
+          <p:nvPr/>
+        </p:nvSpPr>
+        <p:spPr>
+          <a:xfrm>
+            <a:off x="0" y="0"/>
+            <a:ext cx="12188952" cy="50292"/>
+          </a:xfrm>
+          <a:prstGeom prst="rect">
+            <a:avLst/>
+          </a:prstGeom>
+          <a:solidFill>
+            <a:srgbClr val="1F2C56"/>
+          </a:solidFill>
+          <a:ln>
+            <a:noFill/>
+          </a:ln>
+        </p:spPr>
+        <p:style>
+          <a:lnRef idx="1">
+            <a:schemeClr val="accent1"/>
+          </a:lnRef>
+          <a:fillRef idx="3">
+            <a:schemeClr val="accent1"/>
+          </a:fillRef>
+          <a:effectRef idx="2">
+            <a:schemeClr val="accent1"/>
+          </a:effectRef>
+          <a:fontRef idx="minor">
+            <a:schemeClr val="lt1"/>
+          </a:fontRef>
+        </p:style>
+        <p:txBody>
+          <a:bodyPr rtlCol="0" anchor="ctr"/>
+          <a:lstStyle/>
+          <a:p>
+            <a:pPr algn="ctr"/>
+          </a:p>
+        </p:txBody>
+      </p:sp>
+      <p:sp>
+        <p:nvSpPr>
+          <p:cNvPr id="4" name="TextBox 3"/>
+          <p:cNvSpPr txBox="1"/>
+          <p:nvPr/>
+        </p:nvSpPr>
+        <p:spPr>
+          <a:xfrm>
+            <a:off x="685800" y="109728"/>
+            <a:ext cx="10817352" cy="228600"/>
+          </a:xfrm>
+          <a:prstGeom prst="rect">
+            <a:avLst/>
+          </a:prstGeom>
+          <a:noFill/>
+        </p:spPr>
+        <p:txBody>
+          <a:bodyPr wrap="none">
+            <a:spAutoFit/>
+          </a:bodyPr>
+          <a:lstStyle/>
+          <a:p>
+            <a:pPr algn="l"/>
+            <a:r>
+              <a:rPr sz="750">
+                <a:solidFill>
+                  <a:srgbClr val="78808C"/>
+                </a:solidFill>
+                <a:latin typeface="JetBrains Mono"/>
+              </a:rPr>
+              <a:t>M08  ·  INHALT</a:t>
+            </a:r>
+          </a:p>
+        </p:txBody>
+      </p:sp>
+      <p:sp>
+        <p:nvSpPr>
+          <p:cNvPr id="5" name="Rectangle 4"/>
+          <p:cNvSpPr/>
+          <p:nvPr/>
+        </p:nvSpPr>
+        <p:spPr>
+          <a:xfrm>
+            <a:off x="0" y="1234440"/>
+            <a:ext cx="12188952" cy="12700"/>
+          </a:xfrm>
+          <a:prstGeom prst="rect">
+            <a:avLst/>
+          </a:prstGeom>
+          <a:solidFill>
+            <a:srgbClr val="D8DFE4"/>
+          </a:solidFill>
+          <a:ln>
+            <a:noFill/>
+          </a:ln>
+        </p:spPr>
+        <p:style>
+          <a:lnRef idx="1">
+            <a:schemeClr val="accent1"/>
+          </a:lnRef>
+          <a:fillRef idx="3">
+            <a:schemeClr val="accent1"/>
+          </a:fillRef>
+          <a:effectRef idx="2">
+            <a:schemeClr val="accent1"/>
+          </a:effectRef>
+          <a:fontRef idx="minor">
+            <a:schemeClr val="lt1"/>
+          </a:fontRef>
+        </p:style>
+        <p:txBody>
+          <a:bodyPr rtlCol="0" anchor="ctr"/>
+          <a:lstStyle/>
+          <a:p>
+            <a:pPr algn="ctr"/>
+          </a:p>
+        </p:txBody>
+      </p:sp>
+      <p:sp>
+        <p:nvSpPr>
+          <p:cNvPr id="6" name="Rectangle 5"/>
+          <p:cNvSpPr/>
+          <p:nvPr/>
+        </p:nvSpPr>
+        <p:spPr>
+          <a:xfrm>
+            <a:off x="685800" y="502920"/>
+            <a:ext cx="36576" cy="658368"/>
+          </a:xfrm>
+          <a:prstGeom prst="rect">
+            <a:avLst/>
+          </a:prstGeom>
+          <a:solidFill>
+            <a:srgbClr val="D9C089"/>
+          </a:solidFill>
+          <a:ln>
+            <a:noFill/>
+          </a:ln>
+        </p:spPr>
+        <p:style>
+          <a:lnRef idx="1">
+            <a:schemeClr val="accent1"/>
+          </a:lnRef>
+          <a:fillRef idx="3">
+            <a:schemeClr val="accent1"/>
+          </a:fillRef>
+          <a:effectRef idx="2">
+            <a:schemeClr val="accent1"/>
+          </a:effectRef>
+          <a:fontRef idx="minor">
+            <a:schemeClr val="lt1"/>
+          </a:fontRef>
+        </p:style>
+        <p:txBody>
+          <a:bodyPr rtlCol="0" anchor="ctr"/>
+          <a:lstStyle/>
+          <a:p>
+            <a:pPr algn="ctr"/>
+          </a:p>
+        </p:txBody>
+      </p:sp>
+      <p:sp>
+        <p:nvSpPr>
+          <p:cNvPr id="7" name="TextBox 6"/>
+          <p:cNvSpPr txBox="1"/>
+          <p:nvPr/>
+        </p:nvSpPr>
+        <p:spPr>
+          <a:xfrm>
+            <a:off x="813816" y="502920"/>
+            <a:ext cx="10634472" cy="685800"/>
+          </a:xfrm>
+          <a:prstGeom prst="rect">
+            <a:avLst/>
+          </a:prstGeom>
+          <a:noFill/>
+        </p:spPr>
+        <p:txBody>
+          <a:bodyPr wrap="square">
+            <a:spAutoFit/>
+          </a:bodyPr>
+          <a:lstStyle/>
+          <a:p>
+            <a:pPr algn="l"/>
+            <a:r>
+              <a:rPr sz="2400" b="1" i="0">
+                <a:solidFill>
+                  <a:srgbClr val="1F2C56"/>
+                </a:solidFill>
+                <a:latin typeface="Source Serif 4"/>
+              </a:rPr>
               <a:t>Reflexionsfragen</a:t>
             </a:r>
           </a:p>
@@ -5735,7 +6090,7 @@
                 </a:solidFill>
                 <a:latin typeface="JetBrains Mono"/>
               </a:rPr>
-              <a:t>LERNZIELE  ·  M08</a:t>
+              <a:t>ÜBERBLICK  ·  M08</a:t>
             </a:r>
           </a:p>
         </p:txBody>
@@ -5813,7 +6168,7 @@
                 </a:solidFill>
                 <a:latin typeface="Source Serif 4"/>
               </a:rPr>
-              <a:t>Was Sie heute mitnehmen</a:t>
+              <a:t>Worum geht es heute</a:t>
             </a:r>
           </a:p>
         </p:txBody>
@@ -5826,8 +6181,8 @@
         </p:nvSpPr>
         <p:spPr>
           <a:xfrm>
-            <a:off x="685800" y="1371600"/>
-            <a:ext cx="10817352" cy="5120640"/>
+            <a:off x="685800" y="1737360"/>
+            <a:ext cx="9720072" cy="4206240"/>
           </a:xfrm>
           <a:prstGeom prst="rect">
             <a:avLst/>
@@ -5841,97 +6196,50 @@
           <a:lstStyle/>
           <a:p>
             <a:pPr>
-              <a:spcBef>
-                <a:spcPts val="800"/>
-              </a:spcBef>
               <a:spcAft>
-                <a:spcPts val="200"/>
+                <a:spcPts val="1200"/>
               </a:spcAft>
             </a:pPr>
             <a:r>
-              <a:rPr sz="1400">
+              <a:rPr sz="1700">
                 <a:solidFill>
                   <a:srgbClr val="3D5466"/>
                 </a:solidFill>
                 <a:latin typeface="Arial"/>
               </a:rPr>
-              <a:t>▸  Drei Kundentypologien (Bestandshalter, Bauträger, Projektentwickler) anhand Geschäftsmodell und Risikoprofil unterscheiden</a:t>
+              <a:t>Bestandshalter, Bauträger, Projektentwickler – drei Kundentypen, drei völlig verschiedene Risikoprofile.</a:t>
             </a:r>
           </a:p>
           <a:p>
             <a:pPr>
-              <a:spcBef>
-                <a:spcPts val="800"/>
-              </a:spcBef>
               <a:spcAft>
-                <a:spcPts val="200"/>
+                <a:spcPts val="1200"/>
               </a:spcAft>
             </a:pPr>
             <a:r>
-              <a:rPr sz="1400">
+              <a:rPr sz="1700">
                 <a:solidFill>
                   <a:srgbClr val="3D5466"/>
                 </a:solidFill>
                 <a:latin typeface="Arial"/>
               </a:rPr>
-              <a:t>▸  Beleihungswert nach BelWertV (Ertragswert- und Sachwertverfahren) berechnen und kreditpraktisch einordnen</a:t>
+              <a:t>Sie lernen die Typologie, die BelWertV-Bewertungslogik und die Kennzahlen LTV und DSCR und wenden alles auf ein komplettes Bauträgerprojekt an.</a:t>
             </a:r>
           </a:p>
           <a:p>
             <a:pPr>
-              <a:spcBef>
-                <a:spcPts val="800"/>
-              </a:spcBef>
               <a:spcAft>
-                <a:spcPts val="200"/>
+                <a:spcPts val="1200"/>
               </a:spcAft>
             </a:pPr>
             <a:r>
-              <a:rPr sz="1400">
+              <a:rPr sz="1700">
                 <a:solidFill>
                   <a:srgbClr val="3D5466"/>
                 </a:solidFill>
                 <a:latin typeface="Arial"/>
               </a:rPr>
-              <a:t>▸  Kennzahlen LTV, DSCR, ICR und Nettoanfangsrendite berechnen und interpretieren</a:t>
-            </a:r>
-          </a:p>
-          <a:p>
-            <a:pPr>
-              <a:spcBef>
-                <a:spcPts val="800"/>
-              </a:spcBef>
-              <a:spcAft>
-                <a:spcPts val="200"/>
-              </a:spcAft>
-            </a:pPr>
-            <a:r>
-              <a:rPr sz="1400">
-                <a:solidFill>
-                  <a:srgbClr val="3D5466"/>
-                </a:solidFill>
-                <a:latin typeface="Arial"/>
-              </a:rPr>
-              <a:t>▸  Risikofelder einer Bauträgerfinanzierung analysieren, gewichten und Risikominderungsmaßnahmen benennen</a:t>
-            </a:r>
-          </a:p>
-          <a:p>
-            <a:pPr>
-              <a:spcBef>
-                <a:spcPts val="800"/>
-              </a:spcBef>
-              <a:spcAft>
-                <a:spcPts val="200"/>
-              </a:spcAft>
-            </a:pPr>
-            <a:r>
-              <a:rPr sz="1400">
-                <a:solidFill>
-                  <a:srgbClr val="3D5466"/>
-                </a:solidFill>
-                <a:latin typeface="Arial"/>
-              </a:rPr>
-              <a:t>▸  Auf Basis einer vollständigen Projektanalyse eine strukturierte Kreditempfehlung erstellen</a:t>
+              <a:t>Danach beurteilen Sie Immobilienfinanzierungen strukturiert und setzen passende Auflagen.</a:t>
             </a:r>
           </a:p>
         </p:txBody>
@@ -6148,7 +6456,7 @@
                 </a:solidFill>
                 <a:latin typeface="JetBrains Mono"/>
               </a:rPr>
-              <a:t>AGENDA  ·  M08</a:t>
+              <a:t>LERNZIELE  ·  M08</a:t>
             </a:r>
           </a:p>
         </p:txBody>
@@ -6226,7 +6534,7 @@
                 </a:solidFill>
                 <a:latin typeface="Source Serif 4"/>
               </a:rPr>
-              <a:t>Agenda</a:t>
+              <a:t>Was Sie heute mitnehmen</a:t>
             </a:r>
           </a:p>
         </p:txBody>
@@ -6239,8 +6547,8 @@
         </p:nvSpPr>
         <p:spPr>
           <a:xfrm>
-            <a:off x="685800" y="1463040"/>
-            <a:ext cx="10817352" cy="4937760"/>
+            <a:off x="685800" y="1371600"/>
+            <a:ext cx="10817352" cy="5120640"/>
           </a:xfrm>
           <a:prstGeom prst="rect">
             <a:avLst/>
@@ -6262,13 +6570,13 @@
               </a:spcAft>
             </a:pPr>
             <a:r>
-              <a:rPr sz="1500">
+              <a:rPr sz="1400">
                 <a:solidFill>
                   <a:srgbClr val="3D5466"/>
                 </a:solidFill>
                 <a:latin typeface="Arial"/>
               </a:rPr>
-              <a:t>01   Theorie-Input 1: Kundentypologie der Immobilienfinanzierung</a:t>
+              <a:t>▸  Drei Kundentypologien (Bestandshalter, Bauträger, Projektentwickler) anhand Geschäftsmodell und Risikoprofil unterscheiden</a:t>
             </a:r>
           </a:p>
           <a:p>
@@ -6281,13 +6589,13 @@
               </a:spcAft>
             </a:pPr>
             <a:r>
-              <a:rPr sz="1500">
+              <a:rPr sz="1400">
                 <a:solidFill>
                   <a:srgbClr val="3D5466"/>
                 </a:solidFill>
                 <a:latin typeface="Arial"/>
               </a:rPr>
-              <a:t>02   Theorie-Input 2: Beleihungswertermittlung nach BelWertV</a:t>
+              <a:t>▸  Beleihungswert nach BelWertV (Ertragswert- und Sachwertverfahren) berechnen und kreditpraktisch einordnen</a:t>
             </a:r>
           </a:p>
           <a:p>
@@ -6300,13 +6608,13 @@
               </a:spcAft>
             </a:pPr>
             <a:r>
-              <a:rPr sz="1500">
+              <a:rPr sz="1400">
                 <a:solidFill>
                   <a:srgbClr val="3D5466"/>
                 </a:solidFill>
                 <a:latin typeface="Arial"/>
               </a:rPr>
-              <a:t>03   Theorie-Input 3: Kennzahlen der Immobilien- und Projektfinanzierung</a:t>
+              <a:t>▸  Kennzahlen LTV, DSCR, ICR und Nettoanfangsrendite berechnen und interpretieren</a:t>
             </a:r>
           </a:p>
           <a:p>
@@ -6319,13 +6627,13 @@
               </a:spcAft>
             </a:pPr>
             <a:r>
-              <a:rPr sz="1500">
+              <a:rPr sz="1400">
                 <a:solidFill>
                   <a:srgbClr val="3D5466"/>
                 </a:solidFill>
                 <a:latin typeface="Arial"/>
               </a:rPr>
-              <a:t>04   Theorie-Input 4: Risikofelder der Bauträgerfinanzierung</a:t>
+              <a:t>▸  Risikofelder einer Bauträgerfinanzierung analysieren, gewichten und Risikominderungsmaßnahmen benennen</a:t>
             </a:r>
           </a:p>
           <a:p>
@@ -6338,32 +6646,13 @@
               </a:spcAft>
             </a:pPr>
             <a:r>
-              <a:rPr sz="1500">
+              <a:rPr sz="1400">
                 <a:solidFill>
                   <a:srgbClr val="3D5466"/>
                 </a:solidFill>
                 <a:latin typeface="Arial"/>
               </a:rPr>
-              <a:t>05   Praxiscase: Quartier Sonnenhalde – Bauträgerfinanzierung Ravensburg</a:t>
-            </a:r>
-          </a:p>
-          <a:p>
-            <a:pPr>
-              <a:spcBef>
-                <a:spcPts val="800"/>
-              </a:spcBef>
-              <a:spcAft>
-                <a:spcPts val="200"/>
-              </a:spcAft>
-            </a:pPr>
-            <a:r>
-              <a:rPr sz="1500">
-                <a:solidFill>
-                  <a:srgbClr val="3D5466"/>
-                </a:solidFill>
-                <a:latin typeface="Arial"/>
-              </a:rPr>
-              <a:t>06   Reflexionsfragen</a:t>
+              <a:t>▸  Auf Basis einer vollständigen Projektanalyse eine strukturierte Kreditempfehlung erstellen</a:t>
             </a:r>
           </a:p>
         </p:txBody>
@@ -6580,7 +6869,7 @@
                 </a:solidFill>
                 <a:latin typeface="JetBrains Mono"/>
               </a:rPr>
-              <a:t>M08  ·  INHALT</a:t>
+              <a:t>AGENDA  ·  M08</a:t>
             </a:r>
           </a:p>
         </p:txBody>
@@ -6630,57 +6919,14 @@
       </p:sp>
       <p:sp>
         <p:nvSpPr>
-          <p:cNvPr id="6" name="Rectangle 5"/>
-          <p:cNvSpPr/>
+          <p:cNvPr id="6" name="TextBox 5"/>
+          <p:cNvSpPr txBox="1"/>
           <p:nvPr/>
         </p:nvSpPr>
         <p:spPr>
           <a:xfrm>
             <a:off x="685800" y="502920"/>
-            <a:ext cx="36576" cy="658368"/>
-          </a:xfrm>
-          <a:prstGeom prst="rect">
-            <a:avLst/>
-          </a:prstGeom>
-          <a:solidFill>
-            <a:srgbClr val="D9C089"/>
-          </a:solidFill>
-          <a:ln>
-            <a:noFill/>
-          </a:ln>
-        </p:spPr>
-        <p:style>
-          <a:lnRef idx="1">
-            <a:schemeClr val="accent1"/>
-          </a:lnRef>
-          <a:fillRef idx="3">
-            <a:schemeClr val="accent1"/>
-          </a:fillRef>
-          <a:effectRef idx="2">
-            <a:schemeClr val="accent1"/>
-          </a:effectRef>
-          <a:fontRef idx="minor">
-            <a:schemeClr val="lt1"/>
-          </a:fontRef>
-        </p:style>
-        <p:txBody>
-          <a:bodyPr rtlCol="0" anchor="ctr"/>
-          <a:lstStyle/>
-          <a:p>
-            <a:pPr algn="ctr"/>
-          </a:p>
-        </p:txBody>
-      </p:sp>
-      <p:sp>
-        <p:nvSpPr>
-          <p:cNvPr id="7" name="TextBox 6"/>
-          <p:cNvSpPr txBox="1"/>
-          <p:nvPr/>
-        </p:nvSpPr>
-        <p:spPr>
-          <a:xfrm>
-            <a:off x="813816" y="502920"/>
-            <a:ext cx="10634472" cy="685800"/>
+            <a:ext cx="10817352" cy="658368"/>
           </a:xfrm>
           <a:prstGeom prst="rect">
             <a:avLst/>
@@ -6695,27 +6941,27 @@
           <a:p>
             <a:pPr algn="l"/>
             <a:r>
-              <a:rPr sz="2400" b="1" i="0">
+              <a:rPr sz="2600" b="1" i="0">
                 <a:solidFill>
                   <a:srgbClr val="1F2C56"/>
                 </a:solidFill>
                 <a:latin typeface="Source Serif 4"/>
               </a:rPr>
-              <a:t>Theorie-Input 1: Kundentypologie der Immobilienfinanzierung</a:t>
-            </a:r>
-          </a:p>
-        </p:txBody>
-      </p:sp>
-      <p:sp>
-        <p:nvSpPr>
-          <p:cNvPr id="8" name="TextBox 7"/>
+              <a:t>Agenda</a:t>
+            </a:r>
+          </a:p>
+        </p:txBody>
+      </p:sp>
+      <p:sp>
+        <p:nvSpPr>
+          <p:cNvPr id="7" name="TextBox 6"/>
           <p:cNvSpPr txBox="1"/>
           <p:nvPr/>
         </p:nvSpPr>
         <p:spPr>
           <a:xfrm>
-            <a:off x="685800" y="1417320"/>
-            <a:ext cx="10817352" cy="5029200"/>
+            <a:off x="685800" y="1463040"/>
+            <a:ext cx="10817352" cy="4937760"/>
           </a:xfrm>
           <a:prstGeom prst="rect">
             <a:avLst/>
@@ -6730,236 +6976,122 @@
           <a:p>
             <a:pPr>
               <a:spcBef>
-                <a:spcPts val="1000"/>
+                <a:spcPts val="800"/>
               </a:spcBef>
               <a:spcAft>
                 <a:spcPts val="200"/>
               </a:spcAft>
             </a:pPr>
             <a:r>
-              <a:rPr sz="800" b="1">
-                <a:solidFill>
-                  <a:srgbClr val="78808C"/>
-                </a:solidFill>
-                <a:latin typeface="JetBrains Mono"/>
-              </a:rPr>
-              <a:t>DREI GRUNDTYPEN – DREI RISIKOLANDSCHAFTEN</a:t>
+              <a:rPr sz="1500">
+                <a:solidFill>
+                  <a:srgbClr val="3D5466"/>
+                </a:solidFill>
+                <a:latin typeface="Arial"/>
+              </a:rPr>
+              <a:t>01   Theorie-Input 1: Kundentypologie der Immobilienfinanzierung</a:t>
             </a:r>
           </a:p>
           <a:p>
             <a:pPr>
               <a:spcBef>
-                <a:spcPts val="400"/>
+                <a:spcPts val="800"/>
               </a:spcBef>
               <a:spcAft>
                 <a:spcPts val="200"/>
               </a:spcAft>
             </a:pPr>
             <a:r>
-              <a:rPr sz="1200">
+              <a:rPr sz="1500">
                 <a:solidFill>
                   <a:srgbClr val="3D5466"/>
                 </a:solidFill>
                 <a:latin typeface="Arial"/>
               </a:rPr>
-              <a:t>Typ 1: Bestandshalter</a:t>
+              <a:t>02   Theorie-Input 2: Beleihungswertermittlung nach BelWertV</a:t>
             </a:r>
           </a:p>
           <a:p>
             <a:pPr>
               <a:spcBef>
-                <a:spcPts val="400"/>
+                <a:spcPts val="800"/>
               </a:spcBef>
               <a:spcAft>
                 <a:spcPts val="200"/>
               </a:spcAft>
             </a:pPr>
             <a:r>
-              <a:rPr sz="1300">
+              <a:rPr sz="1500">
                 <a:solidFill>
                   <a:srgbClr val="3D5466"/>
                 </a:solidFill>
                 <a:latin typeface="Arial"/>
               </a:rPr>
-              <a:t>▸  Cashflow-Struktur: Stabile, planbare Mieteinnahmen – Finanzierungsrisiko hängt primär an Vermietungsstand und Mietzahlungsfähigkeit der Mieter</a:t>
+              <a:t>03   Theorie-Input 3: Kennzahlen der Immobilien- und Projektfinanzierung</a:t>
             </a:r>
           </a:p>
           <a:p>
             <a:pPr>
               <a:spcBef>
-                <a:spcPts val="400"/>
+                <a:spcPts val="800"/>
               </a:spcBef>
               <a:spcAft>
                 <a:spcPts val="200"/>
               </a:spcAft>
             </a:pPr>
             <a:r>
-              <a:rPr sz="1300">
+              <a:rPr sz="1500">
                 <a:solidFill>
                   <a:srgbClr val="3D5466"/>
                 </a:solidFill>
                 <a:latin typeface="Arial"/>
               </a:rPr>
-              <a:t>▸  Typischer Finanzierungsbedarf: Ankaufsfinanzierung, Refinanzierung, Modernisierungskredite</a:t>
+              <a:t>04   Theorie-Input 4: Risikofelder der Bauträgerfinanzierung</a:t>
             </a:r>
           </a:p>
           <a:p>
             <a:pPr>
               <a:spcBef>
-                <a:spcPts val="400"/>
+                <a:spcPts val="800"/>
               </a:spcBef>
               <a:spcAft>
                 <a:spcPts val="200"/>
               </a:spcAft>
             </a:pPr>
             <a:r>
-              <a:rPr sz="1300">
+              <a:rPr sz="1500">
                 <a:solidFill>
                   <a:srgbClr val="3D5466"/>
                 </a:solidFill>
                 <a:latin typeface="Arial"/>
               </a:rPr>
-              <a:t>▸  Kernkennzahl: DSCR (Debt Service Coverage Ratio) – können die Mieteinnahmen den Kapitaldienst dauerhaft abdecken?</a:t>
+              <a:t>05   Praxiscase: Quartier Sonnenhalde – Bauträgerfinanzierung Ravensburg</a:t>
             </a:r>
           </a:p>
           <a:p>
             <a:pPr>
               <a:spcBef>
-                <a:spcPts val="400"/>
+                <a:spcPts val="800"/>
               </a:spcBef>
               <a:spcAft>
                 <a:spcPts val="200"/>
               </a:spcAft>
             </a:pPr>
             <a:r>
-              <a:rPr sz="1300">
+              <a:rPr sz="1500">
                 <a:solidFill>
                   <a:srgbClr val="3D5466"/>
                 </a:solidFill>
                 <a:latin typeface="Arial"/>
               </a:rPr>
-              <a:t>▸  Hauptrisiko: Leerstandsrisiko, Mieterbonitätsrisiko, Instandhaltungsstau</a:t>
-            </a:r>
-          </a:p>
-          <a:p>
-            <a:pPr>
-              <a:spcBef>
-                <a:spcPts val="400"/>
-              </a:spcBef>
-              <a:spcAft>
-                <a:spcPts val="200"/>
-              </a:spcAft>
-            </a:pPr>
-            <a:r>
-              <a:rPr sz="1200">
-                <a:solidFill>
-                  <a:srgbClr val="3D5466"/>
-                </a:solidFill>
-                <a:latin typeface="Arial"/>
-              </a:rPr>
-              <a:t>Typ 2: Bauträger</a:t>
-            </a:r>
-          </a:p>
-          <a:p>
-            <a:pPr>
-              <a:spcBef>
-                <a:spcPts val="400"/>
-              </a:spcBef>
-              <a:spcAft>
-                <a:spcPts val="200"/>
-              </a:spcAft>
-            </a:pPr>
-            <a:r>
-              <a:rPr sz="1300">
-                <a:solidFill>
-                  <a:srgbClr val="3D5466"/>
-                </a:solidFill>
-                <a:latin typeface="Arial"/>
-              </a:rPr>
-              <a:t>▸  Cashflow-Struktur: Kein laufender Miet-Cashflow – Rückfluss ausschließlich aus Verkaufserlösen nach Fertigstellung. Das Kapital ist bis zum Verkauf vollständig gebunden.</a:t>
-            </a:r>
-          </a:p>
-          <a:p>
-            <a:pPr>
-              <a:spcBef>
-                <a:spcPts val="400"/>
-              </a:spcBef>
-              <a:spcAft>
-                <a:spcPts val="200"/>
-              </a:spcAft>
-            </a:pPr>
-            <a:r>
-              <a:rPr sz="1300">
-                <a:solidFill>
-                  <a:srgbClr val="3D5466"/>
-                </a:solidFill>
-                <a:latin typeface="Arial"/>
-              </a:rPr>
-              <a:t>▸  Typischer Finanzierungsbedarf: Kurzfristige Bauträgerfinanzierung (Laufzeit 18–36 Monate), strukturiert nach Baufortschritt</a:t>
-            </a:r>
-          </a:p>
-          <a:p>
-            <a:pPr>
-              <a:spcBef>
-                <a:spcPts val="400"/>
-              </a:spcBef>
-              <a:spcAft>
-                <a:spcPts val="200"/>
-              </a:spcAft>
-            </a:pPr>
-            <a:r>
-              <a:rPr sz="1300">
-                <a:solidFill>
-                  <a:srgbClr val="3D5466"/>
-                </a:solidFill>
-                <a:latin typeface="Arial"/>
-              </a:rPr>
-              <a:t>▸  Kernkennzahl: LTV (Loan-to-Value) bezogen auf prognostizierte Verkaufserlöse; Vorverkaufsquote</a:t>
-            </a:r>
-          </a:p>
-          <a:p>
-            <a:pPr>
-              <a:spcBef>
-                <a:spcPts val="400"/>
-              </a:spcBef>
-              <a:spcAft>
-                <a:spcPts val="200"/>
-              </a:spcAft>
-            </a:pPr>
-            <a:r>
-              <a:rPr sz="1300">
-                <a:solidFill>
-                  <a:srgbClr val="3D5466"/>
-                </a:solidFill>
-                <a:latin typeface="Arial"/>
-              </a:rPr>
-              <a:t>▸  Hauptrisiko: Fertigstellungsrisiko, Absatzrisiko, Kostenüberschreitungen</a:t>
-            </a:r>
-          </a:p>
-          <a:p>
-            <a:pPr>
-              <a:spcBef>
-                <a:spcPts val="400"/>
-              </a:spcBef>
-              <a:spcAft>
-                <a:spcPts val="200"/>
-              </a:spcAft>
-            </a:pPr>
-            <a:r>
-              <a:rPr sz="1200">
-                <a:solidFill>
-                  <a:srgbClr val="3D5466"/>
-                </a:solidFill>
-                <a:latin typeface="Arial"/>
-              </a:rPr>
-              <a:t>Typ 3: Projektentwickler</a:t>
-            </a:r>
-          </a:p>
-        </p:txBody>
-      </p:sp>
-      <p:sp>
-        <p:nvSpPr>
-          <p:cNvPr id="9" name="Rectangle 8"/>
+              <a:t>06   Reflexionsfragen</a:t>
+            </a:r>
+          </a:p>
+        </p:txBody>
+      </p:sp>
+      <p:sp>
+        <p:nvSpPr>
+          <p:cNvPr id="8" name="Rectangle 7"/>
           <p:cNvSpPr/>
           <p:nvPr/>
         </p:nvSpPr>
@@ -7002,7 +7134,7 @@
       </p:sp>
       <p:sp>
         <p:nvSpPr>
-          <p:cNvPr id="10" name="TextBox 9"/>
+          <p:cNvPr id="9" name="TextBox 8"/>
           <p:cNvSpPr txBox="1"/>
           <p:nvPr/>
         </p:nvSpPr>
@@ -7068,7 +7200,7 @@
             <a:avLst/>
           </a:prstGeom>
           <a:solidFill>
-            <a:srgbClr val="FFFFFF"/>
+            <a:srgbClr val="EDEDF3"/>
           </a:solidFill>
           <a:ln>
             <a:noFill/>
@@ -7169,43 +7301,51 @@
                 </a:solidFill>
                 <a:latin typeface="JetBrains Mono"/>
               </a:rPr>
-              <a:t>M08  ·  SCHAUBILD</a:t>
-            </a:r>
-          </a:p>
-        </p:txBody>
-      </p:sp>
-      <p:sp>
-        <p:nvSpPr>
-          <p:cNvPr id="5" name="TextBox 4"/>
-          <p:cNvSpPr txBox="1"/>
-          <p:nvPr/>
-        </p:nvSpPr>
-        <p:spPr>
-          <a:xfrm>
-            <a:off x="685800" y="502920"/>
-            <a:ext cx="10817352" cy="594360"/>
-          </a:xfrm>
-          <a:prstGeom prst="rect">
-            <a:avLst/>
-          </a:prstGeom>
-          <a:noFill/>
-        </p:spPr>
-        <p:txBody>
-          <a:bodyPr wrap="square">
-            <a:spAutoFit/>
-          </a:bodyPr>
-          <a:lstStyle/>
-          <a:p>
-            <a:pPr algn="l"/>
-            <a:r>
-              <a:rPr sz="2000" b="1" i="0">
-                <a:solidFill>
-                  <a:srgbClr val="1F2C56"/>
-                </a:solidFill>
-                <a:latin typeface="Source Serif 4"/>
-              </a:rPr>
-              <a:t>Drei Immobilien-Typologien im Vergleich</a:t>
-            </a:r>
+              <a:t>M08  ·  INHALT</a:t>
+            </a:r>
+          </a:p>
+        </p:txBody>
+      </p:sp>
+      <p:sp>
+        <p:nvSpPr>
+          <p:cNvPr id="5" name="Rectangle 4"/>
+          <p:cNvSpPr/>
+          <p:nvPr/>
+        </p:nvSpPr>
+        <p:spPr>
+          <a:xfrm>
+            <a:off x="0" y="1234440"/>
+            <a:ext cx="12188952" cy="12700"/>
+          </a:xfrm>
+          <a:prstGeom prst="rect">
+            <a:avLst/>
+          </a:prstGeom>
+          <a:solidFill>
+            <a:srgbClr val="D8DFE4"/>
+          </a:solidFill>
+          <a:ln>
+            <a:noFill/>
+          </a:ln>
+        </p:spPr>
+        <p:style>
+          <a:lnRef idx="1">
+            <a:schemeClr val="accent1"/>
+          </a:lnRef>
+          <a:fillRef idx="3">
+            <a:schemeClr val="accent1"/>
+          </a:fillRef>
+          <a:effectRef idx="2">
+            <a:schemeClr val="accent1"/>
+          </a:effectRef>
+          <a:fontRef idx="minor">
+            <a:schemeClr val="lt1"/>
+          </a:fontRef>
+        </p:style>
+        <p:txBody>
+          <a:bodyPr rtlCol="0" anchor="ctr"/>
+          <a:lstStyle/>
+          <a:p>
+            <a:pPr algn="ctr"/>
           </a:p>
         </p:txBody>
       </p:sp>
@@ -7217,8 +7357,8 @@
         </p:nvSpPr>
         <p:spPr>
           <a:xfrm>
-            <a:off x="685800" y="1143000"/>
-            <a:ext cx="10817352" cy="25400"/>
+            <a:off x="685800" y="502920"/>
+            <a:ext cx="36576" cy="658368"/>
           </a:xfrm>
           <a:prstGeom prst="rect">
             <a:avLst/>
@@ -7252,33 +7392,295 @@
           </a:p>
         </p:txBody>
       </p:sp>
-      <p:pic>
-        <p:nvPicPr>
-          <p:cNvPr id="7" name="Picture 6" descr="image.png"/>
-          <p:cNvPicPr>
-            <a:picLocks noChangeAspect="1"/>
-          </p:cNvPicPr>
-          <p:nvPr/>
-        </p:nvPicPr>
-        <p:blipFill>
-          <a:blip r:embed="rId2"/>
-          <a:stretch>
-            <a:fillRect/>
-          </a:stretch>
-        </p:blipFill>
-        <p:spPr>
-          <a:xfrm>
-            <a:off x="2554863" y="1325880"/>
-            <a:ext cx="7079225" cy="4937760"/>
-          </a:xfrm>
-          <a:prstGeom prst="rect">
-            <a:avLst/>
-          </a:prstGeom>
-        </p:spPr>
-      </p:pic>
-      <p:sp>
-        <p:nvSpPr>
-          <p:cNvPr id="8" name="Rectangle 7"/>
+      <p:sp>
+        <p:nvSpPr>
+          <p:cNvPr id="7" name="TextBox 6"/>
+          <p:cNvSpPr txBox="1"/>
+          <p:nvPr/>
+        </p:nvSpPr>
+        <p:spPr>
+          <a:xfrm>
+            <a:off x="813816" y="502920"/>
+            <a:ext cx="10634472" cy="685800"/>
+          </a:xfrm>
+          <a:prstGeom prst="rect">
+            <a:avLst/>
+          </a:prstGeom>
+          <a:noFill/>
+        </p:spPr>
+        <p:txBody>
+          <a:bodyPr wrap="square">
+            <a:spAutoFit/>
+          </a:bodyPr>
+          <a:lstStyle/>
+          <a:p>
+            <a:pPr algn="l"/>
+            <a:r>
+              <a:rPr sz="2400" b="1" i="0">
+                <a:solidFill>
+                  <a:srgbClr val="1F2C56"/>
+                </a:solidFill>
+                <a:latin typeface="Source Serif 4"/>
+              </a:rPr>
+              <a:t>Theorie-Input 1: Kundentypologie der Immobilienfinanzierung</a:t>
+            </a:r>
+          </a:p>
+        </p:txBody>
+      </p:sp>
+      <p:sp>
+        <p:nvSpPr>
+          <p:cNvPr id="8" name="TextBox 7"/>
+          <p:cNvSpPr txBox="1"/>
+          <p:nvPr/>
+        </p:nvSpPr>
+        <p:spPr>
+          <a:xfrm>
+            <a:off x="685800" y="1417320"/>
+            <a:ext cx="10817352" cy="5029200"/>
+          </a:xfrm>
+          <a:prstGeom prst="rect">
+            <a:avLst/>
+          </a:prstGeom>
+          <a:noFill/>
+        </p:spPr>
+        <p:txBody>
+          <a:bodyPr wrap="square">
+            <a:spAutoFit/>
+          </a:bodyPr>
+          <a:lstStyle/>
+          <a:p>
+            <a:pPr>
+              <a:spcBef>
+                <a:spcPts val="1000"/>
+              </a:spcBef>
+              <a:spcAft>
+                <a:spcPts val="200"/>
+              </a:spcAft>
+            </a:pPr>
+            <a:r>
+              <a:rPr sz="800" b="1">
+                <a:solidFill>
+                  <a:srgbClr val="78808C"/>
+                </a:solidFill>
+                <a:latin typeface="JetBrains Mono"/>
+              </a:rPr>
+              <a:t>DREI GRUNDTYPEN – DREI RISIKOLANDSCHAFTEN</a:t>
+            </a:r>
+          </a:p>
+          <a:p>
+            <a:pPr>
+              <a:spcBef>
+                <a:spcPts val="400"/>
+              </a:spcBef>
+              <a:spcAft>
+                <a:spcPts val="200"/>
+              </a:spcAft>
+            </a:pPr>
+            <a:r>
+              <a:rPr sz="1200">
+                <a:solidFill>
+                  <a:srgbClr val="3D5466"/>
+                </a:solidFill>
+                <a:latin typeface="Arial"/>
+              </a:rPr>
+              <a:t>Typ 1: Bestandshalter</a:t>
+            </a:r>
+          </a:p>
+          <a:p>
+            <a:pPr>
+              <a:spcBef>
+                <a:spcPts val="400"/>
+              </a:spcBef>
+              <a:spcAft>
+                <a:spcPts val="200"/>
+              </a:spcAft>
+            </a:pPr>
+            <a:r>
+              <a:rPr sz="1300">
+                <a:solidFill>
+                  <a:srgbClr val="3D5466"/>
+                </a:solidFill>
+                <a:latin typeface="Arial"/>
+              </a:rPr>
+              <a:t>▸  Cashflow-Struktur: Stabile, planbare Mieteinnahmen – Finanzierungsrisiko hängt primär an Vermietungsstand und Mietzahlungsfähigkeit der Mieter</a:t>
+            </a:r>
+          </a:p>
+          <a:p>
+            <a:pPr>
+              <a:spcBef>
+                <a:spcPts val="400"/>
+              </a:spcBef>
+              <a:spcAft>
+                <a:spcPts val="200"/>
+              </a:spcAft>
+            </a:pPr>
+            <a:r>
+              <a:rPr sz="1300">
+                <a:solidFill>
+                  <a:srgbClr val="3D5466"/>
+                </a:solidFill>
+                <a:latin typeface="Arial"/>
+              </a:rPr>
+              <a:t>▸  Typischer Finanzierungsbedarf: Ankaufsfinanzierung, Refinanzierung, Modernisierungskredite</a:t>
+            </a:r>
+          </a:p>
+          <a:p>
+            <a:pPr>
+              <a:spcBef>
+                <a:spcPts val="400"/>
+              </a:spcBef>
+              <a:spcAft>
+                <a:spcPts val="200"/>
+              </a:spcAft>
+            </a:pPr>
+            <a:r>
+              <a:rPr sz="1300">
+                <a:solidFill>
+                  <a:srgbClr val="3D5466"/>
+                </a:solidFill>
+                <a:latin typeface="Arial"/>
+              </a:rPr>
+              <a:t>▸  Kernkennzahl: DSCR (Debt Service Coverage Ratio) – können die Mieteinnahmen den Kapitaldienst dauerhaft abdecken?</a:t>
+            </a:r>
+          </a:p>
+          <a:p>
+            <a:pPr>
+              <a:spcBef>
+                <a:spcPts val="400"/>
+              </a:spcBef>
+              <a:spcAft>
+                <a:spcPts val="200"/>
+              </a:spcAft>
+            </a:pPr>
+            <a:r>
+              <a:rPr sz="1300">
+                <a:solidFill>
+                  <a:srgbClr val="3D5466"/>
+                </a:solidFill>
+                <a:latin typeface="Arial"/>
+              </a:rPr>
+              <a:t>▸  Hauptrisiko: Leerstandsrisiko, Mieterbonitätsrisiko, Instandhaltungsstau</a:t>
+            </a:r>
+          </a:p>
+          <a:p>
+            <a:pPr>
+              <a:spcBef>
+                <a:spcPts val="400"/>
+              </a:spcBef>
+              <a:spcAft>
+                <a:spcPts val="200"/>
+              </a:spcAft>
+            </a:pPr>
+            <a:r>
+              <a:rPr sz="1200">
+                <a:solidFill>
+                  <a:srgbClr val="3D5466"/>
+                </a:solidFill>
+                <a:latin typeface="Arial"/>
+              </a:rPr>
+              <a:t>Typ 2: Bauträger</a:t>
+            </a:r>
+          </a:p>
+          <a:p>
+            <a:pPr>
+              <a:spcBef>
+                <a:spcPts val="400"/>
+              </a:spcBef>
+              <a:spcAft>
+                <a:spcPts val="200"/>
+              </a:spcAft>
+            </a:pPr>
+            <a:r>
+              <a:rPr sz="1300">
+                <a:solidFill>
+                  <a:srgbClr val="3D5466"/>
+                </a:solidFill>
+                <a:latin typeface="Arial"/>
+              </a:rPr>
+              <a:t>▸  Cashflow-Struktur: Kein laufender Miet-Cashflow – Rückfluss ausschließlich aus Verkaufserlösen nach Fertigstellung. Das Kapital ist bis zum Verkauf vollständig gebunden.</a:t>
+            </a:r>
+          </a:p>
+          <a:p>
+            <a:pPr>
+              <a:spcBef>
+                <a:spcPts val="400"/>
+              </a:spcBef>
+              <a:spcAft>
+                <a:spcPts val="200"/>
+              </a:spcAft>
+            </a:pPr>
+            <a:r>
+              <a:rPr sz="1300">
+                <a:solidFill>
+                  <a:srgbClr val="3D5466"/>
+                </a:solidFill>
+                <a:latin typeface="Arial"/>
+              </a:rPr>
+              <a:t>▸  Typischer Finanzierungsbedarf: Kurzfristige Bauträgerfinanzierung (Laufzeit 18–36 Monate), strukturiert nach Baufortschritt</a:t>
+            </a:r>
+          </a:p>
+          <a:p>
+            <a:pPr>
+              <a:spcBef>
+                <a:spcPts val="400"/>
+              </a:spcBef>
+              <a:spcAft>
+                <a:spcPts val="200"/>
+              </a:spcAft>
+            </a:pPr>
+            <a:r>
+              <a:rPr sz="1300">
+                <a:solidFill>
+                  <a:srgbClr val="3D5466"/>
+                </a:solidFill>
+                <a:latin typeface="Arial"/>
+              </a:rPr>
+              <a:t>▸  Kernkennzahl: LTV (Loan-to-Value) bezogen auf prognostizierte Verkaufserlöse; Vorverkaufsquote</a:t>
+            </a:r>
+          </a:p>
+          <a:p>
+            <a:pPr>
+              <a:spcBef>
+                <a:spcPts val="400"/>
+              </a:spcBef>
+              <a:spcAft>
+                <a:spcPts val="200"/>
+              </a:spcAft>
+            </a:pPr>
+            <a:r>
+              <a:rPr sz="1300">
+                <a:solidFill>
+                  <a:srgbClr val="3D5466"/>
+                </a:solidFill>
+                <a:latin typeface="Arial"/>
+              </a:rPr>
+              <a:t>▸  Hauptrisiko: Fertigstellungsrisiko, Absatzrisiko, Kostenüberschreitungen</a:t>
+            </a:r>
+          </a:p>
+          <a:p>
+            <a:pPr>
+              <a:spcBef>
+                <a:spcPts val="400"/>
+              </a:spcBef>
+              <a:spcAft>
+                <a:spcPts val="200"/>
+              </a:spcAft>
+            </a:pPr>
+            <a:r>
+              <a:rPr sz="1200">
+                <a:solidFill>
+                  <a:srgbClr val="3D5466"/>
+                </a:solidFill>
+                <a:latin typeface="Arial"/>
+              </a:rPr>
+              <a:t>Typ 3: Projektentwickler</a:t>
+            </a:r>
+          </a:p>
+        </p:txBody>
+      </p:sp>
+      <p:sp>
+        <p:nvSpPr>
+          <p:cNvPr id="9" name="Rectangle 8"/>
           <p:cNvSpPr/>
           <p:nvPr/>
         </p:nvSpPr>
@@ -7321,7 +7723,7 @@
       </p:sp>
       <p:sp>
         <p:nvSpPr>
-          <p:cNvPr id="9" name="TextBox 8"/>
+          <p:cNvPr id="10" name="TextBox 9"/>
           <p:cNvSpPr txBox="1"/>
           <p:nvPr/>
         </p:nvSpPr>
@@ -7350,41 +7752,6 @@
                 <a:latin typeface="JetBrains Mono"/>
               </a:rPr>
               <a:t>Benedikt Zoller Coaching  ·  FKB Campus  ·  M08</a:t>
-            </a:r>
-          </a:p>
-        </p:txBody>
-      </p:sp>
-      <p:sp>
-        <p:nvSpPr>
-          <p:cNvPr id="10" name="TextBox 9"/>
-          <p:cNvSpPr txBox="1"/>
-          <p:nvPr/>
-        </p:nvSpPr>
-        <p:spPr>
-          <a:xfrm>
-            <a:off x="7176211" y="6583680"/>
-            <a:ext cx="4326940" cy="256032"/>
-          </a:xfrm>
-          <a:prstGeom prst="rect">
-            <a:avLst/>
-          </a:prstGeom>
-          <a:noFill/>
-        </p:spPr>
-        <p:txBody>
-          <a:bodyPr wrap="none">
-            <a:spAutoFit/>
-          </a:bodyPr>
-          <a:lstStyle/>
-          <a:p>
-            <a:pPr algn="r"/>
-            <a:r>
-              <a:rPr sz="700">
-                <a:solidFill>
-                  <a:srgbClr val="A0B4D2"/>
-                </a:solidFill>
-                <a:latin typeface="JetBrains Mono"/>
-              </a:rPr>
-              <a:t>Schaubild</a:t>
             </a:r>
           </a:p>
         </p:txBody>
@@ -7422,7 +7789,7 @@
             <a:avLst/>
           </a:prstGeom>
           <a:solidFill>
-            <a:srgbClr val="EDEDF3"/>
+            <a:srgbClr val="FFFFFF"/>
           </a:solidFill>
           <a:ln>
             <a:noFill/>
@@ -7523,51 +7890,43 @@
                 </a:solidFill>
                 <a:latin typeface="JetBrains Mono"/>
               </a:rPr>
-              <a:t>M08  ·  INHALT</a:t>
-            </a:r>
-          </a:p>
-        </p:txBody>
-      </p:sp>
-      <p:sp>
-        <p:nvSpPr>
-          <p:cNvPr id="5" name="Rectangle 4"/>
-          <p:cNvSpPr/>
-          <p:nvPr/>
-        </p:nvSpPr>
-        <p:spPr>
-          <a:xfrm>
-            <a:off x="0" y="1234440"/>
-            <a:ext cx="12188952" cy="12700"/>
-          </a:xfrm>
-          <a:prstGeom prst="rect">
-            <a:avLst/>
-          </a:prstGeom>
-          <a:solidFill>
-            <a:srgbClr val="D8DFE4"/>
-          </a:solidFill>
-          <a:ln>
-            <a:noFill/>
-          </a:ln>
-        </p:spPr>
-        <p:style>
-          <a:lnRef idx="1">
-            <a:schemeClr val="accent1"/>
-          </a:lnRef>
-          <a:fillRef idx="3">
-            <a:schemeClr val="accent1"/>
-          </a:fillRef>
-          <a:effectRef idx="2">
-            <a:schemeClr val="accent1"/>
-          </a:effectRef>
-          <a:fontRef idx="minor">
-            <a:schemeClr val="lt1"/>
-          </a:fontRef>
-        </p:style>
-        <p:txBody>
-          <a:bodyPr rtlCol="0" anchor="ctr"/>
-          <a:lstStyle/>
-          <a:p>
-            <a:pPr algn="ctr"/>
+              <a:t>M08  ·  SCHAUBILD</a:t>
+            </a:r>
+          </a:p>
+        </p:txBody>
+      </p:sp>
+      <p:sp>
+        <p:nvSpPr>
+          <p:cNvPr id="5" name="TextBox 4"/>
+          <p:cNvSpPr txBox="1"/>
+          <p:nvPr/>
+        </p:nvSpPr>
+        <p:spPr>
+          <a:xfrm>
+            <a:off x="685800" y="502920"/>
+            <a:ext cx="10817352" cy="594360"/>
+          </a:xfrm>
+          <a:prstGeom prst="rect">
+            <a:avLst/>
+          </a:prstGeom>
+          <a:noFill/>
+        </p:spPr>
+        <p:txBody>
+          <a:bodyPr wrap="square">
+            <a:spAutoFit/>
+          </a:bodyPr>
+          <a:lstStyle/>
+          <a:p>
+            <a:pPr algn="l"/>
+            <a:r>
+              <a:rPr sz="2000" b="1" i="0">
+                <a:solidFill>
+                  <a:srgbClr val="1F2C56"/>
+                </a:solidFill>
+                <a:latin typeface="Source Serif 4"/>
+              </a:rPr>
+              <a:t>Drei Immobilien-Typologien im Vergleich</a:t>
+            </a:r>
           </a:p>
         </p:txBody>
       </p:sp>
@@ -7579,8 +7938,8 @@
         </p:nvSpPr>
         <p:spPr>
           <a:xfrm>
-            <a:off x="685800" y="502920"/>
-            <a:ext cx="36576" cy="658368"/>
+            <a:off x="685800" y="1143000"/>
+            <a:ext cx="10817352" cy="25400"/>
           </a:xfrm>
           <a:prstGeom prst="rect">
             <a:avLst/>
@@ -7614,295 +7973,33 @@
           </a:p>
         </p:txBody>
       </p:sp>
-      <p:sp>
-        <p:nvSpPr>
-          <p:cNvPr id="7" name="TextBox 6"/>
-          <p:cNvSpPr txBox="1"/>
-          <p:nvPr/>
-        </p:nvSpPr>
-        <p:spPr>
-          <a:xfrm>
-            <a:off x="813816" y="502920"/>
-            <a:ext cx="10634472" cy="685800"/>
-          </a:xfrm>
-          <a:prstGeom prst="rect">
-            <a:avLst/>
-          </a:prstGeom>
-          <a:noFill/>
-        </p:spPr>
-        <p:txBody>
-          <a:bodyPr wrap="square">
-            <a:spAutoFit/>
-          </a:bodyPr>
-          <a:lstStyle/>
-          <a:p>
-            <a:pPr algn="l"/>
-            <a:r>
-              <a:rPr sz="2400" b="1" i="0">
-                <a:solidFill>
-                  <a:srgbClr val="1F2C56"/>
-                </a:solidFill>
-                <a:latin typeface="Source Serif 4"/>
-              </a:rPr>
-              <a:t>Theorie-Input 2: Beleihungswertermittlung nach BelWertV</a:t>
-            </a:r>
-          </a:p>
-        </p:txBody>
-      </p:sp>
-      <p:sp>
-        <p:nvSpPr>
-          <p:cNvPr id="8" name="TextBox 7"/>
-          <p:cNvSpPr txBox="1"/>
-          <p:nvPr/>
-        </p:nvSpPr>
-        <p:spPr>
-          <a:xfrm>
-            <a:off x="685800" y="1417320"/>
-            <a:ext cx="10817352" cy="5029200"/>
-          </a:xfrm>
-          <a:prstGeom prst="rect">
-            <a:avLst/>
-          </a:prstGeom>
-          <a:noFill/>
-        </p:spPr>
-        <p:txBody>
-          <a:bodyPr wrap="square">
-            <a:spAutoFit/>
-          </a:bodyPr>
-          <a:lstStyle/>
-          <a:p>
-            <a:pPr>
-              <a:spcBef>
-                <a:spcPts val="1000"/>
-              </a:spcBef>
-              <a:spcAft>
-                <a:spcPts val="200"/>
-              </a:spcAft>
-            </a:pPr>
-            <a:r>
-              <a:rPr sz="800" b="1">
-                <a:solidFill>
-                  <a:srgbClr val="78808C"/>
-                </a:solidFill>
-                <a:latin typeface="JetBrains Mono"/>
-              </a:rPr>
-              <a:t>WARUM DER BELEIHUNGSWERT KEIN MARKTWERT IST</a:t>
-            </a:r>
-          </a:p>
-          <a:p>
-            <a:pPr>
-              <a:spcBef>
-                <a:spcPts val="1000"/>
-              </a:spcBef>
-              <a:spcAft>
-                <a:spcPts val="200"/>
-              </a:spcAft>
-            </a:pPr>
-            <a:r>
-              <a:rPr sz="800" b="1">
-                <a:solidFill>
-                  <a:srgbClr val="78808C"/>
-                </a:solidFill>
-                <a:latin typeface="JetBrains Mono"/>
-              </a:rPr>
-              <a:t>DIE ZWEI HAUPTMETHODEN (§§ 8–17 BELWERTV)</a:t>
-            </a:r>
-          </a:p>
-          <a:p>
-            <a:pPr>
-              <a:spcBef>
-                <a:spcPts val="400"/>
-              </a:spcBef>
-              <a:spcAft>
-                <a:spcPts val="200"/>
-              </a:spcAft>
-            </a:pPr>
-            <a:r>
-              <a:rPr sz="1200">
-                <a:solidFill>
-                  <a:srgbClr val="3D5466"/>
-                </a:solidFill>
-                <a:latin typeface="Arial"/>
-              </a:rPr>
-              <a:t>Methode 1: Ertragswertverfahren (bei vermieteten Objekten)</a:t>
-            </a:r>
-          </a:p>
-          <a:p>
-            <a:pPr>
-              <a:spcBef>
-                <a:spcPts val="400"/>
-              </a:spcBef>
-              <a:spcAft>
-                <a:spcPts val="200"/>
-              </a:spcAft>
-            </a:pPr>
-            <a:r>
-              <a:rPr sz="1200">
-                <a:solidFill>
-                  <a:srgbClr val="3D5466"/>
-                </a:solidFill>
-                <a:latin typeface="Arial"/>
-              </a:rPr>
-              <a:t>Anwendung: Wohnimmobilien mit mehreren Einheiten, Gewerbeimmobilien, Bestandsobjekte mit Miethistorie.</a:t>
-            </a:r>
-          </a:p>
-          <a:p>
-            <a:pPr>
-              <a:spcBef>
-                <a:spcPts val="400"/>
-              </a:spcBef>
-              <a:spcAft>
-                <a:spcPts val="200"/>
-              </a:spcAft>
-            </a:pPr>
-            <a:r>
-              <a:rPr sz="1200">
-                <a:solidFill>
-                  <a:srgbClr val="3D5466"/>
-                </a:solidFill>
-                <a:latin typeface="Arial"/>
-              </a:rPr>
-              <a:t>Berechnung (vereinfacht):</a:t>
-            </a:r>
-          </a:p>
-          <a:p>
-            <a:pPr>
-              <a:spcBef>
-                <a:spcPts val="400"/>
-              </a:spcBef>
-              <a:spcAft>
-                <a:spcPts val="200"/>
-              </a:spcAft>
-            </a:pPr>
-            <a:r>
-              <a:rPr sz="1300">
-                <a:solidFill>
-                  <a:srgbClr val="3D5466"/>
-                </a:solidFill>
-                <a:latin typeface="Arial"/>
-              </a:rPr>
-              <a:t>▸  Rohertrag: Jahresmiete (nachhaltig erzielbar, kein vorübergehender Leerstand)</a:t>
-            </a:r>
-          </a:p>
-          <a:p>
-            <a:pPr>
-              <a:spcBef>
-                <a:spcPts val="400"/>
-              </a:spcBef>
-              <a:spcAft>
-                <a:spcPts val="200"/>
-              </a:spcAft>
-            </a:pPr>
-            <a:r>
-              <a:rPr sz="1300">
-                <a:solidFill>
-                  <a:srgbClr val="3D5466"/>
-                </a:solidFill>
-                <a:latin typeface="Arial"/>
-              </a:rPr>
-              <a:t>▸  Bewirtschaftungskosten: Verwaltung, Instandhaltung, Mietausfall (pauschal 20–25 % je nach Nutzungsart)</a:t>
-            </a:r>
-          </a:p>
-          <a:p>
-            <a:pPr>
-              <a:spcBef>
-                <a:spcPts val="400"/>
-              </a:spcBef>
-              <a:spcAft>
-                <a:spcPts val="200"/>
-              </a:spcAft>
-            </a:pPr>
-            <a:r>
-              <a:rPr sz="1300">
-                <a:solidFill>
-                  <a:srgbClr val="3D5466"/>
-                </a:solidFill>
-                <a:latin typeface="Arial"/>
-              </a:rPr>
-              <a:t>▸  Reinertrag = Rohertrag − Bewirtschaftungskosten</a:t>
-            </a:r>
-          </a:p>
-          <a:p>
-            <a:pPr>
-              <a:spcBef>
-                <a:spcPts val="400"/>
-              </a:spcBef>
-              <a:spcAft>
-                <a:spcPts val="200"/>
-              </a:spcAft>
-            </a:pPr>
-            <a:r>
-              <a:rPr sz="1300">
-                <a:solidFill>
-                  <a:srgbClr val="3D5466"/>
-                </a:solidFill>
-                <a:latin typeface="Arial"/>
-              </a:rPr>
-              <a:t>▸  Bodenwert: Nachhaltiger Bodenrichtwert × Fläche</a:t>
-            </a:r>
-          </a:p>
-          <a:p>
-            <a:pPr>
-              <a:spcBef>
-                <a:spcPts val="400"/>
-              </a:spcBef>
-              <a:spcAft>
-                <a:spcPts val="200"/>
-              </a:spcAft>
-            </a:pPr>
-            <a:r>
-              <a:rPr sz="1300">
-                <a:solidFill>
-                  <a:srgbClr val="3D5466"/>
-                </a:solidFill>
-                <a:latin typeface="Arial"/>
-              </a:rPr>
-              <a:t>▸  Gebäudeertragswert = Reinertrag − Bodenwertverzinsung (Liegenschaftszins × Bodenwert), kapitalisiert mit dem Liegenschaftszins über Restnutzungsdauer</a:t>
-            </a:r>
-          </a:p>
-          <a:p>
-            <a:pPr>
-              <a:spcBef>
-                <a:spcPts val="400"/>
-              </a:spcBef>
-              <a:spcAft>
-                <a:spcPts val="200"/>
-              </a:spcAft>
-            </a:pPr>
-            <a:r>
-              <a:rPr sz="1300">
-                <a:solidFill>
-                  <a:srgbClr val="3D5466"/>
-                </a:solidFill>
-                <a:latin typeface="Arial"/>
-              </a:rPr>
-              <a:t>▸  Ertragswert = Gebäudeertragswert + Bodenwert</a:t>
-            </a:r>
-          </a:p>
-          <a:p>
-            <a:pPr>
-              <a:spcBef>
-                <a:spcPts val="400"/>
-              </a:spcBef>
-              <a:spcAft>
-                <a:spcPts val="200"/>
-              </a:spcAft>
-            </a:pPr>
-            <a:r>
-              <a:rPr sz="1300">
-                <a:solidFill>
-                  <a:srgbClr val="3D5466"/>
-                </a:solidFill>
-                <a:latin typeface="Arial"/>
-              </a:rPr>
-              <a:t>▸  Beleihungswert: Sicherheitsabschlag auf den Ertragswert (§ 12 BelWertV, max. 10 % vom nachhaltigen Wert)</a:t>
-            </a:r>
-          </a:p>
-        </p:txBody>
-      </p:sp>
-      <p:sp>
-        <p:nvSpPr>
-          <p:cNvPr id="9" name="Rectangle 8"/>
+      <p:pic>
+        <p:nvPicPr>
+          <p:cNvPr id="7" name="Picture 6" descr="image.png"/>
+          <p:cNvPicPr>
+            <a:picLocks noChangeAspect="1"/>
+          </p:cNvPicPr>
+          <p:nvPr/>
+        </p:nvPicPr>
+        <p:blipFill>
+          <a:blip r:embed="rId2"/>
+          <a:stretch>
+            <a:fillRect/>
+          </a:stretch>
+        </p:blipFill>
+        <p:spPr>
+          <a:xfrm>
+            <a:off x="2554863" y="1325880"/>
+            <a:ext cx="7079225" cy="4937760"/>
+          </a:xfrm>
+          <a:prstGeom prst="rect">
+            <a:avLst/>
+          </a:prstGeom>
+        </p:spPr>
+      </p:pic>
+      <p:sp>
+        <p:nvSpPr>
+          <p:cNvPr id="8" name="Rectangle 7"/>
           <p:cNvSpPr/>
           <p:nvPr/>
         </p:nvSpPr>
@@ -7945,7 +8042,7 @@
       </p:sp>
       <p:sp>
         <p:nvSpPr>
-          <p:cNvPr id="10" name="TextBox 9"/>
+          <p:cNvPr id="9" name="TextBox 8"/>
           <p:cNvSpPr txBox="1"/>
           <p:nvPr/>
         </p:nvSpPr>
@@ -7974,6 +8071,41 @@
                 <a:latin typeface="JetBrains Mono"/>
               </a:rPr>
               <a:t>Benedikt Zoller Coaching  ·  FKB Campus  ·  M08</a:t>
+            </a:r>
+          </a:p>
+        </p:txBody>
+      </p:sp>
+      <p:sp>
+        <p:nvSpPr>
+          <p:cNvPr id="10" name="TextBox 9"/>
+          <p:cNvSpPr txBox="1"/>
+          <p:nvPr/>
+        </p:nvSpPr>
+        <p:spPr>
+          <a:xfrm>
+            <a:off x="7176211" y="6583680"/>
+            <a:ext cx="4326940" cy="256032"/>
+          </a:xfrm>
+          <a:prstGeom prst="rect">
+            <a:avLst/>
+          </a:prstGeom>
+          <a:noFill/>
+        </p:spPr>
+        <p:txBody>
+          <a:bodyPr wrap="none">
+            <a:spAutoFit/>
+          </a:bodyPr>
+          <a:lstStyle/>
+          <a:p>
+            <a:pPr algn="r"/>
+            <a:r>
+              <a:rPr sz="700">
+                <a:solidFill>
+                  <a:srgbClr val="A0B4D2"/>
+                </a:solidFill>
+                <a:latin typeface="JetBrains Mono"/>
+              </a:rPr>
+              <a:t>Schaubild</a:t>
             </a:r>
           </a:p>
         </p:txBody>
@@ -8233,7 +8365,7 @@
                 </a:solidFill>
                 <a:latin typeface="Source Serif 4"/>
               </a:rPr>
-              <a:t>Theorie-Input 3: Kennzahlen der Immobilien- und Projektfinanzierung</a:t>
+              <a:t>Theorie-Input 2: Beleihungswertermittlung nach BelWertV</a:t>
             </a:r>
           </a:p>
         </p:txBody>
@@ -8275,7 +8407,26 @@
                 </a:solidFill>
                 <a:latin typeface="JetBrains Mono"/>
               </a:rPr>
-              <a:t>DIE VIER SCHLÜSSELKENNZAHLEN IM ÜBERBLICK</a:t>
+              <a:t>WARUM DER BELEIHUNGSWERT KEIN MARKTWERT IST</a:t>
+            </a:r>
+          </a:p>
+          <a:p>
+            <a:pPr>
+              <a:spcBef>
+                <a:spcPts val="1000"/>
+              </a:spcBef>
+              <a:spcAft>
+                <a:spcPts val="200"/>
+              </a:spcAft>
+            </a:pPr>
+            <a:r>
+              <a:rPr sz="800" b="1">
+                <a:solidFill>
+                  <a:srgbClr val="78808C"/>
+                </a:solidFill>
+                <a:latin typeface="JetBrains Mono"/>
+              </a:rPr>
+              <a:t>DIE ZWEI HAUPTMETHODEN (§§ 8–17 BELWERTV)</a:t>
             </a:r>
           </a:p>
           <a:p>
@@ -8294,7 +8445,7 @@
                 </a:solidFill>
                 <a:latin typeface="Arial"/>
               </a:rPr>
-              <a:t>1. LTV – Loan-to-Value (Beleihungsauslauf)</a:t>
+              <a:t>Methode 1: Ertragswertverfahren (bei vermieteten Objekten)</a:t>
             </a:r>
           </a:p>
           <a:p>
@@ -8313,7 +8464,7 @@
                 </a:solidFill>
                 <a:latin typeface="Arial"/>
               </a:rPr>
-              <a:t>Der LTV misst, wie hoch der Kredit im Verhältnis zum Immobilienwert ist. Die Bezugsgröße ist je nach Kundentypologie unterschiedlich – diese Unterscheidung ist in der Kreditpraxis zwingend anzugeben:</a:t>
+              <a:t>Anwendung: Wohnimmobilien mit mehreren Einheiten, Gewerbeimmobilien, Bestandsobjekte mit Miethistorie.</a:t>
             </a:r>
           </a:p>
           <a:p>
@@ -8332,26 +8483,7 @@
                 </a:solidFill>
                 <a:latin typeface="Arial"/>
               </a:rPr>
-              <a:t>Bei Bauträgerprojekten gilt als Richtwert: LTV ≤ 65–70 % des GDV (enger als bei Bestandshaltern, da GDV zum Zeitpunkt der Kreditvergabe erst prognostiziert ist; vgl. Gondring, 2022 ).</a:t>
-            </a:r>
-          </a:p>
-          <a:p>
-            <a:pPr>
-              <a:spcBef>
-                <a:spcPts val="1000"/>
-              </a:spcBef>
-              <a:spcAft>
-                <a:spcPts val="200"/>
-              </a:spcAft>
-            </a:pPr>
-            <a:r>
-              <a:rPr sz="800" b="1">
-                <a:solidFill>
-                  <a:srgbClr val="78808C"/>
-                </a:solidFill>
-                <a:latin typeface="JetBrains Mono"/>
-              </a:rPr>
-              <a:t>VERBUNDPARTNER-ÜBERSICHT IMMOBILIENFINANZIERUNG</a:t>
+              <a:t>Berechnung (vereinfacht):</a:t>
             </a:r>
           </a:p>
           <a:p>
@@ -8364,13 +8496,13 @@
               </a:spcAft>
             </a:pPr>
             <a:r>
-              <a:rPr sz="1200">
+              <a:rPr sz="1300">
                 <a:solidFill>
                   <a:srgbClr val="3D5466"/>
                 </a:solidFill>
                 <a:latin typeface="Arial"/>
               </a:rPr>
-              <a:t>2. DSCR – Debt Service Coverage Ratio (Kapitaldienst-Deckungsgrad)</a:t>
+              <a:t>▸  Rohertrag: Jahresmiete (nachhaltig erzielbar, kein vorübergehender Leerstand)</a:t>
             </a:r>
           </a:p>
           <a:p>
@@ -8383,13 +8515,13 @@
               </a:spcAft>
             </a:pPr>
             <a:r>
-              <a:rPr sz="1200">
+              <a:rPr sz="1300">
                 <a:solidFill>
                   <a:srgbClr val="3D5466"/>
                 </a:solidFill>
                 <a:latin typeface="Arial"/>
               </a:rPr>
-              <a:t>DSCR = Netto-Mieteinnahmen (NOI) / Jährlicher Kapitaldienst (Zins + Tilgung)</a:t>
+              <a:t>▸  Bewirtschaftungskosten: Verwaltung, Instandhaltung, Mietausfall (pauschal 20–25 % je nach Nutzungsart)</a:t>
             </a:r>
           </a:p>
           <a:p>
@@ -8402,13 +8534,13 @@
               </a:spcAft>
             </a:pPr>
             <a:r>
-              <a:rPr sz="1200">
+              <a:rPr sz="1300">
                 <a:solidFill>
                   <a:srgbClr val="3D5466"/>
                 </a:solidFill>
                 <a:latin typeface="Arial"/>
               </a:rPr>
-              <a:t>Der DSCR misst, ob die laufenden Mieteinnahmen ausreichen, um Zins und Tilgung zu bedienen. Anwendung primär bei Bestandshaltern (vgl. Gondring, 2022, S. 512 ).</a:t>
+              <a:t>▸  Reinertrag = Rohertrag − Bewirtschaftungskosten</a:t>
             </a:r>
           </a:p>
           <a:p>
@@ -8427,7 +8559,7 @@
                 </a:solidFill>
                 <a:latin typeface="Arial"/>
               </a:rPr>
-              <a:t>▸  DSCR &gt; 1,25: Solide – ausreichender Puffer für Mietausfälle und Kostensteigerungen</a:t>
+              <a:t>▸  Bodenwert: Nachhaltiger Bodenrichtwert × Fläche</a:t>
             </a:r>
           </a:p>
           <a:p>
@@ -8446,7 +8578,7 @@
                 </a:solidFill>
                 <a:latin typeface="Arial"/>
               </a:rPr>
-              <a:t>▸  DSCR 1,10–1,25: Vertretbar – wenig Puffer, Nebenabsprachen empfehlenswert</a:t>
+              <a:t>▸  Gebäudeertragswert = Reinertrag − Bodenwertverzinsung (Liegenschaftszins × Bodenwert), kapitalisiert mit dem Liegenschaftszins über Restnutzungsdauer</a:t>
             </a:r>
           </a:p>
           <a:p>
@@ -8465,7 +8597,7 @@
                 </a:solidFill>
                 <a:latin typeface="Arial"/>
               </a:rPr>
-              <a:t>▸  DSCR &lt; 1,10: Kritisch – Kapitaldienst kaum gedeckt, erhöhtes Ausfallrisiko</a:t>
+              <a:t>▸  Ertragswert = Gebäudeertragswert + Bodenwert</a:t>
             </a:r>
           </a:p>
           <a:p>
@@ -8478,13 +8610,13 @@
               </a:spcAft>
             </a:pPr>
             <a:r>
-              <a:rPr sz="1200">
+              <a:rPr sz="1300">
                 <a:solidFill>
                   <a:srgbClr val="3D5466"/>
                 </a:solidFill>
                 <a:latin typeface="Arial"/>
               </a:rPr>
-              <a:t>Prolongationsrisiko bei Bestandshaltern (Zinsänderungsrisiko bei Zinsbindungsablauf)</a:t>
+              <a:t>▸  Beleihungswert: Sicherheitsabschlag auf den Ertragswert (§ 12 BelWertV, max. 10 % vom nachhaltigen Wert)</a:t>
             </a:r>
           </a:p>
         </p:txBody>
@@ -8822,7 +8954,7 @@
                 </a:solidFill>
                 <a:latin typeface="Source Serif 4"/>
               </a:rPr>
-              <a:t>Theorie-Input 4: Risikofelder der Bauträgerfinanzierung</a:t>
+              <a:t>Theorie-Input 3: Kennzahlen der Immobilien- und Projektfinanzierung</a:t>
             </a:r>
           </a:p>
         </p:txBody>
@@ -8848,6 +8980,25 @@
             <a:spAutoFit/>
           </a:bodyPr>
           <a:lstStyle/>
+          <a:p>
+            <a:pPr>
+              <a:spcBef>
+                <a:spcPts val="1000"/>
+              </a:spcBef>
+              <a:spcAft>
+                <a:spcPts val="200"/>
+              </a:spcAft>
+            </a:pPr>
+            <a:r>
+              <a:rPr sz="800" b="1">
+                <a:solidFill>
+                  <a:srgbClr val="78808C"/>
+                </a:solidFill>
+                <a:latin typeface="JetBrains Mono"/>
+              </a:rPr>
+              <a:t>DIE VIER SCHLÜSSELKENNZAHLEN IM ÜBERBLICK</a:t>
+            </a:r>
+          </a:p>
           <a:p>
             <a:pPr>
               <a:spcBef>
@@ -8864,7 +9015,7 @@
                 </a:solidFill>
                 <a:latin typeface="Arial"/>
               </a:rPr>
-              <a:t>Risikofeld 1: Fertigstellungsrisiko</a:t>
+              <a:t>1. LTV – Loan-to-Value (Beleihungsauslauf)</a:t>
             </a:r>
           </a:p>
           <a:p>
@@ -8883,7 +9034,7 @@
                 </a:solidFill>
                 <a:latin typeface="Arial"/>
               </a:rPr>
-              <a:t>Risikofeld 2: Absatzrisiko</a:t>
+              <a:t>Der LTV misst, wie hoch der Kredit im Verhältnis zum Immobilienwert ist. Die Bezugsgröße ist je nach Kundentypologie unterschiedlich – diese Unterscheidung ist in der Kreditpraxis zwingend anzugeben:</a:t>
             </a:r>
           </a:p>
           <a:p>
@@ -8902,7 +9053,26 @@
                 </a:solidFill>
                 <a:latin typeface="Arial"/>
               </a:rPr>
-              <a:t>Risikominderung: Vorverkaufsquote als Auszahlungsbedingung, konservative Wertansätze (Vergleichspreise statt Optimistik), Vermarktungskonzept des Bauträgers prüfen.</a:t>
+              <a:t>Bei Bauträgerprojekten gilt als Richtwert: LTV ≤ 65–70 % des GDV (enger als bei Bestandshaltern, da GDV zum Zeitpunkt der Kreditvergabe erst prognostiziert ist; vgl. Gondring, 2022 ).</a:t>
+            </a:r>
+          </a:p>
+          <a:p>
+            <a:pPr>
+              <a:spcBef>
+                <a:spcPts val="1000"/>
+              </a:spcBef>
+              <a:spcAft>
+                <a:spcPts val="200"/>
+              </a:spcAft>
+            </a:pPr>
+            <a:r>
+              <a:rPr sz="800" b="1">
+                <a:solidFill>
+                  <a:srgbClr val="78808C"/>
+                </a:solidFill>
+                <a:latin typeface="JetBrains Mono"/>
+              </a:rPr>
+              <a:t>VERBUNDPARTNER-ÜBERSICHT IMMOBILIENFINANZIERUNG</a:t>
             </a:r>
           </a:p>
           <a:p>
@@ -8921,7 +9091,7 @@
                 </a:solidFill>
                 <a:latin typeface="Arial"/>
               </a:rPr>
-              <a:t>Risikofeld 3: Kostenüberschreitungsrisiko</a:t>
+              <a:t>2. DSCR – Debt Service Coverage Ratio (Kapitaldienst-Deckungsgrad)</a:t>
             </a:r>
           </a:p>
           <a:p>
@@ -8940,7 +9110,7 @@
                 </a:solidFill>
                 <a:latin typeface="Arial"/>
               </a:rPr>
-              <a:t>Risikominderung: Festpreisverträge mit dem Generalunternehmer, EK-Puffer (mindestens 20–25 % EK-Quote), Kostenschätzung durch unabhängigen Bausachverständigen prüfen lassen.</a:t>
+              <a:t>DSCR = Netto-Mieteinnahmen (NOI) / Jährlicher Kapitaldienst (Zins + Tilgung)</a:t>
             </a:r>
           </a:p>
           <a:p>
@@ -8959,7 +9129,7 @@
                 </a:solidFill>
                 <a:latin typeface="Arial"/>
               </a:rPr>
-              <a:t>Risikofeld 4a: Sicherheitenstruktur und Grundschuld-Freigabe bei Bauträgerfinanzierungen</a:t>
+              <a:t>Der DSCR misst, ob die laufenden Mieteinnahmen ausreichen, um Zins und Tilgung zu bedienen. Anwendung primär bei Bestandshaltern (vgl. Gondring, 2022, S. 512 ).</a:t>
             </a:r>
           </a:p>
           <a:p>
@@ -8972,13 +9142,13 @@
               </a:spcAft>
             </a:pPr>
             <a:r>
-              <a:rPr sz="1200">
+              <a:rPr sz="1300">
                 <a:solidFill>
                   <a:srgbClr val="3D5466"/>
                 </a:solidFill>
                 <a:latin typeface="Arial"/>
               </a:rPr>
-              <a:t>Ein in der Praxis häufig unterschätztes operatives Thema: Die Grundschuld-Strukturierung und die Freigaberegelung bei Teilverkäufen.</a:t>
+              <a:t>▸  DSCR &gt; 1,25: Solide – ausreichender Puffer für Mietausfälle und Kostensteigerungen</a:t>
             </a:r>
           </a:p>
           <a:p>
@@ -8991,13 +9161,13 @@
               </a:spcAft>
             </a:pPr>
             <a:r>
-              <a:rPr sz="1200">
+              <a:rPr sz="1300">
                 <a:solidFill>
                   <a:srgbClr val="3D5466"/>
                 </a:solidFill>
                 <a:latin typeface="Arial"/>
               </a:rPr>
-              <a:t>Freigaberegelung – typische Bankpraxis:</a:t>
+              <a:t>▸  DSCR 1,10–1,25: Vertretbar – wenig Puffer, Nebenabsprachen empfehlenswert</a:t>
             </a:r>
           </a:p>
           <a:p>
@@ -9010,13 +9180,13 @@
               </a:spcAft>
             </a:pPr>
             <a:r>
-              <a:rPr sz="1200">
+              <a:rPr sz="1300">
                 <a:solidFill>
                   <a:srgbClr val="3D5466"/>
                 </a:solidFill>
                 <a:latin typeface="Arial"/>
               </a:rPr>
-              <a:t>Risikofeld 4: Zinsänderungs- und Laufzeitrisiko</a:t>
+              <a:t>▸  DSCR &lt; 1,10: Kritisch – Kapitaldienst kaum gedeckt, erhöhtes Ausfallrisiko</a:t>
             </a:r>
           </a:p>
           <a:p>
@@ -9035,26 +9205,7 @@
                 </a:solidFill>
                 <a:latin typeface="Arial"/>
               </a:rPr>
-              <a:t>Risikominderung: Zinssicherung (Zinsswap, Cap) für die Bauphase, realistische Zeitplanung mit Puffer, Klauseln bei Laufzeitverlängerung.</a:t>
-            </a:r>
-          </a:p>
-          <a:p>
-            <a:pPr>
-              <a:spcBef>
-                <a:spcPts val="400"/>
-              </a:spcBef>
-              <a:spcAft>
-                <a:spcPts val="200"/>
-              </a:spcAft>
-            </a:pPr>
-            <a:r>
-              <a:rPr sz="1200">
-                <a:solidFill>
-                  <a:srgbClr val="3D5466"/>
-                </a:solidFill>
-                <a:latin typeface="Arial"/>
-              </a:rPr>
-              <a:t>Die folgende Handlungskarte fasst die zentralen Diagnose-Aktion-Muster für die Immobilien- und Projektfinanzierung zusammen:</a:t>
+              <a:t>Prolongationsrisiko bei Bestandshaltern (Zinsänderungsrisiko bei Zinsbindungsablauf)</a:t>
             </a:r>
           </a:p>
         </p:txBody>
@@ -9170,7 +9321,7 @@
             <a:avLst/>
           </a:prstGeom>
           <a:solidFill>
-            <a:srgbClr val="FFFFFF"/>
+            <a:srgbClr val="EDEDF3"/>
           </a:solidFill>
           <a:ln>
             <a:noFill/>
@@ -9271,43 +9422,51 @@
                 </a:solidFill>
                 <a:latin typeface="JetBrains Mono"/>
               </a:rPr>
-              <a:t>M08  ·  SCHAUBILD</a:t>
-            </a:r>
-          </a:p>
-        </p:txBody>
-      </p:sp>
-      <p:sp>
-        <p:nvSpPr>
-          <p:cNvPr id="5" name="TextBox 4"/>
-          <p:cNvSpPr txBox="1"/>
-          <p:nvPr/>
-        </p:nvSpPr>
-        <p:spPr>
-          <a:xfrm>
-            <a:off x="685800" y="502920"/>
-            <a:ext cx="10817352" cy="594360"/>
-          </a:xfrm>
-          <a:prstGeom prst="rect">
-            <a:avLst/>
-          </a:prstGeom>
-          <a:noFill/>
-        </p:spPr>
-        <p:txBody>
-          <a:bodyPr wrap="square">
-            <a:spAutoFit/>
-          </a:bodyPr>
-          <a:lstStyle/>
-          <a:p>
-            <a:pPr algn="l"/>
-            <a:r>
-              <a:rPr sz="2000" b="1" i="0">
-                <a:solidFill>
-                  <a:srgbClr val="1F2C56"/>
-                </a:solidFill>
-                <a:latin typeface="Source Serif 4"/>
-              </a:rPr>
-              <a:t>Handlungsempfehlung Immobilienfinanzierung</a:t>
-            </a:r>
+              <a:t>M08  ·  INHALT</a:t>
+            </a:r>
+          </a:p>
+        </p:txBody>
+      </p:sp>
+      <p:sp>
+        <p:nvSpPr>
+          <p:cNvPr id="5" name="Rectangle 4"/>
+          <p:cNvSpPr/>
+          <p:nvPr/>
+        </p:nvSpPr>
+        <p:spPr>
+          <a:xfrm>
+            <a:off x="0" y="1234440"/>
+            <a:ext cx="12188952" cy="12700"/>
+          </a:xfrm>
+          <a:prstGeom prst="rect">
+            <a:avLst/>
+          </a:prstGeom>
+          <a:solidFill>
+            <a:srgbClr val="D8DFE4"/>
+          </a:solidFill>
+          <a:ln>
+            <a:noFill/>
+          </a:ln>
+        </p:spPr>
+        <p:style>
+          <a:lnRef idx="1">
+            <a:schemeClr val="accent1"/>
+          </a:lnRef>
+          <a:fillRef idx="3">
+            <a:schemeClr val="accent1"/>
+          </a:fillRef>
+          <a:effectRef idx="2">
+            <a:schemeClr val="accent1"/>
+          </a:effectRef>
+          <a:fontRef idx="minor">
+            <a:schemeClr val="lt1"/>
+          </a:fontRef>
+        </p:style>
+        <p:txBody>
+          <a:bodyPr rtlCol="0" anchor="ctr"/>
+          <a:lstStyle/>
+          <a:p>
+            <a:pPr algn="ctr"/>
           </a:p>
         </p:txBody>
       </p:sp>
@@ -9319,8 +9478,8 @@
         </p:nvSpPr>
         <p:spPr>
           <a:xfrm>
-            <a:off x="685800" y="1143000"/>
-            <a:ext cx="10817352" cy="25400"/>
+            <a:off x="685800" y="502920"/>
+            <a:ext cx="36576" cy="658368"/>
           </a:xfrm>
           <a:prstGeom prst="rect">
             <a:avLst/>
@@ -9354,33 +9513,276 @@
           </a:p>
         </p:txBody>
       </p:sp>
-      <p:pic>
-        <p:nvPicPr>
-          <p:cNvPr id="7" name="Picture 6" descr="image.png"/>
-          <p:cNvPicPr>
-            <a:picLocks noChangeAspect="1"/>
-          </p:cNvPicPr>
-          <p:nvPr/>
-        </p:nvPicPr>
-        <p:blipFill>
-          <a:blip r:embed="rId2"/>
-          <a:stretch>
-            <a:fillRect/>
-          </a:stretch>
-        </p:blipFill>
-        <p:spPr>
-          <a:xfrm>
-            <a:off x="2303489" y="1325880"/>
-            <a:ext cx="7581973" cy="4937760"/>
-          </a:xfrm>
-          <a:prstGeom prst="rect">
-            <a:avLst/>
-          </a:prstGeom>
-        </p:spPr>
-      </p:pic>
-      <p:sp>
-        <p:nvSpPr>
-          <p:cNvPr id="8" name="Rectangle 7"/>
+      <p:sp>
+        <p:nvSpPr>
+          <p:cNvPr id="7" name="TextBox 6"/>
+          <p:cNvSpPr txBox="1"/>
+          <p:nvPr/>
+        </p:nvSpPr>
+        <p:spPr>
+          <a:xfrm>
+            <a:off x="813816" y="502920"/>
+            <a:ext cx="10634472" cy="685800"/>
+          </a:xfrm>
+          <a:prstGeom prst="rect">
+            <a:avLst/>
+          </a:prstGeom>
+          <a:noFill/>
+        </p:spPr>
+        <p:txBody>
+          <a:bodyPr wrap="square">
+            <a:spAutoFit/>
+          </a:bodyPr>
+          <a:lstStyle/>
+          <a:p>
+            <a:pPr algn="l"/>
+            <a:r>
+              <a:rPr sz="2400" b="1" i="0">
+                <a:solidFill>
+                  <a:srgbClr val="1F2C56"/>
+                </a:solidFill>
+                <a:latin typeface="Source Serif 4"/>
+              </a:rPr>
+              <a:t>Theorie-Input 4: Risikofelder der Bauträgerfinanzierung</a:t>
+            </a:r>
+          </a:p>
+        </p:txBody>
+      </p:sp>
+      <p:sp>
+        <p:nvSpPr>
+          <p:cNvPr id="8" name="TextBox 7"/>
+          <p:cNvSpPr txBox="1"/>
+          <p:nvPr/>
+        </p:nvSpPr>
+        <p:spPr>
+          <a:xfrm>
+            <a:off x="685800" y="1417320"/>
+            <a:ext cx="10817352" cy="5029200"/>
+          </a:xfrm>
+          <a:prstGeom prst="rect">
+            <a:avLst/>
+          </a:prstGeom>
+          <a:noFill/>
+        </p:spPr>
+        <p:txBody>
+          <a:bodyPr wrap="square">
+            <a:spAutoFit/>
+          </a:bodyPr>
+          <a:lstStyle/>
+          <a:p>
+            <a:pPr>
+              <a:spcBef>
+                <a:spcPts val="400"/>
+              </a:spcBef>
+              <a:spcAft>
+                <a:spcPts val="200"/>
+              </a:spcAft>
+            </a:pPr>
+            <a:r>
+              <a:rPr sz="1200">
+                <a:solidFill>
+                  <a:srgbClr val="3D5466"/>
+                </a:solidFill>
+                <a:latin typeface="Arial"/>
+              </a:rPr>
+              <a:t>Risikofeld 1: Fertigstellungsrisiko</a:t>
+            </a:r>
+          </a:p>
+          <a:p>
+            <a:pPr>
+              <a:spcBef>
+                <a:spcPts val="400"/>
+              </a:spcBef>
+              <a:spcAft>
+                <a:spcPts val="200"/>
+              </a:spcAft>
+            </a:pPr>
+            <a:r>
+              <a:rPr sz="1200">
+                <a:solidFill>
+                  <a:srgbClr val="3D5466"/>
+                </a:solidFill>
+                <a:latin typeface="Arial"/>
+              </a:rPr>
+              <a:t>Risikofeld 2: Absatzrisiko</a:t>
+            </a:r>
+          </a:p>
+          <a:p>
+            <a:pPr>
+              <a:spcBef>
+                <a:spcPts val="400"/>
+              </a:spcBef>
+              <a:spcAft>
+                <a:spcPts val="200"/>
+              </a:spcAft>
+            </a:pPr>
+            <a:r>
+              <a:rPr sz="1200">
+                <a:solidFill>
+                  <a:srgbClr val="3D5466"/>
+                </a:solidFill>
+                <a:latin typeface="Arial"/>
+              </a:rPr>
+              <a:t>Risikominderung: Vorverkaufsquote als Auszahlungsbedingung, konservative Wertansätze (Vergleichspreise statt Optimistik), Vermarktungskonzept des Bauträgers prüfen.</a:t>
+            </a:r>
+          </a:p>
+          <a:p>
+            <a:pPr>
+              <a:spcBef>
+                <a:spcPts val="400"/>
+              </a:spcBef>
+              <a:spcAft>
+                <a:spcPts val="200"/>
+              </a:spcAft>
+            </a:pPr>
+            <a:r>
+              <a:rPr sz="1200">
+                <a:solidFill>
+                  <a:srgbClr val="3D5466"/>
+                </a:solidFill>
+                <a:latin typeface="Arial"/>
+              </a:rPr>
+              <a:t>Risikofeld 3: Kostenüberschreitungsrisiko</a:t>
+            </a:r>
+          </a:p>
+          <a:p>
+            <a:pPr>
+              <a:spcBef>
+                <a:spcPts val="400"/>
+              </a:spcBef>
+              <a:spcAft>
+                <a:spcPts val="200"/>
+              </a:spcAft>
+            </a:pPr>
+            <a:r>
+              <a:rPr sz="1200">
+                <a:solidFill>
+                  <a:srgbClr val="3D5466"/>
+                </a:solidFill>
+                <a:latin typeface="Arial"/>
+              </a:rPr>
+              <a:t>Risikominderung: Festpreisverträge mit dem Generalunternehmer, EK-Puffer (mindestens 20–25 % EK-Quote), Kostenschätzung durch unabhängigen Bausachverständigen prüfen lassen.</a:t>
+            </a:r>
+          </a:p>
+          <a:p>
+            <a:pPr>
+              <a:spcBef>
+                <a:spcPts val="400"/>
+              </a:spcBef>
+              <a:spcAft>
+                <a:spcPts val="200"/>
+              </a:spcAft>
+            </a:pPr>
+            <a:r>
+              <a:rPr sz="1200">
+                <a:solidFill>
+                  <a:srgbClr val="3D5466"/>
+                </a:solidFill>
+                <a:latin typeface="Arial"/>
+              </a:rPr>
+              <a:t>Risikofeld 4a: Sicherheitenstruktur und Grundschuld-Freigabe bei Bauträgerfinanzierungen</a:t>
+            </a:r>
+          </a:p>
+          <a:p>
+            <a:pPr>
+              <a:spcBef>
+                <a:spcPts val="400"/>
+              </a:spcBef>
+              <a:spcAft>
+                <a:spcPts val="200"/>
+              </a:spcAft>
+            </a:pPr>
+            <a:r>
+              <a:rPr sz="1200">
+                <a:solidFill>
+                  <a:srgbClr val="3D5466"/>
+                </a:solidFill>
+                <a:latin typeface="Arial"/>
+              </a:rPr>
+              <a:t>Ein in der Praxis häufig unterschätztes operatives Thema: Die Grundschuld-Strukturierung und die Freigaberegelung bei Teilverkäufen.</a:t>
+            </a:r>
+          </a:p>
+          <a:p>
+            <a:pPr>
+              <a:spcBef>
+                <a:spcPts val="400"/>
+              </a:spcBef>
+              <a:spcAft>
+                <a:spcPts val="200"/>
+              </a:spcAft>
+            </a:pPr>
+            <a:r>
+              <a:rPr sz="1200">
+                <a:solidFill>
+                  <a:srgbClr val="3D5466"/>
+                </a:solidFill>
+                <a:latin typeface="Arial"/>
+              </a:rPr>
+              <a:t>Freigaberegelung – typische Bankpraxis:</a:t>
+            </a:r>
+          </a:p>
+          <a:p>
+            <a:pPr>
+              <a:spcBef>
+                <a:spcPts val="400"/>
+              </a:spcBef>
+              <a:spcAft>
+                <a:spcPts val="200"/>
+              </a:spcAft>
+            </a:pPr>
+            <a:r>
+              <a:rPr sz="1200">
+                <a:solidFill>
+                  <a:srgbClr val="3D5466"/>
+                </a:solidFill>
+                <a:latin typeface="Arial"/>
+              </a:rPr>
+              <a:t>Risikofeld 4: Zinsänderungs- und Laufzeitrisiko</a:t>
+            </a:r>
+          </a:p>
+          <a:p>
+            <a:pPr>
+              <a:spcBef>
+                <a:spcPts val="400"/>
+              </a:spcBef>
+              <a:spcAft>
+                <a:spcPts val="200"/>
+              </a:spcAft>
+            </a:pPr>
+            <a:r>
+              <a:rPr sz="1200">
+                <a:solidFill>
+                  <a:srgbClr val="3D5466"/>
+                </a:solidFill>
+                <a:latin typeface="Arial"/>
+              </a:rPr>
+              <a:t>Risikominderung: Zinssicherung (Zinsswap, Cap) für die Bauphase, realistische Zeitplanung mit Puffer, Klauseln bei Laufzeitverlängerung.</a:t>
+            </a:r>
+          </a:p>
+          <a:p>
+            <a:pPr>
+              <a:spcBef>
+                <a:spcPts val="400"/>
+              </a:spcBef>
+              <a:spcAft>
+                <a:spcPts val="200"/>
+              </a:spcAft>
+            </a:pPr>
+            <a:r>
+              <a:rPr sz="1200">
+                <a:solidFill>
+                  <a:srgbClr val="3D5466"/>
+                </a:solidFill>
+                <a:latin typeface="Arial"/>
+              </a:rPr>
+              <a:t>Die folgende Handlungskarte fasst die zentralen Diagnose-Aktion-Muster für die Immobilien- und Projektfinanzierung zusammen:</a:t>
+            </a:r>
+          </a:p>
+        </p:txBody>
+      </p:sp>
+      <p:sp>
+        <p:nvSpPr>
+          <p:cNvPr id="9" name="Rectangle 8"/>
           <p:cNvSpPr/>
           <p:nvPr/>
         </p:nvSpPr>
@@ -9423,7 +9825,7 @@
       </p:sp>
       <p:sp>
         <p:nvSpPr>
-          <p:cNvPr id="9" name="TextBox 8"/>
+          <p:cNvPr id="10" name="TextBox 9"/>
           <p:cNvSpPr txBox="1"/>
           <p:nvPr/>
         </p:nvSpPr>
@@ -9452,41 +9854,6 @@
                 <a:latin typeface="JetBrains Mono"/>
               </a:rPr>
               <a:t>Benedikt Zoller Coaching  ·  FKB Campus  ·  M08</a:t>
-            </a:r>
-          </a:p>
-        </p:txBody>
-      </p:sp>
-      <p:sp>
-        <p:nvSpPr>
-          <p:cNvPr id="10" name="TextBox 9"/>
-          <p:cNvSpPr txBox="1"/>
-          <p:nvPr/>
-        </p:nvSpPr>
-        <p:spPr>
-          <a:xfrm>
-            <a:off x="7176211" y="6583680"/>
-            <a:ext cx="4326940" cy="256032"/>
-          </a:xfrm>
-          <a:prstGeom prst="rect">
-            <a:avLst/>
-          </a:prstGeom>
-          <a:noFill/>
-        </p:spPr>
-        <p:txBody>
-          <a:bodyPr wrap="none">
-            <a:spAutoFit/>
-          </a:bodyPr>
-          <a:lstStyle/>
-          <a:p>
-            <a:pPr algn="r"/>
-            <a:r>
-              <a:rPr sz="700">
-                <a:solidFill>
-                  <a:srgbClr val="A0B4D2"/>
-                </a:solidFill>
-                <a:latin typeface="JetBrains Mono"/>
-              </a:rPr>
-              <a:t>Schaubild</a:t>
             </a:r>
           </a:p>
         </p:txBody>

--- a/protected-downloads/praesentation/M08.pptx
+++ b/protected-downloads/praesentation/M08.pptx
@@ -17,6 +17,8 @@
     <p:sldId id="265" r:id="rId17"/>
     <p:sldId id="266" r:id="rId18"/>
     <p:sldId id="267" r:id="rId19"/>
+    <p:sldId id="268" r:id="rId20"/>
+    <p:sldId id="269" r:id="rId21"/>
   </p:sldIdLst>
   <p:sldSz cx="12188952" cy="6858000" type="screen4x3"/>
   <p:notesSz cx="6858000" cy="9144000"/>
@@ -513,7 +515,7 @@
           <a:lstStyle/>
           <a:p>
             <a:r>
-              <a:t>Agenda-Überblick. Timing und Pausen siehe Ablaufplan im Trainerhandbuch (Sektion 3).</a:t>
+              <a:t>Agenda aus dem Ablaufplan (Sektion 3.1). Timing und Pausen siehe Trainerhandbuch.</a:t>
             </a:r>
           </a:p>
         </p:txBody>
@@ -4609,7 +4611,7 @@
             <a:avLst/>
           </a:prstGeom>
           <a:solidFill>
-            <a:srgbClr val="FFFFFF"/>
+            <a:srgbClr val="EDEDF3"/>
           </a:solidFill>
           <a:ln>
             <a:noFill/>
@@ -4710,43 +4712,51 @@
                 </a:solidFill>
                 <a:latin typeface="JetBrains Mono"/>
               </a:rPr>
-              <a:t>M08  ·  SCHAUBILD</a:t>
-            </a:r>
-          </a:p>
-        </p:txBody>
-      </p:sp>
-      <p:sp>
-        <p:nvSpPr>
-          <p:cNvPr id="5" name="TextBox 4"/>
-          <p:cNvSpPr txBox="1"/>
-          <p:nvPr/>
-        </p:nvSpPr>
-        <p:spPr>
-          <a:xfrm>
-            <a:off x="685800" y="502920"/>
-            <a:ext cx="10817352" cy="594360"/>
-          </a:xfrm>
-          <a:prstGeom prst="rect">
-            <a:avLst/>
-          </a:prstGeom>
-          <a:noFill/>
-        </p:spPr>
-        <p:txBody>
-          <a:bodyPr wrap="square">
-            <a:spAutoFit/>
-          </a:bodyPr>
-          <a:lstStyle/>
-          <a:p>
-            <a:pPr algn="l"/>
-            <a:r>
-              <a:rPr sz="2000" b="1" i="0">
-                <a:solidFill>
-                  <a:srgbClr val="1F2C56"/>
-                </a:solidFill>
-                <a:latin typeface="Source Serif 4"/>
-              </a:rPr>
-              <a:t>Handlungsempfehlung Immobilienfinanzierung</a:t>
-            </a:r>
+              <a:t>M08  ·  INHALT</a:t>
+            </a:r>
+          </a:p>
+        </p:txBody>
+      </p:sp>
+      <p:sp>
+        <p:nvSpPr>
+          <p:cNvPr id="5" name="Rectangle 4"/>
+          <p:cNvSpPr/>
+          <p:nvPr/>
+        </p:nvSpPr>
+        <p:spPr>
+          <a:xfrm>
+            <a:off x="0" y="1234440"/>
+            <a:ext cx="12188952" cy="12700"/>
+          </a:xfrm>
+          <a:prstGeom prst="rect">
+            <a:avLst/>
+          </a:prstGeom>
+          <a:solidFill>
+            <a:srgbClr val="D8DFE4"/>
+          </a:solidFill>
+          <a:ln>
+            <a:noFill/>
+          </a:ln>
+        </p:spPr>
+        <p:style>
+          <a:lnRef idx="1">
+            <a:schemeClr val="accent1"/>
+          </a:lnRef>
+          <a:fillRef idx="3">
+            <a:schemeClr val="accent1"/>
+          </a:fillRef>
+          <a:effectRef idx="2">
+            <a:schemeClr val="accent1"/>
+          </a:effectRef>
+          <a:fontRef idx="minor">
+            <a:schemeClr val="lt1"/>
+          </a:fontRef>
+        </p:style>
+        <p:txBody>
+          <a:bodyPr rtlCol="0" anchor="ctr"/>
+          <a:lstStyle/>
+          <a:p>
+            <a:pPr algn="ctr"/>
           </a:p>
         </p:txBody>
       </p:sp>
@@ -4758,8 +4768,8 @@
         </p:nvSpPr>
         <p:spPr>
           <a:xfrm>
-            <a:off x="685800" y="1143000"/>
-            <a:ext cx="10817352" cy="25400"/>
+            <a:off x="685800" y="502920"/>
+            <a:ext cx="36576" cy="658368"/>
           </a:xfrm>
           <a:prstGeom prst="rect">
             <a:avLst/>
@@ -4793,33 +4803,276 @@
           </a:p>
         </p:txBody>
       </p:sp>
-      <p:pic>
-        <p:nvPicPr>
-          <p:cNvPr id="7" name="Picture 6" descr="image.png"/>
-          <p:cNvPicPr>
-            <a:picLocks noChangeAspect="1"/>
-          </p:cNvPicPr>
-          <p:nvPr/>
-        </p:nvPicPr>
-        <p:blipFill>
-          <a:blip r:embed="rId2"/>
-          <a:stretch>
-            <a:fillRect/>
-          </a:stretch>
-        </p:blipFill>
-        <p:spPr>
-          <a:xfrm>
-            <a:off x="2303489" y="1325880"/>
-            <a:ext cx="7581973" cy="4937760"/>
-          </a:xfrm>
-          <a:prstGeom prst="rect">
-            <a:avLst/>
-          </a:prstGeom>
-        </p:spPr>
-      </p:pic>
-      <p:sp>
-        <p:nvSpPr>
-          <p:cNvPr id="8" name="Rectangle 7"/>
+      <p:sp>
+        <p:nvSpPr>
+          <p:cNvPr id="7" name="TextBox 6"/>
+          <p:cNvSpPr txBox="1"/>
+          <p:nvPr/>
+        </p:nvSpPr>
+        <p:spPr>
+          <a:xfrm>
+            <a:off x="813816" y="502920"/>
+            <a:ext cx="10634472" cy="685800"/>
+          </a:xfrm>
+          <a:prstGeom prst="rect">
+            <a:avLst/>
+          </a:prstGeom>
+          <a:noFill/>
+        </p:spPr>
+        <p:txBody>
+          <a:bodyPr wrap="square">
+            <a:spAutoFit/>
+          </a:bodyPr>
+          <a:lstStyle/>
+          <a:p>
+            <a:pPr algn="l"/>
+            <a:r>
+              <a:rPr sz="2400" b="1" i="0">
+                <a:solidFill>
+                  <a:srgbClr val="1F2C56"/>
+                </a:solidFill>
+                <a:latin typeface="Source Serif 4"/>
+              </a:rPr>
+              <a:t>Theorie-Input 4: Risikofelder der Bauträgerfinanzierung</a:t>
+            </a:r>
+          </a:p>
+        </p:txBody>
+      </p:sp>
+      <p:sp>
+        <p:nvSpPr>
+          <p:cNvPr id="8" name="TextBox 7"/>
+          <p:cNvSpPr txBox="1"/>
+          <p:nvPr/>
+        </p:nvSpPr>
+        <p:spPr>
+          <a:xfrm>
+            <a:off x="685800" y="1417320"/>
+            <a:ext cx="10817352" cy="5029200"/>
+          </a:xfrm>
+          <a:prstGeom prst="rect">
+            <a:avLst/>
+          </a:prstGeom>
+          <a:noFill/>
+        </p:spPr>
+        <p:txBody>
+          <a:bodyPr wrap="square">
+            <a:spAutoFit/>
+          </a:bodyPr>
+          <a:lstStyle/>
+          <a:p>
+            <a:pPr>
+              <a:spcBef>
+                <a:spcPts val="400"/>
+              </a:spcBef>
+              <a:spcAft>
+                <a:spcPts val="200"/>
+              </a:spcAft>
+            </a:pPr>
+            <a:r>
+              <a:rPr sz="1300">
+                <a:solidFill>
+                  <a:srgbClr val="3D5466"/>
+                </a:solidFill>
+                <a:latin typeface="Arial"/>
+              </a:rPr>
+              <a:t>▸  Risikofeld 1: Fertigstellungsrisiko</a:t>
+            </a:r>
+          </a:p>
+          <a:p>
+            <a:pPr>
+              <a:spcBef>
+                <a:spcPts val="400"/>
+              </a:spcBef>
+              <a:spcAft>
+                <a:spcPts val="200"/>
+              </a:spcAft>
+            </a:pPr>
+            <a:r>
+              <a:rPr sz="1300">
+                <a:solidFill>
+                  <a:srgbClr val="3D5466"/>
+                </a:solidFill>
+                <a:latin typeface="Arial"/>
+              </a:rPr>
+              <a:t>▸  Risikofeld 2: Absatzrisiko</a:t>
+            </a:r>
+          </a:p>
+          <a:p>
+            <a:pPr>
+              <a:spcBef>
+                <a:spcPts val="400"/>
+              </a:spcBef>
+              <a:spcAft>
+                <a:spcPts val="200"/>
+              </a:spcAft>
+            </a:pPr>
+            <a:r>
+              <a:rPr sz="1300">
+                <a:solidFill>
+                  <a:srgbClr val="3D5466"/>
+                </a:solidFill>
+                <a:latin typeface="Arial"/>
+              </a:rPr>
+              <a:t>▸  Risikominderung: Vorverkaufsquote als Auszahlungsbedingung, konservative Wertansätze (Vergleichspreise statt Optimistik), Vermarktungskonzept des Bauträgers prüfen.</a:t>
+            </a:r>
+          </a:p>
+          <a:p>
+            <a:pPr>
+              <a:spcBef>
+                <a:spcPts val="400"/>
+              </a:spcBef>
+              <a:spcAft>
+                <a:spcPts val="200"/>
+              </a:spcAft>
+            </a:pPr>
+            <a:r>
+              <a:rPr sz="1300">
+                <a:solidFill>
+                  <a:srgbClr val="3D5466"/>
+                </a:solidFill>
+                <a:latin typeface="Arial"/>
+              </a:rPr>
+              <a:t>▸  Risikofeld 3: Kostenüberschreitungsrisiko</a:t>
+            </a:r>
+          </a:p>
+          <a:p>
+            <a:pPr>
+              <a:spcBef>
+                <a:spcPts val="400"/>
+              </a:spcBef>
+              <a:spcAft>
+                <a:spcPts val="200"/>
+              </a:spcAft>
+            </a:pPr>
+            <a:r>
+              <a:rPr sz="1300">
+                <a:solidFill>
+                  <a:srgbClr val="3D5466"/>
+                </a:solidFill>
+                <a:latin typeface="Arial"/>
+              </a:rPr>
+              <a:t>▸  Risikominderung: Festpreisverträge mit dem Generalunternehmer, EK-Puffer (mindestens 20–25 % EK-Quote), Kostenschätzung durch unabhängigen Bausachverständigen prüfen lassen.</a:t>
+            </a:r>
+          </a:p>
+          <a:p>
+            <a:pPr>
+              <a:spcBef>
+                <a:spcPts val="400"/>
+              </a:spcBef>
+              <a:spcAft>
+                <a:spcPts val="200"/>
+              </a:spcAft>
+            </a:pPr>
+            <a:r>
+              <a:rPr sz="1300">
+                <a:solidFill>
+                  <a:srgbClr val="3D5466"/>
+                </a:solidFill>
+                <a:latin typeface="Arial"/>
+              </a:rPr>
+              <a:t>▸  Risikofeld 4a: Sicherheitenstruktur und Grundschuld-Freigabe bei Bauträgerfinanzierungen</a:t>
+            </a:r>
+          </a:p>
+          <a:p>
+            <a:pPr>
+              <a:spcBef>
+                <a:spcPts val="400"/>
+              </a:spcBef>
+              <a:spcAft>
+                <a:spcPts val="200"/>
+              </a:spcAft>
+            </a:pPr>
+            <a:r>
+              <a:rPr sz="1300">
+                <a:solidFill>
+                  <a:srgbClr val="3D5466"/>
+                </a:solidFill>
+                <a:latin typeface="Arial"/>
+              </a:rPr>
+              <a:t>▸  Ein in der Praxis häufig unterschätztes operatives Thema: Die Grundschuld-Strukturierung und die Freigaberegelung bei Teilverkäufen.</a:t>
+            </a:r>
+          </a:p>
+          <a:p>
+            <a:pPr>
+              <a:spcBef>
+                <a:spcPts val="400"/>
+              </a:spcBef>
+              <a:spcAft>
+                <a:spcPts val="200"/>
+              </a:spcAft>
+            </a:pPr>
+            <a:r>
+              <a:rPr sz="1300">
+                <a:solidFill>
+                  <a:srgbClr val="3D5466"/>
+                </a:solidFill>
+                <a:latin typeface="Arial"/>
+              </a:rPr>
+              <a:t>▸  Freigaberegelung – typische Bankpraxis:</a:t>
+            </a:r>
+          </a:p>
+          <a:p>
+            <a:pPr>
+              <a:spcBef>
+                <a:spcPts val="400"/>
+              </a:spcBef>
+              <a:spcAft>
+                <a:spcPts val="200"/>
+              </a:spcAft>
+            </a:pPr>
+            <a:r>
+              <a:rPr sz="1300">
+                <a:solidFill>
+                  <a:srgbClr val="3D5466"/>
+                </a:solidFill>
+                <a:latin typeface="Arial"/>
+              </a:rPr>
+              <a:t>▸  Risikofeld 4: Zinsänderungs- und Laufzeitrisiko</a:t>
+            </a:r>
+          </a:p>
+          <a:p>
+            <a:pPr>
+              <a:spcBef>
+                <a:spcPts val="400"/>
+              </a:spcBef>
+              <a:spcAft>
+                <a:spcPts val="200"/>
+              </a:spcAft>
+            </a:pPr>
+            <a:r>
+              <a:rPr sz="1300">
+                <a:solidFill>
+                  <a:srgbClr val="3D5466"/>
+                </a:solidFill>
+                <a:latin typeface="Arial"/>
+              </a:rPr>
+              <a:t>▸  Risikominderung: Zinssicherung (Zinsswap, Cap) für die Bauphase, realistische Zeitplanung mit Puffer, Klauseln bei Laufzeitverlängerung.</a:t>
+            </a:r>
+          </a:p>
+          <a:p>
+            <a:pPr>
+              <a:spcBef>
+                <a:spcPts val="400"/>
+              </a:spcBef>
+              <a:spcAft>
+                <a:spcPts val="200"/>
+              </a:spcAft>
+            </a:pPr>
+            <a:r>
+              <a:rPr sz="1300">
+                <a:solidFill>
+                  <a:srgbClr val="3D5466"/>
+                </a:solidFill>
+                <a:latin typeface="Arial"/>
+              </a:rPr>
+              <a:t>▸  Die folgende Handlungskarte fasst die zentralen Diagnose-Aktion-Muster für die Immobilien- und Projektfinanzierung zusammen:</a:t>
+            </a:r>
+          </a:p>
+        </p:txBody>
+      </p:sp>
+      <p:sp>
+        <p:nvSpPr>
+          <p:cNvPr id="9" name="Rectangle 8"/>
           <p:cNvSpPr/>
           <p:nvPr/>
         </p:nvSpPr>
@@ -4862,7 +5115,7 @@
       </p:sp>
       <p:sp>
         <p:nvSpPr>
-          <p:cNvPr id="9" name="TextBox 8"/>
+          <p:cNvPr id="10" name="TextBox 9"/>
           <p:cNvSpPr txBox="1"/>
           <p:nvPr/>
         </p:nvSpPr>
@@ -4891,41 +5144,6 @@
                 <a:latin typeface="JetBrains Mono"/>
               </a:rPr>
               <a:t>Benedikt Zoller Coaching  ·  FKB Campus  ·  M08</a:t>
-            </a:r>
-          </a:p>
-        </p:txBody>
-      </p:sp>
-      <p:sp>
-        <p:nvSpPr>
-          <p:cNvPr id="10" name="TextBox 9"/>
-          <p:cNvSpPr txBox="1"/>
-          <p:nvPr/>
-        </p:nvSpPr>
-        <p:spPr>
-          <a:xfrm>
-            <a:off x="7176211" y="6583680"/>
-            <a:ext cx="4326940" cy="256032"/>
-          </a:xfrm>
-          <a:prstGeom prst="rect">
-            <a:avLst/>
-          </a:prstGeom>
-          <a:noFill/>
-        </p:spPr>
-        <p:txBody>
-          <a:bodyPr wrap="none">
-            <a:spAutoFit/>
-          </a:bodyPr>
-          <a:lstStyle/>
-          <a:p>
-            <a:pPr algn="r"/>
-            <a:r>
-              <a:rPr sz="700">
-                <a:solidFill>
-                  <a:srgbClr val="A0B4D2"/>
-                </a:solidFill>
-                <a:latin typeface="JetBrains Mono"/>
-              </a:rPr>
-              <a:t>Schaubild</a:t>
             </a:r>
           </a:p>
         </p:txBody>
@@ -4963,7 +5181,7 @@
             <a:avLst/>
           </a:prstGeom>
           <a:solidFill>
-            <a:srgbClr val="EDEDF3"/>
+            <a:srgbClr val="FFFFFF"/>
           </a:solidFill>
           <a:ln>
             <a:noFill/>
@@ -5064,51 +5282,43 @@
                 </a:solidFill>
                 <a:latin typeface="JetBrains Mono"/>
               </a:rPr>
-              <a:t>M08  ·  INHALT</a:t>
-            </a:r>
-          </a:p>
-        </p:txBody>
-      </p:sp>
-      <p:sp>
-        <p:nvSpPr>
-          <p:cNvPr id="5" name="Rectangle 4"/>
-          <p:cNvSpPr/>
-          <p:nvPr/>
-        </p:nvSpPr>
-        <p:spPr>
-          <a:xfrm>
-            <a:off x="0" y="1234440"/>
-            <a:ext cx="12188952" cy="12700"/>
-          </a:xfrm>
-          <a:prstGeom prst="rect">
-            <a:avLst/>
-          </a:prstGeom>
-          <a:solidFill>
-            <a:srgbClr val="D8DFE4"/>
-          </a:solidFill>
-          <a:ln>
-            <a:noFill/>
-          </a:ln>
-        </p:spPr>
-        <p:style>
-          <a:lnRef idx="1">
-            <a:schemeClr val="accent1"/>
-          </a:lnRef>
-          <a:fillRef idx="3">
-            <a:schemeClr val="accent1"/>
-          </a:fillRef>
-          <a:effectRef idx="2">
-            <a:schemeClr val="accent1"/>
-          </a:effectRef>
-          <a:fontRef idx="minor">
-            <a:schemeClr val="lt1"/>
-          </a:fontRef>
-        </p:style>
-        <p:txBody>
-          <a:bodyPr rtlCol="0" anchor="ctr"/>
-          <a:lstStyle/>
-          <a:p>
-            <a:pPr algn="ctr"/>
+              <a:t>M08  ·  SCHAUBILD</a:t>
+            </a:r>
+          </a:p>
+        </p:txBody>
+      </p:sp>
+      <p:sp>
+        <p:nvSpPr>
+          <p:cNvPr id="5" name="TextBox 4"/>
+          <p:cNvSpPr txBox="1"/>
+          <p:nvPr/>
+        </p:nvSpPr>
+        <p:spPr>
+          <a:xfrm>
+            <a:off x="685800" y="502920"/>
+            <a:ext cx="10817352" cy="594360"/>
+          </a:xfrm>
+          <a:prstGeom prst="rect">
+            <a:avLst/>
+          </a:prstGeom>
+          <a:noFill/>
+        </p:spPr>
+        <p:txBody>
+          <a:bodyPr wrap="square">
+            <a:spAutoFit/>
+          </a:bodyPr>
+          <a:lstStyle/>
+          <a:p>
+            <a:pPr algn="l"/>
+            <a:r>
+              <a:rPr sz="2000" b="1" i="0">
+                <a:solidFill>
+                  <a:srgbClr val="1F2C56"/>
+                </a:solidFill>
+                <a:latin typeface="Source Serif 4"/>
+              </a:rPr>
+              <a:t>Handlungsempfehlung Immobilienfinanzierung</a:t>
+            </a:r>
           </a:p>
         </p:txBody>
       </p:sp>
@@ -5120,8 +5330,8 @@
         </p:nvSpPr>
         <p:spPr>
           <a:xfrm>
-            <a:off x="685800" y="502920"/>
-            <a:ext cx="36576" cy="658368"/>
+            <a:off x="685800" y="1143000"/>
+            <a:ext cx="10817352" cy="25400"/>
           </a:xfrm>
           <a:prstGeom prst="rect">
             <a:avLst/>
@@ -5155,295 +5365,33 @@
           </a:p>
         </p:txBody>
       </p:sp>
-      <p:sp>
-        <p:nvSpPr>
-          <p:cNvPr id="7" name="TextBox 6"/>
-          <p:cNvSpPr txBox="1"/>
-          <p:nvPr/>
-        </p:nvSpPr>
-        <p:spPr>
-          <a:xfrm>
-            <a:off x="813816" y="502920"/>
-            <a:ext cx="10634472" cy="685800"/>
-          </a:xfrm>
-          <a:prstGeom prst="rect">
-            <a:avLst/>
-          </a:prstGeom>
-          <a:noFill/>
-        </p:spPr>
-        <p:txBody>
-          <a:bodyPr wrap="square">
-            <a:spAutoFit/>
-          </a:bodyPr>
-          <a:lstStyle/>
-          <a:p>
-            <a:pPr algn="l"/>
-            <a:r>
-              <a:rPr sz="2400" b="1" i="0">
-                <a:solidFill>
-                  <a:srgbClr val="1F2C56"/>
-                </a:solidFill>
-                <a:latin typeface="Source Serif 4"/>
-              </a:rPr>
-              <a:t>Praxiscase: Quartier Sonnenhalde – Bauträgerfinanzierung Ravensburg</a:t>
-            </a:r>
-          </a:p>
-        </p:txBody>
-      </p:sp>
-      <p:sp>
-        <p:nvSpPr>
-          <p:cNvPr id="8" name="TextBox 7"/>
-          <p:cNvSpPr txBox="1"/>
-          <p:nvPr/>
-        </p:nvSpPr>
-        <p:spPr>
-          <a:xfrm>
-            <a:off x="685800" y="1417320"/>
-            <a:ext cx="10817352" cy="5029200"/>
-          </a:xfrm>
-          <a:prstGeom prst="rect">
-            <a:avLst/>
-          </a:prstGeom>
-          <a:noFill/>
-        </p:spPr>
-        <p:txBody>
-          <a:bodyPr wrap="square">
-            <a:spAutoFit/>
-          </a:bodyPr>
-          <a:lstStyle/>
-          <a:p>
-            <a:pPr>
-              <a:spcBef>
-                <a:spcPts val="1000"/>
-              </a:spcBef>
-              <a:spcAft>
-                <a:spcPts val="200"/>
-              </a:spcAft>
-            </a:pPr>
-            <a:r>
-              <a:rPr sz="800" b="1">
-                <a:solidFill>
-                  <a:srgbClr val="78808C"/>
-                </a:solidFill>
-                <a:latin typeface="JetBrains Mono"/>
-              </a:rPr>
-              <a:t>UNTERNEHMENSPORTRÄT</a:t>
-            </a:r>
-          </a:p>
-          <a:p>
-            <a:pPr>
-              <a:spcBef>
-                <a:spcPts val="400"/>
-              </a:spcBef>
-              <a:spcAft>
-                <a:spcPts val="200"/>
-              </a:spcAft>
-            </a:pPr>
-            <a:r>
-              <a:rPr sz="1200">
-                <a:solidFill>
-                  <a:srgbClr val="3D5466"/>
-                </a:solidFill>
-                <a:latin typeface="Arial"/>
-              </a:rPr>
-              <a:t>Das Projekt "Sonnenhalde":</a:t>
-            </a:r>
-          </a:p>
-          <a:p>
-            <a:pPr>
-              <a:spcBef>
-                <a:spcPts val="400"/>
-              </a:spcBef>
-              <a:spcAft>
-                <a:spcPts val="200"/>
-              </a:spcAft>
-            </a:pPr>
-            <a:r>
-              <a:rPr sz="1300">
-                <a:solidFill>
-                  <a:srgbClr val="3D5466"/>
-                </a:solidFill>
-                <a:latin typeface="Arial"/>
-              </a:rPr>
-              <a:t>▸  Lage: Ravensburg-Südstadt, aufgewertetes Quartier, gute ÖPNV-Anbindung</a:t>
-            </a:r>
-          </a:p>
-          <a:p>
-            <a:pPr>
-              <a:spcBef>
-                <a:spcPts val="400"/>
-              </a:spcBef>
-              <a:spcAft>
-                <a:spcPts val="200"/>
-              </a:spcAft>
-            </a:pPr>
-            <a:r>
-              <a:rPr sz="1300">
-                <a:solidFill>
-                  <a:srgbClr val="3D5466"/>
-                </a:solidFill>
-                <a:latin typeface="Arial"/>
-              </a:rPr>
-              <a:t>▸  Nutzung: 16 Eigentumswohnungen (60–110 m², 2–4 Zimmer)</a:t>
-            </a:r>
-          </a:p>
-          <a:p>
-            <a:pPr>
-              <a:spcBef>
-                <a:spcPts val="400"/>
-              </a:spcBef>
-              <a:spcAft>
-                <a:spcPts val="200"/>
-              </a:spcAft>
-            </a:pPr>
-            <a:r>
-              <a:rPr sz="1300">
-                <a:solidFill>
-                  <a:srgbClr val="3D5466"/>
-                </a:solidFill>
-                <a:latin typeface="Arial"/>
-              </a:rPr>
-              <a:t>▸  Baugenehmigung: seit März 2026 rechtskräftig</a:t>
-            </a:r>
-          </a:p>
-          <a:p>
-            <a:pPr>
-              <a:spcBef>
-                <a:spcPts val="400"/>
-              </a:spcBef>
-              <a:spcAft>
-                <a:spcPts val="200"/>
-              </a:spcAft>
-            </a:pPr>
-            <a:r>
-              <a:rPr sz="1300">
-                <a:solidFill>
-                  <a:srgbClr val="3D5466"/>
-                </a:solidFill>
-                <a:latin typeface="Arial"/>
-              </a:rPr>
-              <a:t>▸  Baubeginn: geplant April 2027 (Vorlaufzeit für Beurkundungen und Bauvorbereitungen realistisch eingeplant)</a:t>
-            </a:r>
-          </a:p>
-          <a:p>
-            <a:pPr>
-              <a:spcBef>
-                <a:spcPts val="400"/>
-              </a:spcBef>
-              <a:spcAft>
-                <a:spcPts val="200"/>
-              </a:spcAft>
-            </a:pPr>
-            <a:r>
-              <a:rPr sz="1300">
-                <a:solidFill>
-                  <a:srgbClr val="3D5466"/>
-                </a:solidFill>
-                <a:latin typeface="Arial"/>
-              </a:rPr>
-              <a:t>▸  Fertigstellung: Juni 2028</a:t>
-            </a:r>
-          </a:p>
-          <a:p>
-            <a:pPr>
-              <a:spcBef>
-                <a:spcPts val="400"/>
-              </a:spcBef>
-              <a:spcAft>
-                <a:spcPts val="200"/>
-              </a:spcAft>
-            </a:pPr>
-            <a:r>
-              <a:rPr sz="1300">
-                <a:solidFill>
-                  <a:srgbClr val="3D5466"/>
-                </a:solidFill>
-                <a:latin typeface="Arial"/>
-              </a:rPr>
-              <a:t>▸  Vertrieb: eigenes Vertriebsbüro + regionaler Maklerpartner</a:t>
-            </a:r>
-          </a:p>
-          <a:p>
-            <a:pPr>
-              <a:spcBef>
-                <a:spcPts val="400"/>
-              </a:spcBef>
-              <a:spcAft>
-                <a:spcPts val="200"/>
-              </a:spcAft>
-            </a:pPr>
-            <a:r>
-              <a:rPr sz="1300">
-                <a:solidFill>
-                  <a:srgbClr val="3D5466"/>
-                </a:solidFill>
-                <a:latin typeface="Arial"/>
-              </a:rPr>
-              <a:t>▸  Vorverkäufe zum Zeitpunkt der Kreditanfrage: 4 von 16 Einheiten notariell beurkundet (25 %)</a:t>
-            </a:r>
-          </a:p>
-          <a:p>
-            <a:pPr>
-              <a:spcBef>
-                <a:spcPts val="1000"/>
-              </a:spcBef>
-              <a:spcAft>
-                <a:spcPts val="200"/>
-              </a:spcAft>
-            </a:pPr>
-            <a:r>
-              <a:rPr sz="800" b="1">
-                <a:solidFill>
-                  <a:srgbClr val="78808C"/>
-                </a:solidFill>
-                <a:latin typeface="JetBrains Mono"/>
-              </a:rPr>
-              <a:t>PROJEKTFINANZIERUNG – ECKDATEN</a:t>
-            </a:r>
-          </a:p>
-          <a:p>
-            <a:pPr>
-              <a:spcBef>
-                <a:spcPts val="400"/>
-              </a:spcBef>
-              <a:spcAft>
-                <a:spcPts val="200"/>
-              </a:spcAft>
-            </a:pPr>
-            <a:r>
-              <a:rPr sz="1200">
-                <a:solidFill>
-                  <a:srgbClr val="3D5466"/>
-                </a:solidFill>
-                <a:latin typeface="Arial"/>
-              </a:rPr>
-              <a:t>Prognostizierte Verkaufserlöse:</a:t>
-            </a:r>
-          </a:p>
-          <a:p>
-            <a:pPr>
-              <a:spcBef>
-                <a:spcPts val="1000"/>
-              </a:spcBef>
-              <a:spcAft>
-                <a:spcPts val="200"/>
-              </a:spcAft>
-            </a:pPr>
-            <a:r>
-              <a:rPr sz="800" b="1">
-                <a:solidFill>
-                  <a:srgbClr val="78808C"/>
-                </a:solidFill>
-                <a:latin typeface="JetBrains Mono"/>
-              </a:rPr>
-              <a:t>AUFGABEN (GRUPPENARBEIT, JE GRUPPE CA. 60 MIN.)</a:t>
-            </a:r>
-          </a:p>
-        </p:txBody>
-      </p:sp>
-      <p:sp>
-        <p:nvSpPr>
-          <p:cNvPr id="9" name="Rectangle 8"/>
+      <p:pic>
+        <p:nvPicPr>
+          <p:cNvPr id="7" name="Picture 6" descr="image.png"/>
+          <p:cNvPicPr>
+            <a:picLocks noChangeAspect="1"/>
+          </p:cNvPicPr>
+          <p:nvPr/>
+        </p:nvPicPr>
+        <p:blipFill>
+          <a:blip r:embed="rId2"/>
+          <a:stretch>
+            <a:fillRect/>
+          </a:stretch>
+        </p:blipFill>
+        <p:spPr>
+          <a:xfrm>
+            <a:off x="2303489" y="1325880"/>
+            <a:ext cx="7581973" cy="4937760"/>
+          </a:xfrm>
+          <a:prstGeom prst="rect">
+            <a:avLst/>
+          </a:prstGeom>
+        </p:spPr>
+      </p:pic>
+      <p:sp>
+        <p:nvSpPr>
+          <p:cNvPr id="8" name="Rectangle 7"/>
           <p:cNvSpPr/>
           <p:nvPr/>
         </p:nvSpPr>
@@ -5486,7 +5434,7 @@
       </p:sp>
       <p:sp>
         <p:nvSpPr>
-          <p:cNvPr id="10" name="TextBox 9"/>
+          <p:cNvPr id="9" name="TextBox 8"/>
           <p:cNvSpPr txBox="1"/>
           <p:nvPr/>
         </p:nvSpPr>
@@ -5515,6 +5463,41 @@
                 <a:latin typeface="JetBrains Mono"/>
               </a:rPr>
               <a:t>Benedikt Zoller Coaching  ·  FKB Campus  ·  M08</a:t>
+            </a:r>
+          </a:p>
+        </p:txBody>
+      </p:sp>
+      <p:sp>
+        <p:nvSpPr>
+          <p:cNvPr id="10" name="TextBox 9"/>
+          <p:cNvSpPr txBox="1"/>
+          <p:nvPr/>
+        </p:nvSpPr>
+        <p:spPr>
+          <a:xfrm>
+            <a:off x="7176211" y="6583680"/>
+            <a:ext cx="4326940" cy="256032"/>
+          </a:xfrm>
+          <a:prstGeom prst="rect">
+            <a:avLst/>
+          </a:prstGeom>
+          <a:noFill/>
+        </p:spPr>
+        <p:txBody>
+          <a:bodyPr wrap="none">
+            <a:spAutoFit/>
+          </a:bodyPr>
+          <a:lstStyle/>
+          <a:p>
+            <a:pPr algn="r"/>
+            <a:r>
+              <a:rPr sz="700">
+                <a:solidFill>
+                  <a:srgbClr val="A0B4D2"/>
+                </a:solidFill>
+                <a:latin typeface="JetBrains Mono"/>
+              </a:rPr>
+              <a:t>Schaubild</a:t>
             </a:r>
           </a:p>
         </p:txBody>
@@ -5774,7 +5757,7 @@
                 </a:solidFill>
                 <a:latin typeface="Source Serif 4"/>
               </a:rPr>
-              <a:t>Reflexionsfragen</a:t>
+              <a:t>Praxiscase: Quartier Sonnenhalde – Bauträgerfinanzierung Ravensburg</a:t>
             </a:r>
           </a:p>
         </p:txBody>
@@ -5800,6 +5783,25 @@
             <a:spAutoFit/>
           </a:bodyPr>
           <a:lstStyle/>
+          <a:p>
+            <a:pPr>
+              <a:spcBef>
+                <a:spcPts val="1000"/>
+              </a:spcBef>
+              <a:spcAft>
+                <a:spcPts val="200"/>
+              </a:spcAft>
+            </a:pPr>
+            <a:r>
+              <a:rPr sz="800" b="1">
+                <a:solidFill>
+                  <a:srgbClr val="78808C"/>
+                </a:solidFill>
+                <a:latin typeface="JetBrains Mono"/>
+              </a:rPr>
+              <a:t>UNTERNEHMENSPORTRÄT</a:t>
+            </a:r>
+          </a:p>
           <a:p>
             <a:pPr>
               <a:spcBef>
@@ -5816,7 +5818,7 @@
                 </a:solidFill>
                 <a:latin typeface="Arial"/>
               </a:rPr>
-              <a:t>▸  Mini-Case Bestandshalter (Anwenden, Bloom 3):</a:t>
+              <a:t>▸  Das Projekt "Sonnenhalde":</a:t>
             </a:r>
           </a:p>
           <a:p>
@@ -5829,13 +5831,1061 @@
               </a:spcAft>
             </a:pPr>
             <a:r>
-              <a:rPr sz="1200">
+              <a:rPr sz="1300">
                 <a:solidFill>
                   <a:srgbClr val="3D5466"/>
                 </a:solidFill>
                 <a:latin typeface="Arial"/>
               </a:rPr>
-              <a:t>Die Familie fragt nach einer Aufstockung des Kredits um 200.000 EUR für Dachgeschossausbau (2 neue Einheiten, geplante Zusatzmiete 18.000 EUR p.a.).</a:t>
+              <a:t>▸  Lage: Ravensburg-Südstadt, aufgewertetes Quartier, gute ÖPNV-Anbindung</a:t>
+            </a:r>
+          </a:p>
+          <a:p>
+            <a:pPr>
+              <a:spcBef>
+                <a:spcPts val="400"/>
+              </a:spcBef>
+              <a:spcAft>
+                <a:spcPts val="200"/>
+              </a:spcAft>
+            </a:pPr>
+            <a:r>
+              <a:rPr sz="1300">
+                <a:solidFill>
+                  <a:srgbClr val="3D5466"/>
+                </a:solidFill>
+                <a:latin typeface="Arial"/>
+              </a:rPr>
+              <a:t>▸  Nutzung: 16 Eigentumswohnungen (60–110 m², 2–4 Zimmer)</a:t>
+            </a:r>
+          </a:p>
+          <a:p>
+            <a:pPr>
+              <a:spcBef>
+                <a:spcPts val="400"/>
+              </a:spcBef>
+              <a:spcAft>
+                <a:spcPts val="200"/>
+              </a:spcAft>
+            </a:pPr>
+            <a:r>
+              <a:rPr sz="1300">
+                <a:solidFill>
+                  <a:srgbClr val="3D5466"/>
+                </a:solidFill>
+                <a:latin typeface="Arial"/>
+              </a:rPr>
+              <a:t>▸  Baugenehmigung: seit März 2026 rechtskräftig</a:t>
+            </a:r>
+          </a:p>
+          <a:p>
+            <a:pPr>
+              <a:spcBef>
+                <a:spcPts val="400"/>
+              </a:spcBef>
+              <a:spcAft>
+                <a:spcPts val="200"/>
+              </a:spcAft>
+            </a:pPr>
+            <a:r>
+              <a:rPr sz="1300">
+                <a:solidFill>
+                  <a:srgbClr val="3D5466"/>
+                </a:solidFill>
+                <a:latin typeface="Arial"/>
+              </a:rPr>
+              <a:t>▸  Baubeginn: geplant April 2027 (Vorlaufzeit für Beurkundungen und Bauvorbereitungen realistisch eingeplant)</a:t>
+            </a:r>
+          </a:p>
+          <a:p>
+            <a:pPr>
+              <a:spcBef>
+                <a:spcPts val="400"/>
+              </a:spcBef>
+              <a:spcAft>
+                <a:spcPts val="200"/>
+              </a:spcAft>
+            </a:pPr>
+            <a:r>
+              <a:rPr sz="1300">
+                <a:solidFill>
+                  <a:srgbClr val="3D5466"/>
+                </a:solidFill>
+                <a:latin typeface="Arial"/>
+              </a:rPr>
+              <a:t>▸  Fertigstellung: Juni 2028</a:t>
+            </a:r>
+          </a:p>
+          <a:p>
+            <a:pPr>
+              <a:spcBef>
+                <a:spcPts val="400"/>
+              </a:spcBef>
+              <a:spcAft>
+                <a:spcPts val="200"/>
+              </a:spcAft>
+            </a:pPr>
+            <a:r>
+              <a:rPr sz="1300">
+                <a:solidFill>
+                  <a:srgbClr val="3D5466"/>
+                </a:solidFill>
+                <a:latin typeface="Arial"/>
+              </a:rPr>
+              <a:t>▸  Vertrieb: eigenes Vertriebsbüro + regionaler Maklerpartner</a:t>
+            </a:r>
+          </a:p>
+          <a:p>
+            <a:pPr>
+              <a:spcBef>
+                <a:spcPts val="400"/>
+              </a:spcBef>
+              <a:spcAft>
+                <a:spcPts val="200"/>
+              </a:spcAft>
+            </a:pPr>
+            <a:r>
+              <a:rPr sz="1300">
+                <a:solidFill>
+                  <a:srgbClr val="3D5466"/>
+                </a:solidFill>
+                <a:latin typeface="Arial"/>
+              </a:rPr>
+              <a:t>▸  Vorverkäufe zum Zeitpunkt der Kreditanfrage: 4 von 16 Einheiten notariell beurkundet (25 %)</a:t>
+            </a:r>
+          </a:p>
+          <a:p>
+            <a:pPr>
+              <a:spcBef>
+                <a:spcPts val="1000"/>
+              </a:spcBef>
+              <a:spcAft>
+                <a:spcPts val="200"/>
+              </a:spcAft>
+            </a:pPr>
+            <a:r>
+              <a:rPr sz="800" b="1">
+                <a:solidFill>
+                  <a:srgbClr val="78808C"/>
+                </a:solidFill>
+                <a:latin typeface="JetBrains Mono"/>
+              </a:rPr>
+              <a:t>PROJEKTFINANZIERUNG – ECKDATEN</a:t>
+            </a:r>
+          </a:p>
+          <a:p>
+            <a:pPr>
+              <a:spcBef>
+                <a:spcPts val="400"/>
+              </a:spcBef>
+              <a:spcAft>
+                <a:spcPts val="200"/>
+              </a:spcAft>
+            </a:pPr>
+            <a:r>
+              <a:rPr sz="1300">
+                <a:solidFill>
+                  <a:srgbClr val="3D5466"/>
+                </a:solidFill>
+                <a:latin typeface="Arial"/>
+              </a:rPr>
+              <a:t>▸  Prognostizierte Verkaufserlöse:</a:t>
+            </a:r>
+          </a:p>
+          <a:p>
+            <a:pPr>
+              <a:spcBef>
+                <a:spcPts val="1000"/>
+              </a:spcBef>
+              <a:spcAft>
+                <a:spcPts val="200"/>
+              </a:spcAft>
+            </a:pPr>
+            <a:r>
+              <a:rPr sz="800" b="1">
+                <a:solidFill>
+                  <a:srgbClr val="78808C"/>
+                </a:solidFill>
+                <a:latin typeface="JetBrains Mono"/>
+              </a:rPr>
+              <a:t>AUFGABEN (GRUPPENARBEIT, JE GRUPPE CA. 60 MIN.)</a:t>
+            </a:r>
+          </a:p>
+        </p:txBody>
+      </p:sp>
+      <p:sp>
+        <p:nvSpPr>
+          <p:cNvPr id="9" name="Rectangle 8"/>
+          <p:cNvSpPr/>
+          <p:nvPr/>
+        </p:nvSpPr>
+        <p:spPr>
+          <a:xfrm>
+            <a:off x="0" y="6510528"/>
+            <a:ext cx="12188952" cy="347472"/>
+          </a:xfrm>
+          <a:prstGeom prst="rect">
+            <a:avLst/>
+          </a:prstGeom>
+          <a:solidFill>
+            <a:srgbClr val="0A1937"/>
+          </a:solidFill>
+          <a:ln>
+            <a:noFill/>
+          </a:ln>
+        </p:spPr>
+        <p:style>
+          <a:lnRef idx="1">
+            <a:schemeClr val="accent1"/>
+          </a:lnRef>
+          <a:fillRef idx="3">
+            <a:schemeClr val="accent1"/>
+          </a:fillRef>
+          <a:effectRef idx="2">
+            <a:schemeClr val="accent1"/>
+          </a:effectRef>
+          <a:fontRef idx="minor">
+            <a:schemeClr val="lt1"/>
+          </a:fontRef>
+        </p:style>
+        <p:txBody>
+          <a:bodyPr rtlCol="0" anchor="ctr"/>
+          <a:lstStyle/>
+          <a:p>
+            <a:pPr algn="ctr"/>
+          </a:p>
+        </p:txBody>
+      </p:sp>
+      <p:sp>
+        <p:nvSpPr>
+          <p:cNvPr id="10" name="TextBox 9"/>
+          <p:cNvSpPr txBox="1"/>
+          <p:nvPr/>
+        </p:nvSpPr>
+        <p:spPr>
+          <a:xfrm>
+            <a:off x="685800" y="6583680"/>
+            <a:ext cx="6490411" cy="256032"/>
+          </a:xfrm>
+          <a:prstGeom prst="rect">
+            <a:avLst/>
+          </a:prstGeom>
+          <a:noFill/>
+        </p:spPr>
+        <p:txBody>
+          <a:bodyPr wrap="none">
+            <a:spAutoFit/>
+          </a:bodyPr>
+          <a:lstStyle/>
+          <a:p>
+            <a:pPr algn="l"/>
+            <a:r>
+              <a:rPr sz="700">
+                <a:solidFill>
+                  <a:srgbClr val="A0B4D2"/>
+                </a:solidFill>
+                <a:latin typeface="JetBrains Mono"/>
+              </a:rPr>
+              <a:t>Benedikt Zoller Coaching  ·  FKB Campus  ·  M08</a:t>
+            </a:r>
+          </a:p>
+        </p:txBody>
+      </p:sp>
+    </p:spTree>
+  </p:cSld>
+  <p:clrMapOvr>
+    <a:masterClrMapping/>
+  </p:clrMapOvr>
+</p:sld>
+</file>
+
+<file path=ppt/slides/slide13.xml><?xml version="1.0" encoding="utf-8"?>
+<p:sld xmlns:a="http://schemas.openxmlformats.org/drawingml/2006/main" xmlns:p="http://schemas.openxmlformats.org/presentationml/2006/main" xmlns:r="http://schemas.openxmlformats.org/officeDocument/2006/relationships">
+  <p:cSld>
+    <p:spTree>
+      <p:nvGrpSpPr>
+        <p:cNvPr id="1" name=""/>
+        <p:cNvGrpSpPr/>
+        <p:nvPr/>
+      </p:nvGrpSpPr>
+      <p:grpSpPr/>
+      <p:sp>
+        <p:nvSpPr>
+          <p:cNvPr id="2" name="Rectangle 1"/>
+          <p:cNvSpPr/>
+          <p:nvPr/>
+        </p:nvSpPr>
+        <p:spPr>
+          <a:xfrm>
+            <a:off x="0" y="0"/>
+            <a:ext cx="12188952" cy="6858000"/>
+          </a:xfrm>
+          <a:prstGeom prst="rect">
+            <a:avLst/>
+          </a:prstGeom>
+          <a:solidFill>
+            <a:srgbClr val="FFFFFF"/>
+          </a:solidFill>
+          <a:ln>
+            <a:noFill/>
+          </a:ln>
+        </p:spPr>
+        <p:style>
+          <a:lnRef idx="1">
+            <a:schemeClr val="accent1"/>
+          </a:lnRef>
+          <a:fillRef idx="3">
+            <a:schemeClr val="accent1"/>
+          </a:fillRef>
+          <a:effectRef idx="2">
+            <a:schemeClr val="accent1"/>
+          </a:effectRef>
+          <a:fontRef idx="minor">
+            <a:schemeClr val="lt1"/>
+          </a:fontRef>
+        </p:style>
+        <p:txBody>
+          <a:bodyPr rtlCol="0" anchor="ctr"/>
+          <a:lstStyle/>
+          <a:p>
+            <a:pPr algn="ctr"/>
+          </a:p>
+        </p:txBody>
+      </p:sp>
+      <p:sp>
+        <p:nvSpPr>
+          <p:cNvPr id="3" name="Rectangle 2"/>
+          <p:cNvSpPr/>
+          <p:nvPr/>
+        </p:nvSpPr>
+        <p:spPr>
+          <a:xfrm>
+            <a:off x="0" y="0"/>
+            <a:ext cx="12188952" cy="50292"/>
+          </a:xfrm>
+          <a:prstGeom prst="rect">
+            <a:avLst/>
+          </a:prstGeom>
+          <a:solidFill>
+            <a:srgbClr val="1F2C56"/>
+          </a:solidFill>
+          <a:ln>
+            <a:noFill/>
+          </a:ln>
+        </p:spPr>
+        <p:style>
+          <a:lnRef idx="1">
+            <a:schemeClr val="accent1"/>
+          </a:lnRef>
+          <a:fillRef idx="3">
+            <a:schemeClr val="accent1"/>
+          </a:fillRef>
+          <a:effectRef idx="2">
+            <a:schemeClr val="accent1"/>
+          </a:effectRef>
+          <a:fontRef idx="minor">
+            <a:schemeClr val="lt1"/>
+          </a:fontRef>
+        </p:style>
+        <p:txBody>
+          <a:bodyPr rtlCol="0" anchor="ctr"/>
+          <a:lstStyle/>
+          <a:p>
+            <a:pPr algn="ctr"/>
+          </a:p>
+        </p:txBody>
+      </p:sp>
+      <p:sp>
+        <p:nvSpPr>
+          <p:cNvPr id="4" name="TextBox 3"/>
+          <p:cNvSpPr txBox="1"/>
+          <p:nvPr/>
+        </p:nvSpPr>
+        <p:spPr>
+          <a:xfrm>
+            <a:off x="685800" y="109728"/>
+            <a:ext cx="10817352" cy="228600"/>
+          </a:xfrm>
+          <a:prstGeom prst="rect">
+            <a:avLst/>
+          </a:prstGeom>
+          <a:noFill/>
+        </p:spPr>
+        <p:txBody>
+          <a:bodyPr wrap="none">
+            <a:spAutoFit/>
+          </a:bodyPr>
+          <a:lstStyle/>
+          <a:p>
+            <a:pPr algn="l"/>
+            <a:r>
+              <a:rPr sz="750">
+                <a:solidFill>
+                  <a:srgbClr val="78808C"/>
+                </a:solidFill>
+                <a:latin typeface="JetBrains Mono"/>
+              </a:rPr>
+              <a:t>M08  ·  ÜBERSICHT</a:t>
+            </a:r>
+          </a:p>
+        </p:txBody>
+      </p:sp>
+      <p:sp>
+        <p:nvSpPr>
+          <p:cNvPr id="5" name="TextBox 4"/>
+          <p:cNvSpPr txBox="1"/>
+          <p:nvPr/>
+        </p:nvSpPr>
+        <p:spPr>
+          <a:xfrm>
+            <a:off x="685800" y="502920"/>
+            <a:ext cx="10817352" cy="594360"/>
+          </a:xfrm>
+          <a:prstGeom prst="rect">
+            <a:avLst/>
+          </a:prstGeom>
+          <a:noFill/>
+        </p:spPr>
+        <p:txBody>
+          <a:bodyPr wrap="square">
+            <a:spAutoFit/>
+          </a:bodyPr>
+          <a:lstStyle/>
+          <a:p>
+            <a:pPr algn="l"/>
+            <a:r>
+              <a:rPr sz="2000" b="1" i="0">
+                <a:solidFill>
+                  <a:srgbClr val="1F2C56"/>
+                </a:solidFill>
+                <a:latin typeface="Source Serif 4"/>
+              </a:rPr>
+              <a:t>Praxiscase: Quartier Sonnenhalde – Bauträgerfinanzierung Ravensburg</a:t>
+            </a:r>
+          </a:p>
+        </p:txBody>
+      </p:sp>
+      <p:sp>
+        <p:nvSpPr>
+          <p:cNvPr id="6" name="Rectangle 5"/>
+          <p:cNvSpPr/>
+          <p:nvPr/>
+        </p:nvSpPr>
+        <p:spPr>
+          <a:xfrm>
+            <a:off x="685800" y="1143000"/>
+            <a:ext cx="10817352" cy="25400"/>
+          </a:xfrm>
+          <a:prstGeom prst="rect">
+            <a:avLst/>
+          </a:prstGeom>
+          <a:solidFill>
+            <a:srgbClr val="D9C089"/>
+          </a:solidFill>
+          <a:ln>
+            <a:noFill/>
+          </a:ln>
+        </p:spPr>
+        <p:style>
+          <a:lnRef idx="1">
+            <a:schemeClr val="accent1"/>
+          </a:lnRef>
+          <a:fillRef idx="3">
+            <a:schemeClr val="accent1"/>
+          </a:fillRef>
+          <a:effectRef idx="2">
+            <a:schemeClr val="accent1"/>
+          </a:effectRef>
+          <a:fontRef idx="minor">
+            <a:schemeClr val="lt1"/>
+          </a:fontRef>
+        </p:style>
+        <p:txBody>
+          <a:bodyPr rtlCol="0" anchor="ctr"/>
+          <a:lstStyle/>
+          <a:p>
+            <a:pPr algn="ctr"/>
+          </a:p>
+        </p:txBody>
+      </p:sp>
+      <p:graphicFrame>
+        <p:nvGraphicFramePr>
+          <p:cNvPr id="7" name="Table 6"/>
+          <p:cNvGraphicFramePr>
+            <a:graphicFrameLocks noGrp="1"/>
+          </p:cNvGraphicFramePr>
+          <p:nvPr/>
+        </p:nvGraphicFramePr>
+        <p:xfrm>
+          <a:off x="685800" y="1417320"/>
+          <a:ext cx="10817352" cy="1152144"/>
+        </p:xfrm>
+        <a:graphic>
+          <a:graphicData uri="http://schemas.openxmlformats.org/drawingml/2006/table">
+            <a:tbl>
+              <a:tblPr firstRow="1" bandRow="1">
+                <a:tableStyleId>{5C22544A-7EE6-4342-B048-85BDC9FD1C3A}</a:tableStyleId>
+              </a:tblPr>
+              <a:tblGrid>
+                <a:gridCol w="5408676"/>
+                <a:gridCol w="5408676"/>
+              </a:tblGrid>
+              <a:tr h="384048">
+                <a:tc>
+                  <a:txBody>
+                    <a:bodyPr/>
+                    <a:lstStyle/>
+                    <a:p>
+                      <a:r>
+                        <a:rPr sz="1100" b="1">
+                          <a:solidFill>
+                            <a:srgbClr val="FFFFFF"/>
+                          </a:solidFill>
+                          <a:latin typeface="Arial"/>
+                        </a:rPr>
+                        <a:t>Position</a:t>
+                      </a:r>
+                    </a:p>
+                  </a:txBody>
+                  <a:tcPr>
+                    <a:solidFill>
+                      <a:srgbClr val="1F2C56"/>
+                    </a:solidFill>
+                  </a:tcPr>
+                </a:tc>
+                <a:tc>
+                  <a:txBody>
+                    <a:bodyPr/>
+                    <a:lstStyle/>
+                    <a:p>
+                      <a:r>
+                        <a:rPr sz="1100" b="1">
+                          <a:solidFill>
+                            <a:srgbClr val="FFFFFF"/>
+                          </a:solidFill>
+                          <a:latin typeface="Arial"/>
+                        </a:rPr>
+                        <a:t>Betrag</a:t>
+                      </a:r>
+                    </a:p>
+                  </a:txBody>
+                  <a:tcPr>
+                    <a:solidFill>
+                      <a:srgbClr val="1F2C56"/>
+                    </a:solidFill>
+                  </a:tcPr>
+                </a:tc>
+              </a:tr>
+              <a:tr h="384048">
+                <a:tc>
+                  <a:txBody>
+                    <a:bodyPr/>
+                    <a:lstStyle/>
+                    <a:p>
+                      <a:r>
+                        <a:rPr sz="1050">
+                          <a:solidFill>
+                            <a:srgbClr val="3D5466"/>
+                          </a:solidFill>
+                          <a:latin typeface="Arial"/>
+                        </a:rPr>
+                        <a:t>Grundstück (bereits bezahlt, EK)</a:t>
+                      </a:r>
+                    </a:p>
+                  </a:txBody>
+                  <a:tcPr/>
+                </a:tc>
+                <a:tc>
+                  <a:txBody>
+                    <a:bodyPr/>
+                    <a:lstStyle/>
+                    <a:p>
+                      <a:r>
+                        <a:rPr sz="1050">
+                          <a:solidFill>
+                            <a:srgbClr val="3D5466"/>
+                          </a:solidFill>
+                          <a:latin typeface="Arial"/>
+                        </a:rPr>
+                        <a:t>1.200.000 EUR</a:t>
+                      </a:r>
+                    </a:p>
+                  </a:txBody>
+                  <a:tcPr/>
+                </a:tc>
+              </a:tr>
+              <a:tr h="384048">
+                <a:tc>
+                  <a:txBody>
+                    <a:bodyPr/>
+                    <a:lstStyle/>
+                    <a:p>
+                      <a:r>
+                        <a:rPr sz="1050">
+                          <a:solidFill>
+                            <a:srgbClr val="3D5466"/>
+                          </a:solidFill>
+                          <a:latin typeface="Arial"/>
+                        </a:rPr>
+                        <a:t>Baukosten (GU-Festpreisvertrag)</a:t>
+                      </a:r>
+                    </a:p>
+                  </a:txBody>
+                  <a:tcPr/>
+                </a:tc>
+                <a:tc>
+                  <a:txBody>
+                    <a:bodyPr/>
+                    <a:lstStyle/>
+                    <a:p>
+                      <a:r>
+                        <a:rPr sz="1050">
+                          <a:solidFill>
+                            <a:srgbClr val="3D5466"/>
+                          </a:solidFill>
+                          <a:latin typeface="Arial"/>
+                        </a:rPr>
+                        <a:t>3.500.000 EUR</a:t>
+                      </a:r>
+                    </a:p>
+                  </a:txBody>
+                  <a:tcPr/>
+                </a:tc>
+              </a:tr>
+            </a:tbl>
+          </a:graphicData>
+        </a:graphic>
+      </p:graphicFrame>
+      <p:sp>
+        <p:nvSpPr>
+          <p:cNvPr id="8" name="Rectangle 7"/>
+          <p:cNvSpPr/>
+          <p:nvPr/>
+        </p:nvSpPr>
+        <p:spPr>
+          <a:xfrm>
+            <a:off x="0" y="6510528"/>
+            <a:ext cx="12188952" cy="347472"/>
+          </a:xfrm>
+          <a:prstGeom prst="rect">
+            <a:avLst/>
+          </a:prstGeom>
+          <a:solidFill>
+            <a:srgbClr val="0A1937"/>
+          </a:solidFill>
+          <a:ln>
+            <a:noFill/>
+          </a:ln>
+        </p:spPr>
+        <p:style>
+          <a:lnRef idx="1">
+            <a:schemeClr val="accent1"/>
+          </a:lnRef>
+          <a:fillRef idx="3">
+            <a:schemeClr val="accent1"/>
+          </a:fillRef>
+          <a:effectRef idx="2">
+            <a:schemeClr val="accent1"/>
+          </a:effectRef>
+          <a:fontRef idx="minor">
+            <a:schemeClr val="lt1"/>
+          </a:fontRef>
+        </p:style>
+        <p:txBody>
+          <a:bodyPr rtlCol="0" anchor="ctr"/>
+          <a:lstStyle/>
+          <a:p>
+            <a:pPr algn="ctr"/>
+          </a:p>
+        </p:txBody>
+      </p:sp>
+      <p:sp>
+        <p:nvSpPr>
+          <p:cNvPr id="9" name="TextBox 8"/>
+          <p:cNvSpPr txBox="1"/>
+          <p:nvPr/>
+        </p:nvSpPr>
+        <p:spPr>
+          <a:xfrm>
+            <a:off x="685800" y="6583680"/>
+            <a:ext cx="6490411" cy="256032"/>
+          </a:xfrm>
+          <a:prstGeom prst="rect">
+            <a:avLst/>
+          </a:prstGeom>
+          <a:noFill/>
+        </p:spPr>
+        <p:txBody>
+          <a:bodyPr wrap="none">
+            <a:spAutoFit/>
+          </a:bodyPr>
+          <a:lstStyle/>
+          <a:p>
+            <a:pPr algn="l"/>
+            <a:r>
+              <a:rPr sz="700">
+                <a:solidFill>
+                  <a:srgbClr val="A0B4D2"/>
+                </a:solidFill>
+                <a:latin typeface="JetBrains Mono"/>
+              </a:rPr>
+              <a:t>Benedikt Zoller Coaching  ·  FKB Campus  ·  M08</a:t>
+            </a:r>
+          </a:p>
+        </p:txBody>
+      </p:sp>
+      <p:sp>
+        <p:nvSpPr>
+          <p:cNvPr id="10" name="TextBox 9"/>
+          <p:cNvSpPr txBox="1"/>
+          <p:nvPr/>
+        </p:nvSpPr>
+        <p:spPr>
+          <a:xfrm>
+            <a:off x="7176211" y="6583680"/>
+            <a:ext cx="4326940" cy="256032"/>
+          </a:xfrm>
+          <a:prstGeom prst="rect">
+            <a:avLst/>
+          </a:prstGeom>
+          <a:noFill/>
+        </p:spPr>
+        <p:txBody>
+          <a:bodyPr wrap="none">
+            <a:spAutoFit/>
+          </a:bodyPr>
+          <a:lstStyle/>
+          <a:p>
+            <a:pPr algn="r"/>
+            <a:r>
+              <a:rPr sz="700">
+                <a:solidFill>
+                  <a:srgbClr val="A0B4D2"/>
+                </a:solidFill>
+                <a:latin typeface="JetBrains Mono"/>
+              </a:rPr>
+              <a:t>Übersicht</a:t>
+            </a:r>
+          </a:p>
+        </p:txBody>
+      </p:sp>
+    </p:spTree>
+  </p:cSld>
+  <p:clrMapOvr>
+    <a:masterClrMapping/>
+  </p:clrMapOvr>
+</p:sld>
+</file>
+
+<file path=ppt/slides/slide14.xml><?xml version="1.0" encoding="utf-8"?>
+<p:sld xmlns:a="http://schemas.openxmlformats.org/drawingml/2006/main" xmlns:p="http://schemas.openxmlformats.org/presentationml/2006/main" xmlns:r="http://schemas.openxmlformats.org/officeDocument/2006/relationships">
+  <p:cSld>
+    <p:spTree>
+      <p:nvGrpSpPr>
+        <p:cNvPr id="1" name=""/>
+        <p:cNvGrpSpPr/>
+        <p:nvPr/>
+      </p:nvGrpSpPr>
+      <p:grpSpPr/>
+      <p:sp>
+        <p:nvSpPr>
+          <p:cNvPr id="2" name="Rectangle 1"/>
+          <p:cNvSpPr/>
+          <p:nvPr/>
+        </p:nvSpPr>
+        <p:spPr>
+          <a:xfrm>
+            <a:off x="0" y="0"/>
+            <a:ext cx="12188952" cy="6858000"/>
+          </a:xfrm>
+          <a:prstGeom prst="rect">
+            <a:avLst/>
+          </a:prstGeom>
+          <a:solidFill>
+            <a:srgbClr val="EDEDF3"/>
+          </a:solidFill>
+          <a:ln>
+            <a:noFill/>
+          </a:ln>
+        </p:spPr>
+        <p:style>
+          <a:lnRef idx="1">
+            <a:schemeClr val="accent1"/>
+          </a:lnRef>
+          <a:fillRef idx="3">
+            <a:schemeClr val="accent1"/>
+          </a:fillRef>
+          <a:effectRef idx="2">
+            <a:schemeClr val="accent1"/>
+          </a:effectRef>
+          <a:fontRef idx="minor">
+            <a:schemeClr val="lt1"/>
+          </a:fontRef>
+        </p:style>
+        <p:txBody>
+          <a:bodyPr rtlCol="0" anchor="ctr"/>
+          <a:lstStyle/>
+          <a:p>
+            <a:pPr algn="ctr"/>
+          </a:p>
+        </p:txBody>
+      </p:sp>
+      <p:sp>
+        <p:nvSpPr>
+          <p:cNvPr id="3" name="Rectangle 2"/>
+          <p:cNvSpPr/>
+          <p:nvPr/>
+        </p:nvSpPr>
+        <p:spPr>
+          <a:xfrm>
+            <a:off x="0" y="0"/>
+            <a:ext cx="12188952" cy="50292"/>
+          </a:xfrm>
+          <a:prstGeom prst="rect">
+            <a:avLst/>
+          </a:prstGeom>
+          <a:solidFill>
+            <a:srgbClr val="1F2C56"/>
+          </a:solidFill>
+          <a:ln>
+            <a:noFill/>
+          </a:ln>
+        </p:spPr>
+        <p:style>
+          <a:lnRef idx="1">
+            <a:schemeClr val="accent1"/>
+          </a:lnRef>
+          <a:fillRef idx="3">
+            <a:schemeClr val="accent1"/>
+          </a:fillRef>
+          <a:effectRef idx="2">
+            <a:schemeClr val="accent1"/>
+          </a:effectRef>
+          <a:fontRef idx="minor">
+            <a:schemeClr val="lt1"/>
+          </a:fontRef>
+        </p:style>
+        <p:txBody>
+          <a:bodyPr rtlCol="0" anchor="ctr"/>
+          <a:lstStyle/>
+          <a:p>
+            <a:pPr algn="ctr"/>
+          </a:p>
+        </p:txBody>
+      </p:sp>
+      <p:sp>
+        <p:nvSpPr>
+          <p:cNvPr id="4" name="TextBox 3"/>
+          <p:cNvSpPr txBox="1"/>
+          <p:nvPr/>
+        </p:nvSpPr>
+        <p:spPr>
+          <a:xfrm>
+            <a:off x="685800" y="109728"/>
+            <a:ext cx="10817352" cy="228600"/>
+          </a:xfrm>
+          <a:prstGeom prst="rect">
+            <a:avLst/>
+          </a:prstGeom>
+          <a:noFill/>
+        </p:spPr>
+        <p:txBody>
+          <a:bodyPr wrap="none">
+            <a:spAutoFit/>
+          </a:bodyPr>
+          <a:lstStyle/>
+          <a:p>
+            <a:pPr algn="l"/>
+            <a:r>
+              <a:rPr sz="750">
+                <a:solidFill>
+                  <a:srgbClr val="78808C"/>
+                </a:solidFill>
+                <a:latin typeface="JetBrains Mono"/>
+              </a:rPr>
+              <a:t>M08  ·  INHALT</a:t>
+            </a:r>
+          </a:p>
+        </p:txBody>
+      </p:sp>
+      <p:sp>
+        <p:nvSpPr>
+          <p:cNvPr id="5" name="Rectangle 4"/>
+          <p:cNvSpPr/>
+          <p:nvPr/>
+        </p:nvSpPr>
+        <p:spPr>
+          <a:xfrm>
+            <a:off x="0" y="1234440"/>
+            <a:ext cx="12188952" cy="12700"/>
+          </a:xfrm>
+          <a:prstGeom prst="rect">
+            <a:avLst/>
+          </a:prstGeom>
+          <a:solidFill>
+            <a:srgbClr val="D8DFE4"/>
+          </a:solidFill>
+          <a:ln>
+            <a:noFill/>
+          </a:ln>
+        </p:spPr>
+        <p:style>
+          <a:lnRef idx="1">
+            <a:schemeClr val="accent1"/>
+          </a:lnRef>
+          <a:fillRef idx="3">
+            <a:schemeClr val="accent1"/>
+          </a:fillRef>
+          <a:effectRef idx="2">
+            <a:schemeClr val="accent1"/>
+          </a:effectRef>
+          <a:fontRef idx="minor">
+            <a:schemeClr val="lt1"/>
+          </a:fontRef>
+        </p:style>
+        <p:txBody>
+          <a:bodyPr rtlCol="0" anchor="ctr"/>
+          <a:lstStyle/>
+          <a:p>
+            <a:pPr algn="ctr"/>
+          </a:p>
+        </p:txBody>
+      </p:sp>
+      <p:sp>
+        <p:nvSpPr>
+          <p:cNvPr id="6" name="Rectangle 5"/>
+          <p:cNvSpPr/>
+          <p:nvPr/>
+        </p:nvSpPr>
+        <p:spPr>
+          <a:xfrm>
+            <a:off x="685800" y="502920"/>
+            <a:ext cx="36576" cy="658368"/>
+          </a:xfrm>
+          <a:prstGeom prst="rect">
+            <a:avLst/>
+          </a:prstGeom>
+          <a:solidFill>
+            <a:srgbClr val="D9C089"/>
+          </a:solidFill>
+          <a:ln>
+            <a:noFill/>
+          </a:ln>
+        </p:spPr>
+        <p:style>
+          <a:lnRef idx="1">
+            <a:schemeClr val="accent1"/>
+          </a:lnRef>
+          <a:fillRef idx="3">
+            <a:schemeClr val="accent1"/>
+          </a:fillRef>
+          <a:effectRef idx="2">
+            <a:schemeClr val="accent1"/>
+          </a:effectRef>
+          <a:fontRef idx="minor">
+            <a:schemeClr val="lt1"/>
+          </a:fontRef>
+        </p:style>
+        <p:txBody>
+          <a:bodyPr rtlCol="0" anchor="ctr"/>
+          <a:lstStyle/>
+          <a:p>
+            <a:pPr algn="ctr"/>
+          </a:p>
+        </p:txBody>
+      </p:sp>
+      <p:sp>
+        <p:nvSpPr>
+          <p:cNvPr id="7" name="TextBox 6"/>
+          <p:cNvSpPr txBox="1"/>
+          <p:nvPr/>
+        </p:nvSpPr>
+        <p:spPr>
+          <a:xfrm>
+            <a:off x="813816" y="502920"/>
+            <a:ext cx="10634472" cy="685800"/>
+          </a:xfrm>
+          <a:prstGeom prst="rect">
+            <a:avLst/>
+          </a:prstGeom>
+          <a:noFill/>
+        </p:spPr>
+        <p:txBody>
+          <a:bodyPr wrap="square">
+            <a:spAutoFit/>
+          </a:bodyPr>
+          <a:lstStyle/>
+          <a:p>
+            <a:pPr algn="l"/>
+            <a:r>
+              <a:rPr sz="2400" b="1" i="0">
+                <a:solidFill>
+                  <a:srgbClr val="1F2C56"/>
+                </a:solidFill>
+                <a:latin typeface="Source Serif 4"/>
+              </a:rPr>
+              <a:t>Reflexionsfragen</a:t>
+            </a:r>
+          </a:p>
+        </p:txBody>
+      </p:sp>
+      <p:sp>
+        <p:nvSpPr>
+          <p:cNvPr id="8" name="TextBox 7"/>
+          <p:cNvSpPr txBox="1"/>
+          <p:nvPr/>
+        </p:nvSpPr>
+        <p:spPr>
+          <a:xfrm>
+            <a:off x="685800" y="1417320"/>
+            <a:ext cx="10817352" cy="5029200"/>
+          </a:xfrm>
+          <a:prstGeom prst="rect">
+            <a:avLst/>
+          </a:prstGeom>
+          <a:noFill/>
+        </p:spPr>
+        <p:txBody>
+          <a:bodyPr wrap="square">
+            <a:spAutoFit/>
+          </a:bodyPr>
+          <a:lstStyle/>
+          <a:p>
+            <a:pPr>
+              <a:spcBef>
+                <a:spcPts val="400"/>
+              </a:spcBef>
+              <a:spcAft>
+                <a:spcPts val="200"/>
+              </a:spcAft>
+            </a:pPr>
+            <a:r>
+              <a:rPr sz="1300">
+                <a:solidFill>
+                  <a:srgbClr val="3D5466"/>
+                </a:solidFill>
+                <a:latin typeface="Arial"/>
+              </a:rPr>
+              <a:t>▸  Mini-Case Bestandshalter (Anwenden, Bloom 3):</a:t>
+            </a:r>
+          </a:p>
+          <a:p>
+            <a:pPr>
+              <a:spcBef>
+                <a:spcPts val="400"/>
+              </a:spcBef>
+              <a:spcAft>
+                <a:spcPts val="200"/>
+              </a:spcAft>
+            </a:pPr>
+            <a:r>
+              <a:rPr sz="1300">
+                <a:solidFill>
+                  <a:srgbClr val="3D5466"/>
+                </a:solidFill>
+                <a:latin typeface="Arial"/>
+              </a:rPr>
+              <a:t>▸  Die Familie fragt nach einer Aufstockung des Kredits um 200.000 EUR für Dachgeschossausbau (2 neue Einheiten, geplante Zusatzmiete 18.000 EUR p.a.).</a:t>
             </a:r>
           </a:p>
           <a:p>
@@ -6947,7 +7997,7 @@
                 </a:solidFill>
                 <a:latin typeface="Source Serif 4"/>
               </a:rPr>
-              <a:t>Agenda</a:t>
+              <a:t>So läuft das Modul</a:t>
             </a:r>
           </a:p>
         </p:txBody>
@@ -6976,115 +8026,418 @@
           <a:p>
             <a:pPr>
               <a:spcBef>
-                <a:spcPts val="800"/>
+                <a:spcPts val="400"/>
               </a:spcBef>
               <a:spcAft>
-                <a:spcPts val="200"/>
+                <a:spcPts val="100"/>
               </a:spcAft>
             </a:pPr>
             <a:r>
-              <a:rPr sz="1500">
+              <a:rPr sz="900">
+                <a:solidFill>
+                  <a:srgbClr val="78808C"/>
+                </a:solidFill>
+                <a:latin typeface="Consolas"/>
+              </a:rPr>
+              <a:t>08:30–09:00 </a:t>
+            </a:r>
+            <a:r>
+              <a:rPr sz="1200" b="1">
                 <a:solidFill>
                   <a:srgbClr val="3D5466"/>
                 </a:solidFill>
                 <a:latin typeface="Arial"/>
               </a:rPr>
-              <a:t>01   Theorie-Input 1: Kundentypologie der Immobilienfinanzierung</a:t>
+              <a:t>  Ankommen &amp; Zielklärung</a:t>
+            </a:r>
+            <a:r>
+              <a:rPr sz="900">
+                <a:solidFill>
+                  <a:srgbClr val="78808C"/>
+                </a:solidFill>
+                <a:latin typeface="Arial"/>
+              </a:rPr>
+              <a:t>  ·  Plenum</a:t>
             </a:r>
           </a:p>
           <a:p>
             <a:pPr>
               <a:spcBef>
-                <a:spcPts val="800"/>
+                <a:spcPts val="400"/>
               </a:spcBef>
               <a:spcAft>
-                <a:spcPts val="200"/>
+                <a:spcPts val="100"/>
               </a:spcAft>
             </a:pPr>
             <a:r>
-              <a:rPr sz="1500">
+              <a:rPr sz="900">
+                <a:solidFill>
+                  <a:srgbClr val="78808C"/>
+                </a:solidFill>
+                <a:latin typeface="Consolas"/>
+              </a:rPr>
+              <a:t>09:00–09:45 </a:t>
+            </a:r>
+            <a:r>
+              <a:rPr sz="1200" b="1">
                 <a:solidFill>
                   <a:srgbClr val="3D5466"/>
                 </a:solidFill>
                 <a:latin typeface="Arial"/>
               </a:rPr>
-              <a:t>02   Theorie-Input 2: Beleihungswertermittlung nach BelWertV</a:t>
+              <a:t>  Theorie-Input: Kundentypologien</a:t>
+            </a:r>
+            <a:r>
+              <a:rPr sz="900">
+                <a:solidFill>
+                  <a:srgbClr val="78808C"/>
+                </a:solidFill>
+                <a:latin typeface="Arial"/>
+              </a:rPr>
+              <a:t>  ·  Kurzinput + Diskussion</a:t>
             </a:r>
           </a:p>
           <a:p>
             <a:pPr>
               <a:spcBef>
-                <a:spcPts val="800"/>
+                <a:spcPts val="400"/>
               </a:spcBef>
               <a:spcAft>
-                <a:spcPts val="200"/>
+                <a:spcPts val="100"/>
               </a:spcAft>
             </a:pPr>
             <a:r>
-              <a:rPr sz="1500">
+              <a:rPr sz="900">
+                <a:solidFill>
+                  <a:srgbClr val="78808C"/>
+                </a:solidFill>
+                <a:latin typeface="Consolas"/>
+              </a:rPr>
+              <a:t>09:45–10:45 </a:t>
+            </a:r>
+            <a:r>
+              <a:rPr sz="1200" b="1">
                 <a:solidFill>
                   <a:srgbClr val="3D5466"/>
                 </a:solidFill>
                 <a:latin typeface="Arial"/>
               </a:rPr>
-              <a:t>03   Theorie-Input 3: Kennzahlen der Immobilien- und Projektfinanzierung</a:t>
+              <a:t>  Rechenübung 1: Beleihungswert</a:t>
+            </a:r>
+            <a:r>
+              <a:rPr sz="900">
+                <a:solidFill>
+                  <a:srgbClr val="78808C"/>
+                </a:solidFill>
+                <a:latin typeface="Arial"/>
+              </a:rPr>
+              <a:t>  ·  Einzelarbeit + Auswertung</a:t>
             </a:r>
           </a:p>
           <a:p>
             <a:pPr>
               <a:spcBef>
-                <a:spcPts val="800"/>
+                <a:spcPts val="400"/>
               </a:spcBef>
               <a:spcAft>
-                <a:spcPts val="200"/>
+                <a:spcPts val="100"/>
               </a:spcAft>
             </a:pPr>
             <a:r>
-              <a:rPr sz="1500">
+              <a:rPr sz="900">
+                <a:solidFill>
+                  <a:srgbClr val="78808C"/>
+                </a:solidFill>
+                <a:latin typeface="Consolas"/>
+              </a:rPr>
+              <a:t>10:45–11:00 </a:t>
+            </a:r>
+            <a:r>
+              <a:rPr sz="1200" b="1">
                 <a:solidFill>
                   <a:srgbClr val="3D5466"/>
                 </a:solidFill>
                 <a:latin typeface="Arial"/>
               </a:rPr>
-              <a:t>04   Theorie-Input 4: Risikofelder der Bauträgerfinanzierung</a:t>
+              <a:t>  Pause</a:t>
             </a:r>
           </a:p>
           <a:p>
             <a:pPr>
               <a:spcBef>
-                <a:spcPts val="800"/>
+                <a:spcPts val="400"/>
               </a:spcBef>
               <a:spcAft>
-                <a:spcPts val="200"/>
+                <a:spcPts val="100"/>
               </a:spcAft>
             </a:pPr>
             <a:r>
-              <a:rPr sz="1500">
+              <a:rPr sz="900">
+                <a:solidFill>
+                  <a:srgbClr val="78808C"/>
+                </a:solidFill>
+                <a:latin typeface="Consolas"/>
+              </a:rPr>
+              <a:t>11:00–11:45 </a:t>
+            </a:r>
+            <a:r>
+              <a:rPr sz="1200" b="1">
                 <a:solidFill>
                   <a:srgbClr val="3D5466"/>
                 </a:solidFill>
                 <a:latin typeface="Arial"/>
               </a:rPr>
-              <a:t>05   Praxiscase: Quartier Sonnenhalde – Bauträgerfinanzierung Ravensburg</a:t>
+              <a:t>  Theorie-Input: Risikofelder + Kennzahlen</a:t>
+            </a:r>
+            <a:r>
+              <a:rPr sz="900">
+                <a:solidFill>
+                  <a:srgbClr val="78808C"/>
+                </a:solidFill>
+                <a:latin typeface="Arial"/>
+              </a:rPr>
+              <a:t>  ·  Kurzinput + Fallbeispiel</a:t>
             </a:r>
           </a:p>
           <a:p>
             <a:pPr>
               <a:spcBef>
-                <a:spcPts val="800"/>
+                <a:spcPts val="400"/>
               </a:spcBef>
               <a:spcAft>
-                <a:spcPts val="200"/>
+                <a:spcPts val="100"/>
               </a:spcAft>
             </a:pPr>
             <a:r>
-              <a:rPr sz="1500">
+              <a:rPr sz="900">
+                <a:solidFill>
+                  <a:srgbClr val="78808C"/>
+                </a:solidFill>
+                <a:latin typeface="Consolas"/>
+              </a:rPr>
+              <a:t>11:45–12:15 </a:t>
+            </a:r>
+            <a:r>
+              <a:rPr sz="1200" b="1">
                 <a:solidFill>
                   <a:srgbClr val="3D5466"/>
                 </a:solidFill>
                 <a:latin typeface="Arial"/>
               </a:rPr>
-              <a:t>06   Reflexionsfragen</a:t>
+              <a:t>  Rechenübung 2: Kennzahlen-Set</a:t>
+            </a:r>
+            <a:r>
+              <a:rPr sz="900">
+                <a:solidFill>
+                  <a:srgbClr val="78808C"/>
+                </a:solidFill>
+                <a:latin typeface="Arial"/>
+              </a:rPr>
+              <a:t>  ·  Partnerarbeit</a:t>
+            </a:r>
+          </a:p>
+          <a:p>
+            <a:pPr>
+              <a:spcBef>
+                <a:spcPts val="400"/>
+              </a:spcBef>
+              <a:spcAft>
+                <a:spcPts val="100"/>
+              </a:spcAft>
+            </a:pPr>
+            <a:r>
+              <a:rPr sz="900">
+                <a:solidFill>
+                  <a:srgbClr val="78808C"/>
+                </a:solidFill>
+                <a:latin typeface="Consolas"/>
+              </a:rPr>
+              <a:t>12:15–13:00 </a:t>
+            </a:r>
+            <a:r>
+              <a:rPr sz="1200" b="1">
+                <a:solidFill>
+                  <a:srgbClr val="3D5466"/>
+                </a:solidFill>
+                <a:latin typeface="Arial"/>
+              </a:rPr>
+              <a:t>  Mittagspause</a:t>
+            </a:r>
+          </a:p>
+          <a:p>
+            <a:pPr>
+              <a:spcBef>
+                <a:spcPts val="400"/>
+              </a:spcBef>
+              <a:spcAft>
+                <a:spcPts val="100"/>
+              </a:spcAft>
+            </a:pPr>
+            <a:r>
+              <a:rPr sz="900">
+                <a:solidFill>
+                  <a:srgbClr val="78808C"/>
+                </a:solidFill>
+                <a:latin typeface="Consolas"/>
+              </a:rPr>
+              <a:t>13:00–13:45 </a:t>
+            </a:r>
+            <a:r>
+              <a:rPr sz="1200" b="1">
+                <a:solidFill>
+                  <a:srgbClr val="3D5466"/>
+                </a:solidFill>
+                <a:latin typeface="Arial"/>
+              </a:rPr>
+              <a:t>  Verbundpartner-Integration</a:t>
+            </a:r>
+            <a:r>
+              <a:rPr sz="900">
+                <a:solidFill>
+                  <a:srgbClr val="78808C"/>
+                </a:solidFill>
+                <a:latin typeface="Arial"/>
+              </a:rPr>
+              <a:t>  ·  Plenum + Input</a:t>
+            </a:r>
+          </a:p>
+          <a:p>
+            <a:pPr>
+              <a:spcBef>
+                <a:spcPts val="400"/>
+              </a:spcBef>
+              <a:spcAft>
+                <a:spcPts val="100"/>
+              </a:spcAft>
+            </a:pPr>
+            <a:r>
+              <a:rPr sz="900">
+                <a:solidFill>
+                  <a:srgbClr val="78808C"/>
+                </a:solidFill>
+                <a:latin typeface="Consolas"/>
+              </a:rPr>
+              <a:t>13:45–15:15 </a:t>
+            </a:r>
+            <a:r>
+              <a:rPr sz="1200" b="1">
+                <a:solidFill>
+                  <a:srgbClr val="3D5466"/>
+                </a:solidFill>
+                <a:latin typeface="Arial"/>
+              </a:rPr>
+              <a:t>  Fallstudie: Bauträgerprojekt</a:t>
+            </a:r>
+            <a:r>
+              <a:rPr sz="900">
+                <a:solidFill>
+                  <a:srgbClr val="78808C"/>
+                </a:solidFill>
+                <a:latin typeface="Arial"/>
+              </a:rPr>
+              <a:t>  ·  Kleingruppen à 3–4 TN</a:t>
+            </a:r>
+          </a:p>
+          <a:p>
+            <a:pPr>
+              <a:spcBef>
+                <a:spcPts val="400"/>
+              </a:spcBef>
+              <a:spcAft>
+                <a:spcPts val="100"/>
+              </a:spcAft>
+            </a:pPr>
+            <a:r>
+              <a:rPr sz="900">
+                <a:solidFill>
+                  <a:srgbClr val="78808C"/>
+                </a:solidFill>
+                <a:latin typeface="Consolas"/>
+              </a:rPr>
+              <a:t>15:15–15:30 </a:t>
+            </a:r>
+            <a:r>
+              <a:rPr sz="1200" b="1">
+                <a:solidFill>
+                  <a:srgbClr val="3D5466"/>
+                </a:solidFill>
+                <a:latin typeface="Arial"/>
+              </a:rPr>
+              <a:t>  Pause</a:t>
+            </a:r>
+          </a:p>
+          <a:p>
+            <a:pPr>
+              <a:spcBef>
+                <a:spcPts val="400"/>
+              </a:spcBef>
+              <a:spcAft>
+                <a:spcPts val="100"/>
+              </a:spcAft>
+            </a:pPr>
+            <a:r>
+              <a:rPr sz="900">
+                <a:solidFill>
+                  <a:srgbClr val="78808C"/>
+                </a:solidFill>
+                <a:latin typeface="Consolas"/>
+              </a:rPr>
+              <a:t>15:30–16:30 </a:t>
+            </a:r>
+            <a:r>
+              <a:rPr sz="1200" b="1">
+                <a:solidFill>
+                  <a:srgbClr val="3D5466"/>
+                </a:solidFill>
+                <a:latin typeface="Arial"/>
+              </a:rPr>
+              <a:t>  Gruppenpräsentationen</a:t>
+            </a:r>
+            <a:r>
+              <a:rPr sz="900">
+                <a:solidFill>
+                  <a:srgbClr val="78808C"/>
+                </a:solidFill>
+                <a:latin typeface="Arial"/>
+              </a:rPr>
+              <a:t>  ·  Plenum</a:t>
+            </a:r>
+          </a:p>
+          <a:p>
+            <a:pPr>
+              <a:spcBef>
+                <a:spcPts val="400"/>
+              </a:spcBef>
+              <a:spcAft>
+                <a:spcPts val="100"/>
+              </a:spcAft>
+            </a:pPr>
+            <a:r>
+              <a:rPr sz="900">
+                <a:solidFill>
+                  <a:srgbClr val="78808C"/>
+                </a:solidFill>
+                <a:latin typeface="Consolas"/>
+              </a:rPr>
+              <a:t>16:30–17:00 </a:t>
+            </a:r>
+            <a:r>
+              <a:rPr sz="1200" b="1">
+                <a:solidFill>
+                  <a:srgbClr val="3D5466"/>
+                </a:solidFill>
+                <a:latin typeface="Arial"/>
+              </a:rPr>
+              <a:t>  Transferplanung &amp; Abschluss</a:t>
+            </a:r>
+            <a:r>
+              <a:rPr sz="900">
+                <a:solidFill>
+                  <a:srgbClr val="78808C"/>
+                </a:solidFill>
+                <a:latin typeface="Arial"/>
+              </a:rPr>
+              <a:t>  ·  Einzelarbeit</a:t>
             </a:r>
           </a:p>
         </p:txBody>
@@ -7477,13 +8830,13 @@
               </a:spcAft>
             </a:pPr>
             <a:r>
-              <a:rPr sz="1200">
+              <a:rPr sz="1300">
                 <a:solidFill>
                   <a:srgbClr val="3D5466"/>
                 </a:solidFill>
                 <a:latin typeface="Arial"/>
               </a:rPr>
-              <a:t>Typ 1: Bestandshalter</a:t>
+              <a:t>▸  Typ 1: Bestandshalter</a:t>
             </a:r>
           </a:p>
           <a:p>
@@ -7572,13 +8925,13 @@
               </a:spcAft>
             </a:pPr>
             <a:r>
-              <a:rPr sz="1200">
+              <a:rPr sz="1300">
                 <a:solidFill>
                   <a:srgbClr val="3D5466"/>
                 </a:solidFill>
                 <a:latin typeface="Arial"/>
               </a:rPr>
-              <a:t>Typ 2: Bauträger</a:t>
+              <a:t>▸  Typ 2: Bauträger</a:t>
             </a:r>
           </a:p>
           <a:p>
@@ -7667,13 +9020,13 @@
               </a:spcAft>
             </a:pPr>
             <a:r>
-              <a:rPr sz="1200">
+              <a:rPr sz="1300">
                 <a:solidFill>
                   <a:srgbClr val="3D5466"/>
                 </a:solidFill>
                 <a:latin typeface="Arial"/>
               </a:rPr>
-              <a:t>Typ 3: Projektentwickler</a:t>
+              <a:t>▸  Typ 3: Projektentwickler</a:t>
             </a:r>
           </a:p>
         </p:txBody>
@@ -8439,13 +9792,13 @@
               </a:spcAft>
             </a:pPr>
             <a:r>
-              <a:rPr sz="1200">
+              <a:rPr sz="1300">
                 <a:solidFill>
                   <a:srgbClr val="3D5466"/>
                 </a:solidFill>
                 <a:latin typeface="Arial"/>
               </a:rPr>
-              <a:t>Methode 1: Ertragswertverfahren (bei vermieteten Objekten)</a:t>
+              <a:t>▸  Methode 1: Ertragswertverfahren (bei vermieteten Objekten)</a:t>
             </a:r>
           </a:p>
           <a:p>
@@ -8458,13 +9811,13 @@
               </a:spcAft>
             </a:pPr>
             <a:r>
-              <a:rPr sz="1200">
+              <a:rPr sz="1300">
                 <a:solidFill>
                   <a:srgbClr val="3D5466"/>
                 </a:solidFill>
                 <a:latin typeface="Arial"/>
               </a:rPr>
-              <a:t>Anwendung: Wohnimmobilien mit mehreren Einheiten, Gewerbeimmobilien, Bestandsobjekte mit Miethistorie.</a:t>
+              <a:t>▸  Anwendung: Wohnimmobilien mit mehreren Einheiten, Gewerbeimmobilien, Bestandsobjekte mit Miethistorie.</a:t>
             </a:r>
           </a:p>
           <a:p>
@@ -8477,13 +9830,13 @@
               </a:spcAft>
             </a:pPr>
             <a:r>
-              <a:rPr sz="1200">
+              <a:rPr sz="1300">
                 <a:solidFill>
                   <a:srgbClr val="3D5466"/>
                 </a:solidFill>
                 <a:latin typeface="Arial"/>
               </a:rPr>
-              <a:t>Berechnung (vereinfacht):</a:t>
+              <a:t>▸  Berechnung (vereinfacht):</a:t>
             </a:r>
           </a:p>
           <a:p>
@@ -9009,13 +10362,13 @@
               </a:spcAft>
             </a:pPr>
             <a:r>
-              <a:rPr sz="1200">
+              <a:rPr sz="1300">
                 <a:solidFill>
                   <a:srgbClr val="3D5466"/>
                 </a:solidFill>
                 <a:latin typeface="Arial"/>
               </a:rPr>
-              <a:t>1. LTV – Loan-to-Value (Beleihungsauslauf)</a:t>
+              <a:t>▸  1. LTV – Loan-to-Value (Beleihungsauslauf)</a:t>
             </a:r>
           </a:p>
           <a:p>
@@ -9028,13 +10381,13 @@
               </a:spcAft>
             </a:pPr>
             <a:r>
-              <a:rPr sz="1200">
+              <a:rPr sz="1300">
                 <a:solidFill>
                   <a:srgbClr val="3D5466"/>
                 </a:solidFill>
                 <a:latin typeface="Arial"/>
               </a:rPr>
-              <a:t>Der LTV misst, wie hoch der Kredit im Verhältnis zum Immobilienwert ist. Die Bezugsgröße ist je nach Kundentypologie unterschiedlich – diese Unterscheidung ist in der Kreditpraxis zwingend anzugeben:</a:t>
+              <a:t>▸  Der LTV misst, wie hoch der Kredit im Verhältnis zum Immobilienwert ist. Die Bezugsgröße ist je nach Kundentypologie unterschiedlich – diese Unterscheidung ist in der Kreditpraxis zwingend anzugeben:</a:t>
             </a:r>
           </a:p>
           <a:p>
@@ -9047,13 +10400,13 @@
               </a:spcAft>
             </a:pPr>
             <a:r>
-              <a:rPr sz="1200">
+              <a:rPr sz="1300">
                 <a:solidFill>
                   <a:srgbClr val="3D5466"/>
                 </a:solidFill>
                 <a:latin typeface="Arial"/>
               </a:rPr>
-              <a:t>Bei Bauträgerprojekten gilt als Richtwert: LTV ≤ 65–70 % des GDV (enger als bei Bestandshaltern, da GDV zum Zeitpunkt der Kreditvergabe erst prognostiziert ist; vgl. Gondring, 2022 ).</a:t>
+              <a:t>▸  Bei Bauträgerprojekten gilt als Richtwert: LTV ≤ 65–70 % des GDV (enger als bei Bestandshaltern, da GDV zum Zeitpunkt der Kreditvergabe erst prognostiziert ist; vgl. Gondring, 2022 ).</a:t>
             </a:r>
           </a:p>
           <a:p>
@@ -9085,13 +10438,13 @@
               </a:spcAft>
             </a:pPr>
             <a:r>
-              <a:rPr sz="1200">
+              <a:rPr sz="1300">
                 <a:solidFill>
                   <a:srgbClr val="3D5466"/>
                 </a:solidFill>
                 <a:latin typeface="Arial"/>
               </a:rPr>
-              <a:t>2. DSCR – Debt Service Coverage Ratio (Kapitaldienst-Deckungsgrad)</a:t>
+              <a:t>▸  2. DSCR – Debt Service Coverage Ratio (Kapitaldienst-Deckungsgrad)</a:t>
             </a:r>
           </a:p>
           <a:p>
@@ -9104,13 +10457,13 @@
               </a:spcAft>
             </a:pPr>
             <a:r>
-              <a:rPr sz="1200">
+              <a:rPr sz="1300">
                 <a:solidFill>
                   <a:srgbClr val="3D5466"/>
                 </a:solidFill>
                 <a:latin typeface="Arial"/>
               </a:rPr>
-              <a:t>DSCR = Netto-Mieteinnahmen (NOI) / Jährlicher Kapitaldienst (Zins + Tilgung)</a:t>
+              <a:t>▸  DSCR = Netto-Mieteinnahmen (NOI) / Jährlicher Kapitaldienst (Zins + Tilgung)</a:t>
             </a:r>
           </a:p>
           <a:p>
@@ -9123,13 +10476,13 @@
               </a:spcAft>
             </a:pPr>
             <a:r>
-              <a:rPr sz="1200">
+              <a:rPr sz="1300">
                 <a:solidFill>
                   <a:srgbClr val="3D5466"/>
                 </a:solidFill>
                 <a:latin typeface="Arial"/>
               </a:rPr>
-              <a:t>Der DSCR misst, ob die laufenden Mieteinnahmen ausreichen, um Zins und Tilgung zu bedienen. Anwendung primär bei Bestandshaltern (vgl. Gondring, 2022, S. 512 ).</a:t>
+              <a:t>▸  Der DSCR misst, ob die laufenden Mieteinnahmen ausreichen, um Zins und Tilgung zu bedienen. Anwendung primär bei Bestandshaltern (vgl. Gondring, 2022, S. 512 ).</a:t>
             </a:r>
           </a:p>
           <a:p>
@@ -9199,13 +10552,13 @@
               </a:spcAft>
             </a:pPr>
             <a:r>
-              <a:rPr sz="1200">
+              <a:rPr sz="1300">
                 <a:solidFill>
                   <a:srgbClr val="3D5466"/>
                 </a:solidFill>
                 <a:latin typeface="Arial"/>
               </a:rPr>
-              <a:t>Prolongationsrisiko bei Bestandshaltern (Zinsänderungsrisiko bei Zinsbindungsablauf)</a:t>
+              <a:t>▸  Prolongationsrisiko bei Bestandshaltern (Zinsänderungsrisiko bei Zinsbindungsablauf)</a:t>
             </a:r>
           </a:p>
         </p:txBody>
@@ -9321,7 +10674,7 @@
             <a:avLst/>
           </a:prstGeom>
           <a:solidFill>
-            <a:srgbClr val="EDEDF3"/>
+            <a:srgbClr val="FFFFFF"/>
           </a:solidFill>
           <a:ln>
             <a:noFill/>
@@ -9422,51 +10775,43 @@
                 </a:solidFill>
                 <a:latin typeface="JetBrains Mono"/>
               </a:rPr>
-              <a:t>M08  ·  INHALT</a:t>
-            </a:r>
-          </a:p>
-        </p:txBody>
-      </p:sp>
-      <p:sp>
-        <p:nvSpPr>
-          <p:cNvPr id="5" name="Rectangle 4"/>
-          <p:cNvSpPr/>
-          <p:nvPr/>
-        </p:nvSpPr>
-        <p:spPr>
-          <a:xfrm>
-            <a:off x="0" y="1234440"/>
-            <a:ext cx="12188952" cy="12700"/>
-          </a:xfrm>
-          <a:prstGeom prst="rect">
-            <a:avLst/>
-          </a:prstGeom>
-          <a:solidFill>
-            <a:srgbClr val="D8DFE4"/>
-          </a:solidFill>
-          <a:ln>
-            <a:noFill/>
-          </a:ln>
-        </p:spPr>
-        <p:style>
-          <a:lnRef idx="1">
-            <a:schemeClr val="accent1"/>
-          </a:lnRef>
-          <a:fillRef idx="3">
-            <a:schemeClr val="accent1"/>
-          </a:fillRef>
-          <a:effectRef idx="2">
-            <a:schemeClr val="accent1"/>
-          </a:effectRef>
-          <a:fontRef idx="minor">
-            <a:schemeClr val="lt1"/>
-          </a:fontRef>
-        </p:style>
-        <p:txBody>
-          <a:bodyPr rtlCol="0" anchor="ctr"/>
-          <a:lstStyle/>
-          <a:p>
-            <a:pPr algn="ctr"/>
+              <a:t>M08  ·  ÜBERSICHT</a:t>
+            </a:r>
+          </a:p>
+        </p:txBody>
+      </p:sp>
+      <p:sp>
+        <p:nvSpPr>
+          <p:cNvPr id="5" name="TextBox 4"/>
+          <p:cNvSpPr txBox="1"/>
+          <p:nvPr/>
+        </p:nvSpPr>
+        <p:spPr>
+          <a:xfrm>
+            <a:off x="685800" y="502920"/>
+            <a:ext cx="10817352" cy="594360"/>
+          </a:xfrm>
+          <a:prstGeom prst="rect">
+            <a:avLst/>
+          </a:prstGeom>
+          <a:noFill/>
+        </p:spPr>
+        <p:txBody>
+          <a:bodyPr wrap="square">
+            <a:spAutoFit/>
+          </a:bodyPr>
+          <a:lstStyle/>
+          <a:p>
+            <a:pPr algn="l"/>
+            <a:r>
+              <a:rPr sz="2000" b="1" i="0">
+                <a:solidFill>
+                  <a:srgbClr val="1F2C56"/>
+                </a:solidFill>
+                <a:latin typeface="Source Serif 4"/>
+              </a:rPr>
+              <a:t>Theorie-Input 3: Kennzahlen der Immobilien- und Projektfinanzierung</a:t>
+            </a:r>
           </a:p>
         </p:txBody>
       </p:sp>
@@ -9478,8 +10823,8 @@
         </p:nvSpPr>
         <p:spPr>
           <a:xfrm>
-            <a:off x="685800" y="502920"/>
-            <a:ext cx="36576" cy="658368"/>
+            <a:off x="685800" y="1143000"/>
+            <a:ext cx="10817352" cy="25400"/>
           </a:xfrm>
           <a:prstGeom prst="rect">
             <a:avLst/>
@@ -9513,276 +10858,195 @@
           </a:p>
         </p:txBody>
       </p:sp>
-      <p:sp>
-        <p:nvSpPr>
-          <p:cNvPr id="7" name="TextBox 6"/>
-          <p:cNvSpPr txBox="1"/>
-          <p:nvPr/>
-        </p:nvSpPr>
-        <p:spPr>
-          <a:xfrm>
-            <a:off x="813816" y="502920"/>
-            <a:ext cx="10634472" cy="685800"/>
-          </a:xfrm>
-          <a:prstGeom prst="rect">
-            <a:avLst/>
-          </a:prstGeom>
-          <a:noFill/>
-        </p:spPr>
-        <p:txBody>
-          <a:bodyPr wrap="square">
-            <a:spAutoFit/>
-          </a:bodyPr>
-          <a:lstStyle/>
-          <a:p>
-            <a:pPr algn="l"/>
-            <a:r>
-              <a:rPr sz="2400" b="1" i="0">
-                <a:solidFill>
-                  <a:srgbClr val="1F2C56"/>
-                </a:solidFill>
-                <a:latin typeface="Source Serif 4"/>
-              </a:rPr>
-              <a:t>Theorie-Input 4: Risikofelder der Bauträgerfinanzierung</a:t>
-            </a:r>
-          </a:p>
-        </p:txBody>
-      </p:sp>
-      <p:sp>
-        <p:nvSpPr>
-          <p:cNvPr id="8" name="TextBox 7"/>
-          <p:cNvSpPr txBox="1"/>
-          <p:nvPr/>
-        </p:nvSpPr>
-        <p:spPr>
-          <a:xfrm>
-            <a:off x="685800" y="1417320"/>
-            <a:ext cx="10817352" cy="5029200"/>
-          </a:xfrm>
-          <a:prstGeom prst="rect">
-            <a:avLst/>
-          </a:prstGeom>
-          <a:noFill/>
-        </p:spPr>
-        <p:txBody>
-          <a:bodyPr wrap="square">
-            <a:spAutoFit/>
-          </a:bodyPr>
-          <a:lstStyle/>
-          <a:p>
-            <a:pPr>
-              <a:spcBef>
-                <a:spcPts val="400"/>
-              </a:spcBef>
-              <a:spcAft>
-                <a:spcPts val="200"/>
-              </a:spcAft>
-            </a:pPr>
-            <a:r>
-              <a:rPr sz="1200">
-                <a:solidFill>
-                  <a:srgbClr val="3D5466"/>
-                </a:solidFill>
-                <a:latin typeface="Arial"/>
-              </a:rPr>
-              <a:t>Risikofeld 1: Fertigstellungsrisiko</a:t>
-            </a:r>
-          </a:p>
-          <a:p>
-            <a:pPr>
-              <a:spcBef>
-                <a:spcPts val="400"/>
-              </a:spcBef>
-              <a:spcAft>
-                <a:spcPts val="200"/>
-              </a:spcAft>
-            </a:pPr>
-            <a:r>
-              <a:rPr sz="1200">
-                <a:solidFill>
-                  <a:srgbClr val="3D5466"/>
-                </a:solidFill>
-                <a:latin typeface="Arial"/>
-              </a:rPr>
-              <a:t>Risikofeld 2: Absatzrisiko</a:t>
-            </a:r>
-          </a:p>
-          <a:p>
-            <a:pPr>
-              <a:spcBef>
-                <a:spcPts val="400"/>
-              </a:spcBef>
-              <a:spcAft>
-                <a:spcPts val="200"/>
-              </a:spcAft>
-            </a:pPr>
-            <a:r>
-              <a:rPr sz="1200">
-                <a:solidFill>
-                  <a:srgbClr val="3D5466"/>
-                </a:solidFill>
-                <a:latin typeface="Arial"/>
-              </a:rPr>
-              <a:t>Risikominderung: Vorverkaufsquote als Auszahlungsbedingung, konservative Wertansätze (Vergleichspreise statt Optimistik), Vermarktungskonzept des Bauträgers prüfen.</a:t>
-            </a:r>
-          </a:p>
-          <a:p>
-            <a:pPr>
-              <a:spcBef>
-                <a:spcPts val="400"/>
-              </a:spcBef>
-              <a:spcAft>
-                <a:spcPts val="200"/>
-              </a:spcAft>
-            </a:pPr>
-            <a:r>
-              <a:rPr sz="1200">
-                <a:solidFill>
-                  <a:srgbClr val="3D5466"/>
-                </a:solidFill>
-                <a:latin typeface="Arial"/>
-              </a:rPr>
-              <a:t>Risikofeld 3: Kostenüberschreitungsrisiko</a:t>
-            </a:r>
-          </a:p>
-          <a:p>
-            <a:pPr>
-              <a:spcBef>
-                <a:spcPts val="400"/>
-              </a:spcBef>
-              <a:spcAft>
-                <a:spcPts val="200"/>
-              </a:spcAft>
-            </a:pPr>
-            <a:r>
-              <a:rPr sz="1200">
-                <a:solidFill>
-                  <a:srgbClr val="3D5466"/>
-                </a:solidFill>
-                <a:latin typeface="Arial"/>
-              </a:rPr>
-              <a:t>Risikominderung: Festpreisverträge mit dem Generalunternehmer, EK-Puffer (mindestens 20–25 % EK-Quote), Kostenschätzung durch unabhängigen Bausachverständigen prüfen lassen.</a:t>
-            </a:r>
-          </a:p>
-          <a:p>
-            <a:pPr>
-              <a:spcBef>
-                <a:spcPts val="400"/>
-              </a:spcBef>
-              <a:spcAft>
-                <a:spcPts val="200"/>
-              </a:spcAft>
-            </a:pPr>
-            <a:r>
-              <a:rPr sz="1200">
-                <a:solidFill>
-                  <a:srgbClr val="3D5466"/>
-                </a:solidFill>
-                <a:latin typeface="Arial"/>
-              </a:rPr>
-              <a:t>Risikofeld 4a: Sicherheitenstruktur und Grundschuld-Freigabe bei Bauträgerfinanzierungen</a:t>
-            </a:r>
-          </a:p>
-          <a:p>
-            <a:pPr>
-              <a:spcBef>
-                <a:spcPts val="400"/>
-              </a:spcBef>
-              <a:spcAft>
-                <a:spcPts val="200"/>
-              </a:spcAft>
-            </a:pPr>
-            <a:r>
-              <a:rPr sz="1200">
-                <a:solidFill>
-                  <a:srgbClr val="3D5466"/>
-                </a:solidFill>
-                <a:latin typeface="Arial"/>
-              </a:rPr>
-              <a:t>Ein in der Praxis häufig unterschätztes operatives Thema: Die Grundschuld-Strukturierung und die Freigaberegelung bei Teilverkäufen.</a:t>
-            </a:r>
-          </a:p>
-          <a:p>
-            <a:pPr>
-              <a:spcBef>
-                <a:spcPts val="400"/>
-              </a:spcBef>
-              <a:spcAft>
-                <a:spcPts val="200"/>
-              </a:spcAft>
-            </a:pPr>
-            <a:r>
-              <a:rPr sz="1200">
-                <a:solidFill>
-                  <a:srgbClr val="3D5466"/>
-                </a:solidFill>
-                <a:latin typeface="Arial"/>
-              </a:rPr>
-              <a:t>Freigaberegelung – typische Bankpraxis:</a:t>
-            </a:r>
-          </a:p>
-          <a:p>
-            <a:pPr>
-              <a:spcBef>
-                <a:spcPts val="400"/>
-              </a:spcBef>
-              <a:spcAft>
-                <a:spcPts val="200"/>
-              </a:spcAft>
-            </a:pPr>
-            <a:r>
-              <a:rPr sz="1200">
-                <a:solidFill>
-                  <a:srgbClr val="3D5466"/>
-                </a:solidFill>
-                <a:latin typeface="Arial"/>
-              </a:rPr>
-              <a:t>Risikofeld 4: Zinsänderungs- und Laufzeitrisiko</a:t>
-            </a:r>
-          </a:p>
-          <a:p>
-            <a:pPr>
-              <a:spcBef>
-                <a:spcPts val="400"/>
-              </a:spcBef>
-              <a:spcAft>
-                <a:spcPts val="200"/>
-              </a:spcAft>
-            </a:pPr>
-            <a:r>
-              <a:rPr sz="1200">
-                <a:solidFill>
-                  <a:srgbClr val="3D5466"/>
-                </a:solidFill>
-                <a:latin typeface="Arial"/>
-              </a:rPr>
-              <a:t>Risikominderung: Zinssicherung (Zinsswap, Cap) für die Bauphase, realistische Zeitplanung mit Puffer, Klauseln bei Laufzeitverlängerung.</a:t>
-            </a:r>
-          </a:p>
-          <a:p>
-            <a:pPr>
-              <a:spcBef>
-                <a:spcPts val="400"/>
-              </a:spcBef>
-              <a:spcAft>
-                <a:spcPts val="200"/>
-              </a:spcAft>
-            </a:pPr>
-            <a:r>
-              <a:rPr sz="1200">
-                <a:solidFill>
-                  <a:srgbClr val="3D5466"/>
-                </a:solidFill>
-                <a:latin typeface="Arial"/>
-              </a:rPr>
-              <a:t>Die folgende Handlungskarte fasst die zentralen Diagnose-Aktion-Muster für die Immobilien- und Projektfinanzierung zusammen:</a:t>
-            </a:r>
-          </a:p>
-        </p:txBody>
-      </p:sp>
-      <p:sp>
-        <p:nvSpPr>
-          <p:cNvPr id="9" name="Rectangle 8"/>
+      <p:graphicFrame>
+        <p:nvGraphicFramePr>
+          <p:cNvPr id="7" name="Table 6"/>
+          <p:cNvGraphicFramePr>
+            <a:graphicFrameLocks noGrp="1"/>
+          </p:cNvGraphicFramePr>
+          <p:nvPr/>
+        </p:nvGraphicFramePr>
+        <p:xfrm>
+          <a:off x="685800" y="1417320"/>
+          <a:ext cx="10817352" cy="1536192"/>
+        </p:xfrm>
+        <a:graphic>
+          <a:graphicData uri="http://schemas.openxmlformats.org/drawingml/2006/table">
+            <a:tbl>
+              <a:tblPr firstRow="1" bandRow="1">
+                <a:tableStyleId>{5C22544A-7EE6-4342-B048-85BDC9FD1C3A}</a:tableStyleId>
+              </a:tblPr>
+              <a:tblGrid>
+                <a:gridCol w="5408676"/>
+                <a:gridCol w="5408676"/>
+              </a:tblGrid>
+              <a:tr h="384048">
+                <a:tc>
+                  <a:txBody>
+                    <a:bodyPr/>
+                    <a:lstStyle/>
+                    <a:p>
+                      <a:r>
+                        <a:rPr sz="1100" b="1">
+                          <a:solidFill>
+                            <a:srgbClr val="FFFFFF"/>
+                          </a:solidFill>
+                          <a:latin typeface="Arial"/>
+                        </a:rPr>
+                        <a:t>LTV-Bereich (Bestandshalter)</a:t>
+                      </a:r>
+                    </a:p>
+                  </a:txBody>
+                  <a:tcPr>
+                    <a:solidFill>
+                      <a:srgbClr val="1F2C56"/>
+                    </a:solidFill>
+                  </a:tcPr>
+                </a:tc>
+                <a:tc>
+                  <a:txBody>
+                    <a:bodyPr/>
+                    <a:lstStyle/>
+                    <a:p>
+                      <a:r>
+                        <a:rPr sz="1100" b="1">
+                          <a:solidFill>
+                            <a:srgbClr val="FFFFFF"/>
+                          </a:solidFill>
+                          <a:latin typeface="Arial"/>
+                        </a:rPr>
+                        <a:t>Einschätzung</a:t>
+                      </a:r>
+                    </a:p>
+                  </a:txBody>
+                  <a:tcPr>
+                    <a:solidFill>
+                      <a:srgbClr val="1F2C56"/>
+                    </a:solidFill>
+                  </a:tcPr>
+                </a:tc>
+              </a:tr>
+              <a:tr h="384048">
+                <a:tc>
+                  <a:txBody>
+                    <a:bodyPr/>
+                    <a:lstStyle/>
+                    <a:p>
+                      <a:r>
+                        <a:rPr sz="1050">
+                          <a:solidFill>
+                            <a:srgbClr val="3D5466"/>
+                          </a:solidFill>
+                          <a:latin typeface="Arial"/>
+                        </a:rPr>
+                        <a:t>&lt; 60 % (Beleihungswert)</a:t>
+                      </a:r>
+                    </a:p>
+                  </a:txBody>
+                  <a:tcPr/>
+                </a:tc>
+                <a:tc>
+                  <a:txBody>
+                    <a:bodyPr/>
+                    <a:lstStyle/>
+                    <a:p>
+                      <a:r>
+                        <a:rPr sz="1050">
+                          <a:solidFill>
+                            <a:srgbClr val="3D5466"/>
+                          </a:solidFill>
+                          <a:latin typeface="Arial"/>
+                        </a:rPr>
+                        <a:t>Konservativ, pfandbrieffähig</a:t>
+                      </a:r>
+                    </a:p>
+                  </a:txBody>
+                  <a:tcPr/>
+                </a:tc>
+              </a:tr>
+              <a:tr h="384048">
+                <a:tc>
+                  <a:txBody>
+                    <a:bodyPr/>
+                    <a:lstStyle/>
+                    <a:p>
+                      <a:r>
+                        <a:rPr sz="1050">
+                          <a:solidFill>
+                            <a:srgbClr val="3D5466"/>
+                          </a:solidFill>
+                          <a:latin typeface="Arial"/>
+                        </a:rPr>
+                        <a:t>60–80 % (Beleihungswert)</a:t>
+                      </a:r>
+                    </a:p>
+                  </a:txBody>
+                  <a:tcPr/>
+                </a:tc>
+                <a:tc>
+                  <a:txBody>
+                    <a:bodyPr/>
+                    <a:lstStyle/>
+                    <a:p>
+                      <a:r>
+                        <a:rPr sz="1050">
+                          <a:solidFill>
+                            <a:srgbClr val="3D5466"/>
+                          </a:solidFill>
+                          <a:latin typeface="Arial"/>
+                        </a:rPr>
+                        <a:t>Banküblicher Standardbereich</a:t>
+                      </a:r>
+                    </a:p>
+                  </a:txBody>
+                  <a:tcPr/>
+                </a:tc>
+              </a:tr>
+              <a:tr h="384048">
+                <a:tc>
+                  <a:txBody>
+                    <a:bodyPr/>
+                    <a:lstStyle/>
+                    <a:p>
+                      <a:r>
+                        <a:rPr sz="1050">
+                          <a:solidFill>
+                            <a:srgbClr val="3D5466"/>
+                          </a:solidFill>
+                          <a:latin typeface="Arial"/>
+                        </a:rPr>
+                        <a:t>&gt; 80 % (Beleihungswert)</a:t>
+                      </a:r>
+                    </a:p>
+                  </a:txBody>
+                  <a:tcPr/>
+                </a:tc>
+                <a:tc>
+                  <a:txBody>
+                    <a:bodyPr/>
+                    <a:lstStyle/>
+                    <a:p>
+                      <a:r>
+                        <a:rPr sz="1050">
+                          <a:solidFill>
+                            <a:srgbClr val="3D5466"/>
+                          </a:solidFill>
+                          <a:latin typeface="Arial"/>
+                        </a:rPr>
+                        <a:t>Erhöhtes Risiko, Auflagen erforderlich</a:t>
+                      </a:r>
+                    </a:p>
+                  </a:txBody>
+                  <a:tcPr/>
+                </a:tc>
+              </a:tr>
+            </a:tbl>
+          </a:graphicData>
+        </a:graphic>
+      </p:graphicFrame>
+      <p:sp>
+        <p:nvSpPr>
+          <p:cNvPr id="8" name="Rectangle 7"/>
           <p:cNvSpPr/>
           <p:nvPr/>
         </p:nvSpPr>
@@ -9825,7 +11089,7 @@
       </p:sp>
       <p:sp>
         <p:nvSpPr>
-          <p:cNvPr id="10" name="TextBox 9"/>
+          <p:cNvPr id="9" name="TextBox 8"/>
           <p:cNvSpPr txBox="1"/>
           <p:nvPr/>
         </p:nvSpPr>
@@ -9854,6 +11118,41 @@
                 <a:latin typeface="JetBrains Mono"/>
               </a:rPr>
               <a:t>Benedikt Zoller Coaching  ·  FKB Campus  ·  M08</a:t>
+            </a:r>
+          </a:p>
+        </p:txBody>
+      </p:sp>
+      <p:sp>
+        <p:nvSpPr>
+          <p:cNvPr id="10" name="TextBox 9"/>
+          <p:cNvSpPr txBox="1"/>
+          <p:nvPr/>
+        </p:nvSpPr>
+        <p:spPr>
+          <a:xfrm>
+            <a:off x="7176211" y="6583680"/>
+            <a:ext cx="4326940" cy="256032"/>
+          </a:xfrm>
+          <a:prstGeom prst="rect">
+            <a:avLst/>
+          </a:prstGeom>
+          <a:noFill/>
+        </p:spPr>
+        <p:txBody>
+          <a:bodyPr wrap="none">
+            <a:spAutoFit/>
+          </a:bodyPr>
+          <a:lstStyle/>
+          <a:p>
+            <a:pPr algn="r"/>
+            <a:r>
+              <a:rPr sz="700">
+                <a:solidFill>
+                  <a:srgbClr val="A0B4D2"/>
+                </a:solidFill>
+                <a:latin typeface="JetBrains Mono"/>
+              </a:rPr>
+              <a:t>Übersicht</a:t>
             </a:r>
           </a:p>
         </p:txBody>

--- a/protected-downloads/praesentation/M08.pptx
+++ b/protected-downloads/praesentation/M08.pptx
@@ -4538,7 +4538,7 @@
                 </a:solidFill>
                 <a:latin typeface="JetBrains Mono"/>
               </a:rPr>
-              <a:t>Benedikt Zoller Coaching  ·  FKB Campus  ·  2026</a:t>
+              <a:t>FKB Campus  ·  2026</a:t>
             </a:r>
           </a:p>
         </p:txBody>
@@ -5143,7 +5143,7 @@
                 </a:solidFill>
                 <a:latin typeface="JetBrains Mono"/>
               </a:rPr>
-              <a:t>Benedikt Zoller Coaching  ·  FKB Campus  ·  M08</a:t>
+              <a:t>FKB Campus  ·  M08</a:t>
             </a:r>
           </a:p>
         </p:txBody>
@@ -5462,7 +5462,7 @@
                 </a:solidFill>
                 <a:latin typeface="JetBrains Mono"/>
               </a:rPr>
-              <a:t>Benedikt Zoller Coaching  ·  FKB Campus  ·  M08</a:t>
+              <a:t>FKB Campus  ·  M08</a:t>
             </a:r>
           </a:p>
         </p:txBody>
@@ -6086,7 +6086,7 @@
                 </a:solidFill>
                 <a:latin typeface="JetBrains Mono"/>
               </a:rPr>
-              <a:t>Benedikt Zoller Coaching  ·  FKB Campus  ·  M08</a:t>
+              <a:t>FKB Campus  ·  M08</a:t>
             </a:r>
           </a:p>
         </p:txBody>
@@ -6529,7 +6529,7 @@
                 </a:solidFill>
                 <a:latin typeface="JetBrains Mono"/>
               </a:rPr>
-              <a:t>Benedikt Zoller Coaching  ·  FKB Campus  ·  M08</a:t>
+              <a:t>FKB Campus  ·  M08</a:t>
             </a:r>
           </a:p>
         </p:txBody>
@@ -7001,7 +7001,7 @@
                 </a:solidFill>
                 <a:latin typeface="JetBrains Mono"/>
               </a:rPr>
-              <a:t>Benedikt Zoller Coaching  ·  FKB Campus  ·  M08</a:t>
+              <a:t>FKB Campus  ·  M08</a:t>
             </a:r>
           </a:p>
         </p:txBody>
@@ -7367,7 +7367,7 @@
                 </a:solidFill>
                 <a:latin typeface="JetBrains Mono"/>
               </a:rPr>
-              <a:t>Benedikt Zoller Coaching  ·  FKB Campus  ·  M08</a:t>
+              <a:t>FKB Campus  ·  M08</a:t>
             </a:r>
           </a:p>
         </p:txBody>
@@ -7780,7 +7780,7 @@
                 </a:solidFill>
                 <a:latin typeface="JetBrains Mono"/>
               </a:rPr>
-              <a:t>Benedikt Zoller Coaching  ·  FKB Campus  ·  M08</a:t>
+              <a:t>FKB Campus  ·  M08</a:t>
             </a:r>
           </a:p>
         </p:txBody>
@@ -8515,7 +8515,7 @@
                 </a:solidFill>
                 <a:latin typeface="JetBrains Mono"/>
               </a:rPr>
-              <a:t>Benedikt Zoller Coaching  ·  FKB Campus  ·  M08</a:t>
+              <a:t>FKB Campus  ·  M08</a:t>
             </a:r>
           </a:p>
         </p:txBody>
@@ -9104,7 +9104,7 @@
                 </a:solidFill>
                 <a:latin typeface="JetBrains Mono"/>
               </a:rPr>
-              <a:t>Benedikt Zoller Coaching  ·  FKB Campus  ·  M08</a:t>
+              <a:t>FKB Campus  ·  M08</a:t>
             </a:r>
           </a:p>
         </p:txBody>
@@ -9423,7 +9423,7 @@
                 </a:solidFill>
                 <a:latin typeface="JetBrains Mono"/>
               </a:rPr>
-              <a:t>Benedikt Zoller Coaching  ·  FKB Campus  ·  M08</a:t>
+              <a:t>FKB Campus  ·  M08</a:t>
             </a:r>
           </a:p>
         </p:txBody>
@@ -10047,7 +10047,7 @@
                 </a:solidFill>
                 <a:latin typeface="JetBrains Mono"/>
               </a:rPr>
-              <a:t>Benedikt Zoller Coaching  ·  FKB Campus  ·  M08</a:t>
+              <a:t>FKB Campus  ·  M08</a:t>
             </a:r>
           </a:p>
         </p:txBody>
@@ -10636,7 +10636,7 @@
                 </a:solidFill>
                 <a:latin typeface="JetBrains Mono"/>
               </a:rPr>
-              <a:t>Benedikt Zoller Coaching  ·  FKB Campus  ·  M08</a:t>
+              <a:t>FKB Campus  ·  M08</a:t>
             </a:r>
           </a:p>
         </p:txBody>
@@ -11117,7 +11117,7 @@
                 </a:solidFill>
                 <a:latin typeface="JetBrains Mono"/>
               </a:rPr>
-              <a:t>Benedikt Zoller Coaching  ·  FKB Campus  ·  M08</a:t>
+              <a:t>FKB Campus  ·  M08</a:t>
             </a:r>
           </a:p>
         </p:txBody>

--- a/protected-downloads/praesentation/M08.pptx
+++ b/protected-downloads/praesentation/M08.pptx
@@ -7702,7 +7702,7 @@
                 </a:solidFill>
                 <a:latin typeface="Arial"/>
               </a:rPr>
-              <a:t>▸  Auf Basis einer vollständigen Projektanalyse eine strukturierte Kreditempfehlung erstellen</a:t>
+              <a:t>▸  Auf Basis einer vollständigen Projektanalyse die zentralen Risikobereiche analysieren und eine strukturierte Kreditempfehlung begründen</a:t>
             </a:r>
           </a:p>
         </p:txBody>
@@ -8113,7 +8113,7 @@
                 </a:solidFill>
                 <a:latin typeface="Consolas"/>
               </a:rPr>
-              <a:t>09:45–10:45 </a:t>
+              <a:t>09:45–10:50 </a:t>
             </a:r>
             <a:r>
               <a:rPr sz="1200" b="1">
@@ -8150,7 +8150,7 @@
                 </a:solidFill>
                 <a:latin typeface="Consolas"/>
               </a:rPr>
-              <a:t>10:45–11:00 </a:t>
+              <a:t>10:50–11:05 </a:t>
             </a:r>
             <a:r>
               <a:rPr sz="1200" b="1">
@@ -8178,7 +8178,7 @@
                 </a:solidFill>
                 <a:latin typeface="Consolas"/>
               </a:rPr>
-              <a:t>11:00–11:45 </a:t>
+              <a:t>11:05–11:50 </a:t>
             </a:r>
             <a:r>
               <a:rPr sz="1200" b="1">
@@ -8215,7 +8215,7 @@
                 </a:solidFill>
                 <a:latin typeface="Consolas"/>
               </a:rPr>
-              <a:t>11:45–12:15 </a:t>
+              <a:t>11:50–12:20 </a:t>
             </a:r>
             <a:r>
               <a:rPr sz="1200" b="1">
@@ -8252,7 +8252,7 @@
                 </a:solidFill>
                 <a:latin typeface="Consolas"/>
               </a:rPr>
-              <a:t>12:15–13:00 </a:t>
+              <a:t>12:20–13:05 </a:t>
             </a:r>
             <a:r>
               <a:rPr sz="1200" b="1">
@@ -8280,7 +8280,7 @@
                 </a:solidFill>
                 <a:latin typeface="Consolas"/>
               </a:rPr>
-              <a:t>13:00–13:45 </a:t>
+              <a:t>13:05–13:50 </a:t>
             </a:r>
             <a:r>
               <a:rPr sz="1200" b="1">
@@ -8317,7 +8317,7 @@
                 </a:solidFill>
                 <a:latin typeface="Consolas"/>
               </a:rPr>
-              <a:t>13:45–15:15 </a:t>
+              <a:t>13:50–15:20 </a:t>
             </a:r>
             <a:r>
               <a:rPr sz="1200" b="1">
@@ -8354,7 +8354,7 @@
                 </a:solidFill>
                 <a:latin typeface="Consolas"/>
               </a:rPr>
-              <a:t>15:15–15:30 </a:t>
+              <a:t>15:20–15:35 </a:t>
             </a:r>
             <a:r>
               <a:rPr sz="1200" b="1">
@@ -8382,7 +8382,7 @@
                 </a:solidFill>
                 <a:latin typeface="Consolas"/>
               </a:rPr>
-              <a:t>15:30–16:30 </a:t>
+              <a:t>15:35–16:30 </a:t>
             </a:r>
             <a:r>
               <a:rPr sz="1200" b="1">

--- a/protected-downloads/praesentation/M08.pptx
+++ b/protected-downloads/praesentation/M08.pptx
@@ -4460,7 +4460,7 @@
                 </a:solidFill>
                 <a:latin typeface="Arial"/>
               </a:rPr>
-              <a:t>v0.3</a:t>
+              <a:t>v1.0</a:t>
             </a:r>
           </a:p>
         </p:txBody>

--- a/protected-downloads/praesentation/M08.pptx
+++ b/protected-downloads/praesentation/M08.pptx
@@ -4135,7 +4135,7 @@
                 <a:solidFill>
                   <a:srgbClr val="C8D2E6"/>
                 </a:solidFill>
-                <a:latin typeface="JetBrains Mono"/>
+                <a:latin typeface="Consolas"/>
               </a:rPr>
               <a:t>FKB CAMPUS  ·  FIRMENKUNDENAKADEMIE  ·  M08</a:t>
             </a:r>
@@ -4170,7 +4170,7 @@
                 <a:solidFill>
                   <a:srgbClr val="FFFFFF"/>
                 </a:solidFill>
-                <a:latin typeface="Source Serif 4"/>
+                <a:latin typeface="Arial"/>
               </a:rPr>
               <a:t>Immobilien &amp; Projektfinanzierung</a:t>
             </a:r>
@@ -4205,7 +4205,7 @@
                 <a:solidFill>
                   <a:srgbClr val="BECDE6"/>
                 </a:solidFill>
-                <a:latin typeface="Source Serif 4"/>
+                <a:latin typeface="Arial"/>
               </a:rPr>
               <a:t>Bauträger, Bestandshalter und Projektentwickler professionell begleiten</a:t>
             </a:r>
@@ -4283,7 +4283,7 @@
                 <a:solidFill>
                   <a:srgbClr val="A0B4D2"/>
                 </a:solidFill>
-                <a:latin typeface="JetBrains Mono"/>
+                <a:latin typeface="Consolas"/>
               </a:rPr>
               <a:t>KOMPETENZFELD</a:t>
             </a:r>
@@ -4353,7 +4353,7 @@
                 <a:solidFill>
                   <a:srgbClr val="A0B4D2"/>
                 </a:solidFill>
-                <a:latin typeface="JetBrains Mono"/>
+                <a:latin typeface="Consolas"/>
               </a:rPr>
               <a:t>KOMPETENZSTUFE</a:t>
             </a:r>
@@ -4423,7 +4423,7 @@
                 <a:solidFill>
                   <a:srgbClr val="A0B4D2"/>
                 </a:solidFill>
-                <a:latin typeface="JetBrains Mono"/>
+                <a:latin typeface="Consolas"/>
               </a:rPr>
               <a:t>VERSION</a:t>
             </a:r>
@@ -4536,7 +4536,7 @@
                 <a:solidFill>
                   <a:srgbClr val="96A5BE"/>
                 </a:solidFill>
-                <a:latin typeface="JetBrains Mono"/>
+                <a:latin typeface="Consolas"/>
               </a:rPr>
               <a:t>FKB Campus  ·  2026</a:t>
             </a:r>
@@ -4571,7 +4571,7 @@
                 <a:solidFill>
                   <a:srgbClr val="96A5BE"/>
                 </a:solidFill>
-                <a:latin typeface="JetBrains Mono"/>
+                <a:latin typeface="Consolas"/>
               </a:rPr>
               <a:t>Trainer-Präsentation</a:t>
             </a:r>
@@ -4710,7 +4710,7 @@
                 <a:solidFill>
                   <a:srgbClr val="78808C"/>
                 </a:solidFill>
-                <a:latin typeface="JetBrains Mono"/>
+                <a:latin typeface="Consolas"/>
               </a:rPr>
               <a:t>M08  ·  INHALT</a:t>
             </a:r>
@@ -4831,7 +4831,7 @@
                 <a:solidFill>
                   <a:srgbClr val="1F2C56"/>
                 </a:solidFill>
-                <a:latin typeface="Source Serif 4"/>
+                <a:latin typeface="Arial"/>
               </a:rPr>
               <a:t>Theorie-Input 4: Risikofelder der Bauträgerfinanzierung</a:t>
             </a:r>
@@ -4847,7 +4847,7 @@
         <p:spPr>
           <a:xfrm>
             <a:off x="685800" y="1417320"/>
-            <a:ext cx="10817352" cy="5029200"/>
+            <a:ext cx="10817352" cy="4892040"/>
           </a:xfrm>
           <a:prstGeom prst="rect">
             <a:avLst/>
@@ -4860,7 +4860,7 @@
           </a:bodyPr>
           <a:lstStyle/>
           <a:p>
-            <a:pPr>
+            <a:pPr marL="190500" indent="-190500">
               <a:spcBef>
                 <a:spcPts val="400"/>
               </a:spcBef>
@@ -4879,7 +4879,7 @@
             </a:r>
           </a:p>
           <a:p>
-            <a:pPr>
+            <a:pPr marL="190500" indent="-190500">
               <a:spcBef>
                 <a:spcPts val="400"/>
               </a:spcBef>
@@ -4898,7 +4898,7 @@
             </a:r>
           </a:p>
           <a:p>
-            <a:pPr>
+            <a:pPr marL="190500" indent="-190500">
               <a:spcBef>
                 <a:spcPts val="400"/>
               </a:spcBef>
@@ -4917,7 +4917,7 @@
             </a:r>
           </a:p>
           <a:p>
-            <a:pPr>
+            <a:pPr marL="190500" indent="-190500">
               <a:spcBef>
                 <a:spcPts val="400"/>
               </a:spcBef>
@@ -4936,7 +4936,7 @@
             </a:r>
           </a:p>
           <a:p>
-            <a:pPr>
+            <a:pPr marL="190500" indent="-190500">
               <a:spcBef>
                 <a:spcPts val="400"/>
               </a:spcBef>
@@ -4955,7 +4955,7 @@
             </a:r>
           </a:p>
           <a:p>
-            <a:pPr>
+            <a:pPr marL="190500" indent="-190500">
               <a:spcBef>
                 <a:spcPts val="400"/>
               </a:spcBef>
@@ -4974,7 +4974,7 @@
             </a:r>
           </a:p>
           <a:p>
-            <a:pPr>
+            <a:pPr marL="190500" indent="-190500">
               <a:spcBef>
                 <a:spcPts val="400"/>
               </a:spcBef>
@@ -4993,7 +4993,7 @@
             </a:r>
           </a:p>
           <a:p>
-            <a:pPr>
+            <a:pPr marL="190500" indent="-190500">
               <a:spcBef>
                 <a:spcPts val="400"/>
               </a:spcBef>
@@ -5012,7 +5012,7 @@
             </a:r>
           </a:p>
           <a:p>
-            <a:pPr>
+            <a:pPr marL="190500" indent="-190500">
               <a:spcBef>
                 <a:spcPts val="400"/>
               </a:spcBef>
@@ -5031,7 +5031,7 @@
             </a:r>
           </a:p>
           <a:p>
-            <a:pPr>
+            <a:pPr marL="190500" indent="-190500">
               <a:spcBef>
                 <a:spcPts val="400"/>
               </a:spcBef>
@@ -5050,7 +5050,7 @@
             </a:r>
           </a:p>
           <a:p>
-            <a:pPr>
+            <a:pPr marL="190500" indent="-190500">
               <a:spcBef>
                 <a:spcPts val="400"/>
               </a:spcBef>
@@ -5141,7 +5141,7 @@
                 <a:solidFill>
                   <a:srgbClr val="A0B4D2"/>
                 </a:solidFill>
-                <a:latin typeface="JetBrains Mono"/>
+                <a:latin typeface="Consolas"/>
               </a:rPr>
               <a:t>FKB Campus  ·  M08</a:t>
             </a:r>
@@ -5280,7 +5280,7 @@
                 <a:solidFill>
                   <a:srgbClr val="78808C"/>
                 </a:solidFill>
-                <a:latin typeface="JetBrains Mono"/>
+                <a:latin typeface="Consolas"/>
               </a:rPr>
               <a:t>M08  ·  SCHAUBILD</a:t>
             </a:r>
@@ -5315,7 +5315,7 @@
                 <a:solidFill>
                   <a:srgbClr val="1F2C56"/>
                 </a:solidFill>
-                <a:latin typeface="Source Serif 4"/>
+                <a:latin typeface="Arial"/>
               </a:rPr>
               <a:t>Handlungsempfehlung Immobilienfinanzierung</a:t>
             </a:r>
@@ -5460,7 +5460,7 @@
                 <a:solidFill>
                   <a:srgbClr val="A0B4D2"/>
                 </a:solidFill>
-                <a:latin typeface="JetBrains Mono"/>
+                <a:latin typeface="Consolas"/>
               </a:rPr>
               <a:t>FKB Campus  ·  M08</a:t>
             </a:r>
@@ -5495,7 +5495,7 @@
                 <a:solidFill>
                   <a:srgbClr val="A0B4D2"/>
                 </a:solidFill>
-                <a:latin typeface="JetBrains Mono"/>
+                <a:latin typeface="Consolas"/>
               </a:rPr>
               <a:t>Schaubild</a:t>
             </a:r>
@@ -5634,7 +5634,7 @@
                 <a:solidFill>
                   <a:srgbClr val="78808C"/>
                 </a:solidFill>
-                <a:latin typeface="JetBrains Mono"/>
+                <a:latin typeface="Consolas"/>
               </a:rPr>
               <a:t>M08  ·  INHALT</a:t>
             </a:r>
@@ -5755,7 +5755,7 @@
                 <a:solidFill>
                   <a:srgbClr val="1F2C56"/>
                 </a:solidFill>
-                <a:latin typeface="Source Serif 4"/>
+                <a:latin typeface="Arial"/>
               </a:rPr>
               <a:t>Praxiscase: Quartier Sonnenhalde – Bauträgerfinanzierung Ravensburg</a:t>
             </a:r>
@@ -5771,7 +5771,7 @@
         <p:spPr>
           <a:xfrm>
             <a:off x="685800" y="1417320"/>
-            <a:ext cx="10817352" cy="5029200"/>
+            <a:ext cx="10817352" cy="4892040"/>
           </a:xfrm>
           <a:prstGeom prst="rect">
             <a:avLst/>
@@ -5797,13 +5797,13 @@
                 <a:solidFill>
                   <a:srgbClr val="78808C"/>
                 </a:solidFill>
-                <a:latin typeface="JetBrains Mono"/>
+                <a:latin typeface="Consolas"/>
               </a:rPr>
               <a:t>UNTERNEHMENSPORTRÄT</a:t>
             </a:r>
           </a:p>
           <a:p>
-            <a:pPr>
+            <a:pPr marL="190500" indent="-190500">
               <a:spcBef>
                 <a:spcPts val="400"/>
               </a:spcBef>
@@ -5822,7 +5822,7 @@
             </a:r>
           </a:p>
           <a:p>
-            <a:pPr>
+            <a:pPr marL="190500" indent="-190500">
               <a:spcBef>
                 <a:spcPts val="400"/>
               </a:spcBef>
@@ -5841,7 +5841,7 @@
             </a:r>
           </a:p>
           <a:p>
-            <a:pPr>
+            <a:pPr marL="190500" indent="-190500">
               <a:spcBef>
                 <a:spcPts val="400"/>
               </a:spcBef>
@@ -5860,7 +5860,7 @@
             </a:r>
           </a:p>
           <a:p>
-            <a:pPr>
+            <a:pPr marL="190500" indent="-190500">
               <a:spcBef>
                 <a:spcPts val="400"/>
               </a:spcBef>
@@ -5879,7 +5879,7 @@
             </a:r>
           </a:p>
           <a:p>
-            <a:pPr>
+            <a:pPr marL="190500" indent="-190500">
               <a:spcBef>
                 <a:spcPts val="400"/>
               </a:spcBef>
@@ -5898,7 +5898,7 @@
             </a:r>
           </a:p>
           <a:p>
-            <a:pPr>
+            <a:pPr marL="190500" indent="-190500">
               <a:spcBef>
                 <a:spcPts val="400"/>
               </a:spcBef>
@@ -5917,7 +5917,7 @@
             </a:r>
           </a:p>
           <a:p>
-            <a:pPr>
+            <a:pPr marL="190500" indent="-190500">
               <a:spcBef>
                 <a:spcPts val="400"/>
               </a:spcBef>
@@ -5936,7 +5936,7 @@
             </a:r>
           </a:p>
           <a:p>
-            <a:pPr>
+            <a:pPr marL="190500" indent="-190500">
               <a:spcBef>
                 <a:spcPts val="400"/>
               </a:spcBef>
@@ -5968,13 +5968,13 @@
                 <a:solidFill>
                   <a:srgbClr val="78808C"/>
                 </a:solidFill>
-                <a:latin typeface="JetBrains Mono"/>
+                <a:latin typeface="Consolas"/>
               </a:rPr>
               <a:t>PROJEKTFINANZIERUNG – ECKDATEN</a:t>
             </a:r>
           </a:p>
           <a:p>
-            <a:pPr>
+            <a:pPr marL="190500" indent="-190500">
               <a:spcBef>
                 <a:spcPts val="400"/>
               </a:spcBef>
@@ -5992,25 +5992,6 @@
               <a:t>▸  Prognostizierte Verkaufserlöse:</a:t>
             </a:r>
           </a:p>
-          <a:p>
-            <a:pPr>
-              <a:spcBef>
-                <a:spcPts val="1000"/>
-              </a:spcBef>
-              <a:spcAft>
-                <a:spcPts val="200"/>
-              </a:spcAft>
-            </a:pPr>
-            <a:r>
-              <a:rPr sz="800" b="1">
-                <a:solidFill>
-                  <a:srgbClr val="78808C"/>
-                </a:solidFill>
-                <a:latin typeface="JetBrains Mono"/>
-              </a:rPr>
-              <a:t>AUFGABEN (GRUPPENARBEIT, JE GRUPPE CA. 60 MIN.)</a:t>
-            </a:r>
-          </a:p>
         </p:txBody>
       </p:sp>
       <p:sp>
@@ -6084,7 +6065,7 @@
                 <a:solidFill>
                   <a:srgbClr val="A0B4D2"/>
                 </a:solidFill>
-                <a:latin typeface="JetBrains Mono"/>
+                <a:latin typeface="Consolas"/>
               </a:rPr>
               <a:t>FKB Campus  ·  M08</a:t>
             </a:r>
@@ -6223,7 +6204,7 @@
                 <a:solidFill>
                   <a:srgbClr val="78808C"/>
                 </a:solidFill>
-                <a:latin typeface="JetBrains Mono"/>
+                <a:latin typeface="Consolas"/>
               </a:rPr>
               <a:t>M08  ·  ÜBERSICHT</a:t>
             </a:r>
@@ -6258,7 +6239,7 @@
                 <a:solidFill>
                   <a:srgbClr val="1F2C56"/>
                 </a:solidFill>
-                <a:latin typeface="Source Serif 4"/>
+                <a:latin typeface="Arial"/>
               </a:rPr>
               <a:t>Praxiscase: Quartier Sonnenhalde – Bauträgerfinanzierung Ravensburg</a:t>
             </a:r>
@@ -6527,7 +6508,7 @@
                 <a:solidFill>
                   <a:srgbClr val="A0B4D2"/>
                 </a:solidFill>
-                <a:latin typeface="JetBrains Mono"/>
+                <a:latin typeface="Consolas"/>
               </a:rPr>
               <a:t>FKB Campus  ·  M08</a:t>
             </a:r>
@@ -6562,7 +6543,7 @@
                 <a:solidFill>
                   <a:srgbClr val="A0B4D2"/>
                 </a:solidFill>
-                <a:latin typeface="JetBrains Mono"/>
+                <a:latin typeface="Consolas"/>
               </a:rPr>
               <a:t>Übersicht</a:t>
             </a:r>
@@ -6701,7 +6682,7 @@
                 <a:solidFill>
                   <a:srgbClr val="78808C"/>
                 </a:solidFill>
-                <a:latin typeface="JetBrains Mono"/>
+                <a:latin typeface="Consolas"/>
               </a:rPr>
               <a:t>M08  ·  INHALT</a:t>
             </a:r>
@@ -6822,7 +6803,7 @@
                 <a:solidFill>
                   <a:srgbClr val="1F2C56"/>
                 </a:solidFill>
-                <a:latin typeface="Source Serif 4"/>
+                <a:latin typeface="Arial"/>
               </a:rPr>
               <a:t>Reflexionsfragen</a:t>
             </a:r>
@@ -6838,7 +6819,7 @@
         <p:spPr>
           <a:xfrm>
             <a:off x="685800" y="1417320"/>
-            <a:ext cx="10817352" cy="5029200"/>
+            <a:ext cx="10817352" cy="4892040"/>
           </a:xfrm>
           <a:prstGeom prst="rect">
             <a:avLst/>
@@ -6846,12 +6827,12 @@
           <a:noFill/>
         </p:spPr>
         <p:txBody>
-          <a:bodyPr wrap="square">
+          <a:bodyPr wrap="square" anchor="ctr">
             <a:spAutoFit/>
           </a:bodyPr>
           <a:lstStyle/>
           <a:p>
-            <a:pPr>
+            <a:pPr marL="190500" indent="-190500">
               <a:spcBef>
                 <a:spcPts val="400"/>
               </a:spcBef>
@@ -6870,7 +6851,7 @@
             </a:r>
           </a:p>
           <a:p>
-            <a:pPr>
+            <a:pPr marL="190500" indent="-190500">
               <a:spcBef>
                 <a:spcPts val="400"/>
               </a:spcBef>
@@ -6889,7 +6870,7 @@
             </a:r>
           </a:p>
           <a:p>
-            <a:pPr>
+            <a:pPr marL="190500" indent="-190500">
               <a:spcBef>
                 <a:spcPts val="400"/>
               </a:spcBef>
@@ -6908,7 +6889,7 @@
             </a:r>
           </a:p>
           <a:p>
-            <a:pPr>
+            <a:pPr marL="190500" indent="-190500">
               <a:spcBef>
                 <a:spcPts val="400"/>
               </a:spcBef>
@@ -6999,7 +6980,7 @@
                 <a:solidFill>
                   <a:srgbClr val="A0B4D2"/>
                 </a:solidFill>
-                <a:latin typeface="JetBrains Mono"/>
+                <a:latin typeface="Consolas"/>
               </a:rPr>
               <a:t>FKB Campus  ·  M08</a:t>
             </a:r>
@@ -7138,7 +7119,7 @@
                 <a:solidFill>
                   <a:srgbClr val="78808C"/>
                 </a:solidFill>
-                <a:latin typeface="JetBrains Mono"/>
+                <a:latin typeface="Consolas"/>
               </a:rPr>
               <a:t>ÜBERBLICK  ·  M08</a:t>
             </a:r>
@@ -7216,7 +7197,7 @@
                 <a:solidFill>
                   <a:srgbClr val="1F2C56"/>
                 </a:solidFill>
-                <a:latin typeface="Source Serif 4"/>
+                <a:latin typeface="Arial"/>
               </a:rPr>
               <a:t>Worum geht es heute</a:t>
             </a:r>
@@ -7365,7 +7346,7 @@
                 <a:solidFill>
                   <a:srgbClr val="A0B4D2"/>
                 </a:solidFill>
-                <a:latin typeface="JetBrains Mono"/>
+                <a:latin typeface="Consolas"/>
               </a:rPr>
               <a:t>FKB Campus  ·  M08</a:t>
             </a:r>
@@ -7504,7 +7485,7 @@
                 <a:solidFill>
                   <a:srgbClr val="78808C"/>
                 </a:solidFill>
-                <a:latin typeface="JetBrains Mono"/>
+                <a:latin typeface="Consolas"/>
               </a:rPr>
               <a:t>LERNZIELE  ·  M08</a:t>
             </a:r>
@@ -7582,7 +7563,7 @@
                 <a:solidFill>
                   <a:srgbClr val="1F2C56"/>
                 </a:solidFill>
-                <a:latin typeface="Source Serif 4"/>
+                <a:latin typeface="Arial"/>
               </a:rPr>
               <a:t>Was Sie heute mitnehmen</a:t>
             </a:r>
@@ -7778,7 +7759,7 @@
                 <a:solidFill>
                   <a:srgbClr val="A0B4D2"/>
                 </a:solidFill>
-                <a:latin typeface="JetBrains Mono"/>
+                <a:latin typeface="Consolas"/>
               </a:rPr>
               <a:t>FKB Campus  ·  M08</a:t>
             </a:r>
@@ -7917,7 +7898,7 @@
                 <a:solidFill>
                   <a:srgbClr val="78808C"/>
                 </a:solidFill>
-                <a:latin typeface="JetBrains Mono"/>
+                <a:latin typeface="Consolas"/>
               </a:rPr>
               <a:t>AGENDA  ·  M08</a:t>
             </a:r>
@@ -7995,7 +7976,7 @@
                 <a:solidFill>
                   <a:srgbClr val="1F2C56"/>
                 </a:solidFill>
-                <a:latin typeface="Source Serif 4"/>
+                <a:latin typeface="Arial"/>
               </a:rPr>
               <a:t>So läuft das Modul</a:t>
             </a:r>
@@ -8513,7 +8494,7 @@
                 <a:solidFill>
                   <a:srgbClr val="A0B4D2"/>
                 </a:solidFill>
-                <a:latin typeface="JetBrains Mono"/>
+                <a:latin typeface="Consolas"/>
               </a:rPr>
               <a:t>FKB Campus  ·  M08</a:t>
             </a:r>
@@ -8652,7 +8633,7 @@
                 <a:solidFill>
                   <a:srgbClr val="78808C"/>
                 </a:solidFill>
-                <a:latin typeface="JetBrains Mono"/>
+                <a:latin typeface="Consolas"/>
               </a:rPr>
               <a:t>M08  ·  INHALT</a:t>
             </a:r>
@@ -8773,7 +8754,7 @@
                 <a:solidFill>
                   <a:srgbClr val="1F2C56"/>
                 </a:solidFill>
-                <a:latin typeface="Source Serif 4"/>
+                <a:latin typeface="Arial"/>
               </a:rPr>
               <a:t>Theorie-Input 1: Kundentypologie der Immobilienfinanzierung</a:t>
             </a:r>
@@ -8789,7 +8770,7 @@
         <p:spPr>
           <a:xfrm>
             <a:off x="685800" y="1417320"/>
-            <a:ext cx="10817352" cy="5029200"/>
+            <a:ext cx="10817352" cy="4892040"/>
           </a:xfrm>
           <a:prstGeom prst="rect">
             <a:avLst/>
@@ -8815,13 +8796,13 @@
                 <a:solidFill>
                   <a:srgbClr val="78808C"/>
                 </a:solidFill>
-                <a:latin typeface="JetBrains Mono"/>
+                <a:latin typeface="Consolas"/>
               </a:rPr>
               <a:t>DREI GRUNDTYPEN – DREI RISIKOLANDSCHAFTEN</a:t>
             </a:r>
           </a:p>
           <a:p>
-            <a:pPr>
+            <a:pPr marL="190500" indent="-190500">
               <a:spcBef>
                 <a:spcPts val="400"/>
               </a:spcBef>
@@ -8840,7 +8821,7 @@
             </a:r>
           </a:p>
           <a:p>
-            <a:pPr>
+            <a:pPr marL="190500" indent="-190500">
               <a:spcBef>
                 <a:spcPts val="400"/>
               </a:spcBef>
@@ -8859,7 +8840,7 @@
             </a:r>
           </a:p>
           <a:p>
-            <a:pPr>
+            <a:pPr marL="190500" indent="-190500">
               <a:spcBef>
                 <a:spcPts val="400"/>
               </a:spcBef>
@@ -8878,7 +8859,7 @@
             </a:r>
           </a:p>
           <a:p>
-            <a:pPr>
+            <a:pPr marL="190500" indent="-190500">
               <a:spcBef>
                 <a:spcPts val="400"/>
               </a:spcBef>
@@ -8897,7 +8878,7 @@
             </a:r>
           </a:p>
           <a:p>
-            <a:pPr>
+            <a:pPr marL="190500" indent="-190500">
               <a:spcBef>
                 <a:spcPts val="400"/>
               </a:spcBef>
@@ -8916,7 +8897,7 @@
             </a:r>
           </a:p>
           <a:p>
-            <a:pPr>
+            <a:pPr marL="190500" indent="-190500">
               <a:spcBef>
                 <a:spcPts val="400"/>
               </a:spcBef>
@@ -8935,7 +8916,7 @@
             </a:r>
           </a:p>
           <a:p>
-            <a:pPr>
+            <a:pPr marL="190500" indent="-190500">
               <a:spcBef>
                 <a:spcPts val="400"/>
               </a:spcBef>
@@ -8954,7 +8935,7 @@
             </a:r>
           </a:p>
           <a:p>
-            <a:pPr>
+            <a:pPr marL="190500" indent="-190500">
               <a:spcBef>
                 <a:spcPts val="400"/>
               </a:spcBef>
@@ -8973,7 +8954,7 @@
             </a:r>
           </a:p>
           <a:p>
-            <a:pPr>
+            <a:pPr marL="190500" indent="-190500">
               <a:spcBef>
                 <a:spcPts val="400"/>
               </a:spcBef>
@@ -8992,7 +8973,7 @@
             </a:r>
           </a:p>
           <a:p>
-            <a:pPr>
+            <a:pPr marL="190500" indent="-190500">
               <a:spcBef>
                 <a:spcPts val="400"/>
               </a:spcBef>
@@ -9011,7 +8992,7 @@
             </a:r>
           </a:p>
           <a:p>
-            <a:pPr>
+            <a:pPr marL="190500" indent="-190500">
               <a:spcBef>
                 <a:spcPts val="400"/>
               </a:spcBef>
@@ -9102,7 +9083,7 @@
                 <a:solidFill>
                   <a:srgbClr val="A0B4D2"/>
                 </a:solidFill>
-                <a:latin typeface="JetBrains Mono"/>
+                <a:latin typeface="Consolas"/>
               </a:rPr>
               <a:t>FKB Campus  ·  M08</a:t>
             </a:r>
@@ -9241,7 +9222,7 @@
                 <a:solidFill>
                   <a:srgbClr val="78808C"/>
                 </a:solidFill>
-                <a:latin typeface="JetBrains Mono"/>
+                <a:latin typeface="Consolas"/>
               </a:rPr>
               <a:t>M08  ·  SCHAUBILD</a:t>
             </a:r>
@@ -9276,7 +9257,7 @@
                 <a:solidFill>
                   <a:srgbClr val="1F2C56"/>
                 </a:solidFill>
-                <a:latin typeface="Source Serif 4"/>
+                <a:latin typeface="Arial"/>
               </a:rPr>
               <a:t>Drei Immobilien-Typologien im Vergleich</a:t>
             </a:r>
@@ -9421,7 +9402,7 @@
                 <a:solidFill>
                   <a:srgbClr val="A0B4D2"/>
                 </a:solidFill>
-                <a:latin typeface="JetBrains Mono"/>
+                <a:latin typeface="Consolas"/>
               </a:rPr>
               <a:t>FKB Campus  ·  M08</a:t>
             </a:r>
@@ -9456,7 +9437,7 @@
                 <a:solidFill>
                   <a:srgbClr val="A0B4D2"/>
                 </a:solidFill>
-                <a:latin typeface="JetBrains Mono"/>
+                <a:latin typeface="Consolas"/>
               </a:rPr>
               <a:t>Schaubild</a:t>
             </a:r>
@@ -9595,7 +9576,7 @@
                 <a:solidFill>
                   <a:srgbClr val="78808C"/>
                 </a:solidFill>
-                <a:latin typeface="JetBrains Mono"/>
+                <a:latin typeface="Consolas"/>
               </a:rPr>
               <a:t>M08  ·  INHALT</a:t>
             </a:r>
@@ -9716,7 +9697,7 @@
                 <a:solidFill>
                   <a:srgbClr val="1F2C56"/>
                 </a:solidFill>
-                <a:latin typeface="Source Serif 4"/>
+                <a:latin typeface="Arial"/>
               </a:rPr>
               <a:t>Theorie-Input 2: Beleihungswertermittlung nach BelWertV</a:t>
             </a:r>
@@ -9732,7 +9713,7 @@
         <p:spPr>
           <a:xfrm>
             <a:off x="685800" y="1417320"/>
-            <a:ext cx="10817352" cy="5029200"/>
+            <a:ext cx="10817352" cy="4892040"/>
           </a:xfrm>
           <a:prstGeom prst="rect">
             <a:avLst/>
@@ -9758,32 +9739,13 @@
                 <a:solidFill>
                   <a:srgbClr val="78808C"/>
                 </a:solidFill>
-                <a:latin typeface="JetBrains Mono"/>
-              </a:rPr>
-              <a:t>WARUM DER BELEIHUNGSWERT KEIN MARKTWERT IST</a:t>
-            </a:r>
-          </a:p>
-          <a:p>
-            <a:pPr>
-              <a:spcBef>
-                <a:spcPts val="1000"/>
-              </a:spcBef>
-              <a:spcAft>
-                <a:spcPts val="200"/>
-              </a:spcAft>
-            </a:pPr>
-            <a:r>
-              <a:rPr sz="800" b="1">
-                <a:solidFill>
-                  <a:srgbClr val="78808C"/>
-                </a:solidFill>
-                <a:latin typeface="JetBrains Mono"/>
+                <a:latin typeface="Consolas"/>
               </a:rPr>
               <a:t>DIE ZWEI HAUPTMETHODEN (§§ 8–17 BELWERTV)</a:t>
             </a:r>
           </a:p>
           <a:p>
-            <a:pPr>
+            <a:pPr marL="190500" indent="-190500">
               <a:spcBef>
                 <a:spcPts val="400"/>
               </a:spcBef>
@@ -9802,7 +9764,7 @@
             </a:r>
           </a:p>
           <a:p>
-            <a:pPr>
+            <a:pPr marL="190500" indent="-190500">
               <a:spcBef>
                 <a:spcPts val="400"/>
               </a:spcBef>
@@ -9821,7 +9783,7 @@
             </a:r>
           </a:p>
           <a:p>
-            <a:pPr>
+            <a:pPr marL="190500" indent="-190500">
               <a:spcBef>
                 <a:spcPts val="400"/>
               </a:spcBef>
@@ -9840,7 +9802,7 @@
             </a:r>
           </a:p>
           <a:p>
-            <a:pPr>
+            <a:pPr marL="190500" indent="-190500">
               <a:spcBef>
                 <a:spcPts val="400"/>
               </a:spcBef>
@@ -9859,7 +9821,7 @@
             </a:r>
           </a:p>
           <a:p>
-            <a:pPr>
+            <a:pPr marL="190500" indent="-190500">
               <a:spcBef>
                 <a:spcPts val="400"/>
               </a:spcBef>
@@ -9878,7 +9840,7 @@
             </a:r>
           </a:p>
           <a:p>
-            <a:pPr>
+            <a:pPr marL="190500" indent="-190500">
               <a:spcBef>
                 <a:spcPts val="400"/>
               </a:spcBef>
@@ -9897,7 +9859,7 @@
             </a:r>
           </a:p>
           <a:p>
-            <a:pPr>
+            <a:pPr marL="190500" indent="-190500">
               <a:spcBef>
                 <a:spcPts val="400"/>
               </a:spcBef>
@@ -9916,7 +9878,7 @@
             </a:r>
           </a:p>
           <a:p>
-            <a:pPr>
+            <a:pPr marL="190500" indent="-190500">
               <a:spcBef>
                 <a:spcPts val="400"/>
               </a:spcBef>
@@ -9935,7 +9897,7 @@
             </a:r>
           </a:p>
           <a:p>
-            <a:pPr>
+            <a:pPr marL="190500" indent="-190500">
               <a:spcBef>
                 <a:spcPts val="400"/>
               </a:spcBef>
@@ -9954,7 +9916,7 @@
             </a:r>
           </a:p>
           <a:p>
-            <a:pPr>
+            <a:pPr marL="190500" indent="-190500">
               <a:spcBef>
                 <a:spcPts val="400"/>
               </a:spcBef>
@@ -10045,7 +10007,7 @@
                 <a:solidFill>
                   <a:srgbClr val="A0B4D2"/>
                 </a:solidFill>
-                <a:latin typeface="JetBrains Mono"/>
+                <a:latin typeface="Consolas"/>
               </a:rPr>
               <a:t>FKB Campus  ·  M08</a:t>
             </a:r>
@@ -10184,7 +10146,7 @@
                 <a:solidFill>
                   <a:srgbClr val="78808C"/>
                 </a:solidFill>
-                <a:latin typeface="JetBrains Mono"/>
+                <a:latin typeface="Consolas"/>
               </a:rPr>
               <a:t>M08  ·  INHALT</a:t>
             </a:r>
@@ -10305,7 +10267,7 @@
                 <a:solidFill>
                   <a:srgbClr val="1F2C56"/>
                 </a:solidFill>
-                <a:latin typeface="Source Serif 4"/>
+                <a:latin typeface="Arial"/>
               </a:rPr>
               <a:t>Theorie-Input 3: Kennzahlen der Immobilien- und Projektfinanzierung</a:t>
             </a:r>
@@ -10321,7 +10283,7 @@
         <p:spPr>
           <a:xfrm>
             <a:off x="685800" y="1417320"/>
-            <a:ext cx="10817352" cy="5029200"/>
+            <a:ext cx="10817352" cy="4892040"/>
           </a:xfrm>
           <a:prstGeom prst="rect">
             <a:avLst/>
@@ -10347,13 +10309,13 @@
                 <a:solidFill>
                   <a:srgbClr val="78808C"/>
                 </a:solidFill>
-                <a:latin typeface="JetBrains Mono"/>
+                <a:latin typeface="Consolas"/>
               </a:rPr>
               <a:t>DIE VIER SCHLÜSSELKENNZAHLEN IM ÜBERBLICK</a:t>
             </a:r>
           </a:p>
           <a:p>
-            <a:pPr>
+            <a:pPr marL="190500" indent="-190500">
               <a:spcBef>
                 <a:spcPts val="400"/>
               </a:spcBef>
@@ -10372,7 +10334,7 @@
             </a:r>
           </a:p>
           <a:p>
-            <a:pPr>
+            <a:pPr marL="190500" indent="-190500">
               <a:spcBef>
                 <a:spcPts val="400"/>
               </a:spcBef>
@@ -10391,7 +10353,7 @@
             </a:r>
           </a:p>
           <a:p>
-            <a:pPr>
+            <a:pPr marL="190500" indent="-190500">
               <a:spcBef>
                 <a:spcPts val="400"/>
               </a:spcBef>
@@ -10423,13 +10385,13 @@
                 <a:solidFill>
                   <a:srgbClr val="78808C"/>
                 </a:solidFill>
-                <a:latin typeface="JetBrains Mono"/>
+                <a:latin typeface="Consolas"/>
               </a:rPr>
               <a:t>VERBUNDPARTNER-ÜBERSICHT IMMOBILIENFINANZIERUNG</a:t>
             </a:r>
           </a:p>
           <a:p>
-            <a:pPr>
+            <a:pPr marL="190500" indent="-190500">
               <a:spcBef>
                 <a:spcPts val="400"/>
               </a:spcBef>
@@ -10448,7 +10410,7 @@
             </a:r>
           </a:p>
           <a:p>
-            <a:pPr>
+            <a:pPr marL="190500" indent="-190500">
               <a:spcBef>
                 <a:spcPts val="400"/>
               </a:spcBef>
@@ -10467,7 +10429,7 @@
             </a:r>
           </a:p>
           <a:p>
-            <a:pPr>
+            <a:pPr marL="190500" indent="-190500">
               <a:spcBef>
                 <a:spcPts val="400"/>
               </a:spcBef>
@@ -10486,7 +10448,7 @@
             </a:r>
           </a:p>
           <a:p>
-            <a:pPr>
+            <a:pPr marL="190500" indent="-190500">
               <a:spcBef>
                 <a:spcPts val="400"/>
               </a:spcBef>
@@ -10505,7 +10467,7 @@
             </a:r>
           </a:p>
           <a:p>
-            <a:pPr>
+            <a:pPr marL="190500" indent="-190500">
               <a:spcBef>
                 <a:spcPts val="400"/>
               </a:spcBef>
@@ -10524,7 +10486,7 @@
             </a:r>
           </a:p>
           <a:p>
-            <a:pPr>
+            <a:pPr marL="190500" indent="-190500">
               <a:spcBef>
                 <a:spcPts val="400"/>
               </a:spcBef>
@@ -10543,7 +10505,7 @@
             </a:r>
           </a:p>
           <a:p>
-            <a:pPr>
+            <a:pPr marL="190500" indent="-190500">
               <a:spcBef>
                 <a:spcPts val="400"/>
               </a:spcBef>
@@ -10634,7 +10596,7 @@
                 <a:solidFill>
                   <a:srgbClr val="A0B4D2"/>
                 </a:solidFill>
-                <a:latin typeface="JetBrains Mono"/>
+                <a:latin typeface="Consolas"/>
               </a:rPr>
               <a:t>FKB Campus  ·  M08</a:t>
             </a:r>
@@ -10773,7 +10735,7 @@
                 <a:solidFill>
                   <a:srgbClr val="78808C"/>
                 </a:solidFill>
-                <a:latin typeface="JetBrains Mono"/>
+                <a:latin typeface="Consolas"/>
               </a:rPr>
               <a:t>M08  ·  ÜBERSICHT</a:t>
             </a:r>
@@ -10808,7 +10770,7 @@
                 <a:solidFill>
                   <a:srgbClr val="1F2C56"/>
                 </a:solidFill>
-                <a:latin typeface="Source Serif 4"/>
+                <a:latin typeface="Arial"/>
               </a:rPr>
               <a:t>Theorie-Input 3: Kennzahlen der Immobilien- und Projektfinanzierung</a:t>
             </a:r>
@@ -11115,7 +11077,7 @@
                 <a:solidFill>
                   <a:srgbClr val="A0B4D2"/>
                 </a:solidFill>
-                <a:latin typeface="JetBrains Mono"/>
+                <a:latin typeface="Consolas"/>
               </a:rPr>
               <a:t>FKB Campus  ·  M08</a:t>
             </a:r>
@@ -11150,7 +11112,7 @@
                 <a:solidFill>
                   <a:srgbClr val="A0B4D2"/>
                 </a:solidFill>
-                <a:latin typeface="JetBrains Mono"/>
+                <a:latin typeface="Consolas"/>
               </a:rPr>
               <a:t>Übersicht</a:t>
             </a:r>
